--- a/NIDS_Final_Presentation_Rohan_Pandey.pptx
+++ b/NIDS_Final_Presentation_Rohan_Pandey.pptx
@@ -15,8 +15,6 @@
     <p:sldId id="263" r:id="rId15"/>
     <p:sldId id="264" r:id="rId16"/>
     <p:sldId id="265" r:id="rId17"/>
-    <p:sldId id="266" r:id="rId18"/>
-    <p:sldId id="267" r:id="rId19"/>
   </p:sldIdLst>
   <p:sldSz cx="12191695" cy="6858000" type="screen4x3"/>
   <p:notesSz cx="6858000" cy="9144000"/>
@@ -583,147 +581,7 @@
           <a:lstStyle/>
           <a:p>
             <a:r>
-              <a:t>This is the real dashboard during testing. The medium port-scan alert and the high SYN-flood alert are both shown, with the live chart and the per-type totals. Detection latency was about two milliseconds, and no false alarm was raised during normal browsing.</a:t>
-            </a:r>
-          </a:p>
-        </p:txBody>
-      </p:sp>
-      <p:sp>
-        <p:nvSpPr>
-          <p:cNvPr id="4" name="Slide Number Placeholder 3"/>
-          <p:cNvSpPr>
-            <a:spLocks noGrp="1"/>
-          </p:cNvSpPr>
-          <p:nvPr>
-            <p:ph type="sldNum" idx="5" sz="quarter"/>
-          </p:nvPr>
-        </p:nvSpPr>
-        <p:spPr/>
-      </p:sp>
-    </p:spTree>
-  </p:cSld>
-  <p:clrMapOvr>
-    <a:masterClrMapping/>
-  </p:clrMapOvr>
-</p:notes>
-</file>
-
-<file path=ppt/notesSlides/notesSlide11.xml><?xml version="1.0" encoding="utf-8"?>
-<p:notes xmlns:a="http://schemas.openxmlformats.org/drawingml/2006/main" xmlns:p="http://schemas.openxmlformats.org/presentationml/2006/main" xmlns:r="http://schemas.openxmlformats.org/officeDocument/2006/relationships">
-  <p:cSld>
-    <p:spTree>
-      <p:nvGrpSpPr>
-        <p:cNvPr id="1" name=""/>
-        <p:cNvGrpSpPr/>
-        <p:nvPr/>
-      </p:nvGrpSpPr>
-      <p:grpSpPr>
-        <a:xfrm>
-          <a:off x="0" y="0"/>
-          <a:ext cx="0" cy="0"/>
-          <a:chOff x="0" y="0"/>
-          <a:chExt cx="0" cy="0"/>
-        </a:xfrm>
-      </p:grpSpPr>
-      <p:sp>
-        <p:nvSpPr>
-          <p:cNvPr id="2" name="Slide Image Placeholder 1"/>
-          <p:cNvSpPr>
-            <a:spLocks noGrp="1"/>
-          </p:cNvSpPr>
-          <p:nvPr>
-            <p:ph type="sldImg" idx="2"/>
-          </p:nvPr>
-        </p:nvSpPr>
-        <p:spPr/>
-      </p:sp>
-      <p:sp>
-        <p:nvSpPr>
-          <p:cNvPr id="3" name="Notes Placeholder 2"/>
-          <p:cNvSpPr>
-            <a:spLocks noGrp="1"/>
-          </p:cNvSpPr>
-          <p:nvPr>
-            <p:ph type="body" idx="3" sz="quarter"/>
-          </p:nvPr>
-        </p:nvSpPr>
-        <p:spPr/>
-        <p:txBody>
-          <a:bodyPr/>
-          <a:lstStyle/>
-          <a:p>
-            <a:r>
-              <a:t>In conclusion, the project is a complete and working intrusion detection system that meets every objective and is small enough to explain in full. The modular rule engine means each future extension can be added and tested on its own.</a:t>
-            </a:r>
-          </a:p>
-        </p:txBody>
-      </p:sp>
-      <p:sp>
-        <p:nvSpPr>
-          <p:cNvPr id="4" name="Slide Number Placeholder 3"/>
-          <p:cNvSpPr>
-            <a:spLocks noGrp="1"/>
-          </p:cNvSpPr>
-          <p:nvPr>
-            <p:ph type="sldNum" idx="5" sz="quarter"/>
-          </p:nvPr>
-        </p:nvSpPr>
-        <p:spPr/>
-      </p:sp>
-    </p:spTree>
-  </p:cSld>
-  <p:clrMapOvr>
-    <a:masterClrMapping/>
-  </p:clrMapOvr>
-</p:notes>
-</file>
-
-<file path=ppt/notesSlides/notesSlide12.xml><?xml version="1.0" encoding="utf-8"?>
-<p:notes xmlns:a="http://schemas.openxmlformats.org/drawingml/2006/main" xmlns:p="http://schemas.openxmlformats.org/presentationml/2006/main" xmlns:r="http://schemas.openxmlformats.org/officeDocument/2006/relationships">
-  <p:cSld>
-    <p:spTree>
-      <p:nvGrpSpPr>
-        <p:cNvPr id="1" name=""/>
-        <p:cNvGrpSpPr/>
-        <p:nvPr/>
-      </p:nvGrpSpPr>
-      <p:grpSpPr>
-        <a:xfrm>
-          <a:off x="0" y="0"/>
-          <a:ext cx="0" cy="0"/>
-          <a:chOff x="0" y="0"/>
-          <a:chExt cx="0" cy="0"/>
-        </a:xfrm>
-      </p:grpSpPr>
-      <p:sp>
-        <p:nvSpPr>
-          <p:cNvPr id="2" name="Slide Image Placeholder 1"/>
-          <p:cNvSpPr>
-            <a:spLocks noGrp="1"/>
-          </p:cNvSpPr>
-          <p:nvPr>
-            <p:ph type="sldImg" idx="2"/>
-          </p:nvPr>
-        </p:nvSpPr>
-        <p:spPr/>
-      </p:sp>
-      <p:sp>
-        <p:nvSpPr>
-          <p:cNvPr id="3" name="Notes Placeholder 2"/>
-          <p:cNvSpPr>
-            <a:spLocks noGrp="1"/>
-          </p:cNvSpPr>
-          <p:nvPr>
-            <p:ph type="body" idx="3" sz="quarter"/>
-          </p:nvPr>
-        </p:nvSpPr>
-        <p:spPr/>
-        <p:txBody>
-          <a:bodyPr/>
-          <a:lstStyle/>
-          <a:p>
-            <a:r>
-              <a:t>Thank you. I am happy to take questions or to show any part of the code or the live demo.</a:t>
+              <a:t>In conclusion, the project is a complete and working intrusion detection system that meets every objective and is small enough to explain in full. The modular rule engine means each future extension can be added and tested on its own. Thank you, I am happy to take questions or show any part of the code or the live demo.</a:t>
             </a:r>
           </a:p>
         </p:txBody>
@@ -793,7 +651,7 @@
           <a:lstStyle/>
           <a:p>
             <a:r>
-              <a:t>Homes, hostels and labs have no monitoring. Three common attacks leave clear patterns in packets but go unnoticed. My system detects all three and shows them live.</a:t>
+              <a:t>Homes, hostels and labs have no monitoring. Three common attacks leave clear patterns in packets but go unnoticed. Existing tools do not fit: Wireshark only captures and does not alert, Snort and Zeek need expert setup and write to log files, and machine learning systems cannot explain an alert. My system detects all three attacks, explains every alert, and shows them live.</a:t>
             </a:r>
           </a:p>
         </p:txBody>
@@ -933,7 +791,7 @@
           <a:lstStyle/>
           <a:p>
             <a:r>
-              <a:t>Wireshark does not alert, Snort needs an expert and logs to files, and machine learning cannot explain itself. My system is small, explainable and live, which is exactly the gap for a small network.</a:t>
+              <a:t>The sensor captures packets with Scapy and runs the rules. Alerts go as JSON over HTTP to the Node.js server, which logs them and pushes them to the dashboard through Socket.IO.</a:t>
             </a:r>
           </a:p>
         </p:txBody>
@@ -1003,7 +861,7 @@
           <a:lstStyle/>
           <a:p>
             <a:r>
-              <a:t>The sensor captures packets with Scapy and runs the rules. Alerts go as JSON over HTTP to the Node.js server, which logs them and pushes them to the dashboard through Socket.IO.</a:t>
+              <a:t>Each tool is used where it is strongest. The two halves talk over HTTP with small JSON messages, so each can be tested on its own.</a:t>
             </a:r>
           </a:p>
         </p:txBody>
@@ -1073,7 +931,7 @@
           <a:lstStyle/>
           <a:p>
             <a:r>
-              <a:t>Each tool is used where it is strongest. The two halves talk over HTTP with small JSON messages, so each can be tested on its own.</a:t>
+              <a:t>The design was captured in standard diagrams: data-flow, use-case, sequence, component and deployment, plus a flowchart of the detection logic. The level-1 data-flow diagram shown here breaks the system into five processes.</a:t>
             </a:r>
           </a:p>
         </p:txBody>
@@ -1143,7 +1001,7 @@
           <a:lstStyle/>
           <a:p>
             <a:r>
-              <a:t>The design was captured in standard diagrams: data-flow, use-case, sequence, component and deployment, plus a flowchart of the detection logic. The level-1 data-flow diagram shown here breaks the system into five processes.</a:t>
+              <a:t>Each rule is a simple threshold on a counter. The port scan counts distinct ports, the SYN flood counts half-open handshakes, and the ARP rule watches for a changed gateway MAC. Every alert can be explained by its counter and threshold, which is the key advantage over machine learning.</a:t>
             </a:r>
           </a:p>
         </p:txBody>
@@ -1213,7 +1071,7 @@
           <a:lstStyle/>
           <a:p>
             <a:r>
-              <a:t>Each rule is a simple threshold on a counter. The port scan counts distinct ports, the SYN flood counts half-open handshakes, and the ARP rule watches for a changed gateway MAC. Every alert can be explained by its counter and threshold, which is the key advantage over machine learning.</a:t>
+              <a:t>Ten unit tests feed crafted packets straight to the detector and all pass. The negative tests matter as much as the positive ones, because a detector that cries wolf would be ignored. Integration tests confirmed the whole pipeline with real attacks against my own machine.</a:t>
             </a:r>
           </a:p>
         </p:txBody>
@@ -1283,7 +1141,7 @@
           <a:lstStyle/>
           <a:p>
             <a:r>
-              <a:t>Ten unit tests feed crafted packets straight to the detector and all pass. The negative tests matter as much as the positive ones, because a detector that cries wolf would be ignored. Integration tests confirmed the whole pipeline with real attacks against my own machine.</a:t>
+              <a:t>This is the real dashboard during testing. The medium port-scan alert and the high SYN-flood alert are both shown, with the live chart and the per-type totals. Detection latency was about two milliseconds, and no false alarm was raised during normal browsing.</a:t>
             </a:r>
           </a:p>
         </p:txBody>
@@ -4671,713 +4529,6 @@
                 </a:solidFill>
                 <a:latin typeface="Calibri"/>
               </a:rPr>
-              <a:t>Results: Live Dashboard</a:t>
-            </a:r>
-          </a:p>
-        </p:txBody>
-      </p:sp>
-      <p:pic>
-        <p:nvPicPr>
-          <p:cNvPr id="3" name="Picture 2" descr="dash_final.png"/>
-          <p:cNvPicPr>
-            <a:picLocks noChangeAspect="1"/>
-          </p:cNvPicPr>
-          <p:nvPr/>
-        </p:nvPicPr>
-        <p:blipFill>
-          <a:blip r:embed="rId2"/>
-          <a:stretch>
-            <a:fillRect/>
-          </a:stretch>
-        </p:blipFill>
-        <p:spPr>
-          <a:xfrm>
-            <a:off x="548640" y="1463040"/>
-            <a:ext cx="7406640" cy="3977411"/>
-          </a:xfrm>
-          <a:prstGeom prst="rect">
-            <a:avLst/>
-          </a:prstGeom>
-          <a:ln w="9525">
-            <a:solidFill>
-              <a:srgbClr val="D5DCE6"/>
-            </a:solidFill>
-          </a:ln>
-        </p:spPr>
-      </p:pic>
-      <p:sp>
-        <p:nvSpPr>
-          <p:cNvPr id="4" name="TextBox 3"/>
-          <p:cNvSpPr txBox="1"/>
-          <p:nvPr/>
-        </p:nvSpPr>
-        <p:spPr>
-          <a:xfrm>
-            <a:off x="548640" y="5513603"/>
-            <a:ext cx="7406640" cy="274320"/>
-          </a:xfrm>
-          <a:prstGeom prst="rect">
-            <a:avLst/>
-          </a:prstGeom>
-          <a:noFill/>
-        </p:spPr>
-        <p:txBody>
-          <a:bodyPr wrap="square" lIns="0" rIns="0" tIns="0" bIns="0" anchor="t">
-            <a:spAutoFit/>
-          </a:bodyPr>
-          <a:lstStyle/>
-          <a:p>
-            <a:pPr algn="ctr">
-              <a:spcAft>
-                <a:spcPts val="0"/>
-              </a:spcAft>
-            </a:pPr>
-            <a:r>
-              <a:rPr sz="1200" b="0" i="0">
-                <a:solidFill>
-                  <a:srgbClr val="5B6472"/>
-                </a:solidFill>
-                <a:latin typeface="Calibri"/>
-              </a:rPr>
-              <a:t>Dashboard after detecting a port scan and a SYN flood</a:t>
-            </a:r>
-          </a:p>
-        </p:txBody>
-      </p:sp>
-      <p:sp>
-        <p:nvSpPr>
-          <p:cNvPr id="5" name="Rounded Rectangle 4"/>
-          <p:cNvSpPr/>
-          <p:nvPr/>
-        </p:nvSpPr>
-        <p:spPr>
-          <a:xfrm>
-            <a:off x="8229600" y="1554480"/>
-            <a:ext cx="3291840" cy="960120"/>
-          </a:xfrm>
-          <a:prstGeom prst="roundRect">
-            <a:avLst>
-              <a:gd name="adj" fmla="val 8000"/>
-            </a:avLst>
-          </a:prstGeom>
-          <a:solidFill>
-            <a:srgbClr val="EEF2F7"/>
-          </a:solidFill>
-          <a:ln>
-            <a:noFill/>
-          </a:ln>
-          <a:effectLst/>
-        </p:spPr>
-        <p:style>
-          <a:lnRef idx="1">
-            <a:schemeClr val="accent1"/>
-          </a:lnRef>
-          <a:fillRef idx="3">
-            <a:schemeClr val="accent1"/>
-          </a:fillRef>
-          <a:effectRef idx="2">
-            <a:schemeClr val="accent1"/>
-          </a:effectRef>
-          <a:fontRef idx="minor">
-            <a:schemeClr val="lt1"/>
-          </a:fontRef>
-        </p:style>
-        <p:txBody>
-          <a:bodyPr rtlCol="0" anchor="ctr"/>
-          <a:lstStyle/>
-          <a:p>
-            <a:pPr algn="ctr"/>
-          </a:p>
-        </p:txBody>
-      </p:sp>
-      <p:sp>
-        <p:nvSpPr>
-          <p:cNvPr id="6" name="TextBox 5"/>
-          <p:cNvSpPr txBox="1"/>
-          <p:nvPr/>
-        </p:nvSpPr>
-        <p:spPr>
-          <a:xfrm>
-            <a:off x="8458200" y="1664207"/>
-            <a:ext cx="1371600" cy="640080"/>
-          </a:xfrm>
-          <a:prstGeom prst="rect">
-            <a:avLst/>
-          </a:prstGeom>
-          <a:noFill/>
-        </p:spPr>
-        <p:txBody>
-          <a:bodyPr wrap="square" lIns="0" rIns="0" tIns="0" bIns="0" anchor="t">
-            <a:spAutoFit/>
-          </a:bodyPr>
-          <a:lstStyle/>
-          <a:p>
-            <a:pPr algn="l">
-              <a:spcAft>
-                <a:spcPts val="0"/>
-              </a:spcAft>
-            </a:pPr>
-            <a:r>
-              <a:rPr sz="3000" b="1" i="0">
-                <a:solidFill>
-                  <a:srgbClr val="14213D"/>
-                </a:solidFill>
-                <a:latin typeface="Calibri"/>
-              </a:rPr>
-              <a:t>3</a:t>
-            </a:r>
-          </a:p>
-        </p:txBody>
-      </p:sp>
-      <p:sp>
-        <p:nvSpPr>
-          <p:cNvPr id="7" name="TextBox 6"/>
-          <p:cNvSpPr txBox="1"/>
-          <p:nvPr/>
-        </p:nvSpPr>
-        <p:spPr>
-          <a:xfrm>
-            <a:off x="9692640" y="1828800"/>
-            <a:ext cx="1737360" cy="457200"/>
-          </a:xfrm>
-          <a:prstGeom prst="rect">
-            <a:avLst/>
-          </a:prstGeom>
-          <a:noFill/>
-        </p:spPr>
-        <p:txBody>
-          <a:bodyPr wrap="square" lIns="0" rIns="0" tIns="0" bIns="0" anchor="t">
-            <a:spAutoFit/>
-          </a:bodyPr>
-          <a:lstStyle/>
-          <a:p>
-            <a:pPr algn="l">
-              <a:spcAft>
-                <a:spcPts val="0"/>
-              </a:spcAft>
-            </a:pPr>
-            <a:r>
-              <a:rPr sz="1400" b="0" i="0">
-                <a:solidFill>
-                  <a:srgbClr val="1F2937"/>
-                </a:solidFill>
-                <a:latin typeface="Calibri"/>
-              </a:rPr>
-              <a:t>attacks detected</a:t>
-            </a:r>
-          </a:p>
-        </p:txBody>
-      </p:sp>
-      <p:sp>
-        <p:nvSpPr>
-          <p:cNvPr id="8" name="Rounded Rectangle 7"/>
-          <p:cNvSpPr/>
-          <p:nvPr/>
-        </p:nvSpPr>
-        <p:spPr>
-          <a:xfrm>
-            <a:off x="8229600" y="2697480"/>
-            <a:ext cx="3291840" cy="960120"/>
-          </a:xfrm>
-          <a:prstGeom prst="roundRect">
-            <a:avLst>
-              <a:gd name="adj" fmla="val 8000"/>
-            </a:avLst>
-          </a:prstGeom>
-          <a:solidFill>
-            <a:srgbClr val="EEF2F7"/>
-          </a:solidFill>
-          <a:ln>
-            <a:noFill/>
-          </a:ln>
-          <a:effectLst/>
-        </p:spPr>
-        <p:style>
-          <a:lnRef idx="1">
-            <a:schemeClr val="accent1"/>
-          </a:lnRef>
-          <a:fillRef idx="3">
-            <a:schemeClr val="accent1"/>
-          </a:fillRef>
-          <a:effectRef idx="2">
-            <a:schemeClr val="accent1"/>
-          </a:effectRef>
-          <a:fontRef idx="minor">
-            <a:schemeClr val="lt1"/>
-          </a:fontRef>
-        </p:style>
-        <p:txBody>
-          <a:bodyPr rtlCol="0" anchor="ctr"/>
-          <a:lstStyle/>
-          <a:p>
-            <a:pPr algn="ctr"/>
-          </a:p>
-        </p:txBody>
-      </p:sp>
-      <p:sp>
-        <p:nvSpPr>
-          <p:cNvPr id="9" name="TextBox 8"/>
-          <p:cNvSpPr txBox="1"/>
-          <p:nvPr/>
-        </p:nvSpPr>
-        <p:spPr>
-          <a:xfrm>
-            <a:off x="8458200" y="2807208"/>
-            <a:ext cx="1371600" cy="640080"/>
-          </a:xfrm>
-          <a:prstGeom prst="rect">
-            <a:avLst/>
-          </a:prstGeom>
-          <a:noFill/>
-        </p:spPr>
-        <p:txBody>
-          <a:bodyPr wrap="square" lIns="0" rIns="0" tIns="0" bIns="0" anchor="t">
-            <a:spAutoFit/>
-          </a:bodyPr>
-          <a:lstStyle/>
-          <a:p>
-            <a:pPr algn="l">
-              <a:spcAft>
-                <a:spcPts val="0"/>
-              </a:spcAft>
-            </a:pPr>
-            <a:r>
-              <a:rPr sz="3000" b="1" i="0">
-                <a:solidFill>
-                  <a:srgbClr val="14213D"/>
-                </a:solidFill>
-                <a:latin typeface="Calibri"/>
-              </a:rPr>
-              <a:t>~2 ms</a:t>
-            </a:r>
-          </a:p>
-        </p:txBody>
-      </p:sp>
-      <p:sp>
-        <p:nvSpPr>
-          <p:cNvPr id="10" name="TextBox 9"/>
-          <p:cNvSpPr txBox="1"/>
-          <p:nvPr/>
-        </p:nvSpPr>
-        <p:spPr>
-          <a:xfrm>
-            <a:off x="9692640" y="2971800"/>
-            <a:ext cx="1737360" cy="457200"/>
-          </a:xfrm>
-          <a:prstGeom prst="rect">
-            <a:avLst/>
-          </a:prstGeom>
-          <a:noFill/>
-        </p:spPr>
-        <p:txBody>
-          <a:bodyPr wrap="square" lIns="0" rIns="0" tIns="0" bIns="0" anchor="t">
-            <a:spAutoFit/>
-          </a:bodyPr>
-          <a:lstStyle/>
-          <a:p>
-            <a:pPr algn="l">
-              <a:spcAft>
-                <a:spcPts val="0"/>
-              </a:spcAft>
-            </a:pPr>
-            <a:r>
-              <a:rPr sz="1400" b="0" i="0">
-                <a:solidFill>
-                  <a:srgbClr val="1F2937"/>
-                </a:solidFill>
-                <a:latin typeface="Calibri"/>
-              </a:rPr>
-              <a:t>detection latency</a:t>
-            </a:r>
-          </a:p>
-        </p:txBody>
-      </p:sp>
-      <p:sp>
-        <p:nvSpPr>
-          <p:cNvPr id="11" name="Rounded Rectangle 10"/>
-          <p:cNvSpPr/>
-          <p:nvPr/>
-        </p:nvSpPr>
-        <p:spPr>
-          <a:xfrm>
-            <a:off x="8229600" y="3840480"/>
-            <a:ext cx="3291840" cy="960120"/>
-          </a:xfrm>
-          <a:prstGeom prst="roundRect">
-            <a:avLst>
-              <a:gd name="adj" fmla="val 8000"/>
-            </a:avLst>
-          </a:prstGeom>
-          <a:solidFill>
-            <a:srgbClr val="EEF2F7"/>
-          </a:solidFill>
-          <a:ln>
-            <a:noFill/>
-          </a:ln>
-          <a:effectLst/>
-        </p:spPr>
-        <p:style>
-          <a:lnRef idx="1">
-            <a:schemeClr val="accent1"/>
-          </a:lnRef>
-          <a:fillRef idx="3">
-            <a:schemeClr val="accent1"/>
-          </a:fillRef>
-          <a:effectRef idx="2">
-            <a:schemeClr val="accent1"/>
-          </a:effectRef>
-          <a:fontRef idx="minor">
-            <a:schemeClr val="lt1"/>
-          </a:fontRef>
-        </p:style>
-        <p:txBody>
-          <a:bodyPr rtlCol="0" anchor="ctr"/>
-          <a:lstStyle/>
-          <a:p>
-            <a:pPr algn="ctr"/>
-          </a:p>
-        </p:txBody>
-      </p:sp>
-      <p:sp>
-        <p:nvSpPr>
-          <p:cNvPr id="12" name="TextBox 11"/>
-          <p:cNvSpPr txBox="1"/>
-          <p:nvPr/>
-        </p:nvSpPr>
-        <p:spPr>
-          <a:xfrm>
-            <a:off x="8458200" y="3950208"/>
-            <a:ext cx="1371600" cy="640080"/>
-          </a:xfrm>
-          <a:prstGeom prst="rect">
-            <a:avLst/>
-          </a:prstGeom>
-          <a:noFill/>
-        </p:spPr>
-        <p:txBody>
-          <a:bodyPr wrap="square" lIns="0" rIns="0" tIns="0" bIns="0" anchor="t">
-            <a:spAutoFit/>
-          </a:bodyPr>
-          <a:lstStyle/>
-          <a:p>
-            <a:pPr algn="l">
-              <a:spcAft>
-                <a:spcPts val="0"/>
-              </a:spcAft>
-            </a:pPr>
-            <a:r>
-              <a:rPr sz="3000" b="1" i="0">
-                <a:solidFill>
-                  <a:srgbClr val="14213D"/>
-                </a:solidFill>
-                <a:latin typeface="Calibri"/>
-              </a:rPr>
-              <a:t>10/10</a:t>
-            </a:r>
-          </a:p>
-        </p:txBody>
-      </p:sp>
-      <p:sp>
-        <p:nvSpPr>
-          <p:cNvPr id="13" name="TextBox 12"/>
-          <p:cNvSpPr txBox="1"/>
-          <p:nvPr/>
-        </p:nvSpPr>
-        <p:spPr>
-          <a:xfrm>
-            <a:off x="9692640" y="4114800"/>
-            <a:ext cx="1737360" cy="457200"/>
-          </a:xfrm>
-          <a:prstGeom prst="rect">
-            <a:avLst/>
-          </a:prstGeom>
-          <a:noFill/>
-        </p:spPr>
-        <p:txBody>
-          <a:bodyPr wrap="square" lIns="0" rIns="0" tIns="0" bIns="0" anchor="t">
-            <a:spAutoFit/>
-          </a:bodyPr>
-          <a:lstStyle/>
-          <a:p>
-            <a:pPr algn="l">
-              <a:spcAft>
-                <a:spcPts val="0"/>
-              </a:spcAft>
-            </a:pPr>
-            <a:r>
-              <a:rPr sz="1400" b="0" i="0">
-                <a:solidFill>
-                  <a:srgbClr val="1F2937"/>
-                </a:solidFill>
-                <a:latin typeface="Calibri"/>
-              </a:rPr>
-              <a:t>unit tests pass</a:t>
-            </a:r>
-          </a:p>
-        </p:txBody>
-      </p:sp>
-      <p:sp>
-        <p:nvSpPr>
-          <p:cNvPr id="14" name="Rounded Rectangle 13"/>
-          <p:cNvSpPr/>
-          <p:nvPr/>
-        </p:nvSpPr>
-        <p:spPr>
-          <a:xfrm>
-            <a:off x="8229600" y="4983480"/>
-            <a:ext cx="3291840" cy="960120"/>
-          </a:xfrm>
-          <a:prstGeom prst="roundRect">
-            <a:avLst>
-              <a:gd name="adj" fmla="val 8000"/>
-            </a:avLst>
-          </a:prstGeom>
-          <a:solidFill>
-            <a:srgbClr val="EEF2F7"/>
-          </a:solidFill>
-          <a:ln>
-            <a:noFill/>
-          </a:ln>
-          <a:effectLst/>
-        </p:spPr>
-        <p:style>
-          <a:lnRef idx="1">
-            <a:schemeClr val="accent1"/>
-          </a:lnRef>
-          <a:fillRef idx="3">
-            <a:schemeClr val="accent1"/>
-          </a:fillRef>
-          <a:effectRef idx="2">
-            <a:schemeClr val="accent1"/>
-          </a:effectRef>
-          <a:fontRef idx="minor">
-            <a:schemeClr val="lt1"/>
-          </a:fontRef>
-        </p:style>
-        <p:txBody>
-          <a:bodyPr rtlCol="0" anchor="ctr"/>
-          <a:lstStyle/>
-          <a:p>
-            <a:pPr algn="ctr"/>
-          </a:p>
-        </p:txBody>
-      </p:sp>
-      <p:sp>
-        <p:nvSpPr>
-          <p:cNvPr id="15" name="TextBox 14"/>
-          <p:cNvSpPr txBox="1"/>
-          <p:nvPr/>
-        </p:nvSpPr>
-        <p:spPr>
-          <a:xfrm>
-            <a:off x="8458200" y="5093208"/>
-            <a:ext cx="1371600" cy="640080"/>
-          </a:xfrm>
-          <a:prstGeom prst="rect">
-            <a:avLst/>
-          </a:prstGeom>
-          <a:noFill/>
-        </p:spPr>
-        <p:txBody>
-          <a:bodyPr wrap="square" lIns="0" rIns="0" tIns="0" bIns="0" anchor="t">
-            <a:spAutoFit/>
-          </a:bodyPr>
-          <a:lstStyle/>
-          <a:p>
-            <a:pPr algn="l">
-              <a:spcAft>
-                <a:spcPts val="0"/>
-              </a:spcAft>
-            </a:pPr>
-            <a:r>
-              <a:rPr sz="3000" b="1" i="0">
-                <a:solidFill>
-                  <a:srgbClr val="14213D"/>
-                </a:solidFill>
-                <a:latin typeface="Calibri"/>
-              </a:rPr>
-              <a:t>~200</a:t>
-            </a:r>
-          </a:p>
-        </p:txBody>
-      </p:sp>
-      <p:sp>
-        <p:nvSpPr>
-          <p:cNvPr id="16" name="TextBox 15"/>
-          <p:cNvSpPr txBox="1"/>
-          <p:nvPr/>
-        </p:nvSpPr>
-        <p:spPr>
-          <a:xfrm>
-            <a:off x="9692640" y="5257800"/>
-            <a:ext cx="1737360" cy="457200"/>
-          </a:xfrm>
-          <a:prstGeom prst="rect">
-            <a:avLst/>
-          </a:prstGeom>
-          <a:noFill/>
-        </p:spPr>
-        <p:txBody>
-          <a:bodyPr wrap="square" lIns="0" rIns="0" tIns="0" bIns="0" anchor="t">
-            <a:spAutoFit/>
-          </a:bodyPr>
-          <a:lstStyle/>
-          <a:p>
-            <a:pPr algn="l">
-              <a:spcAft>
-                <a:spcPts val="0"/>
-              </a:spcAft>
-            </a:pPr>
-            <a:r>
-              <a:rPr sz="1400" b="0" i="0">
-                <a:solidFill>
-                  <a:srgbClr val="1F2937"/>
-                </a:solidFill>
-                <a:latin typeface="Calibri"/>
-              </a:rPr>
-              <a:t>lines of code</a:t>
-            </a:r>
-          </a:p>
-        </p:txBody>
-      </p:sp>
-      <p:sp>
-        <p:nvSpPr>
-          <p:cNvPr id="17" name="TextBox 16"/>
-          <p:cNvSpPr txBox="1"/>
-          <p:nvPr/>
-        </p:nvSpPr>
-        <p:spPr>
-          <a:xfrm>
-            <a:off x="548640" y="6419088"/>
-            <a:ext cx="8229600" cy="274320"/>
-          </a:xfrm>
-          <a:prstGeom prst="rect">
-            <a:avLst/>
-          </a:prstGeom>
-          <a:noFill/>
-        </p:spPr>
-        <p:txBody>
-          <a:bodyPr wrap="square" lIns="0" rIns="0" tIns="0" bIns="0" anchor="t">
-            <a:spAutoFit/>
-          </a:bodyPr>
-          <a:lstStyle/>
-          <a:p>
-            <a:pPr algn="l">
-              <a:spcAft>
-                <a:spcPts val="0"/>
-              </a:spcAft>
-            </a:pPr>
-            <a:r>
-              <a:rPr sz="1000" b="0" i="0">
-                <a:solidFill>
-                  <a:srgbClr val="5B6472"/>
-                </a:solidFill>
-                <a:latin typeface="Calibri"/>
-              </a:rPr>
-              <a:t>Real-Time NIDS  |  Rohan Pandey  |  Final Evaluation</a:t>
-            </a:r>
-          </a:p>
-        </p:txBody>
-      </p:sp>
-      <p:sp>
-        <p:nvSpPr>
-          <p:cNvPr id="18" name="TextBox 17"/>
-          <p:cNvSpPr txBox="1"/>
-          <p:nvPr/>
-        </p:nvSpPr>
-        <p:spPr>
-          <a:xfrm>
-            <a:off x="10881360" y="6419088"/>
-            <a:ext cx="731520" cy="274320"/>
-          </a:xfrm>
-          <a:prstGeom prst="rect">
-            <a:avLst/>
-          </a:prstGeom>
-          <a:noFill/>
-        </p:spPr>
-        <p:txBody>
-          <a:bodyPr wrap="square" lIns="0" rIns="0" tIns="0" bIns="0" anchor="t">
-            <a:spAutoFit/>
-          </a:bodyPr>
-          <a:lstStyle/>
-          <a:p>
-            <a:pPr algn="r">
-              <a:spcAft>
-                <a:spcPts val="0"/>
-              </a:spcAft>
-            </a:pPr>
-            <a:r>
-              <a:rPr sz="1000" b="0" i="0">
-                <a:solidFill>
-                  <a:srgbClr val="5B6472"/>
-                </a:solidFill>
-                <a:latin typeface="Calibri"/>
-              </a:rPr>
-              <a:t>10</a:t>
-            </a:r>
-          </a:p>
-        </p:txBody>
-      </p:sp>
-    </p:spTree>
-  </p:cSld>
-  <p:clrMapOvr>
-    <a:masterClrMapping/>
-  </p:clrMapOvr>
-</p:sld>
-</file>
-
-<file path=ppt/slides/slide11.xml><?xml version="1.0" encoding="utf-8"?>
-<p:sld xmlns:a="http://schemas.openxmlformats.org/drawingml/2006/main" xmlns:p="http://schemas.openxmlformats.org/presentationml/2006/main" xmlns:r="http://schemas.openxmlformats.org/officeDocument/2006/relationships">
-  <p:cSld>
-    <p:bg>
-      <p:bgPr>
-        <a:solidFill>
-          <a:srgbClr val="FFFFFF"/>
-        </a:solidFill>
-        <a:effectLst/>
-      </p:bgPr>
-    </p:bg>
-    <p:spTree>
-      <p:nvGrpSpPr>
-        <p:cNvPr id="1" name=""/>
-        <p:cNvGrpSpPr/>
-        <p:nvPr/>
-      </p:nvGrpSpPr>
-      <p:grpSpPr/>
-      <p:sp>
-        <p:nvSpPr>
-          <p:cNvPr id="2" name="TextBox 1"/>
-          <p:cNvSpPr txBox="1"/>
-          <p:nvPr/>
-        </p:nvSpPr>
-        <p:spPr>
-          <a:xfrm>
-            <a:off x="548640" y="411480"/>
-            <a:ext cx="11064240" cy="685800"/>
-          </a:xfrm>
-          <a:prstGeom prst="rect">
-            <a:avLst/>
-          </a:prstGeom>
-          <a:noFill/>
-        </p:spPr>
-        <p:txBody>
-          <a:bodyPr wrap="square" lIns="0" rIns="0" tIns="0" bIns="0" anchor="t">
-            <a:spAutoFit/>
-          </a:bodyPr>
-          <a:lstStyle/>
-          <a:p>
-            <a:pPr algn="l">
-              <a:spcAft>
-                <a:spcPts val="0"/>
-              </a:spcAft>
-            </a:pPr>
-            <a:r>
-              <a:rPr sz="3200" b="1" i="0">
-                <a:solidFill>
-                  <a:srgbClr val="14213D"/>
-                </a:solidFill>
-                <a:latin typeface="Calibri"/>
-              </a:rPr>
               <a:t>Conclusion and Future Scope</a:t>
             </a:r>
           </a:p>
@@ -6423,6 +5574,45 @@
         </p:nvSpPr>
         <p:spPr>
           <a:xfrm>
+            <a:off x="548640" y="5989320"/>
+            <a:ext cx="11064240" cy="365760"/>
+          </a:xfrm>
+          <a:prstGeom prst="rect">
+            <a:avLst/>
+          </a:prstGeom>
+          <a:noFill/>
+        </p:spPr>
+        <p:txBody>
+          <a:bodyPr wrap="square" lIns="0" rIns="0" tIns="0" bIns="0" anchor="t">
+            <a:spAutoFit/>
+          </a:bodyPr>
+          <a:lstStyle/>
+          <a:p>
+            <a:pPr algn="l">
+              <a:spcAft>
+                <a:spcPts val="0"/>
+              </a:spcAft>
+            </a:pPr>
+            <a:r>
+              <a:rPr sz="1400" b="1" i="0">
+                <a:solidFill>
+                  <a:srgbClr val="1B7F73"/>
+                </a:solidFill>
+                <a:latin typeface="Calibri"/>
+              </a:rPr>
+              <a:t>Thank you. Questions are welcome.   github.com/rohanpandey436/realtime-nids</a:t>
+            </a:r>
+          </a:p>
+        </p:txBody>
+      </p:sp>
+      <p:sp>
+        <p:nvSpPr>
+          <p:cNvPr id="29" name="TextBox 28"/>
+          <p:cNvSpPr txBox="1"/>
+          <p:nvPr/>
+        </p:nvSpPr>
+        <p:spPr>
+          <a:xfrm>
             <a:off x="548640" y="6419088"/>
             <a:ext cx="8229600" cy="274320"/>
           </a:xfrm>
@@ -6456,7 +5646,7 @@
       </p:sp>
       <p:sp>
         <p:nvSpPr>
-          <p:cNvPr id="29" name="TextBox 28"/>
+          <p:cNvPr id="30" name="TextBox 29"/>
           <p:cNvSpPr txBox="1"/>
           <p:nvPr/>
         </p:nvSpPr>
@@ -6488,189 +5678,7 @@
                 </a:solidFill>
                 <a:latin typeface="Calibri"/>
               </a:rPr>
-              <a:t>11</a:t>
-            </a:r>
-          </a:p>
-        </p:txBody>
-      </p:sp>
-    </p:spTree>
-  </p:cSld>
-  <p:clrMapOvr>
-    <a:masterClrMapping/>
-  </p:clrMapOvr>
-</p:sld>
-</file>
-
-<file path=ppt/slides/slide12.xml><?xml version="1.0" encoding="utf-8"?>
-<p:sld xmlns:a="http://schemas.openxmlformats.org/drawingml/2006/main" xmlns:p="http://schemas.openxmlformats.org/presentationml/2006/main" xmlns:r="http://schemas.openxmlformats.org/officeDocument/2006/relationships">
-  <p:cSld>
-    <p:bg>
-      <p:bgPr>
-        <a:solidFill>
-          <a:srgbClr val="14213D"/>
-        </a:solidFill>
-        <a:effectLst/>
-      </p:bgPr>
-    </p:bg>
-    <p:spTree>
-      <p:nvGrpSpPr>
-        <p:cNvPr id="1" name=""/>
-        <p:cNvGrpSpPr/>
-        <p:nvPr/>
-      </p:nvGrpSpPr>
-      <p:grpSpPr/>
-      <p:sp>
-        <p:nvSpPr>
-          <p:cNvPr id="2" name="TextBox 1"/>
-          <p:cNvSpPr txBox="1"/>
-          <p:nvPr/>
-        </p:nvSpPr>
-        <p:spPr>
-          <a:xfrm>
-            <a:off x="548640" y="2103120"/>
-            <a:ext cx="11064240" cy="914400"/>
-          </a:xfrm>
-          <a:prstGeom prst="rect">
-            <a:avLst/>
-          </a:prstGeom>
-          <a:noFill/>
-        </p:spPr>
-        <p:txBody>
-          <a:bodyPr wrap="square" lIns="0" rIns="0" tIns="0" bIns="0" anchor="t">
-            <a:spAutoFit/>
-          </a:bodyPr>
-          <a:lstStyle/>
-          <a:p>
-            <a:pPr algn="ctr">
-              <a:spcAft>
-                <a:spcPts val="0"/>
-              </a:spcAft>
-            </a:pPr>
-            <a:r>
-              <a:rPr sz="5400" b="1" i="0">
-                <a:solidFill>
-                  <a:srgbClr val="FFFFFF"/>
-                </a:solidFill>
-                <a:latin typeface="Calibri"/>
-              </a:rPr>
-              <a:t>Thank You</a:t>
-            </a:r>
-          </a:p>
-        </p:txBody>
-      </p:sp>
-      <p:sp>
-        <p:nvSpPr>
-          <p:cNvPr id="3" name="TextBox 2"/>
-          <p:cNvSpPr txBox="1"/>
-          <p:nvPr/>
-        </p:nvSpPr>
-        <p:spPr>
-          <a:xfrm>
-            <a:off x="548640" y="3108960"/>
-            <a:ext cx="11064240" cy="457200"/>
-          </a:xfrm>
-          <a:prstGeom prst="rect">
-            <a:avLst/>
-          </a:prstGeom>
-          <a:noFill/>
-        </p:spPr>
-        <p:txBody>
-          <a:bodyPr wrap="square" lIns="0" rIns="0" tIns="0" bIns="0" anchor="t">
-            <a:spAutoFit/>
-          </a:bodyPr>
-          <a:lstStyle/>
-          <a:p>
-            <a:pPr algn="ctr">
-              <a:spcAft>
-                <a:spcPts val="0"/>
-              </a:spcAft>
-            </a:pPr>
-            <a:r>
-              <a:rPr sz="2200" b="0" i="0">
-                <a:solidFill>
-                  <a:srgbClr val="C9D6EA"/>
-                </a:solidFill>
-                <a:latin typeface="Calibri"/>
-              </a:rPr>
-              <a:t>Questions are welcome</a:t>
-            </a:r>
-          </a:p>
-        </p:txBody>
-      </p:sp>
-      <p:sp>
-        <p:nvSpPr>
-          <p:cNvPr id="4" name="TextBox 3"/>
-          <p:cNvSpPr txBox="1"/>
-          <p:nvPr/>
-        </p:nvSpPr>
-        <p:spPr>
-          <a:xfrm>
-            <a:off x="548640" y="4206240"/>
-            <a:ext cx="11064240" cy="365760"/>
-          </a:xfrm>
-          <a:prstGeom prst="rect">
-            <a:avLst/>
-          </a:prstGeom>
-          <a:noFill/>
-        </p:spPr>
-        <p:txBody>
-          <a:bodyPr wrap="square" lIns="0" rIns="0" tIns="0" bIns="0" anchor="t">
-            <a:spAutoFit/>
-          </a:bodyPr>
-          <a:lstStyle/>
-          <a:p>
-            <a:pPr algn="ctr">
-              <a:spcAft>
-                <a:spcPts val="0"/>
-              </a:spcAft>
-            </a:pPr>
-            <a:r>
-              <a:rPr sz="1500" b="0" i="0">
-                <a:solidFill>
-                  <a:srgbClr val="9FB3D1"/>
-                </a:solidFill>
-                <a:latin typeface="Calibri"/>
-              </a:rPr>
-              <a:t>github.com/rohanpandey436/realtime-nids</a:t>
-            </a:r>
-          </a:p>
-        </p:txBody>
-      </p:sp>
-      <p:sp>
-        <p:nvSpPr>
-          <p:cNvPr id="5" name="TextBox 4"/>
-          <p:cNvSpPr txBox="1"/>
-          <p:nvPr/>
-        </p:nvSpPr>
-        <p:spPr>
-          <a:xfrm>
-            <a:off x="548640" y="5303520"/>
-            <a:ext cx="11064240" cy="365760"/>
-          </a:xfrm>
-          <a:prstGeom prst="rect">
-            <a:avLst/>
-          </a:prstGeom>
-          <a:noFill/>
-        </p:spPr>
-        <p:txBody>
-          <a:bodyPr wrap="square" lIns="0" rIns="0" tIns="0" bIns="0" anchor="t">
-            <a:spAutoFit/>
-          </a:bodyPr>
-          <a:lstStyle/>
-          <a:p>
-            <a:pPr algn="ctr">
-              <a:spcAft>
-                <a:spcPts val="0"/>
-              </a:spcAft>
-            </a:pPr>
-            <a:r>
-              <a:rPr sz="1400" b="0" i="0">
-                <a:solidFill>
-                  <a:srgbClr val="B8C4D9"/>
-                </a:solidFill>
-                <a:latin typeface="Calibri"/>
-              </a:rPr>
-              <a:t>Rohan Pandey  |  Roll No. 2501720100117  |  Guide: Mr. Vikas</a:t>
+              <a:t>10</a:t>
             </a:r>
           </a:p>
         </p:txBody>
@@ -8680,700 +7688,91 @@
                 </a:solidFill>
                 <a:latin typeface="Calibri"/>
               </a:rPr>
-              <a:t>Existing Systems and the Gap</a:t>
-            </a:r>
-          </a:p>
-        </p:txBody>
-      </p:sp>
-      <p:graphicFrame>
-        <p:nvGraphicFramePr>
-          <p:cNvPr id="3" name="Table 2"/>
-          <p:cNvGraphicFramePr>
-            <a:graphicFrameLocks noGrp="1"/>
-          </p:cNvGraphicFramePr>
-          <p:nvPr/>
-        </p:nvGraphicFramePr>
-        <p:xfrm>
-          <a:off x="548640" y="1463040"/>
-          <a:ext cx="11064240" cy="2743200"/>
-        </p:xfrm>
-        <a:graphic>
-          <a:graphicData uri="http://schemas.openxmlformats.org/drawingml/2006/table">
-            <a:tbl>
-              <a:tblPr firstRow="1" bandRow="1">
-                <a:tableStyleId>{5C22544A-7EE6-4342-B048-85BDC9FD1C3A}</a:tableStyleId>
-              </a:tblPr>
-              <a:tblGrid>
-                <a:gridCol w="2468880"/>
-                <a:gridCol w="3840480"/>
-                <a:gridCol w="4754880"/>
-              </a:tblGrid>
-              <a:tr h="548640">
-                <a:tc>
-                  <a:txBody>
-                    <a:bodyPr/>
-                    <a:lstStyle/>
-                    <a:p>
-                      <a:r>
-                        <a:rPr sz="1500" b="1" i="0">
-                          <a:solidFill>
-                            <a:srgbClr val="FFFFFF"/>
-                          </a:solidFill>
-                          <a:latin typeface="Calibri"/>
-                        </a:rPr>
-                        <a:t>Existing tool</a:t>
-                      </a:r>
-                    </a:p>
-                  </a:txBody>
-                  <a:tcPr marL="137160" marR="137160" anchor="ctr">
-                    <a:solidFill>
-                      <a:srgbClr val="14213D"/>
-                    </a:solidFill>
-                  </a:tcPr>
-                </a:tc>
-                <a:tc>
-                  <a:txBody>
-                    <a:bodyPr/>
-                    <a:lstStyle/>
-                    <a:p>
-                      <a:r>
-                        <a:rPr sz="1500" b="1" i="0">
-                          <a:solidFill>
-                            <a:srgbClr val="FFFFFF"/>
-                          </a:solidFill>
-                          <a:latin typeface="Calibri"/>
-                        </a:rPr>
-                        <a:t>What it does well</a:t>
-                      </a:r>
-                    </a:p>
-                  </a:txBody>
-                  <a:tcPr marL="137160" marR="137160" anchor="ctr">
-                    <a:solidFill>
-                      <a:srgbClr val="14213D"/>
-                    </a:solidFill>
-                  </a:tcPr>
-                </a:tc>
-                <a:tc>
-                  <a:txBody>
-                    <a:bodyPr/>
-                    <a:lstStyle/>
-                    <a:p>
-                      <a:r>
-                        <a:rPr sz="1500" b="1" i="0">
-                          <a:solidFill>
-                            <a:srgbClr val="FFFFFF"/>
-                          </a:solidFill>
-                          <a:latin typeface="Calibri"/>
-                        </a:rPr>
-                        <a:t>Gap for small networks</a:t>
-                      </a:r>
-                    </a:p>
-                  </a:txBody>
-                  <a:tcPr marL="137160" marR="137160" anchor="ctr">
-                    <a:solidFill>
-                      <a:srgbClr val="14213D"/>
-                    </a:solidFill>
-                  </a:tcPr>
-                </a:tc>
-              </a:tr>
-              <a:tr h="548640">
-                <a:tc>
-                  <a:txBody>
-                    <a:bodyPr/>
-                    <a:lstStyle/>
-                    <a:p>
-                      <a:r>
-                        <a:rPr sz="1500" b="1" i="0">
-                          <a:solidFill>
-                            <a:srgbClr val="14213D"/>
-                          </a:solidFill>
-                          <a:latin typeface="Calibri"/>
-                        </a:rPr>
-                        <a:t>Wireshark</a:t>
-                      </a:r>
-                    </a:p>
-                  </a:txBody>
-                  <a:tcPr marL="137160" marR="137160" anchor="ctr">
-                    <a:solidFill>
-                      <a:srgbClr val="FFFFFF"/>
-                    </a:solidFill>
-                  </a:tcPr>
-                </a:tc>
-                <a:tc>
-                  <a:txBody>
-                    <a:bodyPr/>
-                    <a:lstStyle/>
-                    <a:p>
-                      <a:r>
-                        <a:rPr sz="1500" b="0" i="0">
-                          <a:solidFill>
-                            <a:srgbClr val="1F2937"/>
-                          </a:solidFill>
-                          <a:latin typeface="Calibri"/>
-                        </a:rPr>
-                        <a:t>Captures and decodes every packet</a:t>
-                      </a:r>
-                    </a:p>
-                  </a:txBody>
-                  <a:tcPr marL="137160" marR="137160" anchor="ctr">
-                    <a:solidFill>
-                      <a:srgbClr val="FFFFFF"/>
-                    </a:solidFill>
-                  </a:tcPr>
-                </a:tc>
-                <a:tc>
-                  <a:txBody>
-                    <a:bodyPr/>
-                    <a:lstStyle/>
-                    <a:p>
-                      <a:r>
-                        <a:rPr sz="1500" b="0" i="0">
-                          <a:solidFill>
-                            <a:srgbClr val="1F2937"/>
-                          </a:solidFill>
-                          <a:latin typeface="Calibri"/>
-                        </a:rPr>
-                        <a:t>Manual study, no automatic alerts</a:t>
-                      </a:r>
-                    </a:p>
-                  </a:txBody>
-                  <a:tcPr marL="137160" marR="137160" anchor="ctr">
-                    <a:solidFill>
-                      <a:srgbClr val="FFFFFF"/>
-                    </a:solidFill>
-                  </a:tcPr>
-                </a:tc>
-              </a:tr>
-              <a:tr h="548640">
-                <a:tc>
-                  <a:txBody>
-                    <a:bodyPr/>
-                    <a:lstStyle/>
-                    <a:p>
-                      <a:r>
-                        <a:rPr sz="1500" b="1" i="0">
-                          <a:solidFill>
-                            <a:srgbClr val="14213D"/>
-                          </a:solidFill>
-                          <a:latin typeface="Calibri"/>
-                        </a:rPr>
-                        <a:t>Snort, Suricata</a:t>
-                      </a:r>
-                    </a:p>
-                  </a:txBody>
-                  <a:tcPr marL="137160" marR="137160" anchor="ctr">
-                    <a:solidFill>
-                      <a:srgbClr val="F4F6F9"/>
-                    </a:solidFill>
-                  </a:tcPr>
-                </a:tc>
-                <a:tc>
-                  <a:txBody>
-                    <a:bodyPr/>
-                    <a:lstStyle/>
-                    <a:p>
-                      <a:r>
-                        <a:rPr sz="1500" b="0" i="0">
-                          <a:solidFill>
-                            <a:srgbClr val="1F2937"/>
-                          </a:solidFill>
-                          <a:latin typeface="Calibri"/>
-                        </a:rPr>
-                        <a:t>Professional rule-based detection</a:t>
-                      </a:r>
-                    </a:p>
-                  </a:txBody>
-                  <a:tcPr marL="137160" marR="137160" anchor="ctr">
-                    <a:solidFill>
-                      <a:srgbClr val="F4F6F9"/>
-                    </a:solidFill>
-                  </a:tcPr>
-                </a:tc>
-                <a:tc>
-                  <a:txBody>
-                    <a:bodyPr/>
-                    <a:lstStyle/>
-                    <a:p>
-                      <a:r>
-                        <a:rPr sz="1500" b="0" i="0">
-                          <a:solidFill>
-                            <a:srgbClr val="1F2937"/>
-                          </a:solidFill>
-                          <a:latin typeface="Calibri"/>
-                        </a:rPr>
-                        <a:t>Complex rules, expert setup, log files</a:t>
-                      </a:r>
-                    </a:p>
-                  </a:txBody>
-                  <a:tcPr marL="137160" marR="137160" anchor="ctr">
-                    <a:solidFill>
-                      <a:srgbClr val="F4F6F9"/>
-                    </a:solidFill>
-                  </a:tcPr>
-                </a:tc>
-              </a:tr>
-              <a:tr h="548640">
-                <a:tc>
-                  <a:txBody>
-                    <a:bodyPr/>
-                    <a:lstStyle/>
-                    <a:p>
-                      <a:r>
-                        <a:rPr sz="1500" b="1" i="0">
-                          <a:solidFill>
-                            <a:srgbClr val="14213D"/>
-                          </a:solidFill>
-                          <a:latin typeface="Calibri"/>
-                        </a:rPr>
-                        <a:t>Zeek</a:t>
-                      </a:r>
-                    </a:p>
-                  </a:txBody>
-                  <a:tcPr marL="137160" marR="137160" anchor="ctr">
-                    <a:solidFill>
-                      <a:srgbClr val="FFFFFF"/>
-                    </a:solidFill>
-                  </a:tcPr>
-                </a:tc>
-                <a:tc>
-                  <a:txBody>
-                    <a:bodyPr/>
-                    <a:lstStyle/>
-                    <a:p>
-                      <a:r>
-                        <a:rPr sz="1500" b="0" i="0">
-                          <a:solidFill>
-                            <a:srgbClr val="1F2937"/>
-                          </a:solidFill>
-                          <a:latin typeface="Calibri"/>
-                        </a:rPr>
-                        <a:t>Deep analysis with scripts</a:t>
-                      </a:r>
-                    </a:p>
-                  </a:txBody>
-                  <a:tcPr marL="137160" marR="137160" anchor="ctr">
-                    <a:solidFill>
-                      <a:srgbClr val="FFFFFF"/>
-                    </a:solidFill>
-                  </a:tcPr>
-                </a:tc>
-                <a:tc>
-                  <a:txBody>
-                    <a:bodyPr/>
-                    <a:lstStyle/>
-                    <a:p>
-                      <a:r>
-                        <a:rPr sz="1500" b="0" i="0">
-                          <a:solidFill>
-                            <a:srgbClr val="1F2937"/>
-                          </a:solidFill>
-                          <a:latin typeface="Calibri"/>
-                        </a:rPr>
-                        <a:t>Steep learning curve, no live dashboard</a:t>
-                      </a:r>
-                    </a:p>
-                  </a:txBody>
-                  <a:tcPr marL="137160" marR="137160" anchor="ctr">
-                    <a:solidFill>
-                      <a:srgbClr val="FFFFFF"/>
-                    </a:solidFill>
-                  </a:tcPr>
-                </a:tc>
-              </a:tr>
-              <a:tr h="548640">
-                <a:tc>
-                  <a:txBody>
-                    <a:bodyPr/>
-                    <a:lstStyle/>
-                    <a:p>
-                      <a:r>
-                        <a:rPr sz="1500" b="1" i="0">
-                          <a:solidFill>
-                            <a:srgbClr val="14213D"/>
-                          </a:solidFill>
-                          <a:latin typeface="Calibri"/>
-                        </a:rPr>
-                        <a:t>ML-based IDS</a:t>
-                      </a:r>
-                    </a:p>
-                  </a:txBody>
-                  <a:tcPr marL="137160" marR="137160" anchor="ctr">
-                    <a:solidFill>
-                      <a:srgbClr val="F4F6F9"/>
-                    </a:solidFill>
-                  </a:tcPr>
-                </a:tc>
-                <a:tc>
-                  <a:txBody>
-                    <a:bodyPr/>
-                    <a:lstStyle/>
-                    <a:p>
-                      <a:r>
-                        <a:rPr sz="1500" b="0" i="0">
-                          <a:solidFill>
-                            <a:srgbClr val="1F2937"/>
-                          </a:solidFill>
-                          <a:latin typeface="Calibri"/>
-                        </a:rPr>
-                        <a:t>High accuracy on test datasets</a:t>
-                      </a:r>
-                    </a:p>
-                  </a:txBody>
-                  <a:tcPr marL="137160" marR="137160" anchor="ctr">
-                    <a:solidFill>
-                      <a:srgbClr val="F4F6F9"/>
-                    </a:solidFill>
-                  </a:tcPr>
-                </a:tc>
-                <a:tc>
-                  <a:txBody>
-                    <a:bodyPr/>
-                    <a:lstStyle/>
-                    <a:p>
-                      <a:r>
-                        <a:rPr sz="1500" b="0" i="0">
-                          <a:solidFill>
-                            <a:srgbClr val="1F2937"/>
-                          </a:solidFill>
-                          <a:latin typeface="Calibri"/>
-                        </a:rPr>
-                        <a:t>Black box, needs training data</a:t>
-                      </a:r>
-                    </a:p>
-                  </a:txBody>
-                  <a:tcPr marL="137160" marR="137160" anchor="ctr">
-                    <a:solidFill>
-                      <a:srgbClr val="F4F6F9"/>
-                    </a:solidFill>
-                  </a:tcPr>
-                </a:tc>
-              </a:tr>
-            </a:tbl>
-          </a:graphicData>
-        </a:graphic>
-      </p:graphicFrame>
-      <p:sp>
-        <p:nvSpPr>
-          <p:cNvPr id="4" name="Rounded Rectangle 3"/>
-          <p:cNvSpPr/>
-          <p:nvPr/>
-        </p:nvSpPr>
-        <p:spPr>
-          <a:xfrm>
-            <a:off x="548640" y="4526280"/>
-            <a:ext cx="11064240" cy="1600200"/>
-          </a:xfrm>
-          <a:prstGeom prst="roundRect">
-            <a:avLst>
-              <a:gd name="adj" fmla="val 8000"/>
-            </a:avLst>
-          </a:prstGeom>
-          <a:solidFill>
-            <a:srgbClr val="14213D"/>
-          </a:solidFill>
-          <a:ln>
-            <a:noFill/>
+              <a:t>System Architecture</a:t>
+            </a:r>
+          </a:p>
+        </p:txBody>
+      </p:sp>
+      <p:pic>
+        <p:nvPicPr>
+          <p:cNvPr id="3" name="Picture 2" descr="architecture.png"/>
+          <p:cNvPicPr>
+            <a:picLocks noChangeAspect="1"/>
+          </p:cNvPicPr>
+          <p:nvPr/>
+        </p:nvPicPr>
+        <p:blipFill>
+          <a:blip r:embed="rId2"/>
+          <a:stretch>
+            <a:fillRect/>
+          </a:stretch>
+        </p:blipFill>
+        <p:spPr>
+          <a:xfrm>
+            <a:off x="1097280" y="1554480"/>
+            <a:ext cx="9966960" cy="5801538"/>
+          </a:xfrm>
+          <a:prstGeom prst="rect">
+            <a:avLst/>
+          </a:prstGeom>
+          <a:ln w="9525">
+            <a:solidFill>
+              <a:srgbClr val="D5DCE6"/>
+            </a:solidFill>
           </a:ln>
-          <a:effectLst/>
-        </p:spPr>
-        <p:style>
-          <a:lnRef idx="1">
-            <a:schemeClr val="accent1"/>
-          </a:lnRef>
-          <a:fillRef idx="3">
-            <a:schemeClr val="accent1"/>
-          </a:fillRef>
-          <a:effectRef idx="2">
-            <a:schemeClr val="accent1"/>
-          </a:effectRef>
-          <a:fontRef idx="minor">
-            <a:schemeClr val="lt1"/>
-          </a:fontRef>
-        </p:style>
-        <p:txBody>
-          <a:bodyPr rtlCol="0" anchor="ctr"/>
-          <a:lstStyle/>
-          <a:p>
-            <a:pPr algn="ctr"/>
+        </p:spPr>
+      </p:pic>
+      <p:sp>
+        <p:nvSpPr>
+          <p:cNvPr id="4" name="TextBox 3"/>
+          <p:cNvSpPr txBox="1"/>
+          <p:nvPr/>
+        </p:nvSpPr>
+        <p:spPr>
+          <a:xfrm>
+            <a:off x="548640" y="9093378"/>
+            <a:ext cx="11064240" cy="548640"/>
+          </a:xfrm>
+          <a:prstGeom prst="rect">
+            <a:avLst/>
+          </a:prstGeom>
+          <a:noFill/>
+        </p:spPr>
+        <p:txBody>
+          <a:bodyPr wrap="square" lIns="0" rIns="0" tIns="0" bIns="0" anchor="t">
+            <a:spAutoFit/>
+          </a:bodyPr>
+          <a:lstStyle/>
+          <a:p>
+            <a:pPr algn="ctr">
+              <a:spcAft>
+                <a:spcPts val="0"/>
+              </a:spcAft>
+            </a:pPr>
+            <a:r>
+              <a:rPr sz="1600" b="0" i="0">
+                <a:solidFill>
+                  <a:srgbClr val="1F2937"/>
+                </a:solidFill>
+                <a:latin typeface="Calibri"/>
+              </a:rPr>
+              <a:t>Packets flow left to right; alerts flow from the detector to the browser. </a:t>
+            </a:r>
+            <a:r>
+              <a:rPr sz="1600" b="1" i="0">
+                <a:solidFill>
+                  <a:srgbClr val="14213D"/>
+                </a:solidFill>
+                <a:latin typeface="Calibri"/>
+              </a:rPr>
+              <a:t>Python captures, Node.js serves, the browser displays.</a:t>
+            </a:r>
           </a:p>
         </p:txBody>
       </p:sp>
       <p:sp>
         <p:nvSpPr>
           <p:cNvPr id="5" name="TextBox 4"/>
-          <p:cNvSpPr txBox="1"/>
-          <p:nvPr/>
-        </p:nvSpPr>
-        <p:spPr>
-          <a:xfrm>
-            <a:off x="868680" y="4681728"/>
-            <a:ext cx="5486400" cy="320040"/>
-          </a:xfrm>
-          <a:prstGeom prst="rect">
-            <a:avLst/>
-          </a:prstGeom>
-          <a:noFill/>
-        </p:spPr>
-        <p:txBody>
-          <a:bodyPr wrap="square" lIns="0" rIns="0" tIns="0" bIns="0" anchor="t">
-            <a:spAutoFit/>
-          </a:bodyPr>
-          <a:lstStyle/>
-          <a:p>
-            <a:pPr algn="l">
-              <a:spcAft>
-                <a:spcPts val="0"/>
-              </a:spcAft>
-            </a:pPr>
-            <a:r>
-              <a:rPr sz="1200" b="1" i="0">
-                <a:solidFill>
-                  <a:srgbClr val="9FB3D1"/>
-                </a:solidFill>
-                <a:latin typeface="Calibri"/>
-              </a:rPr>
-              <a:t>MY SYSTEM FILLS THE GAP</a:t>
-            </a:r>
-          </a:p>
-        </p:txBody>
-      </p:sp>
-      <p:sp>
-        <p:nvSpPr>
-          <p:cNvPr id="6" name="TextBox 5"/>
-          <p:cNvSpPr txBox="1"/>
-          <p:nvPr/>
-        </p:nvSpPr>
-        <p:spPr>
-          <a:xfrm>
-            <a:off x="868680" y="5029200"/>
-            <a:ext cx="3383280" cy="365760"/>
-          </a:xfrm>
-          <a:prstGeom prst="rect">
-            <a:avLst/>
-          </a:prstGeom>
-          <a:noFill/>
-        </p:spPr>
-        <p:txBody>
-          <a:bodyPr wrap="square" lIns="0" rIns="0" tIns="0" bIns="0" anchor="t">
-            <a:spAutoFit/>
-          </a:bodyPr>
-          <a:lstStyle/>
-          <a:p>
-            <a:pPr algn="l">
-              <a:spcAft>
-                <a:spcPts val="0"/>
-              </a:spcAft>
-            </a:pPr>
-            <a:r>
-              <a:rPr sz="1900" b="1" i="0">
-                <a:solidFill>
-                  <a:srgbClr val="FFFFFF"/>
-                </a:solidFill>
-                <a:latin typeface="Calibri"/>
-              </a:rPr>
-              <a:t>Lightweight</a:t>
-            </a:r>
-          </a:p>
-        </p:txBody>
-      </p:sp>
-      <p:sp>
-        <p:nvSpPr>
-          <p:cNvPr id="7" name="TextBox 6"/>
-          <p:cNvSpPr txBox="1"/>
-          <p:nvPr/>
-        </p:nvSpPr>
-        <p:spPr>
-          <a:xfrm>
-            <a:off x="868680" y="5413248"/>
-            <a:ext cx="3383280" cy="548640"/>
-          </a:xfrm>
-          <a:prstGeom prst="rect">
-            <a:avLst/>
-          </a:prstGeom>
-          <a:noFill/>
-        </p:spPr>
-        <p:txBody>
-          <a:bodyPr wrap="square" lIns="0" rIns="0" tIns="0" bIns="0" anchor="t">
-            <a:spAutoFit/>
-          </a:bodyPr>
-          <a:lstStyle/>
-          <a:p>
-            <a:pPr algn="l">
-              <a:spcAft>
-                <a:spcPts val="0"/>
-              </a:spcAft>
-            </a:pPr>
-            <a:r>
-              <a:rPr sz="1400" b="0" i="0">
-                <a:solidFill>
-                  <a:srgbClr val="C9D6EA"/>
-                </a:solidFill>
-                <a:latin typeface="Calibri"/>
-              </a:rPr>
-              <a:t>about 200 lines, runs on a laptop</a:t>
-            </a:r>
-          </a:p>
-        </p:txBody>
-      </p:sp>
-      <p:sp>
-        <p:nvSpPr>
-          <p:cNvPr id="8" name="TextBox 7"/>
-          <p:cNvSpPr txBox="1"/>
-          <p:nvPr/>
-        </p:nvSpPr>
-        <p:spPr>
-          <a:xfrm>
-            <a:off x="4480560" y="5029200"/>
-            <a:ext cx="3383280" cy="365760"/>
-          </a:xfrm>
-          <a:prstGeom prst="rect">
-            <a:avLst/>
-          </a:prstGeom>
-          <a:noFill/>
-        </p:spPr>
-        <p:txBody>
-          <a:bodyPr wrap="square" lIns="0" rIns="0" tIns="0" bIns="0" anchor="t">
-            <a:spAutoFit/>
-          </a:bodyPr>
-          <a:lstStyle/>
-          <a:p>
-            <a:pPr algn="l">
-              <a:spcAft>
-                <a:spcPts val="0"/>
-              </a:spcAft>
-            </a:pPr>
-            <a:r>
-              <a:rPr sz="1900" b="1" i="0">
-                <a:solidFill>
-                  <a:srgbClr val="FFFFFF"/>
-                </a:solidFill>
-                <a:latin typeface="Calibri"/>
-              </a:rPr>
-              <a:t>Explainable</a:t>
-            </a:r>
-          </a:p>
-        </p:txBody>
-      </p:sp>
-      <p:sp>
-        <p:nvSpPr>
-          <p:cNvPr id="9" name="TextBox 8"/>
-          <p:cNvSpPr txBox="1"/>
-          <p:nvPr/>
-        </p:nvSpPr>
-        <p:spPr>
-          <a:xfrm>
-            <a:off x="4480560" y="5413248"/>
-            <a:ext cx="3383280" cy="548640"/>
-          </a:xfrm>
-          <a:prstGeom prst="rect">
-            <a:avLst/>
-          </a:prstGeom>
-          <a:noFill/>
-        </p:spPr>
-        <p:txBody>
-          <a:bodyPr wrap="square" lIns="0" rIns="0" tIns="0" bIns="0" anchor="t">
-            <a:spAutoFit/>
-          </a:bodyPr>
-          <a:lstStyle/>
-          <a:p>
-            <a:pPr algn="l">
-              <a:spcAft>
-                <a:spcPts val="0"/>
-              </a:spcAft>
-            </a:pPr>
-            <a:r>
-              <a:rPr sz="1400" b="0" i="0">
-                <a:solidFill>
-                  <a:srgbClr val="C9D6EA"/>
-                </a:solidFill>
-                <a:latin typeface="Calibri"/>
-              </a:rPr>
-              <a:t>every alert shows its threshold</a:t>
-            </a:r>
-          </a:p>
-        </p:txBody>
-      </p:sp>
-      <p:sp>
-        <p:nvSpPr>
-          <p:cNvPr id="10" name="TextBox 9"/>
-          <p:cNvSpPr txBox="1"/>
-          <p:nvPr/>
-        </p:nvSpPr>
-        <p:spPr>
-          <a:xfrm>
-            <a:off x="8092440" y="5029200"/>
-            <a:ext cx="3383280" cy="365760"/>
-          </a:xfrm>
-          <a:prstGeom prst="rect">
-            <a:avLst/>
-          </a:prstGeom>
-          <a:noFill/>
-        </p:spPr>
-        <p:txBody>
-          <a:bodyPr wrap="square" lIns="0" rIns="0" tIns="0" bIns="0" anchor="t">
-            <a:spAutoFit/>
-          </a:bodyPr>
-          <a:lstStyle/>
-          <a:p>
-            <a:pPr algn="l">
-              <a:spcAft>
-                <a:spcPts val="0"/>
-              </a:spcAft>
-            </a:pPr>
-            <a:r>
-              <a:rPr sz="1900" b="1" i="0">
-                <a:solidFill>
-                  <a:srgbClr val="FFFFFF"/>
-                </a:solidFill>
-                <a:latin typeface="Calibri"/>
-              </a:rPr>
-              <a:t>Live</a:t>
-            </a:r>
-          </a:p>
-        </p:txBody>
-      </p:sp>
-      <p:sp>
-        <p:nvSpPr>
-          <p:cNvPr id="11" name="TextBox 10"/>
-          <p:cNvSpPr txBox="1"/>
-          <p:nvPr/>
-        </p:nvSpPr>
-        <p:spPr>
-          <a:xfrm>
-            <a:off x="8092440" y="5413248"/>
-            <a:ext cx="3383280" cy="548640"/>
-          </a:xfrm>
-          <a:prstGeom prst="rect">
-            <a:avLst/>
-          </a:prstGeom>
-          <a:noFill/>
-        </p:spPr>
-        <p:txBody>
-          <a:bodyPr wrap="square" lIns="0" rIns="0" tIns="0" bIns="0" anchor="t">
-            <a:spAutoFit/>
-          </a:bodyPr>
-          <a:lstStyle/>
-          <a:p>
-            <a:pPr algn="l">
-              <a:spcAft>
-                <a:spcPts val="0"/>
-              </a:spcAft>
-            </a:pPr>
-            <a:r>
-              <a:rPr sz="1400" b="0" i="0">
-                <a:solidFill>
-                  <a:srgbClr val="C9D6EA"/>
-                </a:solidFill>
-                <a:latin typeface="Calibri"/>
-              </a:rPr>
-              <a:t>alert on the dashboard in under 1 second</a:t>
-            </a:r>
-          </a:p>
-        </p:txBody>
-      </p:sp>
-      <p:sp>
-        <p:nvSpPr>
-          <p:cNvPr id="12" name="TextBox 11"/>
           <p:cNvSpPr txBox="1"/>
           <p:nvPr/>
         </p:nvSpPr>
@@ -9412,7 +7811,7 @@
       </p:sp>
       <p:sp>
         <p:nvSpPr>
-          <p:cNvPr id="13" name="TextBox 12"/>
+          <p:cNvPr id="6" name="TextBox 5"/>
           <p:cNvSpPr txBox="1"/>
           <p:nvPr/>
         </p:nvSpPr>
@@ -9509,40 +7908,57 @@
                 </a:solidFill>
                 <a:latin typeface="Calibri"/>
               </a:rPr>
-              <a:t>System Architecture</a:t>
-            </a:r>
-          </a:p>
-        </p:txBody>
-      </p:sp>
-      <p:pic>
-        <p:nvPicPr>
-          <p:cNvPr id="3" name="Picture 2" descr="architecture.png"/>
-          <p:cNvPicPr>
-            <a:picLocks noChangeAspect="1"/>
-          </p:cNvPicPr>
-          <p:nvPr/>
-        </p:nvPicPr>
-        <p:blipFill>
-          <a:blip r:embed="rId2"/>
-          <a:stretch>
-            <a:fillRect/>
-          </a:stretch>
-        </p:blipFill>
-        <p:spPr>
-          <a:xfrm>
-            <a:off x="1097280" y="1554480"/>
-            <a:ext cx="9966960" cy="5801538"/>
-          </a:xfrm>
-          <a:prstGeom prst="rect">
-            <a:avLst/>
-          </a:prstGeom>
-          <a:ln w="9525">
-            <a:solidFill>
-              <a:srgbClr val="D5DCE6"/>
-            </a:solidFill>
+              <a:t>Technology Stack</a:t>
+            </a:r>
+          </a:p>
+        </p:txBody>
+      </p:sp>
+      <p:sp>
+        <p:nvSpPr>
+          <p:cNvPr id="3" name="Rounded Rectangle 2"/>
+          <p:cNvSpPr/>
+          <p:nvPr/>
+        </p:nvSpPr>
+        <p:spPr>
+          <a:xfrm>
+            <a:off x="548640" y="1508760"/>
+            <a:ext cx="3474720" cy="1828800"/>
+          </a:xfrm>
+          <a:prstGeom prst="roundRect">
+            <a:avLst>
+              <a:gd name="adj" fmla="val 8000"/>
+            </a:avLst>
+          </a:prstGeom>
+          <a:solidFill>
+            <a:srgbClr val="EEF2F7"/>
+          </a:solidFill>
+          <a:ln>
+            <a:noFill/>
           </a:ln>
-        </p:spPr>
-      </p:pic>
+          <a:effectLst/>
+        </p:spPr>
+        <p:style>
+          <a:lnRef idx="1">
+            <a:schemeClr val="accent1"/>
+          </a:lnRef>
+          <a:fillRef idx="3">
+            <a:schemeClr val="accent1"/>
+          </a:fillRef>
+          <a:effectRef idx="2">
+            <a:schemeClr val="accent1"/>
+          </a:effectRef>
+          <a:fontRef idx="minor">
+            <a:schemeClr val="lt1"/>
+          </a:fontRef>
+        </p:style>
+        <p:txBody>
+          <a:bodyPr rtlCol="0" anchor="ctr"/>
+          <a:lstStyle/>
+          <a:p>
+            <a:pPr algn="ctr"/>
+          </a:p>
+        </p:txBody>
+      </p:sp>
       <p:sp>
         <p:nvSpPr>
           <p:cNvPr id="4" name="TextBox 3"/>
@@ -9551,49 +7967,1035 @@
         </p:nvSpPr>
         <p:spPr>
           <a:xfrm>
-            <a:off x="548640" y="9093378"/>
-            <a:ext cx="11064240" cy="548640"/>
-          </a:xfrm>
-          <a:prstGeom prst="rect">
-            <a:avLst/>
-          </a:prstGeom>
-          <a:noFill/>
-        </p:spPr>
-        <p:txBody>
-          <a:bodyPr wrap="square" lIns="0" rIns="0" tIns="0" bIns="0" anchor="t">
-            <a:spAutoFit/>
-          </a:bodyPr>
-          <a:lstStyle/>
-          <a:p>
-            <a:pPr algn="ctr">
+            <a:off x="822959" y="1764792"/>
+            <a:ext cx="2926080" cy="274320"/>
+          </a:xfrm>
+          <a:prstGeom prst="rect">
+            <a:avLst/>
+          </a:prstGeom>
+          <a:noFill/>
+        </p:spPr>
+        <p:txBody>
+          <a:bodyPr wrap="square" lIns="0" rIns="0" tIns="0" bIns="0" anchor="t">
+            <a:spAutoFit/>
+          </a:bodyPr>
+          <a:lstStyle/>
+          <a:p>
+            <a:pPr algn="l">
               <a:spcAft>
                 <a:spcPts val="0"/>
               </a:spcAft>
             </a:pPr>
             <a:r>
-              <a:rPr sz="1600" b="0" i="0">
+              <a:rPr sz="1200" b="1" i="0">
+                <a:solidFill>
+                  <a:srgbClr val="5B6472"/>
+                </a:solidFill>
+                <a:latin typeface="Calibri"/>
+              </a:rPr>
+              <a:t>CAPTURE</a:t>
+            </a:r>
+          </a:p>
+        </p:txBody>
+      </p:sp>
+      <p:sp>
+        <p:nvSpPr>
+          <p:cNvPr id="5" name="TextBox 4"/>
+          <p:cNvSpPr txBox="1"/>
+          <p:nvPr/>
+        </p:nvSpPr>
+        <p:spPr>
+          <a:xfrm>
+            <a:off x="822959" y="2075688"/>
+            <a:ext cx="2926080" cy="685800"/>
+          </a:xfrm>
+          <a:prstGeom prst="rect">
+            <a:avLst/>
+          </a:prstGeom>
+          <a:noFill/>
+        </p:spPr>
+        <p:txBody>
+          <a:bodyPr wrap="square" lIns="0" rIns="0" tIns="0" bIns="0" anchor="t">
+            <a:spAutoFit/>
+          </a:bodyPr>
+          <a:lstStyle/>
+          <a:p>
+            <a:pPr algn="l">
+              <a:lnSpc>
+                <a:spcPct val="95000"/>
+              </a:lnSpc>
+              <a:spcAft>
+                <a:spcPts val="0"/>
+              </a:spcAft>
+            </a:pPr>
+            <a:r>
+              <a:rPr sz="1900" b="1" i="0">
+                <a:solidFill>
+                  <a:srgbClr val="14213D"/>
+                </a:solidFill>
+                <a:latin typeface="Calibri"/>
+              </a:rPr>
+              <a:t>Npcap 1.89</a:t>
+            </a:r>
+          </a:p>
+        </p:txBody>
+      </p:sp>
+      <p:sp>
+        <p:nvSpPr>
+          <p:cNvPr id="6" name="TextBox 5"/>
+          <p:cNvSpPr txBox="1"/>
+          <p:nvPr/>
+        </p:nvSpPr>
+        <p:spPr>
+          <a:xfrm>
+            <a:off x="822959" y="2807208"/>
+            <a:ext cx="2926080" cy="411480"/>
+          </a:xfrm>
+          <a:prstGeom prst="rect">
+            <a:avLst/>
+          </a:prstGeom>
+          <a:noFill/>
+        </p:spPr>
+        <p:txBody>
+          <a:bodyPr wrap="square" lIns="0" rIns="0" tIns="0" bIns="0" anchor="t">
+            <a:spAutoFit/>
+          </a:bodyPr>
+          <a:lstStyle/>
+          <a:p>
+            <a:pPr algn="l">
+              <a:spcAft>
+                <a:spcPts val="0"/>
+              </a:spcAft>
+            </a:pPr>
+            <a:r>
+              <a:rPr sz="1400" b="0" i="0">
                 <a:solidFill>
                   <a:srgbClr val="1F2937"/>
                 </a:solidFill>
                 <a:latin typeface="Calibri"/>
               </a:rPr>
-              <a:t>Packets flow left to right; alerts flow from the detector to the browser. </a:t>
-            </a:r>
-            <a:r>
-              <a:rPr sz="1600" b="1" i="0">
+              <a:t>raw packets on Windows</a:t>
+            </a:r>
+          </a:p>
+        </p:txBody>
+      </p:sp>
+      <p:sp>
+        <p:nvSpPr>
+          <p:cNvPr id="7" name="Rounded Rectangle 6"/>
+          <p:cNvSpPr/>
+          <p:nvPr/>
+        </p:nvSpPr>
+        <p:spPr>
+          <a:xfrm>
+            <a:off x="4343400" y="1508760"/>
+            <a:ext cx="3474720" cy="1828800"/>
+          </a:xfrm>
+          <a:prstGeom prst="roundRect">
+            <a:avLst>
+              <a:gd name="adj" fmla="val 8000"/>
+            </a:avLst>
+          </a:prstGeom>
+          <a:solidFill>
+            <a:srgbClr val="EEF2F7"/>
+          </a:solidFill>
+          <a:ln>
+            <a:noFill/>
+          </a:ln>
+          <a:effectLst/>
+        </p:spPr>
+        <p:style>
+          <a:lnRef idx="1">
+            <a:schemeClr val="accent1"/>
+          </a:lnRef>
+          <a:fillRef idx="3">
+            <a:schemeClr val="accent1"/>
+          </a:fillRef>
+          <a:effectRef idx="2">
+            <a:schemeClr val="accent1"/>
+          </a:effectRef>
+          <a:fontRef idx="minor">
+            <a:schemeClr val="lt1"/>
+          </a:fontRef>
+        </p:style>
+        <p:txBody>
+          <a:bodyPr rtlCol="0" anchor="ctr"/>
+          <a:lstStyle/>
+          <a:p>
+            <a:pPr algn="ctr"/>
+          </a:p>
+        </p:txBody>
+      </p:sp>
+      <p:sp>
+        <p:nvSpPr>
+          <p:cNvPr id="8" name="TextBox 7"/>
+          <p:cNvSpPr txBox="1"/>
+          <p:nvPr/>
+        </p:nvSpPr>
+        <p:spPr>
+          <a:xfrm>
+            <a:off x="4617720" y="1764792"/>
+            <a:ext cx="2926080" cy="274320"/>
+          </a:xfrm>
+          <a:prstGeom prst="rect">
+            <a:avLst/>
+          </a:prstGeom>
+          <a:noFill/>
+        </p:spPr>
+        <p:txBody>
+          <a:bodyPr wrap="square" lIns="0" rIns="0" tIns="0" bIns="0" anchor="t">
+            <a:spAutoFit/>
+          </a:bodyPr>
+          <a:lstStyle/>
+          <a:p>
+            <a:pPr algn="l">
+              <a:spcAft>
+                <a:spcPts val="0"/>
+              </a:spcAft>
+            </a:pPr>
+            <a:r>
+              <a:rPr sz="1200" b="1" i="0">
+                <a:solidFill>
+                  <a:srgbClr val="5B6472"/>
+                </a:solidFill>
+                <a:latin typeface="Calibri"/>
+              </a:rPr>
+              <a:t>SENSOR</a:t>
+            </a:r>
+          </a:p>
+        </p:txBody>
+      </p:sp>
+      <p:sp>
+        <p:nvSpPr>
+          <p:cNvPr id="9" name="TextBox 8"/>
+          <p:cNvSpPr txBox="1"/>
+          <p:nvPr/>
+        </p:nvSpPr>
+        <p:spPr>
+          <a:xfrm>
+            <a:off x="4617720" y="2075688"/>
+            <a:ext cx="2926080" cy="685800"/>
+          </a:xfrm>
+          <a:prstGeom prst="rect">
+            <a:avLst/>
+          </a:prstGeom>
+          <a:noFill/>
+        </p:spPr>
+        <p:txBody>
+          <a:bodyPr wrap="square" lIns="0" rIns="0" tIns="0" bIns="0" anchor="t">
+            <a:spAutoFit/>
+          </a:bodyPr>
+          <a:lstStyle/>
+          <a:p>
+            <a:pPr algn="l">
+              <a:lnSpc>
+                <a:spcPct val="95000"/>
+              </a:lnSpc>
+              <a:spcAft>
+                <a:spcPts val="0"/>
+              </a:spcAft>
+            </a:pPr>
+            <a:r>
+              <a:rPr sz="1900" b="1" i="0">
                 <a:solidFill>
                   <a:srgbClr val="14213D"/>
                 </a:solidFill>
                 <a:latin typeface="Calibri"/>
               </a:rPr>
-              <a:t>Python captures, Node.js serves, the browser displays.</a:t>
-            </a:r>
-          </a:p>
-        </p:txBody>
-      </p:sp>
-      <p:sp>
-        <p:nvSpPr>
-          <p:cNvPr id="5" name="TextBox 4"/>
+              <a:t>Python 3.13 + Scapy 2.8</a:t>
+            </a:r>
+          </a:p>
+        </p:txBody>
+      </p:sp>
+      <p:sp>
+        <p:nvSpPr>
+          <p:cNvPr id="10" name="TextBox 9"/>
+          <p:cNvSpPr txBox="1"/>
+          <p:nvPr/>
+        </p:nvSpPr>
+        <p:spPr>
+          <a:xfrm>
+            <a:off x="4617720" y="2807208"/>
+            <a:ext cx="2926080" cy="411480"/>
+          </a:xfrm>
+          <a:prstGeom prst="rect">
+            <a:avLst/>
+          </a:prstGeom>
+          <a:noFill/>
+        </p:spPr>
+        <p:txBody>
+          <a:bodyPr wrap="square" lIns="0" rIns="0" tIns="0" bIns="0" anchor="t">
+            <a:spAutoFit/>
+          </a:bodyPr>
+          <a:lstStyle/>
+          <a:p>
+            <a:pPr algn="l">
+              <a:spcAft>
+                <a:spcPts val="0"/>
+              </a:spcAft>
+            </a:pPr>
+            <a:r>
+              <a:rPr sz="1400" b="0" i="0">
+                <a:solidFill>
+                  <a:srgbClr val="1F2937"/>
+                </a:solidFill>
+                <a:latin typeface="Calibri"/>
+              </a:rPr>
+              <a:t>decodes IP, TCP, UDP, ARP</a:t>
+            </a:r>
+          </a:p>
+        </p:txBody>
+      </p:sp>
+      <p:sp>
+        <p:nvSpPr>
+          <p:cNvPr id="11" name="Rounded Rectangle 10"/>
+          <p:cNvSpPr/>
+          <p:nvPr/>
+        </p:nvSpPr>
+        <p:spPr>
+          <a:xfrm>
+            <a:off x="8138160" y="1508760"/>
+            <a:ext cx="3474720" cy="1828800"/>
+          </a:xfrm>
+          <a:prstGeom prst="roundRect">
+            <a:avLst>
+              <a:gd name="adj" fmla="val 8000"/>
+            </a:avLst>
+          </a:prstGeom>
+          <a:solidFill>
+            <a:srgbClr val="EEF2F7"/>
+          </a:solidFill>
+          <a:ln>
+            <a:noFill/>
+          </a:ln>
+          <a:effectLst/>
+        </p:spPr>
+        <p:style>
+          <a:lnRef idx="1">
+            <a:schemeClr val="accent1"/>
+          </a:lnRef>
+          <a:fillRef idx="3">
+            <a:schemeClr val="accent1"/>
+          </a:fillRef>
+          <a:effectRef idx="2">
+            <a:schemeClr val="accent1"/>
+          </a:effectRef>
+          <a:fontRef idx="minor">
+            <a:schemeClr val="lt1"/>
+          </a:fontRef>
+        </p:style>
+        <p:txBody>
+          <a:bodyPr rtlCol="0" anchor="ctr"/>
+          <a:lstStyle/>
+          <a:p>
+            <a:pPr algn="ctr"/>
+          </a:p>
+        </p:txBody>
+      </p:sp>
+      <p:sp>
+        <p:nvSpPr>
+          <p:cNvPr id="12" name="TextBox 11"/>
+          <p:cNvSpPr txBox="1"/>
+          <p:nvPr/>
+        </p:nvSpPr>
+        <p:spPr>
+          <a:xfrm>
+            <a:off x="8412480" y="1764792"/>
+            <a:ext cx="2926080" cy="274320"/>
+          </a:xfrm>
+          <a:prstGeom prst="rect">
+            <a:avLst/>
+          </a:prstGeom>
+          <a:noFill/>
+        </p:spPr>
+        <p:txBody>
+          <a:bodyPr wrap="square" lIns="0" rIns="0" tIns="0" bIns="0" anchor="t">
+            <a:spAutoFit/>
+          </a:bodyPr>
+          <a:lstStyle/>
+          <a:p>
+            <a:pPr algn="l">
+              <a:spcAft>
+                <a:spcPts val="0"/>
+              </a:spcAft>
+            </a:pPr>
+            <a:r>
+              <a:rPr sz="1200" b="1" i="0">
+                <a:solidFill>
+                  <a:srgbClr val="5B6472"/>
+                </a:solidFill>
+                <a:latin typeface="Calibri"/>
+              </a:rPr>
+              <a:t>RULES</a:t>
+            </a:r>
+          </a:p>
+        </p:txBody>
+      </p:sp>
+      <p:sp>
+        <p:nvSpPr>
+          <p:cNvPr id="13" name="TextBox 12"/>
+          <p:cNvSpPr txBox="1"/>
+          <p:nvPr/>
+        </p:nvSpPr>
+        <p:spPr>
+          <a:xfrm>
+            <a:off x="8412480" y="2075688"/>
+            <a:ext cx="2926080" cy="685800"/>
+          </a:xfrm>
+          <a:prstGeom prst="rect">
+            <a:avLst/>
+          </a:prstGeom>
+          <a:noFill/>
+        </p:spPr>
+        <p:txBody>
+          <a:bodyPr wrap="square" lIns="0" rIns="0" tIns="0" bIns="0" anchor="t">
+            <a:spAutoFit/>
+          </a:bodyPr>
+          <a:lstStyle/>
+          <a:p>
+            <a:pPr algn="l">
+              <a:lnSpc>
+                <a:spcPct val="95000"/>
+              </a:lnSpc>
+              <a:spcAft>
+                <a:spcPts val="0"/>
+              </a:spcAft>
+            </a:pPr>
+            <a:r>
+              <a:rPr sz="1900" b="1" i="0">
+                <a:solidFill>
+                  <a:srgbClr val="14213D"/>
+                </a:solidFill>
+                <a:latin typeface="Calibri"/>
+              </a:rPr>
+              <a:t>Python standard library</a:t>
+            </a:r>
+          </a:p>
+        </p:txBody>
+      </p:sp>
+      <p:sp>
+        <p:nvSpPr>
+          <p:cNvPr id="14" name="TextBox 13"/>
+          <p:cNvSpPr txBox="1"/>
+          <p:nvPr/>
+        </p:nvSpPr>
+        <p:spPr>
+          <a:xfrm>
+            <a:off x="8412480" y="2807208"/>
+            <a:ext cx="2926080" cy="411480"/>
+          </a:xfrm>
+          <a:prstGeom prst="rect">
+            <a:avLst/>
+          </a:prstGeom>
+          <a:noFill/>
+        </p:spPr>
+        <p:txBody>
+          <a:bodyPr wrap="square" lIns="0" rIns="0" tIns="0" bIns="0" anchor="t">
+            <a:spAutoFit/>
+          </a:bodyPr>
+          <a:lstStyle/>
+          <a:p>
+            <a:pPr algn="l">
+              <a:spcAft>
+                <a:spcPts val="0"/>
+              </a:spcAft>
+            </a:pPr>
+            <a:r>
+              <a:rPr sz="1400" b="0" i="0">
+                <a:solidFill>
+                  <a:srgbClr val="1F2937"/>
+                </a:solidFill>
+                <a:latin typeface="Calibri"/>
+              </a:rPr>
+              <a:t>deque window, set of ports</a:t>
+            </a:r>
+          </a:p>
+        </p:txBody>
+      </p:sp>
+      <p:sp>
+        <p:nvSpPr>
+          <p:cNvPr id="15" name="Rounded Rectangle 14"/>
+          <p:cNvSpPr/>
+          <p:nvPr/>
+        </p:nvSpPr>
+        <p:spPr>
+          <a:xfrm>
+            <a:off x="548640" y="3611879"/>
+            <a:ext cx="3474720" cy="1828800"/>
+          </a:xfrm>
+          <a:prstGeom prst="roundRect">
+            <a:avLst>
+              <a:gd name="adj" fmla="val 8000"/>
+            </a:avLst>
+          </a:prstGeom>
+          <a:solidFill>
+            <a:srgbClr val="EEF2F7"/>
+          </a:solidFill>
+          <a:ln>
+            <a:noFill/>
+          </a:ln>
+          <a:effectLst/>
+        </p:spPr>
+        <p:style>
+          <a:lnRef idx="1">
+            <a:schemeClr val="accent1"/>
+          </a:lnRef>
+          <a:fillRef idx="3">
+            <a:schemeClr val="accent1"/>
+          </a:fillRef>
+          <a:effectRef idx="2">
+            <a:schemeClr val="accent1"/>
+          </a:effectRef>
+          <a:fontRef idx="minor">
+            <a:schemeClr val="lt1"/>
+          </a:fontRef>
+        </p:style>
+        <p:txBody>
+          <a:bodyPr rtlCol="0" anchor="ctr"/>
+          <a:lstStyle/>
+          <a:p>
+            <a:pPr algn="ctr"/>
+          </a:p>
+        </p:txBody>
+      </p:sp>
+      <p:sp>
+        <p:nvSpPr>
+          <p:cNvPr id="16" name="TextBox 15"/>
+          <p:cNvSpPr txBox="1"/>
+          <p:nvPr/>
+        </p:nvSpPr>
+        <p:spPr>
+          <a:xfrm>
+            <a:off x="822959" y="3867911"/>
+            <a:ext cx="2926080" cy="274320"/>
+          </a:xfrm>
+          <a:prstGeom prst="rect">
+            <a:avLst/>
+          </a:prstGeom>
+          <a:noFill/>
+        </p:spPr>
+        <p:txBody>
+          <a:bodyPr wrap="square" lIns="0" rIns="0" tIns="0" bIns="0" anchor="t">
+            <a:spAutoFit/>
+          </a:bodyPr>
+          <a:lstStyle/>
+          <a:p>
+            <a:pPr algn="l">
+              <a:spcAft>
+                <a:spcPts val="0"/>
+              </a:spcAft>
+            </a:pPr>
+            <a:r>
+              <a:rPr sz="1200" b="1" i="0">
+                <a:solidFill>
+                  <a:srgbClr val="5B6472"/>
+                </a:solidFill>
+                <a:latin typeface="Calibri"/>
+              </a:rPr>
+              <a:t>SERVER</a:t>
+            </a:r>
+          </a:p>
+        </p:txBody>
+      </p:sp>
+      <p:sp>
+        <p:nvSpPr>
+          <p:cNvPr id="17" name="TextBox 16"/>
+          <p:cNvSpPr txBox="1"/>
+          <p:nvPr/>
+        </p:nvSpPr>
+        <p:spPr>
+          <a:xfrm>
+            <a:off x="822959" y="4178807"/>
+            <a:ext cx="2926080" cy="685800"/>
+          </a:xfrm>
+          <a:prstGeom prst="rect">
+            <a:avLst/>
+          </a:prstGeom>
+          <a:noFill/>
+        </p:spPr>
+        <p:txBody>
+          <a:bodyPr wrap="square" lIns="0" rIns="0" tIns="0" bIns="0" anchor="t">
+            <a:spAutoFit/>
+          </a:bodyPr>
+          <a:lstStyle/>
+          <a:p>
+            <a:pPr algn="l">
+              <a:lnSpc>
+                <a:spcPct val="95000"/>
+              </a:lnSpc>
+              <a:spcAft>
+                <a:spcPts val="0"/>
+              </a:spcAft>
+            </a:pPr>
+            <a:r>
+              <a:rPr sz="1900" b="1" i="0">
+                <a:solidFill>
+                  <a:srgbClr val="14213D"/>
+                </a:solidFill>
+                <a:latin typeface="Calibri"/>
+              </a:rPr>
+              <a:t>Node.js 24 + Express 5</a:t>
+            </a:r>
+          </a:p>
+        </p:txBody>
+      </p:sp>
+      <p:sp>
+        <p:nvSpPr>
+          <p:cNvPr id="18" name="TextBox 17"/>
+          <p:cNvSpPr txBox="1"/>
+          <p:nvPr/>
+        </p:nvSpPr>
+        <p:spPr>
+          <a:xfrm>
+            <a:off x="822959" y="4910327"/>
+            <a:ext cx="2926080" cy="411480"/>
+          </a:xfrm>
+          <a:prstGeom prst="rect">
+            <a:avLst/>
+          </a:prstGeom>
+          <a:noFill/>
+        </p:spPr>
+        <p:txBody>
+          <a:bodyPr wrap="square" lIns="0" rIns="0" tIns="0" bIns="0" anchor="t">
+            <a:spAutoFit/>
+          </a:bodyPr>
+          <a:lstStyle/>
+          <a:p>
+            <a:pPr algn="l">
+              <a:spcAft>
+                <a:spcPts val="0"/>
+              </a:spcAft>
+            </a:pPr>
+            <a:r>
+              <a:rPr sz="1400" b="0" i="0">
+                <a:solidFill>
+                  <a:srgbClr val="1F2937"/>
+                </a:solidFill>
+                <a:latin typeface="Calibri"/>
+              </a:rPr>
+              <a:t>receives alerts by HTTP POST</a:t>
+            </a:r>
+          </a:p>
+        </p:txBody>
+      </p:sp>
+      <p:sp>
+        <p:nvSpPr>
+          <p:cNvPr id="19" name="Rounded Rectangle 18"/>
+          <p:cNvSpPr/>
+          <p:nvPr/>
+        </p:nvSpPr>
+        <p:spPr>
+          <a:xfrm>
+            <a:off x="4343400" y="3611879"/>
+            <a:ext cx="3474720" cy="1828800"/>
+          </a:xfrm>
+          <a:prstGeom prst="roundRect">
+            <a:avLst>
+              <a:gd name="adj" fmla="val 8000"/>
+            </a:avLst>
+          </a:prstGeom>
+          <a:solidFill>
+            <a:srgbClr val="EEF2F7"/>
+          </a:solidFill>
+          <a:ln>
+            <a:noFill/>
+          </a:ln>
+          <a:effectLst/>
+        </p:spPr>
+        <p:style>
+          <a:lnRef idx="1">
+            <a:schemeClr val="accent1"/>
+          </a:lnRef>
+          <a:fillRef idx="3">
+            <a:schemeClr val="accent1"/>
+          </a:fillRef>
+          <a:effectRef idx="2">
+            <a:schemeClr val="accent1"/>
+          </a:effectRef>
+          <a:fontRef idx="minor">
+            <a:schemeClr val="lt1"/>
+          </a:fontRef>
+        </p:style>
+        <p:txBody>
+          <a:bodyPr rtlCol="0" anchor="ctr"/>
+          <a:lstStyle/>
+          <a:p>
+            <a:pPr algn="ctr"/>
+          </a:p>
+        </p:txBody>
+      </p:sp>
+      <p:sp>
+        <p:nvSpPr>
+          <p:cNvPr id="20" name="TextBox 19"/>
+          <p:cNvSpPr txBox="1"/>
+          <p:nvPr/>
+        </p:nvSpPr>
+        <p:spPr>
+          <a:xfrm>
+            <a:off x="4617720" y="3867911"/>
+            <a:ext cx="2926080" cy="274320"/>
+          </a:xfrm>
+          <a:prstGeom prst="rect">
+            <a:avLst/>
+          </a:prstGeom>
+          <a:noFill/>
+        </p:spPr>
+        <p:txBody>
+          <a:bodyPr wrap="square" lIns="0" rIns="0" tIns="0" bIns="0" anchor="t">
+            <a:spAutoFit/>
+          </a:bodyPr>
+          <a:lstStyle/>
+          <a:p>
+            <a:pPr algn="l">
+              <a:spcAft>
+                <a:spcPts val="0"/>
+              </a:spcAft>
+            </a:pPr>
+            <a:r>
+              <a:rPr sz="1200" b="1" i="0">
+                <a:solidFill>
+                  <a:srgbClr val="5B6472"/>
+                </a:solidFill>
+                <a:latin typeface="Calibri"/>
+              </a:rPr>
+              <a:t>LIVE PUSH</a:t>
+            </a:r>
+          </a:p>
+        </p:txBody>
+      </p:sp>
+      <p:sp>
+        <p:nvSpPr>
+          <p:cNvPr id="21" name="TextBox 20"/>
+          <p:cNvSpPr txBox="1"/>
+          <p:nvPr/>
+        </p:nvSpPr>
+        <p:spPr>
+          <a:xfrm>
+            <a:off x="4617720" y="4178807"/>
+            <a:ext cx="2926080" cy="685800"/>
+          </a:xfrm>
+          <a:prstGeom prst="rect">
+            <a:avLst/>
+          </a:prstGeom>
+          <a:noFill/>
+        </p:spPr>
+        <p:txBody>
+          <a:bodyPr wrap="square" lIns="0" rIns="0" tIns="0" bIns="0" anchor="t">
+            <a:spAutoFit/>
+          </a:bodyPr>
+          <a:lstStyle/>
+          <a:p>
+            <a:pPr algn="l">
+              <a:lnSpc>
+                <a:spcPct val="95000"/>
+              </a:lnSpc>
+              <a:spcAft>
+                <a:spcPts val="0"/>
+              </a:spcAft>
+            </a:pPr>
+            <a:r>
+              <a:rPr sz="1900" b="1" i="0">
+                <a:solidFill>
+                  <a:srgbClr val="14213D"/>
+                </a:solidFill>
+                <a:latin typeface="Calibri"/>
+              </a:rPr>
+              <a:t>Socket.IO 4</a:t>
+            </a:r>
+          </a:p>
+        </p:txBody>
+      </p:sp>
+      <p:sp>
+        <p:nvSpPr>
+          <p:cNvPr id="22" name="TextBox 21"/>
+          <p:cNvSpPr txBox="1"/>
+          <p:nvPr/>
+        </p:nvSpPr>
+        <p:spPr>
+          <a:xfrm>
+            <a:off x="4617720" y="4910327"/>
+            <a:ext cx="2926080" cy="411480"/>
+          </a:xfrm>
+          <a:prstGeom prst="rect">
+            <a:avLst/>
+          </a:prstGeom>
+          <a:noFill/>
+        </p:spPr>
+        <p:txBody>
+          <a:bodyPr wrap="square" lIns="0" rIns="0" tIns="0" bIns="0" anchor="t">
+            <a:spAutoFit/>
+          </a:bodyPr>
+          <a:lstStyle/>
+          <a:p>
+            <a:pPr algn="l">
+              <a:spcAft>
+                <a:spcPts val="0"/>
+              </a:spcAft>
+            </a:pPr>
+            <a:r>
+              <a:rPr sz="1400" b="0" i="0">
+                <a:solidFill>
+                  <a:srgbClr val="1F2937"/>
+                </a:solidFill>
+                <a:latin typeface="Calibri"/>
+              </a:rPr>
+              <a:t>alerts reach the browser instantly</a:t>
+            </a:r>
+          </a:p>
+        </p:txBody>
+      </p:sp>
+      <p:sp>
+        <p:nvSpPr>
+          <p:cNvPr id="23" name="Rounded Rectangle 22"/>
+          <p:cNvSpPr/>
+          <p:nvPr/>
+        </p:nvSpPr>
+        <p:spPr>
+          <a:xfrm>
+            <a:off x="8138160" y="3611879"/>
+            <a:ext cx="3474720" cy="1828800"/>
+          </a:xfrm>
+          <a:prstGeom prst="roundRect">
+            <a:avLst>
+              <a:gd name="adj" fmla="val 8000"/>
+            </a:avLst>
+          </a:prstGeom>
+          <a:solidFill>
+            <a:srgbClr val="EEF2F7"/>
+          </a:solidFill>
+          <a:ln>
+            <a:noFill/>
+          </a:ln>
+          <a:effectLst/>
+        </p:spPr>
+        <p:style>
+          <a:lnRef idx="1">
+            <a:schemeClr val="accent1"/>
+          </a:lnRef>
+          <a:fillRef idx="3">
+            <a:schemeClr val="accent1"/>
+          </a:fillRef>
+          <a:effectRef idx="2">
+            <a:schemeClr val="accent1"/>
+          </a:effectRef>
+          <a:fontRef idx="minor">
+            <a:schemeClr val="lt1"/>
+          </a:fontRef>
+        </p:style>
+        <p:txBody>
+          <a:bodyPr rtlCol="0" anchor="ctr"/>
+          <a:lstStyle/>
+          <a:p>
+            <a:pPr algn="ctr"/>
+          </a:p>
+        </p:txBody>
+      </p:sp>
+      <p:sp>
+        <p:nvSpPr>
+          <p:cNvPr id="24" name="TextBox 23"/>
+          <p:cNvSpPr txBox="1"/>
+          <p:nvPr/>
+        </p:nvSpPr>
+        <p:spPr>
+          <a:xfrm>
+            <a:off x="8412480" y="3867911"/>
+            <a:ext cx="2926080" cy="274320"/>
+          </a:xfrm>
+          <a:prstGeom prst="rect">
+            <a:avLst/>
+          </a:prstGeom>
+          <a:noFill/>
+        </p:spPr>
+        <p:txBody>
+          <a:bodyPr wrap="square" lIns="0" rIns="0" tIns="0" bIns="0" anchor="t">
+            <a:spAutoFit/>
+          </a:bodyPr>
+          <a:lstStyle/>
+          <a:p>
+            <a:pPr algn="l">
+              <a:spcAft>
+                <a:spcPts val="0"/>
+              </a:spcAft>
+            </a:pPr>
+            <a:r>
+              <a:rPr sz="1200" b="1" i="0">
+                <a:solidFill>
+                  <a:srgbClr val="5B6472"/>
+                </a:solidFill>
+                <a:latin typeface="Calibri"/>
+              </a:rPr>
+              <a:t>DASHBOARD</a:t>
+            </a:r>
+          </a:p>
+        </p:txBody>
+      </p:sp>
+      <p:sp>
+        <p:nvSpPr>
+          <p:cNvPr id="25" name="TextBox 24"/>
+          <p:cNvSpPr txBox="1"/>
+          <p:nvPr/>
+        </p:nvSpPr>
+        <p:spPr>
+          <a:xfrm>
+            <a:off x="8412480" y="4178807"/>
+            <a:ext cx="2926080" cy="685800"/>
+          </a:xfrm>
+          <a:prstGeom prst="rect">
+            <a:avLst/>
+          </a:prstGeom>
+          <a:noFill/>
+        </p:spPr>
+        <p:txBody>
+          <a:bodyPr wrap="square" lIns="0" rIns="0" tIns="0" bIns="0" anchor="t">
+            <a:spAutoFit/>
+          </a:bodyPr>
+          <a:lstStyle/>
+          <a:p>
+            <a:pPr algn="l">
+              <a:lnSpc>
+                <a:spcPct val="95000"/>
+              </a:lnSpc>
+              <a:spcAft>
+                <a:spcPts val="0"/>
+              </a:spcAft>
+            </a:pPr>
+            <a:r>
+              <a:rPr sz="1900" b="1" i="0">
+                <a:solidFill>
+                  <a:srgbClr val="14213D"/>
+                </a:solidFill>
+                <a:latin typeface="Calibri"/>
+              </a:rPr>
+              <a:t>HTML, CSS, JS + Chart.js</a:t>
+            </a:r>
+          </a:p>
+        </p:txBody>
+      </p:sp>
+      <p:sp>
+        <p:nvSpPr>
+          <p:cNvPr id="26" name="TextBox 25"/>
+          <p:cNvSpPr txBox="1"/>
+          <p:nvPr/>
+        </p:nvSpPr>
+        <p:spPr>
+          <a:xfrm>
+            <a:off x="8412480" y="4910327"/>
+            <a:ext cx="2926080" cy="411480"/>
+          </a:xfrm>
+          <a:prstGeom prst="rect">
+            <a:avLst/>
+          </a:prstGeom>
+          <a:noFill/>
+        </p:spPr>
+        <p:txBody>
+          <a:bodyPr wrap="square" lIns="0" rIns="0" tIns="0" bIns="0" anchor="t">
+            <a:spAutoFit/>
+          </a:bodyPr>
+          <a:lstStyle/>
+          <a:p>
+            <a:pPr algn="l">
+              <a:spcAft>
+                <a:spcPts val="0"/>
+              </a:spcAft>
+            </a:pPr>
+            <a:r>
+              <a:rPr sz="1400" b="0" i="0">
+                <a:solidFill>
+                  <a:srgbClr val="1F2937"/>
+                </a:solidFill>
+                <a:latin typeface="Calibri"/>
+              </a:rPr>
+              <a:t>live chart, table and banner</a:t>
+            </a:r>
+          </a:p>
+        </p:txBody>
+      </p:sp>
+      <p:sp>
+        <p:nvSpPr>
+          <p:cNvPr id="27" name="TextBox 26"/>
+          <p:cNvSpPr txBox="1"/>
+          <p:nvPr/>
+        </p:nvSpPr>
+        <p:spPr>
+          <a:xfrm>
+            <a:off x="548640" y="5806440"/>
+            <a:ext cx="10972800" cy="365760"/>
+          </a:xfrm>
+          <a:prstGeom prst="rect">
+            <a:avLst/>
+          </a:prstGeom>
+          <a:noFill/>
+        </p:spPr>
+        <p:txBody>
+          <a:bodyPr wrap="square" lIns="0" rIns="0" tIns="0" bIns="0" anchor="t">
+            <a:spAutoFit/>
+          </a:bodyPr>
+          <a:lstStyle/>
+          <a:p>
+            <a:pPr algn="l">
+              <a:spcAft>
+                <a:spcPts val="0"/>
+              </a:spcAft>
+            </a:pPr>
+            <a:r>
+              <a:rPr sz="1400" b="1" i="0">
+                <a:solidFill>
+                  <a:srgbClr val="14213D"/>
+                </a:solidFill>
+                <a:latin typeface="Calibri"/>
+              </a:rPr>
+              <a:t>Storage: </a:t>
+            </a:r>
+            <a:r>
+              <a:rPr sz="1400" b="0" i="0">
+                <a:solidFill>
+                  <a:srgbClr val="1F2937"/>
+                </a:solidFill>
+                <a:latin typeface="Calibri"/>
+              </a:rPr>
+              <a:t>JSON alert log  </a:t>
+            </a:r>
+            <a:r>
+              <a:rPr sz="1400" b="1" i="0">
+                <a:solidFill>
+                  <a:srgbClr val="14213D"/>
+                </a:solidFill>
+                <a:latin typeface="Calibri"/>
+              </a:rPr>
+              <a:t>Testing: </a:t>
+            </a:r>
+            <a:r>
+              <a:rPr sz="1400" b="0" i="0">
+                <a:solidFill>
+                  <a:srgbClr val="1F2937"/>
+                </a:solidFill>
+                <a:latin typeface="Calibri"/>
+              </a:rPr>
+              <a:t>unittest, Nmap, Wireshark  </a:t>
+            </a:r>
+            <a:r>
+              <a:rPr sz="1400" b="1" i="0">
+                <a:solidFill>
+                  <a:srgbClr val="14213D"/>
+                </a:solidFill>
+                <a:latin typeface="Calibri"/>
+              </a:rPr>
+              <a:t>Tools: </a:t>
+            </a:r>
+            <a:r>
+              <a:rPr sz="1400" b="0" i="0">
+                <a:solidFill>
+                  <a:srgbClr val="1F2937"/>
+                </a:solidFill>
+                <a:latin typeface="Calibri"/>
+              </a:rPr>
+              <a:t>VS Code, Git, GitHub</a:t>
+            </a:r>
+          </a:p>
+        </p:txBody>
+      </p:sp>
+      <p:sp>
+        <p:nvSpPr>
+          <p:cNvPr id="28" name="TextBox 27"/>
           <p:cNvSpPr txBox="1"/>
           <p:nvPr/>
         </p:nvSpPr>
@@ -9632,7 +9034,7 @@
       </p:sp>
       <p:sp>
         <p:nvSpPr>
-          <p:cNvPr id="6" name="TextBox 5"/>
+          <p:cNvPr id="29" name="TextBox 28"/>
           <p:cNvSpPr txBox="1"/>
           <p:nvPr/>
         </p:nvSpPr>
@@ -9729,29 +9131,134 @@
                 </a:solidFill>
                 <a:latin typeface="Calibri"/>
               </a:rPr>
-              <a:t>Technology Stack</a:t>
-            </a:r>
-          </a:p>
-        </p:txBody>
-      </p:sp>
-      <p:sp>
-        <p:nvSpPr>
-          <p:cNvPr id="3" name="Rounded Rectangle 2"/>
+              <a:t>System Design</a:t>
+            </a:r>
+          </a:p>
+        </p:txBody>
+      </p:sp>
+      <p:pic>
+        <p:nvPicPr>
+          <p:cNvPr id="3" name="Picture 2" descr="dfd_level1.png"/>
+          <p:cNvPicPr>
+            <a:picLocks noChangeAspect="1"/>
+          </p:cNvPicPr>
+          <p:nvPr/>
+        </p:nvPicPr>
+        <p:blipFill>
+          <a:blip r:embed="rId2"/>
+          <a:stretch>
+            <a:fillRect/>
+          </a:stretch>
+        </p:blipFill>
+        <p:spPr>
+          <a:xfrm>
+            <a:off x="548640" y="1554480"/>
+            <a:ext cx="6583680" cy="3800019"/>
+          </a:xfrm>
+          <a:prstGeom prst="rect">
+            <a:avLst/>
+          </a:prstGeom>
+          <a:ln w="9525">
+            <a:solidFill>
+              <a:srgbClr val="D5DCE6"/>
+            </a:solidFill>
+          </a:ln>
+        </p:spPr>
+      </p:pic>
+      <p:sp>
+        <p:nvSpPr>
+          <p:cNvPr id="4" name="TextBox 3"/>
+          <p:cNvSpPr txBox="1"/>
+          <p:nvPr/>
+        </p:nvSpPr>
+        <p:spPr>
+          <a:xfrm>
+            <a:off x="548640" y="5445939"/>
+            <a:ext cx="6583680" cy="274320"/>
+          </a:xfrm>
+          <a:prstGeom prst="rect">
+            <a:avLst/>
+          </a:prstGeom>
+          <a:noFill/>
+        </p:spPr>
+        <p:txBody>
+          <a:bodyPr wrap="square" lIns="0" rIns="0" tIns="0" bIns="0" anchor="t">
+            <a:spAutoFit/>
+          </a:bodyPr>
+          <a:lstStyle/>
+          <a:p>
+            <a:pPr algn="ctr">
+              <a:spcAft>
+                <a:spcPts val="0"/>
+              </a:spcAft>
+            </a:pPr>
+            <a:r>
+              <a:rPr sz="1200" b="0" i="0">
+                <a:solidFill>
+                  <a:srgbClr val="5B6472"/>
+                </a:solidFill>
+                <a:latin typeface="Calibri"/>
+              </a:rPr>
+              <a:t>Level-1 Data Flow Diagram</a:t>
+            </a:r>
+          </a:p>
+        </p:txBody>
+      </p:sp>
+      <p:sp>
+        <p:nvSpPr>
+          <p:cNvPr id="5" name="TextBox 4"/>
+          <p:cNvSpPr txBox="1"/>
+          <p:nvPr/>
+        </p:nvSpPr>
+        <p:spPr>
+          <a:xfrm>
+            <a:off x="7406640" y="1554480"/>
+            <a:ext cx="4206240" cy="365760"/>
+          </a:xfrm>
+          <a:prstGeom prst="rect">
+            <a:avLst/>
+          </a:prstGeom>
+          <a:noFill/>
+        </p:spPr>
+        <p:txBody>
+          <a:bodyPr wrap="square" lIns="0" rIns="0" tIns="0" bIns="0" anchor="t">
+            <a:spAutoFit/>
+          </a:bodyPr>
+          <a:lstStyle/>
+          <a:p>
+            <a:pPr algn="l">
+              <a:spcAft>
+                <a:spcPts val="0"/>
+              </a:spcAft>
+            </a:pPr>
+            <a:r>
+              <a:rPr sz="1200" b="1" i="0">
+                <a:solidFill>
+                  <a:srgbClr val="5B6472"/>
+                </a:solidFill>
+                <a:latin typeface="Calibri"/>
+              </a:rPr>
+              <a:t>DESIGN ARTEFACTS</a:t>
+            </a:r>
+          </a:p>
+        </p:txBody>
+      </p:sp>
+      <p:sp>
+        <p:nvSpPr>
+          <p:cNvPr id="6" name="Oval 5"/>
           <p:cNvSpPr/>
           <p:nvPr/>
         </p:nvSpPr>
         <p:spPr>
           <a:xfrm>
-            <a:off x="548640" y="1508760"/>
-            <a:ext cx="3474720" cy="1828800"/>
-          </a:xfrm>
-          <a:prstGeom prst="roundRect">
-            <a:avLst>
-              <a:gd name="adj" fmla="val 8000"/>
-            </a:avLst>
+            <a:off x="7406640" y="2066544"/>
+            <a:ext cx="164592" cy="164592"/>
+          </a:xfrm>
+          <a:prstGeom prst="ellipse">
+            <a:avLst/>
           </a:prstGeom>
           <a:solidFill>
-            <a:srgbClr val="EEF2F7"/>
+            <a:srgbClr val="14213D"/>
           </a:solidFill>
           <a:ln>
             <a:noFill/>
@@ -9782,14 +9289,14 @@
       </p:sp>
       <p:sp>
         <p:nvSpPr>
-          <p:cNvPr id="4" name="TextBox 3"/>
-          <p:cNvSpPr txBox="1"/>
-          <p:nvPr/>
-        </p:nvSpPr>
-        <p:spPr>
-          <a:xfrm>
-            <a:off x="822959" y="1764792"/>
-            <a:ext cx="2926080" cy="274320"/>
+          <p:cNvPr id="7" name="TextBox 6"/>
+          <p:cNvSpPr txBox="1"/>
+          <p:nvPr/>
+        </p:nvSpPr>
+        <p:spPr>
+          <a:xfrm>
+            <a:off x="7726679" y="2011680"/>
+            <a:ext cx="3931920" cy="365760"/>
           </a:xfrm>
           <a:prstGeom prst="rect">
             <a:avLst/>
@@ -9808,116 +9315,33 @@
               </a:spcAft>
             </a:pPr>
             <a:r>
-              <a:rPr sz="1200" b="1" i="0">
-                <a:solidFill>
-                  <a:srgbClr val="5B6472"/>
-                </a:solidFill>
-                <a:latin typeface="Calibri"/>
-              </a:rPr>
-              <a:t>CAPTURE</a:t>
-            </a:r>
-          </a:p>
-        </p:txBody>
-      </p:sp>
-      <p:sp>
-        <p:nvSpPr>
-          <p:cNvPr id="5" name="TextBox 4"/>
-          <p:cNvSpPr txBox="1"/>
-          <p:nvPr/>
-        </p:nvSpPr>
-        <p:spPr>
-          <a:xfrm>
-            <a:off x="822959" y="2075688"/>
-            <a:ext cx="2926080" cy="685800"/>
-          </a:xfrm>
-          <a:prstGeom prst="rect">
-            <a:avLst/>
-          </a:prstGeom>
-          <a:noFill/>
-        </p:spPr>
-        <p:txBody>
-          <a:bodyPr wrap="square" lIns="0" rIns="0" tIns="0" bIns="0" anchor="t">
-            <a:spAutoFit/>
-          </a:bodyPr>
-          <a:lstStyle/>
-          <a:p>
-            <a:pPr algn="l">
-              <a:lnSpc>
-                <a:spcPct val="95000"/>
-              </a:lnSpc>
-              <a:spcAft>
-                <a:spcPts val="0"/>
-              </a:spcAft>
-            </a:pPr>
-            <a:r>
-              <a:rPr sz="1900" b="1" i="0">
-                <a:solidFill>
-                  <a:srgbClr val="14213D"/>
-                </a:solidFill>
-                <a:latin typeface="Calibri"/>
-              </a:rPr>
-              <a:t>Npcap 1.89</a:t>
-            </a:r>
-          </a:p>
-        </p:txBody>
-      </p:sp>
-      <p:sp>
-        <p:nvSpPr>
-          <p:cNvPr id="6" name="TextBox 5"/>
-          <p:cNvSpPr txBox="1"/>
-          <p:nvPr/>
-        </p:nvSpPr>
-        <p:spPr>
-          <a:xfrm>
-            <a:off x="822959" y="2807208"/>
-            <a:ext cx="2926080" cy="411480"/>
-          </a:xfrm>
-          <a:prstGeom prst="rect">
-            <a:avLst/>
-          </a:prstGeom>
-          <a:noFill/>
-        </p:spPr>
-        <p:txBody>
-          <a:bodyPr wrap="square" lIns="0" rIns="0" tIns="0" bIns="0" anchor="t">
-            <a:spAutoFit/>
-          </a:bodyPr>
-          <a:lstStyle/>
-          <a:p>
-            <a:pPr algn="l">
-              <a:spcAft>
-                <a:spcPts val="0"/>
-              </a:spcAft>
-            </a:pPr>
-            <a:r>
-              <a:rPr sz="1400" b="0" i="0">
+              <a:rPr sz="1500" b="0" i="0">
                 <a:solidFill>
                   <a:srgbClr val="1F2937"/>
                 </a:solidFill>
                 <a:latin typeface="Calibri"/>
               </a:rPr>
-              <a:t>raw packets on Windows</a:t>
-            </a:r>
-          </a:p>
-        </p:txBody>
-      </p:sp>
-      <p:sp>
-        <p:nvSpPr>
-          <p:cNvPr id="7" name="Rounded Rectangle 6"/>
+              <a:t>Context and level-1 DFDs</a:t>
+            </a:r>
+          </a:p>
+        </p:txBody>
+      </p:sp>
+      <p:sp>
+        <p:nvSpPr>
+          <p:cNvPr id="8" name="Oval 7"/>
           <p:cNvSpPr/>
           <p:nvPr/>
         </p:nvSpPr>
         <p:spPr>
           <a:xfrm>
-            <a:off x="4343400" y="1508760"/>
-            <a:ext cx="3474720" cy="1828800"/>
-          </a:xfrm>
-          <a:prstGeom prst="roundRect">
-            <a:avLst>
-              <a:gd name="adj" fmla="val 8000"/>
-            </a:avLst>
+            <a:off x="7406640" y="2615184"/>
+            <a:ext cx="164592" cy="164592"/>
+          </a:xfrm>
+          <a:prstGeom prst="ellipse">
+            <a:avLst/>
           </a:prstGeom>
           <a:solidFill>
-            <a:srgbClr val="EEF2F7"/>
+            <a:srgbClr val="14213D"/>
           </a:solidFill>
           <a:ln>
             <a:noFill/>
@@ -9948,14 +9372,14 @@
       </p:sp>
       <p:sp>
         <p:nvSpPr>
-          <p:cNvPr id="8" name="TextBox 7"/>
-          <p:cNvSpPr txBox="1"/>
-          <p:nvPr/>
-        </p:nvSpPr>
-        <p:spPr>
-          <a:xfrm>
-            <a:off x="4617720" y="1764792"/>
-            <a:ext cx="2926080" cy="274320"/>
+          <p:cNvPr id="9" name="TextBox 8"/>
+          <p:cNvSpPr txBox="1"/>
+          <p:nvPr/>
+        </p:nvSpPr>
+        <p:spPr>
+          <a:xfrm>
+            <a:off x="7726679" y="2560320"/>
+            <a:ext cx="3931920" cy="365760"/>
           </a:xfrm>
           <a:prstGeom prst="rect">
             <a:avLst/>
@@ -9974,116 +9398,33 @@
               </a:spcAft>
             </a:pPr>
             <a:r>
-              <a:rPr sz="1200" b="1" i="0">
-                <a:solidFill>
-                  <a:srgbClr val="5B6472"/>
-                </a:solidFill>
-                <a:latin typeface="Calibri"/>
-              </a:rPr>
-              <a:t>SENSOR</a:t>
-            </a:r>
-          </a:p>
-        </p:txBody>
-      </p:sp>
-      <p:sp>
-        <p:nvSpPr>
-          <p:cNvPr id="9" name="TextBox 8"/>
-          <p:cNvSpPr txBox="1"/>
-          <p:nvPr/>
-        </p:nvSpPr>
-        <p:spPr>
-          <a:xfrm>
-            <a:off x="4617720" y="2075688"/>
-            <a:ext cx="2926080" cy="685800"/>
-          </a:xfrm>
-          <a:prstGeom prst="rect">
-            <a:avLst/>
-          </a:prstGeom>
-          <a:noFill/>
-        </p:spPr>
-        <p:txBody>
-          <a:bodyPr wrap="square" lIns="0" rIns="0" tIns="0" bIns="0" anchor="t">
-            <a:spAutoFit/>
-          </a:bodyPr>
-          <a:lstStyle/>
-          <a:p>
-            <a:pPr algn="l">
-              <a:lnSpc>
-                <a:spcPct val="95000"/>
-              </a:lnSpc>
-              <a:spcAft>
-                <a:spcPts val="0"/>
-              </a:spcAft>
-            </a:pPr>
-            <a:r>
-              <a:rPr sz="1900" b="1" i="0">
-                <a:solidFill>
-                  <a:srgbClr val="14213D"/>
-                </a:solidFill>
-                <a:latin typeface="Calibri"/>
-              </a:rPr>
-              <a:t>Python 3.13 + Scapy 2.8</a:t>
-            </a:r>
-          </a:p>
-        </p:txBody>
-      </p:sp>
-      <p:sp>
-        <p:nvSpPr>
-          <p:cNvPr id="10" name="TextBox 9"/>
-          <p:cNvSpPr txBox="1"/>
-          <p:nvPr/>
-        </p:nvSpPr>
-        <p:spPr>
-          <a:xfrm>
-            <a:off x="4617720" y="2807208"/>
-            <a:ext cx="2926080" cy="411480"/>
-          </a:xfrm>
-          <a:prstGeom prst="rect">
-            <a:avLst/>
-          </a:prstGeom>
-          <a:noFill/>
-        </p:spPr>
-        <p:txBody>
-          <a:bodyPr wrap="square" lIns="0" rIns="0" tIns="0" bIns="0" anchor="t">
-            <a:spAutoFit/>
-          </a:bodyPr>
-          <a:lstStyle/>
-          <a:p>
-            <a:pPr algn="l">
-              <a:spcAft>
-                <a:spcPts val="0"/>
-              </a:spcAft>
-            </a:pPr>
-            <a:r>
-              <a:rPr sz="1400" b="0" i="0">
+              <a:rPr sz="1500" b="0" i="0">
                 <a:solidFill>
                   <a:srgbClr val="1F2937"/>
                 </a:solidFill>
                 <a:latin typeface="Calibri"/>
               </a:rPr>
-              <a:t>decodes IP, TCP, UDP, ARP</a:t>
-            </a:r>
-          </a:p>
-        </p:txBody>
-      </p:sp>
-      <p:sp>
-        <p:nvSpPr>
-          <p:cNvPr id="11" name="Rounded Rectangle 10"/>
+              <a:t>Use-case diagram</a:t>
+            </a:r>
+          </a:p>
+        </p:txBody>
+      </p:sp>
+      <p:sp>
+        <p:nvSpPr>
+          <p:cNvPr id="10" name="Oval 9"/>
           <p:cNvSpPr/>
           <p:nvPr/>
         </p:nvSpPr>
         <p:spPr>
           <a:xfrm>
-            <a:off x="8138160" y="1508760"/>
-            <a:ext cx="3474720" cy="1828800"/>
-          </a:xfrm>
-          <a:prstGeom prst="roundRect">
-            <a:avLst>
-              <a:gd name="adj" fmla="val 8000"/>
-            </a:avLst>
+            <a:off x="7406640" y="3163824"/>
+            <a:ext cx="164592" cy="164592"/>
+          </a:xfrm>
+          <a:prstGeom prst="ellipse">
+            <a:avLst/>
           </a:prstGeom>
           <a:solidFill>
-            <a:srgbClr val="EEF2F7"/>
+            <a:srgbClr val="14213D"/>
           </a:solidFill>
           <a:ln>
             <a:noFill/>
@@ -10114,14 +9455,14 @@
       </p:sp>
       <p:sp>
         <p:nvSpPr>
-          <p:cNvPr id="12" name="TextBox 11"/>
-          <p:cNvSpPr txBox="1"/>
-          <p:nvPr/>
-        </p:nvSpPr>
-        <p:spPr>
-          <a:xfrm>
-            <a:off x="8412480" y="1764792"/>
-            <a:ext cx="2926080" cy="274320"/>
+          <p:cNvPr id="11" name="TextBox 10"/>
+          <p:cNvSpPr txBox="1"/>
+          <p:nvPr/>
+        </p:nvSpPr>
+        <p:spPr>
+          <a:xfrm>
+            <a:off x="7726679" y="3108960"/>
+            <a:ext cx="3931920" cy="365760"/>
           </a:xfrm>
           <a:prstGeom prst="rect">
             <a:avLst/>
@@ -10140,116 +9481,33 @@
               </a:spcAft>
             </a:pPr>
             <a:r>
-              <a:rPr sz="1200" b="1" i="0">
-                <a:solidFill>
-                  <a:srgbClr val="5B6472"/>
-                </a:solidFill>
-                <a:latin typeface="Calibri"/>
-              </a:rPr>
-              <a:t>RULES</a:t>
-            </a:r>
-          </a:p>
-        </p:txBody>
-      </p:sp>
-      <p:sp>
-        <p:nvSpPr>
-          <p:cNvPr id="13" name="TextBox 12"/>
-          <p:cNvSpPr txBox="1"/>
-          <p:nvPr/>
-        </p:nvSpPr>
-        <p:spPr>
-          <a:xfrm>
-            <a:off x="8412480" y="2075688"/>
-            <a:ext cx="2926080" cy="685800"/>
-          </a:xfrm>
-          <a:prstGeom prst="rect">
-            <a:avLst/>
-          </a:prstGeom>
-          <a:noFill/>
-        </p:spPr>
-        <p:txBody>
-          <a:bodyPr wrap="square" lIns="0" rIns="0" tIns="0" bIns="0" anchor="t">
-            <a:spAutoFit/>
-          </a:bodyPr>
-          <a:lstStyle/>
-          <a:p>
-            <a:pPr algn="l">
-              <a:lnSpc>
-                <a:spcPct val="95000"/>
-              </a:lnSpc>
-              <a:spcAft>
-                <a:spcPts val="0"/>
-              </a:spcAft>
-            </a:pPr>
-            <a:r>
-              <a:rPr sz="1900" b="1" i="0">
-                <a:solidFill>
-                  <a:srgbClr val="14213D"/>
-                </a:solidFill>
-                <a:latin typeface="Calibri"/>
-              </a:rPr>
-              <a:t>Python standard library</a:t>
-            </a:r>
-          </a:p>
-        </p:txBody>
-      </p:sp>
-      <p:sp>
-        <p:nvSpPr>
-          <p:cNvPr id="14" name="TextBox 13"/>
-          <p:cNvSpPr txBox="1"/>
-          <p:nvPr/>
-        </p:nvSpPr>
-        <p:spPr>
-          <a:xfrm>
-            <a:off x="8412480" y="2807208"/>
-            <a:ext cx="2926080" cy="411480"/>
-          </a:xfrm>
-          <a:prstGeom prst="rect">
-            <a:avLst/>
-          </a:prstGeom>
-          <a:noFill/>
-        </p:spPr>
-        <p:txBody>
-          <a:bodyPr wrap="square" lIns="0" rIns="0" tIns="0" bIns="0" anchor="t">
-            <a:spAutoFit/>
-          </a:bodyPr>
-          <a:lstStyle/>
-          <a:p>
-            <a:pPr algn="l">
-              <a:spcAft>
-                <a:spcPts val="0"/>
-              </a:spcAft>
-            </a:pPr>
-            <a:r>
-              <a:rPr sz="1400" b="0" i="0">
+              <a:rPr sz="1500" b="0" i="0">
                 <a:solidFill>
                   <a:srgbClr val="1F2937"/>
                 </a:solidFill>
                 <a:latin typeface="Calibri"/>
               </a:rPr>
-              <a:t>deque window, set of ports</a:t>
-            </a:r>
-          </a:p>
-        </p:txBody>
-      </p:sp>
-      <p:sp>
-        <p:nvSpPr>
-          <p:cNvPr id="15" name="Rounded Rectangle 14"/>
+              <a:t>Sequence diagram</a:t>
+            </a:r>
+          </a:p>
+        </p:txBody>
+      </p:sp>
+      <p:sp>
+        <p:nvSpPr>
+          <p:cNvPr id="12" name="Oval 11"/>
           <p:cNvSpPr/>
           <p:nvPr/>
         </p:nvSpPr>
         <p:spPr>
           <a:xfrm>
-            <a:off x="548640" y="3611879"/>
-            <a:ext cx="3474720" cy="1828800"/>
-          </a:xfrm>
-          <a:prstGeom prst="roundRect">
-            <a:avLst>
-              <a:gd name="adj" fmla="val 8000"/>
-            </a:avLst>
+            <a:off x="7406640" y="3712463"/>
+            <a:ext cx="164592" cy="164592"/>
+          </a:xfrm>
+          <a:prstGeom prst="ellipse">
+            <a:avLst/>
           </a:prstGeom>
           <a:solidFill>
-            <a:srgbClr val="EEF2F7"/>
+            <a:srgbClr val="14213D"/>
           </a:solidFill>
           <a:ln>
             <a:noFill/>
@@ -10280,14 +9538,14 @@
       </p:sp>
       <p:sp>
         <p:nvSpPr>
-          <p:cNvPr id="16" name="TextBox 15"/>
-          <p:cNvSpPr txBox="1"/>
-          <p:nvPr/>
-        </p:nvSpPr>
-        <p:spPr>
-          <a:xfrm>
-            <a:off x="822959" y="3867911"/>
-            <a:ext cx="2926080" cy="274320"/>
+          <p:cNvPr id="13" name="TextBox 12"/>
+          <p:cNvSpPr txBox="1"/>
+          <p:nvPr/>
+        </p:nvSpPr>
+        <p:spPr>
+          <a:xfrm>
+            <a:off x="7726679" y="3657600"/>
+            <a:ext cx="3931920" cy="365760"/>
           </a:xfrm>
           <a:prstGeom prst="rect">
             <a:avLst/>
@@ -10306,116 +9564,33 @@
               </a:spcAft>
             </a:pPr>
             <a:r>
-              <a:rPr sz="1200" b="1" i="0">
-                <a:solidFill>
-                  <a:srgbClr val="5B6472"/>
-                </a:solidFill>
-                <a:latin typeface="Calibri"/>
-              </a:rPr>
-              <a:t>SERVER</a:t>
-            </a:r>
-          </a:p>
-        </p:txBody>
-      </p:sp>
-      <p:sp>
-        <p:nvSpPr>
-          <p:cNvPr id="17" name="TextBox 16"/>
-          <p:cNvSpPr txBox="1"/>
-          <p:nvPr/>
-        </p:nvSpPr>
-        <p:spPr>
-          <a:xfrm>
-            <a:off x="822959" y="4178807"/>
-            <a:ext cx="2926080" cy="685800"/>
-          </a:xfrm>
-          <a:prstGeom prst="rect">
-            <a:avLst/>
-          </a:prstGeom>
-          <a:noFill/>
-        </p:spPr>
-        <p:txBody>
-          <a:bodyPr wrap="square" lIns="0" rIns="0" tIns="0" bIns="0" anchor="t">
-            <a:spAutoFit/>
-          </a:bodyPr>
-          <a:lstStyle/>
-          <a:p>
-            <a:pPr algn="l">
-              <a:lnSpc>
-                <a:spcPct val="95000"/>
-              </a:lnSpc>
-              <a:spcAft>
-                <a:spcPts val="0"/>
-              </a:spcAft>
-            </a:pPr>
-            <a:r>
-              <a:rPr sz="1900" b="1" i="0">
-                <a:solidFill>
-                  <a:srgbClr val="14213D"/>
-                </a:solidFill>
-                <a:latin typeface="Calibri"/>
-              </a:rPr>
-              <a:t>Node.js 24 + Express 5</a:t>
-            </a:r>
-          </a:p>
-        </p:txBody>
-      </p:sp>
-      <p:sp>
-        <p:nvSpPr>
-          <p:cNvPr id="18" name="TextBox 17"/>
-          <p:cNvSpPr txBox="1"/>
-          <p:nvPr/>
-        </p:nvSpPr>
-        <p:spPr>
-          <a:xfrm>
-            <a:off x="822959" y="4910327"/>
-            <a:ext cx="2926080" cy="411480"/>
-          </a:xfrm>
-          <a:prstGeom prst="rect">
-            <a:avLst/>
-          </a:prstGeom>
-          <a:noFill/>
-        </p:spPr>
-        <p:txBody>
-          <a:bodyPr wrap="square" lIns="0" rIns="0" tIns="0" bIns="0" anchor="t">
-            <a:spAutoFit/>
-          </a:bodyPr>
-          <a:lstStyle/>
-          <a:p>
-            <a:pPr algn="l">
-              <a:spcAft>
-                <a:spcPts val="0"/>
-              </a:spcAft>
-            </a:pPr>
-            <a:r>
-              <a:rPr sz="1400" b="0" i="0">
+              <a:rPr sz="1500" b="0" i="0">
                 <a:solidFill>
                   <a:srgbClr val="1F2937"/>
                 </a:solidFill>
                 <a:latin typeface="Calibri"/>
               </a:rPr>
-              <a:t>receives alerts by HTTP POST</a:t>
-            </a:r>
-          </a:p>
-        </p:txBody>
-      </p:sp>
-      <p:sp>
-        <p:nvSpPr>
-          <p:cNvPr id="19" name="Rounded Rectangle 18"/>
+              <a:t>Component diagram</a:t>
+            </a:r>
+          </a:p>
+        </p:txBody>
+      </p:sp>
+      <p:sp>
+        <p:nvSpPr>
+          <p:cNvPr id="14" name="Oval 13"/>
           <p:cNvSpPr/>
           <p:nvPr/>
         </p:nvSpPr>
         <p:spPr>
           <a:xfrm>
-            <a:off x="4343400" y="3611879"/>
-            <a:ext cx="3474720" cy="1828800"/>
-          </a:xfrm>
-          <a:prstGeom prst="roundRect">
-            <a:avLst>
-              <a:gd name="adj" fmla="val 8000"/>
-            </a:avLst>
+            <a:off x="7406640" y="4261103"/>
+            <a:ext cx="164592" cy="164592"/>
+          </a:xfrm>
+          <a:prstGeom prst="ellipse">
+            <a:avLst/>
           </a:prstGeom>
           <a:solidFill>
-            <a:srgbClr val="EEF2F7"/>
+            <a:srgbClr val="14213D"/>
           </a:solidFill>
           <a:ln>
             <a:noFill/>
@@ -10446,14 +9621,14 @@
       </p:sp>
       <p:sp>
         <p:nvSpPr>
-          <p:cNvPr id="20" name="TextBox 19"/>
-          <p:cNvSpPr txBox="1"/>
-          <p:nvPr/>
-        </p:nvSpPr>
-        <p:spPr>
-          <a:xfrm>
-            <a:off x="4617720" y="3867911"/>
-            <a:ext cx="2926080" cy="274320"/>
+          <p:cNvPr id="15" name="TextBox 14"/>
+          <p:cNvSpPr txBox="1"/>
+          <p:nvPr/>
+        </p:nvSpPr>
+        <p:spPr>
+          <a:xfrm>
+            <a:off x="7726679" y="4206240"/>
+            <a:ext cx="3931920" cy="365760"/>
           </a:xfrm>
           <a:prstGeom prst="rect">
             <a:avLst/>
@@ -10472,116 +9647,33 @@
               </a:spcAft>
             </a:pPr>
             <a:r>
-              <a:rPr sz="1200" b="1" i="0">
-                <a:solidFill>
-                  <a:srgbClr val="5B6472"/>
-                </a:solidFill>
-                <a:latin typeface="Calibri"/>
-              </a:rPr>
-              <a:t>LIVE PUSH</a:t>
-            </a:r>
-          </a:p>
-        </p:txBody>
-      </p:sp>
-      <p:sp>
-        <p:nvSpPr>
-          <p:cNvPr id="21" name="TextBox 20"/>
-          <p:cNvSpPr txBox="1"/>
-          <p:nvPr/>
-        </p:nvSpPr>
-        <p:spPr>
-          <a:xfrm>
-            <a:off x="4617720" y="4178807"/>
-            <a:ext cx="2926080" cy="685800"/>
-          </a:xfrm>
-          <a:prstGeom prst="rect">
-            <a:avLst/>
-          </a:prstGeom>
-          <a:noFill/>
-        </p:spPr>
-        <p:txBody>
-          <a:bodyPr wrap="square" lIns="0" rIns="0" tIns="0" bIns="0" anchor="t">
-            <a:spAutoFit/>
-          </a:bodyPr>
-          <a:lstStyle/>
-          <a:p>
-            <a:pPr algn="l">
-              <a:lnSpc>
-                <a:spcPct val="95000"/>
-              </a:lnSpc>
-              <a:spcAft>
-                <a:spcPts val="0"/>
-              </a:spcAft>
-            </a:pPr>
-            <a:r>
-              <a:rPr sz="1900" b="1" i="0">
-                <a:solidFill>
-                  <a:srgbClr val="14213D"/>
-                </a:solidFill>
-                <a:latin typeface="Calibri"/>
-              </a:rPr>
-              <a:t>Socket.IO 4</a:t>
-            </a:r>
-          </a:p>
-        </p:txBody>
-      </p:sp>
-      <p:sp>
-        <p:nvSpPr>
-          <p:cNvPr id="22" name="TextBox 21"/>
-          <p:cNvSpPr txBox="1"/>
-          <p:nvPr/>
-        </p:nvSpPr>
-        <p:spPr>
-          <a:xfrm>
-            <a:off x="4617720" y="4910327"/>
-            <a:ext cx="2926080" cy="411480"/>
-          </a:xfrm>
-          <a:prstGeom prst="rect">
-            <a:avLst/>
-          </a:prstGeom>
-          <a:noFill/>
-        </p:spPr>
-        <p:txBody>
-          <a:bodyPr wrap="square" lIns="0" rIns="0" tIns="0" bIns="0" anchor="t">
-            <a:spAutoFit/>
-          </a:bodyPr>
-          <a:lstStyle/>
-          <a:p>
-            <a:pPr algn="l">
-              <a:spcAft>
-                <a:spcPts val="0"/>
-              </a:spcAft>
-            </a:pPr>
-            <a:r>
-              <a:rPr sz="1400" b="0" i="0">
+              <a:rPr sz="1500" b="0" i="0">
                 <a:solidFill>
                   <a:srgbClr val="1F2937"/>
                 </a:solidFill>
                 <a:latin typeface="Calibri"/>
               </a:rPr>
-              <a:t>alerts reach the browser instantly</a:t>
-            </a:r>
-          </a:p>
-        </p:txBody>
-      </p:sp>
-      <p:sp>
-        <p:nvSpPr>
-          <p:cNvPr id="23" name="Rounded Rectangle 22"/>
+              <a:t>Deployment diagram</a:t>
+            </a:r>
+          </a:p>
+        </p:txBody>
+      </p:sp>
+      <p:sp>
+        <p:nvSpPr>
+          <p:cNvPr id="16" name="Oval 15"/>
           <p:cNvSpPr/>
           <p:nvPr/>
         </p:nvSpPr>
         <p:spPr>
           <a:xfrm>
-            <a:off x="8138160" y="3611879"/>
-            <a:ext cx="3474720" cy="1828800"/>
-          </a:xfrm>
-          <a:prstGeom prst="roundRect">
-            <a:avLst>
-              <a:gd name="adj" fmla="val 8000"/>
-            </a:avLst>
+            <a:off x="7406640" y="4809744"/>
+            <a:ext cx="164592" cy="164592"/>
+          </a:xfrm>
+          <a:prstGeom prst="ellipse">
+            <a:avLst/>
           </a:prstGeom>
           <a:solidFill>
-            <a:srgbClr val="EEF2F7"/>
+            <a:srgbClr val="14213D"/>
           </a:solidFill>
           <a:ln>
             <a:noFill/>
@@ -10612,14 +9704,14 @@
       </p:sp>
       <p:sp>
         <p:nvSpPr>
-          <p:cNvPr id="24" name="TextBox 23"/>
-          <p:cNvSpPr txBox="1"/>
-          <p:nvPr/>
-        </p:nvSpPr>
-        <p:spPr>
-          <a:xfrm>
-            <a:off x="8412480" y="3867911"/>
-            <a:ext cx="2926080" cy="274320"/>
+          <p:cNvPr id="17" name="TextBox 16"/>
+          <p:cNvSpPr txBox="1"/>
+          <p:nvPr/>
+        </p:nvSpPr>
+        <p:spPr>
+          <a:xfrm>
+            <a:off x="7726679" y="4754880"/>
+            <a:ext cx="3931920" cy="365760"/>
           </a:xfrm>
           <a:prstGeom prst="rect">
             <a:avLst/>
@@ -10638,27 +9730,27 @@
               </a:spcAft>
             </a:pPr>
             <a:r>
-              <a:rPr sz="1200" b="1" i="0">
-                <a:solidFill>
-                  <a:srgbClr val="5B6472"/>
-                </a:solidFill>
-                <a:latin typeface="Calibri"/>
-              </a:rPr>
-              <a:t>DASHBOARD</a:t>
-            </a:r>
-          </a:p>
-        </p:txBody>
-      </p:sp>
-      <p:sp>
-        <p:nvSpPr>
-          <p:cNvPr id="25" name="TextBox 24"/>
-          <p:cNvSpPr txBox="1"/>
-          <p:nvPr/>
-        </p:nvSpPr>
-        <p:spPr>
-          <a:xfrm>
-            <a:off x="8412480" y="4178807"/>
-            <a:ext cx="2926080" cy="685800"/>
+              <a:rPr sz="1500" b="0" i="0">
+                <a:solidFill>
+                  <a:srgbClr val="1F2937"/>
+                </a:solidFill>
+                <a:latin typeface="Calibri"/>
+              </a:rPr>
+              <a:t>Flowchart of the port-scan rule</a:t>
+            </a:r>
+          </a:p>
+        </p:txBody>
+      </p:sp>
+      <p:sp>
+        <p:nvSpPr>
+          <p:cNvPr id="18" name="TextBox 17"/>
+          <p:cNvSpPr txBox="1"/>
+          <p:nvPr/>
+        </p:nvSpPr>
+        <p:spPr>
+          <a:xfrm>
+            <a:off x="7406640" y="5394960"/>
+            <a:ext cx="4206240" cy="822960"/>
           </a:xfrm>
           <a:prstGeom prst="rect">
             <a:avLst/>
@@ -10672,52 +9764,28 @@
           <a:lstStyle/>
           <a:p>
             <a:pPr algn="l">
-              <a:lnSpc>
-                <a:spcPct val="95000"/>
-              </a:lnSpc>
               <a:spcAft>
                 <a:spcPts val="0"/>
               </a:spcAft>
             </a:pPr>
             <a:r>
-              <a:rPr sz="1900" b="1" i="0">
+              <a:rPr sz="1400" b="0" i="0">
+                <a:solidFill>
+                  <a:srgbClr val="1F2937"/>
+                </a:solidFill>
+                <a:latin typeface="Calibri"/>
+              </a:rPr>
+              <a:t>All diagrams are in the report, </a:t>
+            </a:r>
+            <a:r>
+              <a:rPr sz="1400" b="1" i="0">
                 <a:solidFill>
                   <a:srgbClr val="14213D"/>
                 </a:solidFill>
                 <a:latin typeface="Calibri"/>
               </a:rPr>
-              <a:t>HTML, CSS, JS + Chart.js</a:t>
-            </a:r>
-          </a:p>
-        </p:txBody>
-      </p:sp>
-      <p:sp>
-        <p:nvSpPr>
-          <p:cNvPr id="26" name="TextBox 25"/>
-          <p:cNvSpPr txBox="1"/>
-          <p:nvPr/>
-        </p:nvSpPr>
-        <p:spPr>
-          <a:xfrm>
-            <a:off x="8412480" y="4910327"/>
-            <a:ext cx="2926080" cy="411480"/>
-          </a:xfrm>
-          <a:prstGeom prst="rect">
-            <a:avLst/>
-          </a:prstGeom>
-          <a:noFill/>
-        </p:spPr>
-        <p:txBody>
-          <a:bodyPr wrap="square" lIns="0" rIns="0" tIns="0" bIns="0" anchor="t">
-            <a:spAutoFit/>
-          </a:bodyPr>
-          <a:lstStyle/>
-          <a:p>
-            <a:pPr algn="l">
-              <a:spcAft>
-                <a:spcPts val="0"/>
-              </a:spcAft>
-            </a:pPr>
+              <a:t>numbered chapter-wise</a:t>
+            </a:r>
             <a:r>
               <a:rPr sz="1400" b="0" i="0">
                 <a:solidFill>
@@ -10725,98 +9793,14 @@
                 </a:solidFill>
                 <a:latin typeface="Calibri"/>
               </a:rPr>
-              <a:t>live chart, table and banner</a:t>
-            </a:r>
-          </a:p>
-        </p:txBody>
-      </p:sp>
-      <p:sp>
-        <p:nvSpPr>
-          <p:cNvPr id="27" name="TextBox 26"/>
-          <p:cNvSpPr txBox="1"/>
-          <p:nvPr/>
-        </p:nvSpPr>
-        <p:spPr>
-          <a:xfrm>
-            <a:off x="548640" y="5806440"/>
-            <a:ext cx="10972800" cy="365760"/>
-          </a:xfrm>
-          <a:prstGeom prst="rect">
-            <a:avLst/>
-          </a:prstGeom>
-          <a:noFill/>
-        </p:spPr>
-        <p:txBody>
-          <a:bodyPr wrap="square" lIns="0" rIns="0" tIns="0" bIns="0" anchor="t">
-            <a:spAutoFit/>
-          </a:bodyPr>
-          <a:lstStyle/>
-          <a:p>
-            <a:pPr algn="l">
-              <a:spcAft>
-                <a:spcPts val="0"/>
-              </a:spcAft>
-            </a:pPr>
-            <a:r>
-              <a:rPr sz="1400" b="1" i="0">
-                <a:solidFill>
-                  <a:srgbClr val="14213D"/>
-                </a:solidFill>
-                <a:latin typeface="Calibri"/>
-              </a:rPr>
-              <a:t>Storage: </a:t>
-            </a:r>
-            <a:r>
-              <a:rPr sz="1400" b="0" i="0">
-                <a:solidFill>
-                  <a:srgbClr val="1F2937"/>
-                </a:solidFill>
-                <a:latin typeface="Calibri"/>
-              </a:rPr>
-              <a:t>JSON alert log  </a:t>
-            </a:r>
-            <a:r>
-              <a:rPr sz="1400" b="1" i="0">
-                <a:solidFill>
-                  <a:srgbClr val="14213D"/>
-                </a:solidFill>
-                <a:latin typeface="Calibri"/>
-              </a:rPr>
-              <a:t>Testing: </a:t>
-            </a:r>
-            <a:r>
-              <a:rPr sz="1400" b="0" i="0">
-                <a:solidFill>
-                  <a:srgbClr val="1F2937"/>
-                </a:solidFill>
-                <a:latin typeface="Calibri"/>
-              </a:rPr>
-              <a:t>unittest, Nmap, Wireshark  </a:t>
-            </a:r>
-            <a:r>
-              <a:rPr sz="1400" b="1" i="0">
-                <a:solidFill>
-                  <a:srgbClr val="14213D"/>
-                </a:solidFill>
-                <a:latin typeface="Calibri"/>
-              </a:rPr>
-              <a:t>Tools: </a:t>
-            </a:r>
-            <a:r>
-              <a:rPr sz="1400" b="0" i="0">
-                <a:solidFill>
-                  <a:srgbClr val="1F2937"/>
-                </a:solidFill>
-                <a:latin typeface="Calibri"/>
-              </a:rPr>
-              <a:t>VS Code, Git, GitHub</a:t>
-            </a:r>
-          </a:p>
-        </p:txBody>
-      </p:sp>
-      <p:sp>
-        <p:nvSpPr>
-          <p:cNvPr id="28" name="TextBox 27"/>
+              <a:t> as Fig. 3.1 to 4.2.</a:t>
+            </a:r>
+          </a:p>
+        </p:txBody>
+      </p:sp>
+      <p:sp>
+        <p:nvSpPr>
+          <p:cNvPr id="19" name="TextBox 18"/>
           <p:cNvSpPr txBox="1"/>
           <p:nvPr/>
         </p:nvSpPr>
@@ -10855,7 +9839,7 @@
       </p:sp>
       <p:sp>
         <p:nvSpPr>
-          <p:cNvPr id="29" name="TextBox 28"/>
+          <p:cNvPr id="20" name="TextBox 19"/>
           <p:cNvSpPr txBox="1"/>
           <p:nvPr/>
         </p:nvSpPr>
@@ -10952,134 +9936,29 @@
                 </a:solidFill>
                 <a:latin typeface="Calibri"/>
               </a:rPr>
-              <a:t>System Design</a:t>
-            </a:r>
-          </a:p>
-        </p:txBody>
-      </p:sp>
-      <p:pic>
-        <p:nvPicPr>
-          <p:cNvPr id="3" name="Picture 2" descr="dfd_level1.png"/>
-          <p:cNvPicPr>
-            <a:picLocks noChangeAspect="1"/>
-          </p:cNvPicPr>
-          <p:nvPr/>
-        </p:nvPicPr>
-        <p:blipFill>
-          <a:blip r:embed="rId2"/>
-          <a:stretch>
-            <a:fillRect/>
-          </a:stretch>
-        </p:blipFill>
-        <p:spPr>
-          <a:xfrm>
-            <a:off x="548640" y="1554480"/>
-            <a:ext cx="6583680" cy="3800019"/>
-          </a:xfrm>
-          <a:prstGeom prst="rect">
-            <a:avLst/>
-          </a:prstGeom>
-          <a:ln w="9525">
-            <a:solidFill>
-              <a:srgbClr val="D5DCE6"/>
-            </a:solidFill>
-          </a:ln>
-        </p:spPr>
-      </p:pic>
-      <p:sp>
-        <p:nvSpPr>
-          <p:cNvPr id="4" name="TextBox 3"/>
-          <p:cNvSpPr txBox="1"/>
-          <p:nvPr/>
-        </p:nvSpPr>
-        <p:spPr>
-          <a:xfrm>
-            <a:off x="548640" y="5445939"/>
-            <a:ext cx="6583680" cy="274320"/>
-          </a:xfrm>
-          <a:prstGeom prst="rect">
-            <a:avLst/>
-          </a:prstGeom>
-          <a:noFill/>
-        </p:spPr>
-        <p:txBody>
-          <a:bodyPr wrap="square" lIns="0" rIns="0" tIns="0" bIns="0" anchor="t">
-            <a:spAutoFit/>
-          </a:bodyPr>
-          <a:lstStyle/>
-          <a:p>
-            <a:pPr algn="ctr">
-              <a:spcAft>
-                <a:spcPts val="0"/>
-              </a:spcAft>
-            </a:pPr>
-            <a:r>
-              <a:rPr sz="1200" b="0" i="0">
-                <a:solidFill>
-                  <a:srgbClr val="5B6472"/>
-                </a:solidFill>
-                <a:latin typeface="Calibri"/>
-              </a:rPr>
-              <a:t>Level-1 Data Flow Diagram</a:t>
-            </a:r>
-          </a:p>
-        </p:txBody>
-      </p:sp>
-      <p:sp>
-        <p:nvSpPr>
-          <p:cNvPr id="5" name="TextBox 4"/>
-          <p:cNvSpPr txBox="1"/>
-          <p:nvPr/>
-        </p:nvSpPr>
-        <p:spPr>
-          <a:xfrm>
-            <a:off x="7406640" y="1554480"/>
-            <a:ext cx="4206240" cy="365760"/>
-          </a:xfrm>
-          <a:prstGeom prst="rect">
-            <a:avLst/>
-          </a:prstGeom>
-          <a:noFill/>
-        </p:spPr>
-        <p:txBody>
-          <a:bodyPr wrap="square" lIns="0" rIns="0" tIns="0" bIns="0" anchor="t">
-            <a:spAutoFit/>
-          </a:bodyPr>
-          <a:lstStyle/>
-          <a:p>
-            <a:pPr algn="l">
-              <a:spcAft>
-                <a:spcPts val="0"/>
-              </a:spcAft>
-            </a:pPr>
-            <a:r>
-              <a:rPr sz="1200" b="1" i="0">
-                <a:solidFill>
-                  <a:srgbClr val="5B6472"/>
-                </a:solidFill>
-                <a:latin typeface="Calibri"/>
-              </a:rPr>
-              <a:t>DESIGN ARTEFACTS</a:t>
-            </a:r>
-          </a:p>
-        </p:txBody>
-      </p:sp>
-      <p:sp>
-        <p:nvSpPr>
-          <p:cNvPr id="6" name="Oval 5"/>
+              <a:t>Detection Rules</a:t>
+            </a:r>
+          </a:p>
+        </p:txBody>
+      </p:sp>
+      <p:sp>
+        <p:nvSpPr>
+          <p:cNvPr id="3" name="Rounded Rectangle 2"/>
           <p:cNvSpPr/>
           <p:nvPr/>
         </p:nvSpPr>
         <p:spPr>
           <a:xfrm>
-            <a:off x="7406640" y="2066544"/>
-            <a:ext cx="164592" cy="164592"/>
-          </a:xfrm>
-          <a:prstGeom prst="ellipse">
-            <a:avLst/>
+            <a:off x="548640" y="1508760"/>
+            <a:ext cx="3474720" cy="3200400"/>
+          </a:xfrm>
+          <a:prstGeom prst="roundRect">
+            <a:avLst>
+              <a:gd name="adj" fmla="val 8000"/>
+            </a:avLst>
           </a:prstGeom>
           <a:solidFill>
-            <a:srgbClr val="14213D"/>
+            <a:srgbClr val="EEF2F7"/>
           </a:solidFill>
           <a:ln>
             <a:noFill/>
@@ -11110,59 +9989,22 @@
       </p:sp>
       <p:sp>
         <p:nvSpPr>
-          <p:cNvPr id="7" name="TextBox 6"/>
-          <p:cNvSpPr txBox="1"/>
-          <p:nvPr/>
-        </p:nvSpPr>
-        <p:spPr>
-          <a:xfrm>
-            <a:off x="7726679" y="2011680"/>
-            <a:ext cx="3931920" cy="365760"/>
-          </a:xfrm>
-          <a:prstGeom prst="rect">
-            <a:avLst/>
-          </a:prstGeom>
-          <a:noFill/>
-        </p:spPr>
-        <p:txBody>
-          <a:bodyPr wrap="square" lIns="0" rIns="0" tIns="0" bIns="0" anchor="t">
-            <a:spAutoFit/>
-          </a:bodyPr>
-          <a:lstStyle/>
-          <a:p>
-            <a:pPr algn="l">
-              <a:spcAft>
-                <a:spcPts val="0"/>
-              </a:spcAft>
-            </a:pPr>
-            <a:r>
-              <a:rPr sz="1500" b="0" i="0">
-                <a:solidFill>
-                  <a:srgbClr val="1F2937"/>
-                </a:solidFill>
-                <a:latin typeface="Calibri"/>
-              </a:rPr>
-              <a:t>Context and level-1 DFDs</a:t>
-            </a:r>
-          </a:p>
-        </p:txBody>
-      </p:sp>
-      <p:sp>
-        <p:nvSpPr>
-          <p:cNvPr id="8" name="Oval 7"/>
+          <p:cNvPr id="4" name="Rounded Rectangle 3"/>
           <p:cNvSpPr/>
           <p:nvPr/>
         </p:nvSpPr>
         <p:spPr>
           <a:xfrm>
-            <a:off x="7406640" y="2615184"/>
-            <a:ext cx="164592" cy="164592"/>
-          </a:xfrm>
-          <a:prstGeom prst="ellipse">
-            <a:avLst/>
+            <a:off x="548640" y="1508760"/>
+            <a:ext cx="3474720" cy="822960"/>
+          </a:xfrm>
+          <a:prstGeom prst="roundRect">
+            <a:avLst>
+              <a:gd name="adj" fmla="val 8000"/>
+            </a:avLst>
           </a:prstGeom>
           <a:solidFill>
-            <a:srgbClr val="14213D"/>
+            <a:srgbClr val="E08A00"/>
           </a:solidFill>
           <a:ln>
             <a:noFill/>
@@ -11193,59 +10035,178 @@
       </p:sp>
       <p:sp>
         <p:nvSpPr>
-          <p:cNvPr id="9" name="TextBox 8"/>
-          <p:cNvSpPr txBox="1"/>
-          <p:nvPr/>
-        </p:nvSpPr>
-        <p:spPr>
-          <a:xfrm>
-            <a:off x="7726679" y="2560320"/>
-            <a:ext cx="3931920" cy="365760"/>
-          </a:xfrm>
-          <a:prstGeom prst="rect">
-            <a:avLst/>
-          </a:prstGeom>
-          <a:noFill/>
-        </p:spPr>
-        <p:txBody>
-          <a:bodyPr wrap="square" lIns="0" rIns="0" tIns="0" bIns="0" anchor="t">
-            <a:spAutoFit/>
-          </a:bodyPr>
-          <a:lstStyle/>
-          <a:p>
-            <a:pPr algn="l">
+          <p:cNvPr id="5" name="TextBox 4"/>
+          <p:cNvSpPr txBox="1"/>
+          <p:nvPr/>
+        </p:nvSpPr>
+        <p:spPr>
+          <a:xfrm>
+            <a:off x="548640" y="1664208"/>
+            <a:ext cx="3474720" cy="548640"/>
+          </a:xfrm>
+          <a:prstGeom prst="rect">
+            <a:avLst/>
+          </a:prstGeom>
+          <a:noFill/>
+        </p:spPr>
+        <p:txBody>
+          <a:bodyPr wrap="square" lIns="0" rIns="0" tIns="0" bIns="0" anchor="t">
+            <a:spAutoFit/>
+          </a:bodyPr>
+          <a:lstStyle/>
+          <a:p>
+            <a:pPr algn="ctr">
               <a:spcAft>
                 <a:spcPts val="0"/>
               </a:spcAft>
             </a:pPr>
             <a:r>
-              <a:rPr sz="1500" b="0" i="0">
+              <a:rPr sz="2200" b="1" i="0">
+                <a:solidFill>
+                  <a:srgbClr val="FFFFFF"/>
+                </a:solidFill>
+                <a:latin typeface="Calibri"/>
+              </a:rPr>
+              <a:t>Port Scan</a:t>
+            </a:r>
+          </a:p>
+        </p:txBody>
+      </p:sp>
+      <p:sp>
+        <p:nvSpPr>
+          <p:cNvPr id="6" name="TextBox 5"/>
+          <p:cNvSpPr txBox="1"/>
+          <p:nvPr/>
+        </p:nvSpPr>
+        <p:spPr>
+          <a:xfrm>
+            <a:off x="822959" y="2697480"/>
+            <a:ext cx="2926080" cy="457200"/>
+          </a:xfrm>
+          <a:prstGeom prst="rect">
+            <a:avLst/>
+          </a:prstGeom>
+          <a:noFill/>
+        </p:spPr>
+        <p:txBody>
+          <a:bodyPr wrap="square" lIns="0" rIns="0" tIns="0" bIns="0" anchor="t">
+            <a:spAutoFit/>
+          </a:bodyPr>
+          <a:lstStyle/>
+          <a:p>
+            <a:pPr algn="ctr">
+              <a:spcAft>
+                <a:spcPts val="0"/>
+              </a:spcAft>
+            </a:pPr>
+            <a:r>
+              <a:rPr sz="1600" b="0" i="0">
                 <a:solidFill>
                   <a:srgbClr val="1F2937"/>
                 </a:solidFill>
                 <a:latin typeface="Calibri"/>
               </a:rPr>
-              <a:t>Use-case diagram</a:t>
-            </a:r>
-          </a:p>
-        </p:txBody>
-      </p:sp>
-      <p:sp>
-        <p:nvSpPr>
-          <p:cNvPr id="10" name="Oval 9"/>
+              <a:t>&gt; 15 distinct ports</a:t>
+            </a:r>
+          </a:p>
+        </p:txBody>
+      </p:sp>
+      <p:sp>
+        <p:nvSpPr>
+          <p:cNvPr id="7" name="TextBox 6"/>
+          <p:cNvSpPr txBox="1"/>
+          <p:nvPr/>
+        </p:nvSpPr>
+        <p:spPr>
+          <a:xfrm>
+            <a:off x="822959" y="3200400"/>
+            <a:ext cx="2926080" cy="457200"/>
+          </a:xfrm>
+          <a:prstGeom prst="rect">
+            <a:avLst/>
+          </a:prstGeom>
+          <a:noFill/>
+        </p:spPr>
+        <p:txBody>
+          <a:bodyPr wrap="square" lIns="0" rIns="0" tIns="0" bIns="0" anchor="t">
+            <a:spAutoFit/>
+          </a:bodyPr>
+          <a:lstStyle/>
+          <a:p>
+            <a:pPr algn="ctr">
+              <a:spcAft>
+                <a:spcPts val="0"/>
+              </a:spcAft>
+            </a:pPr>
+            <a:r>
+              <a:rPr sz="1600" b="0" i="0">
+                <a:solidFill>
+                  <a:srgbClr val="1F2937"/>
+                </a:solidFill>
+                <a:latin typeface="Calibri"/>
+              </a:rPr>
+              <a:t>from one source</a:t>
+            </a:r>
+          </a:p>
+        </p:txBody>
+      </p:sp>
+      <p:sp>
+        <p:nvSpPr>
+          <p:cNvPr id="8" name="TextBox 7"/>
+          <p:cNvSpPr txBox="1"/>
+          <p:nvPr/>
+        </p:nvSpPr>
+        <p:spPr>
+          <a:xfrm>
+            <a:off x="822959" y="3703320"/>
+            <a:ext cx="2926080" cy="457200"/>
+          </a:xfrm>
+          <a:prstGeom prst="rect">
+            <a:avLst/>
+          </a:prstGeom>
+          <a:noFill/>
+        </p:spPr>
+        <p:txBody>
+          <a:bodyPr wrap="square" lIns="0" rIns="0" tIns="0" bIns="0" anchor="t">
+            <a:spAutoFit/>
+          </a:bodyPr>
+          <a:lstStyle/>
+          <a:p>
+            <a:pPr algn="ctr">
+              <a:spcAft>
+                <a:spcPts val="0"/>
+              </a:spcAft>
+            </a:pPr>
+            <a:r>
+              <a:rPr sz="1600" b="0" i="0">
+                <a:solidFill>
+                  <a:srgbClr val="1F2937"/>
+                </a:solidFill>
+                <a:latin typeface="Calibri"/>
+              </a:rPr>
+              <a:t>within 5 seconds</a:t>
+            </a:r>
+          </a:p>
+        </p:txBody>
+      </p:sp>
+      <p:sp>
+        <p:nvSpPr>
+          <p:cNvPr id="9" name="Rounded Rectangle 8"/>
           <p:cNvSpPr/>
           <p:nvPr/>
         </p:nvSpPr>
         <p:spPr>
           <a:xfrm>
-            <a:off x="7406640" y="3163824"/>
-            <a:ext cx="164592" cy="164592"/>
-          </a:xfrm>
-          <a:prstGeom prst="ellipse">
-            <a:avLst/>
+            <a:off x="1737360" y="4251960"/>
+            <a:ext cx="1097280" cy="329184"/>
+          </a:xfrm>
+          <a:prstGeom prst="roundRect">
+            <a:avLst>
+              <a:gd name="adj" fmla="val 50000"/>
+            </a:avLst>
           </a:prstGeom>
           <a:solidFill>
-            <a:srgbClr val="14213D"/>
+            <a:srgbClr val="E08A00"/>
           </a:solidFill>
           <a:ln>
             <a:noFill/>
@@ -11267,68 +10228,40 @@
           </a:fontRef>
         </p:style>
         <p:txBody>
-          <a:bodyPr rtlCol="0" anchor="ctr"/>
+          <a:bodyPr rtlCol="0" anchor="ctr" lIns="0" rIns="0" tIns="0" bIns="0" wrap="square"/>
           <a:lstStyle/>
           <a:p>
             <a:pPr algn="ctr"/>
-          </a:p>
-        </p:txBody>
-      </p:sp>
-      <p:sp>
-        <p:nvSpPr>
-          <p:cNvPr id="11" name="TextBox 10"/>
-          <p:cNvSpPr txBox="1"/>
-          <p:nvPr/>
-        </p:nvSpPr>
-        <p:spPr>
-          <a:xfrm>
-            <a:off x="7726679" y="3108960"/>
-            <a:ext cx="3931920" cy="365760"/>
-          </a:xfrm>
-          <a:prstGeom prst="rect">
-            <a:avLst/>
-          </a:prstGeom>
-          <a:noFill/>
-        </p:spPr>
-        <p:txBody>
-          <a:bodyPr wrap="square" lIns="0" rIns="0" tIns="0" bIns="0" anchor="t">
-            <a:spAutoFit/>
-          </a:bodyPr>
-          <a:lstStyle/>
-          <a:p>
-            <a:pPr algn="l">
-              <a:spcAft>
-                <a:spcPts val="0"/>
-              </a:spcAft>
-            </a:pPr>
-            <a:r>
-              <a:rPr sz="1500" b="0" i="0">
-                <a:solidFill>
-                  <a:srgbClr val="1F2937"/>
-                </a:solidFill>
-                <a:latin typeface="Calibri"/>
-              </a:rPr>
-              <a:t>Sequence diagram</a:t>
-            </a:r>
-          </a:p>
-        </p:txBody>
-      </p:sp>
-      <p:sp>
-        <p:nvSpPr>
-          <p:cNvPr id="12" name="Oval 11"/>
+            <a:r>
+              <a:rPr sz="1200" b="1" i="0">
+                <a:solidFill>
+                  <a:srgbClr val="FFFFFF"/>
+                </a:solidFill>
+                <a:latin typeface="Calibri"/>
+              </a:rPr>
+              <a:t>medium</a:t>
+            </a:r>
+          </a:p>
+        </p:txBody>
+      </p:sp>
+      <p:sp>
+        <p:nvSpPr>
+          <p:cNvPr id="10" name="Rounded Rectangle 9"/>
           <p:cNvSpPr/>
           <p:nvPr/>
         </p:nvSpPr>
         <p:spPr>
           <a:xfrm>
-            <a:off x="7406640" y="3712463"/>
-            <a:ext cx="164592" cy="164592"/>
-          </a:xfrm>
-          <a:prstGeom prst="ellipse">
-            <a:avLst/>
+            <a:off x="4343400" y="1508760"/>
+            <a:ext cx="3474720" cy="3200400"/>
+          </a:xfrm>
+          <a:prstGeom prst="roundRect">
+            <a:avLst>
+              <a:gd name="adj" fmla="val 8000"/>
+            </a:avLst>
           </a:prstGeom>
           <a:solidFill>
-            <a:srgbClr val="14213D"/>
+            <a:srgbClr val="EEF2F7"/>
           </a:solidFill>
           <a:ln>
             <a:noFill/>
@@ -11359,59 +10292,22 @@
       </p:sp>
       <p:sp>
         <p:nvSpPr>
-          <p:cNvPr id="13" name="TextBox 12"/>
-          <p:cNvSpPr txBox="1"/>
-          <p:nvPr/>
-        </p:nvSpPr>
-        <p:spPr>
-          <a:xfrm>
-            <a:off x="7726679" y="3657600"/>
-            <a:ext cx="3931920" cy="365760"/>
-          </a:xfrm>
-          <a:prstGeom prst="rect">
-            <a:avLst/>
-          </a:prstGeom>
-          <a:noFill/>
-        </p:spPr>
-        <p:txBody>
-          <a:bodyPr wrap="square" lIns="0" rIns="0" tIns="0" bIns="0" anchor="t">
-            <a:spAutoFit/>
-          </a:bodyPr>
-          <a:lstStyle/>
-          <a:p>
-            <a:pPr algn="l">
-              <a:spcAft>
-                <a:spcPts val="0"/>
-              </a:spcAft>
-            </a:pPr>
-            <a:r>
-              <a:rPr sz="1500" b="0" i="0">
-                <a:solidFill>
-                  <a:srgbClr val="1F2937"/>
-                </a:solidFill>
-                <a:latin typeface="Calibri"/>
-              </a:rPr>
-              <a:t>Component diagram</a:t>
-            </a:r>
-          </a:p>
-        </p:txBody>
-      </p:sp>
-      <p:sp>
-        <p:nvSpPr>
-          <p:cNvPr id="14" name="Oval 13"/>
+          <p:cNvPr id="11" name="Rounded Rectangle 10"/>
           <p:cNvSpPr/>
           <p:nvPr/>
         </p:nvSpPr>
         <p:spPr>
           <a:xfrm>
-            <a:off x="7406640" y="4261103"/>
-            <a:ext cx="164592" cy="164592"/>
-          </a:xfrm>
-          <a:prstGeom prst="ellipse">
-            <a:avLst/>
+            <a:off x="4343400" y="1508760"/>
+            <a:ext cx="3474720" cy="822960"/>
+          </a:xfrm>
+          <a:prstGeom prst="roundRect">
+            <a:avLst>
+              <a:gd name="adj" fmla="val 8000"/>
+            </a:avLst>
           </a:prstGeom>
           <a:solidFill>
-            <a:srgbClr val="14213D"/>
+            <a:srgbClr val="C62828"/>
           </a:solidFill>
           <a:ln>
             <a:noFill/>
@@ -11442,59 +10338,178 @@
       </p:sp>
       <p:sp>
         <p:nvSpPr>
+          <p:cNvPr id="12" name="TextBox 11"/>
+          <p:cNvSpPr txBox="1"/>
+          <p:nvPr/>
+        </p:nvSpPr>
+        <p:spPr>
+          <a:xfrm>
+            <a:off x="4343400" y="1664208"/>
+            <a:ext cx="3474720" cy="548640"/>
+          </a:xfrm>
+          <a:prstGeom prst="rect">
+            <a:avLst/>
+          </a:prstGeom>
+          <a:noFill/>
+        </p:spPr>
+        <p:txBody>
+          <a:bodyPr wrap="square" lIns="0" rIns="0" tIns="0" bIns="0" anchor="t">
+            <a:spAutoFit/>
+          </a:bodyPr>
+          <a:lstStyle/>
+          <a:p>
+            <a:pPr algn="ctr">
+              <a:spcAft>
+                <a:spcPts val="0"/>
+              </a:spcAft>
+            </a:pPr>
+            <a:r>
+              <a:rPr sz="2200" b="1" i="0">
+                <a:solidFill>
+                  <a:srgbClr val="FFFFFF"/>
+                </a:solidFill>
+                <a:latin typeface="Calibri"/>
+              </a:rPr>
+              <a:t>SYN Flood</a:t>
+            </a:r>
+          </a:p>
+        </p:txBody>
+      </p:sp>
+      <p:sp>
+        <p:nvSpPr>
+          <p:cNvPr id="13" name="TextBox 12"/>
+          <p:cNvSpPr txBox="1"/>
+          <p:nvPr/>
+        </p:nvSpPr>
+        <p:spPr>
+          <a:xfrm>
+            <a:off x="4617720" y="2697480"/>
+            <a:ext cx="2926080" cy="457200"/>
+          </a:xfrm>
+          <a:prstGeom prst="rect">
+            <a:avLst/>
+          </a:prstGeom>
+          <a:noFill/>
+        </p:spPr>
+        <p:txBody>
+          <a:bodyPr wrap="square" lIns="0" rIns="0" tIns="0" bIns="0" anchor="t">
+            <a:spAutoFit/>
+          </a:bodyPr>
+          <a:lstStyle/>
+          <a:p>
+            <a:pPr algn="ctr">
+              <a:spcAft>
+                <a:spcPts val="0"/>
+              </a:spcAft>
+            </a:pPr>
+            <a:r>
+              <a:rPr sz="1600" b="0" i="0">
+                <a:solidFill>
+                  <a:srgbClr val="1F2937"/>
+                </a:solidFill>
+                <a:latin typeface="Calibri"/>
+              </a:rPr>
+              <a:t>100+ half-open SYNs</a:t>
+            </a:r>
+          </a:p>
+        </p:txBody>
+      </p:sp>
+      <p:sp>
+        <p:nvSpPr>
+          <p:cNvPr id="14" name="TextBox 13"/>
+          <p:cNvSpPr txBox="1"/>
+          <p:nvPr/>
+        </p:nvSpPr>
+        <p:spPr>
+          <a:xfrm>
+            <a:off x="4617720" y="3200400"/>
+            <a:ext cx="2926080" cy="457200"/>
+          </a:xfrm>
+          <a:prstGeom prst="rect">
+            <a:avLst/>
+          </a:prstGeom>
+          <a:noFill/>
+        </p:spPr>
+        <p:txBody>
+          <a:bodyPr wrap="square" lIns="0" rIns="0" tIns="0" bIns="0" anchor="t">
+            <a:spAutoFit/>
+          </a:bodyPr>
+          <a:lstStyle/>
+          <a:p>
+            <a:pPr algn="ctr">
+              <a:spcAft>
+                <a:spcPts val="0"/>
+              </a:spcAft>
+            </a:pPr>
+            <a:r>
+              <a:rPr sz="1600" b="0" i="0">
+                <a:solidFill>
+                  <a:srgbClr val="1F2937"/>
+                </a:solidFill>
+                <a:latin typeface="Calibri"/>
+              </a:rPr>
+              <a:t>to one host</a:t>
+            </a:r>
+          </a:p>
+        </p:txBody>
+      </p:sp>
+      <p:sp>
+        <p:nvSpPr>
           <p:cNvPr id="15" name="TextBox 14"/>
           <p:cNvSpPr txBox="1"/>
           <p:nvPr/>
         </p:nvSpPr>
         <p:spPr>
           <a:xfrm>
-            <a:off x="7726679" y="4206240"/>
-            <a:ext cx="3931920" cy="365760"/>
-          </a:xfrm>
-          <a:prstGeom prst="rect">
-            <a:avLst/>
-          </a:prstGeom>
-          <a:noFill/>
-        </p:spPr>
-        <p:txBody>
-          <a:bodyPr wrap="square" lIns="0" rIns="0" tIns="0" bIns="0" anchor="t">
-            <a:spAutoFit/>
-          </a:bodyPr>
-          <a:lstStyle/>
-          <a:p>
-            <a:pPr algn="l">
+            <a:off x="4617720" y="3703320"/>
+            <a:ext cx="2926080" cy="457200"/>
+          </a:xfrm>
+          <a:prstGeom prst="rect">
+            <a:avLst/>
+          </a:prstGeom>
+          <a:noFill/>
+        </p:spPr>
+        <p:txBody>
+          <a:bodyPr wrap="square" lIns="0" rIns="0" tIns="0" bIns="0" anchor="t">
+            <a:spAutoFit/>
+          </a:bodyPr>
+          <a:lstStyle/>
+          <a:p>
+            <a:pPr algn="ctr">
               <a:spcAft>
                 <a:spcPts val="0"/>
               </a:spcAft>
             </a:pPr>
             <a:r>
-              <a:rPr sz="1500" b="0" i="0">
+              <a:rPr sz="1600" b="0" i="0">
                 <a:solidFill>
                   <a:srgbClr val="1F2937"/>
                 </a:solidFill>
                 <a:latin typeface="Calibri"/>
               </a:rPr>
-              <a:t>Deployment diagram</a:t>
-            </a:r>
-          </a:p>
-        </p:txBody>
-      </p:sp>
-      <p:sp>
-        <p:nvSpPr>
-          <p:cNvPr id="16" name="Oval 15"/>
+              <a:t>few completed</a:t>
+            </a:r>
+          </a:p>
+        </p:txBody>
+      </p:sp>
+      <p:sp>
+        <p:nvSpPr>
+          <p:cNvPr id="16" name="Rounded Rectangle 15"/>
           <p:cNvSpPr/>
           <p:nvPr/>
         </p:nvSpPr>
         <p:spPr>
           <a:xfrm>
-            <a:off x="7406640" y="4809744"/>
-            <a:ext cx="164592" cy="164592"/>
-          </a:xfrm>
-          <a:prstGeom prst="ellipse">
-            <a:avLst/>
+            <a:off x="5532120" y="4251960"/>
+            <a:ext cx="1097280" cy="329184"/>
+          </a:xfrm>
+          <a:prstGeom prst="roundRect">
+            <a:avLst>
+              <a:gd name="adj" fmla="val 50000"/>
+            </a:avLst>
           </a:prstGeom>
           <a:solidFill>
-            <a:srgbClr val="14213D"/>
+            <a:srgbClr val="C62828"/>
           </a:solidFill>
           <a:ln>
             <a:noFill/>
@@ -11516,6 +10531,61 @@
           </a:fontRef>
         </p:style>
         <p:txBody>
+          <a:bodyPr rtlCol="0" anchor="ctr" lIns="0" rIns="0" tIns="0" bIns="0" wrap="square"/>
+          <a:lstStyle/>
+          <a:p>
+            <a:pPr algn="ctr"/>
+            <a:r>
+              <a:rPr sz="1200" b="1" i="0">
+                <a:solidFill>
+                  <a:srgbClr val="FFFFFF"/>
+                </a:solidFill>
+                <a:latin typeface="Calibri"/>
+              </a:rPr>
+              <a:t>high</a:t>
+            </a:r>
+          </a:p>
+        </p:txBody>
+      </p:sp>
+      <p:sp>
+        <p:nvSpPr>
+          <p:cNvPr id="17" name="Rounded Rectangle 16"/>
+          <p:cNvSpPr/>
+          <p:nvPr/>
+        </p:nvSpPr>
+        <p:spPr>
+          <a:xfrm>
+            <a:off x="8138160" y="1508760"/>
+            <a:ext cx="3474720" cy="3200400"/>
+          </a:xfrm>
+          <a:prstGeom prst="roundRect">
+            <a:avLst>
+              <a:gd name="adj" fmla="val 8000"/>
+            </a:avLst>
+          </a:prstGeom>
+          <a:solidFill>
+            <a:srgbClr val="EEF2F7"/>
+          </a:solidFill>
+          <a:ln>
+            <a:noFill/>
+          </a:ln>
+          <a:effectLst/>
+        </p:spPr>
+        <p:style>
+          <a:lnRef idx="1">
+            <a:schemeClr val="accent1"/>
+          </a:lnRef>
+          <a:fillRef idx="3">
+            <a:schemeClr val="accent1"/>
+          </a:fillRef>
+          <a:effectRef idx="2">
+            <a:schemeClr val="accent1"/>
+          </a:effectRef>
+          <a:fontRef idx="minor">
+            <a:schemeClr val="lt1"/>
+          </a:fontRef>
+        </p:style>
+        <p:txBody>
           <a:bodyPr rtlCol="0" anchor="ctr"/>
           <a:lstStyle/>
           <a:p>
@@ -11525,14 +10595,271 @@
       </p:sp>
       <p:sp>
         <p:nvSpPr>
-          <p:cNvPr id="17" name="TextBox 16"/>
-          <p:cNvSpPr txBox="1"/>
-          <p:nvPr/>
-        </p:nvSpPr>
-        <p:spPr>
-          <a:xfrm>
-            <a:off x="7726679" y="4754880"/>
-            <a:ext cx="3931920" cy="365760"/>
+          <p:cNvPr id="18" name="Rounded Rectangle 17"/>
+          <p:cNvSpPr/>
+          <p:nvPr/>
+        </p:nvSpPr>
+        <p:spPr>
+          <a:xfrm>
+            <a:off x="8138160" y="1508760"/>
+            <a:ext cx="3474720" cy="822960"/>
+          </a:xfrm>
+          <a:prstGeom prst="roundRect">
+            <a:avLst>
+              <a:gd name="adj" fmla="val 8000"/>
+            </a:avLst>
+          </a:prstGeom>
+          <a:solidFill>
+            <a:srgbClr val="7B1FA2"/>
+          </a:solidFill>
+          <a:ln>
+            <a:noFill/>
+          </a:ln>
+          <a:effectLst/>
+        </p:spPr>
+        <p:style>
+          <a:lnRef idx="1">
+            <a:schemeClr val="accent1"/>
+          </a:lnRef>
+          <a:fillRef idx="3">
+            <a:schemeClr val="accent1"/>
+          </a:fillRef>
+          <a:effectRef idx="2">
+            <a:schemeClr val="accent1"/>
+          </a:effectRef>
+          <a:fontRef idx="minor">
+            <a:schemeClr val="lt1"/>
+          </a:fontRef>
+        </p:style>
+        <p:txBody>
+          <a:bodyPr rtlCol="0" anchor="ctr"/>
+          <a:lstStyle/>
+          <a:p>
+            <a:pPr algn="ctr"/>
+          </a:p>
+        </p:txBody>
+      </p:sp>
+      <p:sp>
+        <p:nvSpPr>
+          <p:cNvPr id="19" name="TextBox 18"/>
+          <p:cNvSpPr txBox="1"/>
+          <p:nvPr/>
+        </p:nvSpPr>
+        <p:spPr>
+          <a:xfrm>
+            <a:off x="8138160" y="1664208"/>
+            <a:ext cx="3474720" cy="548640"/>
+          </a:xfrm>
+          <a:prstGeom prst="rect">
+            <a:avLst/>
+          </a:prstGeom>
+          <a:noFill/>
+        </p:spPr>
+        <p:txBody>
+          <a:bodyPr wrap="square" lIns="0" rIns="0" tIns="0" bIns="0" anchor="t">
+            <a:spAutoFit/>
+          </a:bodyPr>
+          <a:lstStyle/>
+          <a:p>
+            <a:pPr algn="ctr">
+              <a:spcAft>
+                <a:spcPts val="0"/>
+              </a:spcAft>
+            </a:pPr>
+            <a:r>
+              <a:rPr sz="2200" b="1" i="0">
+                <a:solidFill>
+                  <a:srgbClr val="FFFFFF"/>
+                </a:solidFill>
+                <a:latin typeface="Calibri"/>
+              </a:rPr>
+              <a:t>ARP Spoofing</a:t>
+            </a:r>
+          </a:p>
+        </p:txBody>
+      </p:sp>
+      <p:sp>
+        <p:nvSpPr>
+          <p:cNvPr id="20" name="TextBox 19"/>
+          <p:cNvSpPr txBox="1"/>
+          <p:nvPr/>
+        </p:nvSpPr>
+        <p:spPr>
+          <a:xfrm>
+            <a:off x="8412480" y="2697480"/>
+            <a:ext cx="2926080" cy="457200"/>
+          </a:xfrm>
+          <a:prstGeom prst="rect">
+            <a:avLst/>
+          </a:prstGeom>
+          <a:noFill/>
+        </p:spPr>
+        <p:txBody>
+          <a:bodyPr wrap="square" lIns="0" rIns="0" tIns="0" bIns="0" anchor="t">
+            <a:spAutoFit/>
+          </a:bodyPr>
+          <a:lstStyle/>
+          <a:p>
+            <a:pPr algn="ctr">
+              <a:spcAft>
+                <a:spcPts val="0"/>
+              </a:spcAft>
+            </a:pPr>
+            <a:r>
+              <a:rPr sz="1600" b="0" i="0">
+                <a:solidFill>
+                  <a:srgbClr val="1F2937"/>
+                </a:solidFill>
+                <a:latin typeface="Calibri"/>
+              </a:rPr>
+              <a:t>gateway IP seen</a:t>
+            </a:r>
+          </a:p>
+        </p:txBody>
+      </p:sp>
+      <p:sp>
+        <p:nvSpPr>
+          <p:cNvPr id="21" name="TextBox 20"/>
+          <p:cNvSpPr txBox="1"/>
+          <p:nvPr/>
+        </p:nvSpPr>
+        <p:spPr>
+          <a:xfrm>
+            <a:off x="8412480" y="3200400"/>
+            <a:ext cx="2926080" cy="457200"/>
+          </a:xfrm>
+          <a:prstGeom prst="rect">
+            <a:avLst/>
+          </a:prstGeom>
+          <a:noFill/>
+        </p:spPr>
+        <p:txBody>
+          <a:bodyPr wrap="square" lIns="0" rIns="0" tIns="0" bIns="0" anchor="t">
+            <a:spAutoFit/>
+          </a:bodyPr>
+          <a:lstStyle/>
+          <a:p>
+            <a:pPr algn="ctr">
+              <a:spcAft>
+                <a:spcPts val="0"/>
+              </a:spcAft>
+            </a:pPr>
+            <a:r>
+              <a:rPr sz="1600" b="0" i="0">
+                <a:solidFill>
+                  <a:srgbClr val="1F2937"/>
+                </a:solidFill>
+                <a:latin typeface="Calibri"/>
+              </a:rPr>
+              <a:t>with a different</a:t>
+            </a:r>
+          </a:p>
+        </p:txBody>
+      </p:sp>
+      <p:sp>
+        <p:nvSpPr>
+          <p:cNvPr id="22" name="TextBox 21"/>
+          <p:cNvSpPr txBox="1"/>
+          <p:nvPr/>
+        </p:nvSpPr>
+        <p:spPr>
+          <a:xfrm>
+            <a:off x="8412480" y="3703320"/>
+            <a:ext cx="2926080" cy="457200"/>
+          </a:xfrm>
+          <a:prstGeom prst="rect">
+            <a:avLst/>
+          </a:prstGeom>
+          <a:noFill/>
+        </p:spPr>
+        <p:txBody>
+          <a:bodyPr wrap="square" lIns="0" rIns="0" tIns="0" bIns="0" anchor="t">
+            <a:spAutoFit/>
+          </a:bodyPr>
+          <a:lstStyle/>
+          <a:p>
+            <a:pPr algn="ctr">
+              <a:spcAft>
+                <a:spcPts val="0"/>
+              </a:spcAft>
+            </a:pPr>
+            <a:r>
+              <a:rPr sz="1600" b="0" i="0">
+                <a:solidFill>
+                  <a:srgbClr val="1F2937"/>
+                </a:solidFill>
+                <a:latin typeface="Calibri"/>
+              </a:rPr>
+              <a:t>MAC address</a:t>
+            </a:r>
+          </a:p>
+        </p:txBody>
+      </p:sp>
+      <p:sp>
+        <p:nvSpPr>
+          <p:cNvPr id="23" name="Rounded Rectangle 22"/>
+          <p:cNvSpPr/>
+          <p:nvPr/>
+        </p:nvSpPr>
+        <p:spPr>
+          <a:xfrm>
+            <a:off x="9326880" y="4251960"/>
+            <a:ext cx="1097280" cy="329184"/>
+          </a:xfrm>
+          <a:prstGeom prst="roundRect">
+            <a:avLst>
+              <a:gd name="adj" fmla="val 50000"/>
+            </a:avLst>
+          </a:prstGeom>
+          <a:solidFill>
+            <a:srgbClr val="7B1FA2"/>
+          </a:solidFill>
+          <a:ln>
+            <a:noFill/>
+          </a:ln>
+          <a:effectLst/>
+        </p:spPr>
+        <p:style>
+          <a:lnRef idx="1">
+            <a:schemeClr val="accent1"/>
+          </a:lnRef>
+          <a:fillRef idx="3">
+            <a:schemeClr val="accent1"/>
+          </a:fillRef>
+          <a:effectRef idx="2">
+            <a:schemeClr val="accent1"/>
+          </a:effectRef>
+          <a:fontRef idx="minor">
+            <a:schemeClr val="lt1"/>
+          </a:fontRef>
+        </p:style>
+        <p:txBody>
+          <a:bodyPr rtlCol="0" anchor="ctr" lIns="0" rIns="0" tIns="0" bIns="0" wrap="square"/>
+          <a:lstStyle/>
+          <a:p>
+            <a:pPr algn="ctr"/>
+            <a:r>
+              <a:rPr sz="1200" b="1" i="0">
+                <a:solidFill>
+                  <a:srgbClr val="FFFFFF"/>
+                </a:solidFill>
+                <a:latin typeface="Calibri"/>
+              </a:rPr>
+              <a:t>critical</a:t>
+            </a:r>
+          </a:p>
+        </p:txBody>
+      </p:sp>
+      <p:sp>
+        <p:nvSpPr>
+          <p:cNvPr id="24" name="TextBox 23"/>
+          <p:cNvSpPr txBox="1"/>
+          <p:nvPr/>
+        </p:nvSpPr>
+        <p:spPr>
+          <a:xfrm>
+            <a:off x="548640" y="5029200"/>
+            <a:ext cx="11064240" cy="1097280"/>
           </a:xfrm>
           <a:prstGeom prst="rect">
             <a:avLst/>
@@ -11546,82 +10873,37 @@
           <a:lstStyle/>
           <a:p>
             <a:pPr algn="l">
+              <a:lnSpc>
+                <a:spcPct val="110000"/>
+              </a:lnSpc>
               <a:spcAft>
                 <a:spcPts val="0"/>
               </a:spcAft>
             </a:pPr>
             <a:r>
-              <a:rPr sz="1500" b="0" i="0">
+              <a:rPr sz="1600" b="1" i="0">
+                <a:solidFill>
+                  <a:srgbClr val="14213D"/>
+                </a:solidFill>
+                <a:latin typeface="Calibri"/>
+              </a:rPr>
+              <a:t>All rules are deterministic. </a:t>
+            </a:r>
+            <a:r>
+              <a:rPr sz="1600" b="0" i="0">
                 <a:solidFill>
                   <a:srgbClr val="1F2937"/>
                 </a:solidFill>
                 <a:latin typeface="Calibri"/>
               </a:rPr>
-              <a:t>Flowchart of the port-scan rule</a:t>
-            </a:r>
-          </a:p>
-        </p:txBody>
-      </p:sp>
-      <p:sp>
-        <p:nvSpPr>
-          <p:cNvPr id="18" name="TextBox 17"/>
-          <p:cNvSpPr txBox="1"/>
-          <p:nvPr/>
-        </p:nvSpPr>
-        <p:spPr>
-          <a:xfrm>
-            <a:off x="7406640" y="5394960"/>
-            <a:ext cx="4206240" cy="822960"/>
-          </a:xfrm>
-          <a:prstGeom prst="rect">
-            <a:avLst/>
-          </a:prstGeom>
-          <a:noFill/>
-        </p:spPr>
-        <p:txBody>
-          <a:bodyPr wrap="square" lIns="0" rIns="0" tIns="0" bIns="0" anchor="t">
-            <a:spAutoFit/>
-          </a:bodyPr>
-          <a:lstStyle/>
-          <a:p>
-            <a:pPr algn="l">
-              <a:spcAft>
-                <a:spcPts val="0"/>
-              </a:spcAft>
-            </a:pPr>
-            <a:r>
-              <a:rPr sz="1400" b="0" i="0">
-                <a:solidFill>
-                  <a:srgbClr val="1F2937"/>
-                </a:solidFill>
-                <a:latin typeface="Calibri"/>
-              </a:rPr>
-              <a:t>All diagrams are in the report, </a:t>
-            </a:r>
-            <a:r>
-              <a:rPr sz="1400" b="1" i="0">
-                <a:solidFill>
-                  <a:srgbClr val="14213D"/>
-                </a:solidFill>
-                <a:latin typeface="Calibri"/>
-              </a:rPr>
-              <a:t>numbered chapter-wise</a:t>
-            </a:r>
-            <a:r>
-              <a:rPr sz="1400" b="0" i="0">
-                <a:solidFill>
-                  <a:srgbClr val="1F2937"/>
-                </a:solidFill>
-                <a:latin typeface="Calibri"/>
-              </a:rPr>
-              <a:t> as Fig. 3.1 to 4.2.</a:t>
-            </a:r>
-          </a:p>
-        </p:txBody>
-      </p:sp>
-      <p:sp>
-        <p:nvSpPr>
-          <p:cNvPr id="19" name="TextBox 18"/>
+              <a:t>Each keeps a few seconds of history in a sliding window, compares a count against a threshold, and raises an alert with a cool-down so one attack gives one alert.</a:t>
+            </a:r>
+          </a:p>
+        </p:txBody>
+      </p:sp>
+      <p:sp>
+        <p:nvSpPr>
+          <p:cNvPr id="25" name="TextBox 24"/>
           <p:cNvSpPr txBox="1"/>
           <p:nvPr/>
         </p:nvSpPr>
@@ -11660,7 +10942,7 @@
       </p:sp>
       <p:sp>
         <p:nvSpPr>
-          <p:cNvPr id="20" name="TextBox 19"/>
+          <p:cNvPr id="26" name="TextBox 25"/>
           <p:cNvSpPr txBox="1"/>
           <p:nvPr/>
         </p:nvSpPr>
@@ -11757,7 +11039,7 @@
                 </a:solidFill>
                 <a:latin typeface="Calibri"/>
               </a:rPr>
-              <a:t>Detection Rules</a:t>
+              <a:t>Testing</a:t>
             </a:r>
           </a:p>
         </p:txBody>
@@ -11771,7 +11053,7 @@
         <p:spPr>
           <a:xfrm>
             <a:off x="548640" y="1508760"/>
-            <a:ext cx="3474720" cy="3200400"/>
+            <a:ext cx="5394960" cy="1828800"/>
           </a:xfrm>
           <a:prstGeom prst="roundRect">
             <a:avLst>
@@ -11810,271 +11092,163 @@
       </p:sp>
       <p:sp>
         <p:nvSpPr>
-          <p:cNvPr id="4" name="Rounded Rectangle 3"/>
+          <p:cNvPr id="4" name="TextBox 3"/>
+          <p:cNvSpPr txBox="1"/>
+          <p:nvPr/>
+        </p:nvSpPr>
+        <p:spPr>
+          <a:xfrm>
+            <a:off x="822960" y="1737360"/>
+            <a:ext cx="4846320" cy="365760"/>
+          </a:xfrm>
+          <a:prstGeom prst="rect">
+            <a:avLst/>
+          </a:prstGeom>
+          <a:noFill/>
+        </p:spPr>
+        <p:txBody>
+          <a:bodyPr wrap="square" lIns="0" rIns="0" tIns="0" bIns="0" anchor="t">
+            <a:spAutoFit/>
+          </a:bodyPr>
+          <a:lstStyle/>
+          <a:p>
+            <a:pPr algn="l">
+              <a:spcAft>
+                <a:spcPts val="0"/>
+              </a:spcAft>
+            </a:pPr>
+            <a:r>
+              <a:rPr sz="1300" b="1" i="0">
+                <a:solidFill>
+                  <a:srgbClr val="5B6472"/>
+                </a:solidFill>
+                <a:latin typeface="Calibri"/>
+              </a:rPr>
+              <a:t>UNIT TESTS</a:t>
+            </a:r>
+          </a:p>
+        </p:txBody>
+      </p:sp>
+      <p:sp>
+        <p:nvSpPr>
+          <p:cNvPr id="5" name="TextBox 4"/>
+          <p:cNvSpPr txBox="1"/>
+          <p:nvPr/>
+        </p:nvSpPr>
+        <p:spPr>
+          <a:xfrm>
+            <a:off x="822960" y="2103120"/>
+            <a:ext cx="1828800" cy="914400"/>
+          </a:xfrm>
+          <a:prstGeom prst="rect">
+            <a:avLst/>
+          </a:prstGeom>
+          <a:noFill/>
+        </p:spPr>
+        <p:txBody>
+          <a:bodyPr wrap="square" lIns="0" rIns="0" tIns="0" bIns="0" anchor="t">
+            <a:spAutoFit/>
+          </a:bodyPr>
+          <a:lstStyle/>
+          <a:p>
+            <a:pPr algn="l">
+              <a:spcAft>
+                <a:spcPts val="0"/>
+              </a:spcAft>
+            </a:pPr>
+            <a:r>
+              <a:rPr sz="4400" b="1" i="0">
+                <a:solidFill>
+                  <a:srgbClr val="1B7F73"/>
+                </a:solidFill>
+                <a:latin typeface="Calibri"/>
+              </a:rPr>
+              <a:t>10 / 10</a:t>
+            </a:r>
+          </a:p>
+        </p:txBody>
+      </p:sp>
+      <p:sp>
+        <p:nvSpPr>
+          <p:cNvPr id="6" name="TextBox 5"/>
+          <p:cNvSpPr txBox="1"/>
+          <p:nvPr/>
+        </p:nvSpPr>
+        <p:spPr>
+          <a:xfrm>
+            <a:off x="2926080" y="2240280"/>
+            <a:ext cx="2926080" cy="914400"/>
+          </a:xfrm>
+          <a:prstGeom prst="rect">
+            <a:avLst/>
+          </a:prstGeom>
+          <a:noFill/>
+        </p:spPr>
+        <p:txBody>
+          <a:bodyPr wrap="square" lIns="0" rIns="0" tIns="0" bIns="0" anchor="t">
+            <a:spAutoFit/>
+          </a:bodyPr>
+          <a:lstStyle/>
+          <a:p>
+            <a:pPr algn="l">
+              <a:spcAft>
+                <a:spcPts val="200"/>
+              </a:spcAft>
+            </a:pPr>
+            <a:r>
+              <a:rPr sz="1500" b="0" i="0">
+                <a:solidFill>
+                  <a:srgbClr val="1F2937"/>
+                </a:solidFill>
+                <a:latin typeface="Calibri"/>
+              </a:rPr>
+              <a:t>tests passing</a:t>
+            </a:r>
+          </a:p>
+          <a:p>
+            <a:pPr algn="l">
+              <a:spcAft>
+                <a:spcPts val="200"/>
+              </a:spcAft>
+            </a:pPr>
+            <a:r>
+              <a:rPr sz="1500" b="0" i="0">
+                <a:solidFill>
+                  <a:srgbClr val="1F2937"/>
+                </a:solidFill>
+                <a:latin typeface="Calibri"/>
+              </a:rPr>
+              <a:t>one per rule, with</a:t>
+            </a:r>
+          </a:p>
+          <a:p>
+            <a:pPr algn="l">
+              <a:spcAft>
+                <a:spcPts val="200"/>
+              </a:spcAft>
+            </a:pPr>
+            <a:r>
+              <a:rPr sz="1500" b="0" i="0">
+                <a:solidFill>
+                  <a:srgbClr val="1F2937"/>
+                </a:solidFill>
+                <a:latin typeface="Calibri"/>
+              </a:rPr>
+              <a:t>positive and negative cases</a:t>
+            </a:r>
+          </a:p>
+        </p:txBody>
+      </p:sp>
+      <p:sp>
+        <p:nvSpPr>
+          <p:cNvPr id="7" name="Rounded Rectangle 6"/>
           <p:cNvSpPr/>
           <p:nvPr/>
         </p:nvSpPr>
         <p:spPr>
           <a:xfrm>
-            <a:off x="548640" y="1508760"/>
-            <a:ext cx="3474720" cy="822960"/>
-          </a:xfrm>
-          <a:prstGeom prst="roundRect">
-            <a:avLst>
-              <a:gd name="adj" fmla="val 8000"/>
-            </a:avLst>
-          </a:prstGeom>
-          <a:solidFill>
-            <a:srgbClr val="E08A00"/>
-          </a:solidFill>
-          <a:ln>
-            <a:noFill/>
-          </a:ln>
-          <a:effectLst/>
-        </p:spPr>
-        <p:style>
-          <a:lnRef idx="1">
-            <a:schemeClr val="accent1"/>
-          </a:lnRef>
-          <a:fillRef idx="3">
-            <a:schemeClr val="accent1"/>
-          </a:fillRef>
-          <a:effectRef idx="2">
-            <a:schemeClr val="accent1"/>
-          </a:effectRef>
-          <a:fontRef idx="minor">
-            <a:schemeClr val="lt1"/>
-          </a:fontRef>
-        </p:style>
-        <p:txBody>
-          <a:bodyPr rtlCol="0" anchor="ctr"/>
-          <a:lstStyle/>
-          <a:p>
-            <a:pPr algn="ctr"/>
-          </a:p>
-        </p:txBody>
-      </p:sp>
-      <p:sp>
-        <p:nvSpPr>
-          <p:cNvPr id="5" name="TextBox 4"/>
-          <p:cNvSpPr txBox="1"/>
-          <p:nvPr/>
-        </p:nvSpPr>
-        <p:spPr>
-          <a:xfrm>
-            <a:off x="548640" y="1664208"/>
-            <a:ext cx="3474720" cy="548640"/>
-          </a:xfrm>
-          <a:prstGeom prst="rect">
-            <a:avLst/>
-          </a:prstGeom>
-          <a:noFill/>
-        </p:spPr>
-        <p:txBody>
-          <a:bodyPr wrap="square" lIns="0" rIns="0" tIns="0" bIns="0" anchor="t">
-            <a:spAutoFit/>
-          </a:bodyPr>
-          <a:lstStyle/>
-          <a:p>
-            <a:pPr algn="ctr">
-              <a:spcAft>
-                <a:spcPts val="0"/>
-              </a:spcAft>
-            </a:pPr>
-            <a:r>
-              <a:rPr sz="2200" b="1" i="0">
-                <a:solidFill>
-                  <a:srgbClr val="FFFFFF"/>
-                </a:solidFill>
-                <a:latin typeface="Calibri"/>
-              </a:rPr>
-              <a:t>Port Scan</a:t>
-            </a:r>
-          </a:p>
-        </p:txBody>
-      </p:sp>
-      <p:sp>
-        <p:nvSpPr>
-          <p:cNvPr id="6" name="TextBox 5"/>
-          <p:cNvSpPr txBox="1"/>
-          <p:nvPr/>
-        </p:nvSpPr>
-        <p:spPr>
-          <a:xfrm>
-            <a:off x="822959" y="2697480"/>
-            <a:ext cx="2926080" cy="457200"/>
-          </a:xfrm>
-          <a:prstGeom prst="rect">
-            <a:avLst/>
-          </a:prstGeom>
-          <a:noFill/>
-        </p:spPr>
-        <p:txBody>
-          <a:bodyPr wrap="square" lIns="0" rIns="0" tIns="0" bIns="0" anchor="t">
-            <a:spAutoFit/>
-          </a:bodyPr>
-          <a:lstStyle/>
-          <a:p>
-            <a:pPr algn="ctr">
-              <a:spcAft>
-                <a:spcPts val="0"/>
-              </a:spcAft>
-            </a:pPr>
-            <a:r>
-              <a:rPr sz="1600" b="0" i="0">
-                <a:solidFill>
-                  <a:srgbClr val="1F2937"/>
-                </a:solidFill>
-                <a:latin typeface="Calibri"/>
-              </a:rPr>
-              <a:t>&gt; 15 distinct ports</a:t>
-            </a:r>
-          </a:p>
-        </p:txBody>
-      </p:sp>
-      <p:sp>
-        <p:nvSpPr>
-          <p:cNvPr id="7" name="TextBox 6"/>
-          <p:cNvSpPr txBox="1"/>
-          <p:nvPr/>
-        </p:nvSpPr>
-        <p:spPr>
-          <a:xfrm>
-            <a:off x="822959" y="3200400"/>
-            <a:ext cx="2926080" cy="457200"/>
-          </a:xfrm>
-          <a:prstGeom prst="rect">
-            <a:avLst/>
-          </a:prstGeom>
-          <a:noFill/>
-        </p:spPr>
-        <p:txBody>
-          <a:bodyPr wrap="square" lIns="0" rIns="0" tIns="0" bIns="0" anchor="t">
-            <a:spAutoFit/>
-          </a:bodyPr>
-          <a:lstStyle/>
-          <a:p>
-            <a:pPr algn="ctr">
-              <a:spcAft>
-                <a:spcPts val="0"/>
-              </a:spcAft>
-            </a:pPr>
-            <a:r>
-              <a:rPr sz="1600" b="0" i="0">
-                <a:solidFill>
-                  <a:srgbClr val="1F2937"/>
-                </a:solidFill>
-                <a:latin typeface="Calibri"/>
-              </a:rPr>
-              <a:t>from one source</a:t>
-            </a:r>
-          </a:p>
-        </p:txBody>
-      </p:sp>
-      <p:sp>
-        <p:nvSpPr>
-          <p:cNvPr id="8" name="TextBox 7"/>
-          <p:cNvSpPr txBox="1"/>
-          <p:nvPr/>
-        </p:nvSpPr>
-        <p:spPr>
-          <a:xfrm>
-            <a:off x="822959" y="3703320"/>
-            <a:ext cx="2926080" cy="457200"/>
-          </a:xfrm>
-          <a:prstGeom prst="rect">
-            <a:avLst/>
-          </a:prstGeom>
-          <a:noFill/>
-        </p:spPr>
-        <p:txBody>
-          <a:bodyPr wrap="square" lIns="0" rIns="0" tIns="0" bIns="0" anchor="t">
-            <a:spAutoFit/>
-          </a:bodyPr>
-          <a:lstStyle/>
-          <a:p>
-            <a:pPr algn="ctr">
-              <a:spcAft>
-                <a:spcPts val="0"/>
-              </a:spcAft>
-            </a:pPr>
-            <a:r>
-              <a:rPr sz="1600" b="0" i="0">
-                <a:solidFill>
-                  <a:srgbClr val="1F2937"/>
-                </a:solidFill>
-                <a:latin typeface="Calibri"/>
-              </a:rPr>
-              <a:t>within 5 seconds</a:t>
-            </a:r>
-          </a:p>
-        </p:txBody>
-      </p:sp>
-      <p:sp>
-        <p:nvSpPr>
-          <p:cNvPr id="9" name="Rounded Rectangle 8"/>
-          <p:cNvSpPr/>
-          <p:nvPr/>
-        </p:nvSpPr>
-        <p:spPr>
-          <a:xfrm>
-            <a:off x="1737360" y="4251960"/>
-            <a:ext cx="1097280" cy="329184"/>
-          </a:xfrm>
-          <a:prstGeom prst="roundRect">
-            <a:avLst>
-              <a:gd name="adj" fmla="val 50000"/>
-            </a:avLst>
-          </a:prstGeom>
-          <a:solidFill>
-            <a:srgbClr val="E08A00"/>
-          </a:solidFill>
-          <a:ln>
-            <a:noFill/>
-          </a:ln>
-          <a:effectLst/>
-        </p:spPr>
-        <p:style>
-          <a:lnRef idx="1">
-            <a:schemeClr val="accent1"/>
-          </a:lnRef>
-          <a:fillRef idx="3">
-            <a:schemeClr val="accent1"/>
-          </a:fillRef>
-          <a:effectRef idx="2">
-            <a:schemeClr val="accent1"/>
-          </a:effectRef>
-          <a:fontRef idx="minor">
-            <a:schemeClr val="lt1"/>
-          </a:fontRef>
-        </p:style>
-        <p:txBody>
-          <a:bodyPr rtlCol="0" anchor="ctr" lIns="0" rIns="0" tIns="0" bIns="0" wrap="square"/>
-          <a:lstStyle/>
-          <a:p>
-            <a:pPr algn="ctr"/>
-            <a:r>
-              <a:rPr sz="1200" b="1" i="0">
-                <a:solidFill>
-                  <a:srgbClr val="FFFFFF"/>
-                </a:solidFill>
-                <a:latin typeface="Calibri"/>
-              </a:rPr>
-              <a:t>medium</a:t>
-            </a:r>
-          </a:p>
-        </p:txBody>
-      </p:sp>
-      <p:sp>
-        <p:nvSpPr>
-          <p:cNvPr id="10" name="Rounded Rectangle 9"/>
-          <p:cNvSpPr/>
-          <p:nvPr/>
-        </p:nvSpPr>
-        <p:spPr>
-          <a:xfrm>
-            <a:off x="4343400" y="1508760"/>
-            <a:ext cx="3474720" cy="3200400"/>
+            <a:off x="6126480" y="1508760"/>
+            <a:ext cx="5394960" cy="1828800"/>
           </a:xfrm>
           <a:prstGeom prst="roundRect">
             <a:avLst>
@@ -12113,22 +11287,169 @@
       </p:sp>
       <p:sp>
         <p:nvSpPr>
-          <p:cNvPr id="11" name="Rounded Rectangle 10"/>
+          <p:cNvPr id="8" name="TextBox 7"/>
+          <p:cNvSpPr txBox="1"/>
+          <p:nvPr/>
+        </p:nvSpPr>
+        <p:spPr>
+          <a:xfrm>
+            <a:off x="6400800" y="1737360"/>
+            <a:ext cx="4846320" cy="365760"/>
+          </a:xfrm>
+          <a:prstGeom prst="rect">
+            <a:avLst/>
+          </a:prstGeom>
+          <a:noFill/>
+        </p:spPr>
+        <p:txBody>
+          <a:bodyPr wrap="square" lIns="0" rIns="0" tIns="0" bIns="0" anchor="t">
+            <a:spAutoFit/>
+          </a:bodyPr>
+          <a:lstStyle/>
+          <a:p>
+            <a:pPr algn="l">
+              <a:spcAft>
+                <a:spcPts val="0"/>
+              </a:spcAft>
+            </a:pPr>
+            <a:r>
+              <a:rPr sz="1300" b="1" i="0">
+                <a:solidFill>
+                  <a:srgbClr val="5B6472"/>
+                </a:solidFill>
+                <a:latin typeface="Calibri"/>
+              </a:rPr>
+              <a:t>INTEGRATION TESTS</a:t>
+            </a:r>
+          </a:p>
+        </p:txBody>
+      </p:sp>
+      <p:sp>
+        <p:nvSpPr>
+          <p:cNvPr id="9" name="TextBox 8"/>
+          <p:cNvSpPr txBox="1"/>
+          <p:nvPr/>
+        </p:nvSpPr>
+        <p:spPr>
+          <a:xfrm>
+            <a:off x="6400800" y="2148840"/>
+            <a:ext cx="4846320" cy="1097280"/>
+          </a:xfrm>
+          <a:prstGeom prst="rect">
+            <a:avLst/>
+          </a:prstGeom>
+          <a:noFill/>
+        </p:spPr>
+        <p:txBody>
+          <a:bodyPr wrap="square" lIns="0" rIns="0" tIns="0" bIns="0" anchor="t">
+            <a:spAutoFit/>
+          </a:bodyPr>
+          <a:lstStyle/>
+          <a:p>
+            <a:pPr algn="l">
+              <a:spcAft>
+                <a:spcPts val="400"/>
+              </a:spcAft>
+            </a:pPr>
+            <a:r>
+              <a:rPr sz="1400" b="0" i="0">
+                <a:solidFill>
+                  <a:srgbClr val="1F2937"/>
+                </a:solidFill>
+                <a:latin typeface="Calibri"/>
+              </a:rPr>
+              <a:t>Real port scan and SYN flood against the host</a:t>
+            </a:r>
+          </a:p>
+          <a:p>
+            <a:pPr algn="l">
+              <a:spcAft>
+                <a:spcPts val="400"/>
+              </a:spcAft>
+            </a:pPr>
+            <a:r>
+              <a:rPr sz="1400" b="0" i="0">
+                <a:solidFill>
+                  <a:srgbClr val="1F2937"/>
+                </a:solidFill>
+                <a:latin typeface="Calibri"/>
+              </a:rPr>
+              <a:t>Alert reached the dashboard and log in a few ms</a:t>
+            </a:r>
+          </a:p>
+          <a:p>
+            <a:pPr algn="l">
+              <a:spcAft>
+                <a:spcPts val="400"/>
+              </a:spcAft>
+            </a:pPr>
+            <a:r>
+              <a:rPr sz="1400" b="0" i="0">
+                <a:solidFill>
+                  <a:srgbClr val="1F2937"/>
+                </a:solidFill>
+                <a:latin typeface="Calibri"/>
+              </a:rPr>
+              <a:t>No false alarm during normal browsing</a:t>
+            </a:r>
+          </a:p>
+        </p:txBody>
+      </p:sp>
+      <p:sp>
+        <p:nvSpPr>
+          <p:cNvPr id="10" name="TextBox 9"/>
+          <p:cNvSpPr txBox="1"/>
+          <p:nvPr/>
+        </p:nvSpPr>
+        <p:spPr>
+          <a:xfrm>
+            <a:off x="548640" y="3657600"/>
+            <a:ext cx="10972800" cy="365760"/>
+          </a:xfrm>
+          <a:prstGeom prst="rect">
+            <a:avLst/>
+          </a:prstGeom>
+          <a:noFill/>
+        </p:spPr>
+        <p:txBody>
+          <a:bodyPr wrap="square" lIns="0" rIns="0" tIns="0" bIns="0" anchor="t">
+            <a:spAutoFit/>
+          </a:bodyPr>
+          <a:lstStyle/>
+          <a:p>
+            <a:pPr algn="l">
+              <a:spcAft>
+                <a:spcPts val="0"/>
+              </a:spcAft>
+            </a:pPr>
+            <a:r>
+              <a:rPr sz="1600" b="1" i="0">
+                <a:solidFill>
+                  <a:srgbClr val="14213D"/>
+                </a:solidFill>
+                <a:latin typeface="Calibri"/>
+              </a:rPr>
+              <a:t>What the negative tests confirm</a:t>
+            </a:r>
+          </a:p>
+        </p:txBody>
+      </p:sp>
+      <p:sp>
+        <p:nvSpPr>
+          <p:cNvPr id="11" name="Oval 10"/>
           <p:cNvSpPr/>
           <p:nvPr/>
         </p:nvSpPr>
         <p:spPr>
           <a:xfrm>
-            <a:off x="4343400" y="1508760"/>
-            <a:ext cx="3474720" cy="822960"/>
-          </a:xfrm>
-          <a:prstGeom prst="roundRect">
-            <a:avLst>
-              <a:gd name="adj" fmla="val 8000"/>
-            </a:avLst>
+            <a:off x="640080" y="4142232"/>
+            <a:ext cx="237744" cy="237744"/>
+          </a:xfrm>
+          <a:prstGeom prst="ellipse">
+            <a:avLst/>
           </a:prstGeom>
           <a:solidFill>
-            <a:srgbClr val="C62828"/>
+            <a:srgbClr val="1B7F73"/>
           </a:solidFill>
           <a:ln>
             <a:noFill/>
@@ -12165,8 +11486,8 @@
         </p:nvSpPr>
         <p:spPr>
           <a:xfrm>
-            <a:off x="4343400" y="1664208"/>
-            <a:ext cx="3474720" cy="548640"/>
+            <a:off x="640080" y="4123944"/>
+            <a:ext cx="237744" cy="274320"/>
           </a:xfrm>
           <a:prstGeom prst="rect">
             <a:avLst/>
@@ -12185,13 +11506,13 @@
               </a:spcAft>
             </a:pPr>
             <a:r>
-              <a:rPr sz="2200" b="1" i="0">
+              <a:rPr sz="1300" b="1" i="0">
                 <a:solidFill>
                   <a:srgbClr val="FFFFFF"/>
                 </a:solidFill>
                 <a:latin typeface="Calibri"/>
               </a:rPr>
-              <a:t>SYN Flood</a:t>
+              <a:t>✓</a:t>
             </a:r>
           </a:p>
         </p:txBody>
@@ -12204,133 +11525,53 @@
         </p:nvSpPr>
         <p:spPr>
           <a:xfrm>
-            <a:off x="4617720" y="2697480"/>
-            <a:ext cx="2926080" cy="457200"/>
-          </a:xfrm>
-          <a:prstGeom prst="rect">
-            <a:avLst/>
-          </a:prstGeom>
-          <a:noFill/>
-        </p:spPr>
-        <p:txBody>
-          <a:bodyPr wrap="square" lIns="0" rIns="0" tIns="0" bIns="0" anchor="t">
-            <a:spAutoFit/>
-          </a:bodyPr>
-          <a:lstStyle/>
-          <a:p>
-            <a:pPr algn="ctr">
+            <a:off x="1005840" y="4114800"/>
+            <a:ext cx="5120640" cy="365760"/>
+          </a:xfrm>
+          <a:prstGeom prst="rect">
+            <a:avLst/>
+          </a:prstGeom>
+          <a:noFill/>
+        </p:spPr>
+        <p:txBody>
+          <a:bodyPr wrap="square" lIns="0" rIns="0" tIns="0" bIns="0" anchor="t">
+            <a:spAutoFit/>
+          </a:bodyPr>
+          <a:lstStyle/>
+          <a:p>
+            <a:pPr algn="l">
               <a:spcAft>
                 <a:spcPts val="0"/>
               </a:spcAft>
             </a:pPr>
             <a:r>
-              <a:rPr sz="1600" b="0" i="0">
+              <a:rPr sz="1500" b="0" i="0">
                 <a:solidFill>
                   <a:srgbClr val="1F2937"/>
                 </a:solidFill>
                 <a:latin typeface="Calibri"/>
               </a:rPr>
-              <a:t>100+ half-open SYNs</a:t>
-            </a:r>
-          </a:p>
-        </p:txBody>
-      </p:sp>
-      <p:sp>
-        <p:nvSpPr>
-          <p:cNvPr id="14" name="TextBox 13"/>
-          <p:cNvSpPr txBox="1"/>
-          <p:nvPr/>
-        </p:nvSpPr>
-        <p:spPr>
-          <a:xfrm>
-            <a:off x="4617720" y="3200400"/>
-            <a:ext cx="2926080" cy="457200"/>
-          </a:xfrm>
-          <a:prstGeom prst="rect">
-            <a:avLst/>
-          </a:prstGeom>
-          <a:noFill/>
-        </p:spPr>
-        <p:txBody>
-          <a:bodyPr wrap="square" lIns="0" rIns="0" tIns="0" bIns="0" anchor="t">
-            <a:spAutoFit/>
-          </a:bodyPr>
-          <a:lstStyle/>
-          <a:p>
-            <a:pPr algn="ctr">
-              <a:spcAft>
-                <a:spcPts val="0"/>
-              </a:spcAft>
-            </a:pPr>
-            <a:r>
-              <a:rPr sz="1600" b="0" i="0">
-                <a:solidFill>
-                  <a:srgbClr val="1F2937"/>
-                </a:solidFill>
-                <a:latin typeface="Calibri"/>
-              </a:rPr>
-              <a:t>to one host</a:t>
-            </a:r>
-          </a:p>
-        </p:txBody>
-      </p:sp>
-      <p:sp>
-        <p:nvSpPr>
-          <p:cNvPr id="15" name="TextBox 14"/>
-          <p:cNvSpPr txBox="1"/>
-          <p:nvPr/>
-        </p:nvSpPr>
-        <p:spPr>
-          <a:xfrm>
-            <a:off x="4617720" y="3703320"/>
-            <a:ext cx="2926080" cy="457200"/>
-          </a:xfrm>
-          <a:prstGeom prst="rect">
-            <a:avLst/>
-          </a:prstGeom>
-          <a:noFill/>
-        </p:spPr>
-        <p:txBody>
-          <a:bodyPr wrap="square" lIns="0" rIns="0" tIns="0" bIns="0" anchor="t">
-            <a:spAutoFit/>
-          </a:bodyPr>
-          <a:lstStyle/>
-          <a:p>
-            <a:pPr algn="ctr">
-              <a:spcAft>
-                <a:spcPts val="0"/>
-              </a:spcAft>
-            </a:pPr>
-            <a:r>
-              <a:rPr sz="1600" b="0" i="0">
-                <a:solidFill>
-                  <a:srgbClr val="1F2937"/>
-                </a:solidFill>
-                <a:latin typeface="Calibri"/>
-              </a:rPr>
-              <a:t>few completed</a:t>
-            </a:r>
-          </a:p>
-        </p:txBody>
-      </p:sp>
-      <p:sp>
-        <p:nvSpPr>
-          <p:cNvPr id="16" name="Rounded Rectangle 15"/>
+              <a:t>Reply (SYN-ACK) packets are not a scan</a:t>
+            </a:r>
+          </a:p>
+        </p:txBody>
+      </p:sp>
+      <p:sp>
+        <p:nvSpPr>
+          <p:cNvPr id="14" name="Oval 13"/>
           <p:cNvSpPr/>
           <p:nvPr/>
         </p:nvSpPr>
         <p:spPr>
           <a:xfrm>
-            <a:off x="5532120" y="4251960"/>
-            <a:ext cx="1097280" cy="329184"/>
-          </a:xfrm>
-          <a:prstGeom prst="roundRect">
-            <a:avLst>
-              <a:gd name="adj" fmla="val 50000"/>
-            </a:avLst>
+            <a:off x="6309360" y="4142232"/>
+            <a:ext cx="237744" cy="237744"/>
+          </a:xfrm>
+          <a:prstGeom prst="ellipse">
+            <a:avLst/>
           </a:prstGeom>
           <a:solidFill>
-            <a:srgbClr val="C62828"/>
+            <a:srgbClr val="1B7F73"/>
           </a:solidFill>
           <a:ln>
             <a:noFill/>
@@ -12352,40 +11593,107 @@
           </a:fontRef>
         </p:style>
         <p:txBody>
-          <a:bodyPr rtlCol="0" anchor="ctr" lIns="0" rIns="0" tIns="0" bIns="0" wrap="square"/>
+          <a:bodyPr rtlCol="0" anchor="ctr"/>
           <a:lstStyle/>
           <a:p>
             <a:pPr algn="ctr"/>
-            <a:r>
-              <a:rPr sz="1200" b="1" i="0">
+          </a:p>
+        </p:txBody>
+      </p:sp>
+      <p:sp>
+        <p:nvSpPr>
+          <p:cNvPr id="15" name="TextBox 14"/>
+          <p:cNvSpPr txBox="1"/>
+          <p:nvPr/>
+        </p:nvSpPr>
+        <p:spPr>
+          <a:xfrm>
+            <a:off x="6309360" y="4123944"/>
+            <a:ext cx="237744" cy="274320"/>
+          </a:xfrm>
+          <a:prstGeom prst="rect">
+            <a:avLst/>
+          </a:prstGeom>
+          <a:noFill/>
+        </p:spPr>
+        <p:txBody>
+          <a:bodyPr wrap="square" lIns="0" rIns="0" tIns="0" bIns="0" anchor="t">
+            <a:spAutoFit/>
+          </a:bodyPr>
+          <a:lstStyle/>
+          <a:p>
+            <a:pPr algn="ctr">
+              <a:spcAft>
+                <a:spcPts val="0"/>
+              </a:spcAft>
+            </a:pPr>
+            <a:r>
+              <a:rPr sz="1300" b="1" i="0">
                 <a:solidFill>
                   <a:srgbClr val="FFFFFF"/>
                 </a:solidFill>
                 <a:latin typeface="Calibri"/>
               </a:rPr>
-              <a:t>high</a:t>
-            </a:r>
-          </a:p>
-        </p:txBody>
-      </p:sp>
-      <p:sp>
-        <p:nvSpPr>
-          <p:cNvPr id="17" name="Rounded Rectangle 16"/>
+              <a:t>✓</a:t>
+            </a:r>
+          </a:p>
+        </p:txBody>
+      </p:sp>
+      <p:sp>
+        <p:nvSpPr>
+          <p:cNvPr id="16" name="TextBox 15"/>
+          <p:cNvSpPr txBox="1"/>
+          <p:nvPr/>
+        </p:nvSpPr>
+        <p:spPr>
+          <a:xfrm>
+            <a:off x="6675120" y="4114800"/>
+            <a:ext cx="5120640" cy="365760"/>
+          </a:xfrm>
+          <a:prstGeom prst="rect">
+            <a:avLst/>
+          </a:prstGeom>
+          <a:noFill/>
+        </p:spPr>
+        <p:txBody>
+          <a:bodyPr wrap="square" lIns="0" rIns="0" tIns="0" bIns="0" anchor="t">
+            <a:spAutoFit/>
+          </a:bodyPr>
+          <a:lstStyle/>
+          <a:p>
+            <a:pPr algn="l">
+              <a:spcAft>
+                <a:spcPts val="0"/>
+              </a:spcAft>
+            </a:pPr>
+            <a:r>
+              <a:rPr sz="1500" b="0" i="0">
+                <a:solidFill>
+                  <a:srgbClr val="1F2937"/>
+                </a:solidFill>
+                <a:latin typeface="Calibri"/>
+              </a:rPr>
+              <a:t>Slow activity below the threshold stays silent</a:t>
+            </a:r>
+          </a:p>
+        </p:txBody>
+      </p:sp>
+      <p:sp>
+        <p:nvSpPr>
+          <p:cNvPr id="17" name="Oval 16"/>
           <p:cNvSpPr/>
           <p:nvPr/>
         </p:nvSpPr>
         <p:spPr>
           <a:xfrm>
-            <a:off x="8138160" y="1508760"/>
-            <a:ext cx="3474720" cy="3200400"/>
-          </a:xfrm>
-          <a:prstGeom prst="roundRect">
-            <a:avLst>
-              <a:gd name="adj" fmla="val 8000"/>
-            </a:avLst>
+            <a:off x="640080" y="4709160"/>
+            <a:ext cx="237744" cy="237744"/>
+          </a:xfrm>
+          <a:prstGeom prst="ellipse">
+            <a:avLst/>
           </a:prstGeom>
           <a:solidFill>
-            <a:srgbClr val="EEF2F7"/>
+            <a:srgbClr val="1B7F73"/>
           </a:solidFill>
           <a:ln>
             <a:noFill/>
@@ -12416,22 +11724,98 @@
       </p:sp>
       <p:sp>
         <p:nvSpPr>
-          <p:cNvPr id="18" name="Rounded Rectangle 17"/>
+          <p:cNvPr id="18" name="TextBox 17"/>
+          <p:cNvSpPr txBox="1"/>
+          <p:nvPr/>
+        </p:nvSpPr>
+        <p:spPr>
+          <a:xfrm>
+            <a:off x="640080" y="4690872"/>
+            <a:ext cx="237744" cy="274320"/>
+          </a:xfrm>
+          <a:prstGeom prst="rect">
+            <a:avLst/>
+          </a:prstGeom>
+          <a:noFill/>
+        </p:spPr>
+        <p:txBody>
+          <a:bodyPr wrap="square" lIns="0" rIns="0" tIns="0" bIns="0" anchor="t">
+            <a:spAutoFit/>
+          </a:bodyPr>
+          <a:lstStyle/>
+          <a:p>
+            <a:pPr algn="ctr">
+              <a:spcAft>
+                <a:spcPts val="0"/>
+              </a:spcAft>
+            </a:pPr>
+            <a:r>
+              <a:rPr sz="1300" b="1" i="0">
+                <a:solidFill>
+                  <a:srgbClr val="FFFFFF"/>
+                </a:solidFill>
+                <a:latin typeface="Calibri"/>
+              </a:rPr>
+              <a:t>✓</a:t>
+            </a:r>
+          </a:p>
+        </p:txBody>
+      </p:sp>
+      <p:sp>
+        <p:nvSpPr>
+          <p:cNvPr id="19" name="TextBox 18"/>
+          <p:cNvSpPr txBox="1"/>
+          <p:nvPr/>
+        </p:nvSpPr>
+        <p:spPr>
+          <a:xfrm>
+            <a:off x="1005840" y="4681728"/>
+            <a:ext cx="5120640" cy="365760"/>
+          </a:xfrm>
+          <a:prstGeom prst="rect">
+            <a:avLst/>
+          </a:prstGeom>
+          <a:noFill/>
+        </p:spPr>
+        <p:txBody>
+          <a:bodyPr wrap="square" lIns="0" rIns="0" tIns="0" bIns="0" anchor="t">
+            <a:spAutoFit/>
+          </a:bodyPr>
+          <a:lstStyle/>
+          <a:p>
+            <a:pPr algn="l">
+              <a:spcAft>
+                <a:spcPts val="0"/>
+              </a:spcAft>
+            </a:pPr>
+            <a:r>
+              <a:rPr sz="1500" b="0" i="0">
+                <a:solidFill>
+                  <a:srgbClr val="1F2937"/>
+                </a:solidFill>
+                <a:latin typeface="Calibri"/>
+              </a:rPr>
+              <a:t>Completed handshakes are not a flood</a:t>
+            </a:r>
+          </a:p>
+        </p:txBody>
+      </p:sp>
+      <p:sp>
+        <p:nvSpPr>
+          <p:cNvPr id="20" name="Oval 19"/>
           <p:cNvSpPr/>
           <p:nvPr/>
         </p:nvSpPr>
         <p:spPr>
           <a:xfrm>
-            <a:off x="8138160" y="1508760"/>
-            <a:ext cx="3474720" cy="822960"/>
-          </a:xfrm>
-          <a:prstGeom prst="roundRect">
-            <a:avLst>
-              <a:gd name="adj" fmla="val 8000"/>
-            </a:avLst>
+            <a:off x="6309360" y="4709160"/>
+            <a:ext cx="237744" cy="237744"/>
+          </a:xfrm>
+          <a:prstGeom prst="ellipse">
+            <a:avLst/>
           </a:prstGeom>
           <a:solidFill>
-            <a:srgbClr val="7B1FA2"/>
+            <a:srgbClr val="1B7F73"/>
           </a:solidFill>
           <a:ln>
             <a:noFill/>
@@ -12462,14 +11846,14 @@
       </p:sp>
       <p:sp>
         <p:nvSpPr>
-          <p:cNvPr id="19" name="TextBox 18"/>
-          <p:cNvSpPr txBox="1"/>
-          <p:nvPr/>
-        </p:nvSpPr>
-        <p:spPr>
-          <a:xfrm>
-            <a:off x="8138160" y="1664208"/>
-            <a:ext cx="3474720" cy="548640"/>
+          <p:cNvPr id="21" name="TextBox 20"/>
+          <p:cNvSpPr txBox="1"/>
+          <p:nvPr/>
+        </p:nvSpPr>
+        <p:spPr>
+          <a:xfrm>
+            <a:off x="6309360" y="4690872"/>
+            <a:ext cx="237744" cy="274320"/>
           </a:xfrm>
           <a:prstGeom prst="rect">
             <a:avLst/>
@@ -12488,152 +11872,72 @@
               </a:spcAft>
             </a:pPr>
             <a:r>
-              <a:rPr sz="2200" b="1" i="0">
+              <a:rPr sz="1300" b="1" i="0">
                 <a:solidFill>
                   <a:srgbClr val="FFFFFF"/>
                 </a:solidFill>
                 <a:latin typeface="Calibri"/>
               </a:rPr>
-              <a:t>ARP Spoofing</a:t>
-            </a:r>
-          </a:p>
-        </p:txBody>
-      </p:sp>
-      <p:sp>
-        <p:nvSpPr>
-          <p:cNvPr id="20" name="TextBox 19"/>
-          <p:cNvSpPr txBox="1"/>
-          <p:nvPr/>
-        </p:nvSpPr>
-        <p:spPr>
-          <a:xfrm>
-            <a:off x="8412480" y="2697480"/>
-            <a:ext cx="2926080" cy="457200"/>
-          </a:xfrm>
-          <a:prstGeom prst="rect">
-            <a:avLst/>
-          </a:prstGeom>
-          <a:noFill/>
-        </p:spPr>
-        <p:txBody>
-          <a:bodyPr wrap="square" lIns="0" rIns="0" tIns="0" bIns="0" anchor="t">
-            <a:spAutoFit/>
-          </a:bodyPr>
-          <a:lstStyle/>
-          <a:p>
-            <a:pPr algn="ctr">
+              <a:t>✓</a:t>
+            </a:r>
+          </a:p>
+        </p:txBody>
+      </p:sp>
+      <p:sp>
+        <p:nvSpPr>
+          <p:cNvPr id="22" name="TextBox 21"/>
+          <p:cNvSpPr txBox="1"/>
+          <p:nvPr/>
+        </p:nvSpPr>
+        <p:spPr>
+          <a:xfrm>
+            <a:off x="6675120" y="4681728"/>
+            <a:ext cx="5120640" cy="365760"/>
+          </a:xfrm>
+          <a:prstGeom prst="rect">
+            <a:avLst/>
+          </a:prstGeom>
+          <a:noFill/>
+        </p:spPr>
+        <p:txBody>
+          <a:bodyPr wrap="square" lIns="0" rIns="0" tIns="0" bIns="0" anchor="t">
+            <a:spAutoFit/>
+          </a:bodyPr>
+          <a:lstStyle/>
+          <a:p>
+            <a:pPr algn="l">
               <a:spcAft>
                 <a:spcPts val="0"/>
               </a:spcAft>
             </a:pPr>
             <a:r>
-              <a:rPr sz="1600" b="0" i="0">
+              <a:rPr sz="1500" b="0" i="0">
                 <a:solidFill>
                   <a:srgbClr val="1F2937"/>
                 </a:solidFill>
                 <a:latin typeface="Calibri"/>
               </a:rPr>
-              <a:t>gateway IP seen</a:t>
-            </a:r>
-          </a:p>
-        </p:txBody>
-      </p:sp>
-      <p:sp>
-        <p:nvSpPr>
-          <p:cNvPr id="21" name="TextBox 20"/>
-          <p:cNvSpPr txBox="1"/>
-          <p:nvPr/>
-        </p:nvSpPr>
-        <p:spPr>
-          <a:xfrm>
-            <a:off x="8412480" y="3200400"/>
-            <a:ext cx="2926080" cy="457200"/>
-          </a:xfrm>
-          <a:prstGeom prst="rect">
-            <a:avLst/>
-          </a:prstGeom>
-          <a:noFill/>
-        </p:spPr>
-        <p:txBody>
-          <a:bodyPr wrap="square" lIns="0" rIns="0" tIns="0" bIns="0" anchor="t">
-            <a:spAutoFit/>
-          </a:bodyPr>
-          <a:lstStyle/>
-          <a:p>
-            <a:pPr algn="ctr">
-              <a:spcAft>
-                <a:spcPts val="0"/>
-              </a:spcAft>
-            </a:pPr>
-            <a:r>
-              <a:rPr sz="1600" b="0" i="0">
-                <a:solidFill>
-                  <a:srgbClr val="1F2937"/>
-                </a:solidFill>
-                <a:latin typeface="Calibri"/>
-              </a:rPr>
-              <a:t>with a different</a:t>
-            </a:r>
-          </a:p>
-        </p:txBody>
-      </p:sp>
-      <p:sp>
-        <p:nvSpPr>
-          <p:cNvPr id="22" name="TextBox 21"/>
-          <p:cNvSpPr txBox="1"/>
-          <p:nvPr/>
-        </p:nvSpPr>
-        <p:spPr>
-          <a:xfrm>
-            <a:off x="8412480" y="3703320"/>
-            <a:ext cx="2926080" cy="457200"/>
-          </a:xfrm>
-          <a:prstGeom prst="rect">
-            <a:avLst/>
-          </a:prstGeom>
-          <a:noFill/>
-        </p:spPr>
-        <p:txBody>
-          <a:bodyPr wrap="square" lIns="0" rIns="0" tIns="0" bIns="0" anchor="t">
-            <a:spAutoFit/>
-          </a:bodyPr>
-          <a:lstStyle/>
-          <a:p>
-            <a:pPr algn="ctr">
-              <a:spcAft>
-                <a:spcPts val="0"/>
-              </a:spcAft>
-            </a:pPr>
-            <a:r>
-              <a:rPr sz="1600" b="0" i="0">
-                <a:solidFill>
-                  <a:srgbClr val="1F2937"/>
-                </a:solidFill>
-                <a:latin typeface="Calibri"/>
-              </a:rPr>
-              <a:t>MAC address</a:t>
-            </a:r>
-          </a:p>
-        </p:txBody>
-      </p:sp>
-      <p:sp>
-        <p:nvSpPr>
-          <p:cNvPr id="23" name="Rounded Rectangle 22"/>
+              <a:t>A port scan is not mistaken for a flood</a:t>
+            </a:r>
+          </a:p>
+        </p:txBody>
+      </p:sp>
+      <p:sp>
+        <p:nvSpPr>
+          <p:cNvPr id="23" name="Oval 22"/>
           <p:cNvSpPr/>
           <p:nvPr/>
         </p:nvSpPr>
         <p:spPr>
           <a:xfrm>
-            <a:off x="9326880" y="4251960"/>
-            <a:ext cx="1097280" cy="329184"/>
-          </a:xfrm>
-          <a:prstGeom prst="roundRect">
-            <a:avLst>
-              <a:gd name="adj" fmla="val 50000"/>
-            </a:avLst>
+            <a:off x="640080" y="5276088"/>
+            <a:ext cx="237744" cy="237744"/>
+          </a:xfrm>
+          <a:prstGeom prst="ellipse">
+            <a:avLst/>
           </a:prstGeom>
           <a:solidFill>
-            <a:srgbClr val="7B1FA2"/>
+            <a:srgbClr val="1B7F73"/>
           </a:solidFill>
           <a:ln>
             <a:noFill/>
@@ -12655,32 +11959,62 @@
           </a:fontRef>
         </p:style>
         <p:txBody>
-          <a:bodyPr rtlCol="0" anchor="ctr" lIns="0" rIns="0" tIns="0" bIns="0" wrap="square"/>
+          <a:bodyPr rtlCol="0" anchor="ctr"/>
           <a:lstStyle/>
           <a:p>
             <a:pPr algn="ctr"/>
-            <a:r>
-              <a:rPr sz="1200" b="1" i="0">
+          </a:p>
+        </p:txBody>
+      </p:sp>
+      <p:sp>
+        <p:nvSpPr>
+          <p:cNvPr id="24" name="TextBox 23"/>
+          <p:cNvSpPr txBox="1"/>
+          <p:nvPr/>
+        </p:nvSpPr>
+        <p:spPr>
+          <a:xfrm>
+            <a:off x="640080" y="5257800"/>
+            <a:ext cx="237744" cy="274320"/>
+          </a:xfrm>
+          <a:prstGeom prst="rect">
+            <a:avLst/>
+          </a:prstGeom>
+          <a:noFill/>
+        </p:spPr>
+        <p:txBody>
+          <a:bodyPr wrap="square" lIns="0" rIns="0" tIns="0" bIns="0" anchor="t">
+            <a:spAutoFit/>
+          </a:bodyPr>
+          <a:lstStyle/>
+          <a:p>
+            <a:pPr algn="ctr">
+              <a:spcAft>
+                <a:spcPts val="0"/>
+              </a:spcAft>
+            </a:pPr>
+            <a:r>
+              <a:rPr sz="1300" b="1" i="0">
                 <a:solidFill>
                   <a:srgbClr val="FFFFFF"/>
                 </a:solidFill>
                 <a:latin typeface="Calibri"/>
               </a:rPr>
-              <a:t>critical</a:t>
-            </a:r>
-          </a:p>
-        </p:txBody>
-      </p:sp>
-      <p:sp>
-        <p:nvSpPr>
-          <p:cNvPr id="24" name="TextBox 23"/>
-          <p:cNvSpPr txBox="1"/>
-          <p:nvPr/>
-        </p:nvSpPr>
-        <p:spPr>
-          <a:xfrm>
-            <a:off x="548640" y="5029200"/>
-            <a:ext cx="11064240" cy="1097280"/>
+              <a:t>✓</a:t>
+            </a:r>
+          </a:p>
+        </p:txBody>
+      </p:sp>
+      <p:sp>
+        <p:nvSpPr>
+          <p:cNvPr id="25" name="TextBox 24"/>
+          <p:cNvSpPr txBox="1"/>
+          <p:nvPr/>
+        </p:nvSpPr>
+        <p:spPr>
+          <a:xfrm>
+            <a:off x="1005840" y="5248656"/>
+            <a:ext cx="5120640" cy="365760"/>
           </a:xfrm>
           <a:prstGeom prst="rect">
             <a:avLst/>
@@ -12694,37 +12028,147 @@
           <a:lstStyle/>
           <a:p>
             <a:pPr algn="l">
-              <a:lnSpc>
-                <a:spcPct val="110000"/>
-              </a:lnSpc>
               <a:spcAft>
                 <a:spcPts val="0"/>
               </a:spcAft>
             </a:pPr>
             <a:r>
-              <a:rPr sz="1600" b="1" i="0">
-                <a:solidFill>
-                  <a:srgbClr val="14213D"/>
-                </a:solidFill>
-                <a:latin typeface="Calibri"/>
-              </a:rPr>
-              <a:t>All rules are deterministic. </a:t>
-            </a:r>
-            <a:r>
-              <a:rPr sz="1600" b="0" i="0">
+              <a:rPr sz="1500" b="0" i="0">
                 <a:solidFill>
                   <a:srgbClr val="1F2937"/>
                 </a:solidFill>
                 <a:latin typeface="Calibri"/>
               </a:rPr>
-              <a:t>Each keeps a few seconds of history in a sliding window, compares a count against a threshold, and raises an alert with a cool-down so one attack gives one alert.</a:t>
-            </a:r>
-          </a:p>
-        </p:txBody>
-      </p:sp>
-      <p:sp>
-        <p:nvSpPr>
-          <p:cNvPr id="25" name="TextBox 24"/>
+              <a:t>Genuine ARP replies raise no alarm</a:t>
+            </a:r>
+          </a:p>
+        </p:txBody>
+      </p:sp>
+      <p:sp>
+        <p:nvSpPr>
+          <p:cNvPr id="26" name="Oval 25"/>
+          <p:cNvSpPr/>
+          <p:nvPr/>
+        </p:nvSpPr>
+        <p:spPr>
+          <a:xfrm>
+            <a:off x="6309360" y="5276088"/>
+            <a:ext cx="237744" cy="237744"/>
+          </a:xfrm>
+          <a:prstGeom prst="ellipse">
+            <a:avLst/>
+          </a:prstGeom>
+          <a:solidFill>
+            <a:srgbClr val="1B7F73"/>
+          </a:solidFill>
+          <a:ln>
+            <a:noFill/>
+          </a:ln>
+          <a:effectLst/>
+        </p:spPr>
+        <p:style>
+          <a:lnRef idx="1">
+            <a:schemeClr val="accent1"/>
+          </a:lnRef>
+          <a:fillRef idx="3">
+            <a:schemeClr val="accent1"/>
+          </a:fillRef>
+          <a:effectRef idx="2">
+            <a:schemeClr val="accent1"/>
+          </a:effectRef>
+          <a:fontRef idx="minor">
+            <a:schemeClr val="lt1"/>
+          </a:fontRef>
+        </p:style>
+        <p:txBody>
+          <a:bodyPr rtlCol="0" anchor="ctr"/>
+          <a:lstStyle/>
+          <a:p>
+            <a:pPr algn="ctr"/>
+          </a:p>
+        </p:txBody>
+      </p:sp>
+      <p:sp>
+        <p:nvSpPr>
+          <p:cNvPr id="27" name="TextBox 26"/>
+          <p:cNvSpPr txBox="1"/>
+          <p:nvPr/>
+        </p:nvSpPr>
+        <p:spPr>
+          <a:xfrm>
+            <a:off x="6309360" y="5257800"/>
+            <a:ext cx="237744" cy="274320"/>
+          </a:xfrm>
+          <a:prstGeom prst="rect">
+            <a:avLst/>
+          </a:prstGeom>
+          <a:noFill/>
+        </p:spPr>
+        <p:txBody>
+          <a:bodyPr wrap="square" lIns="0" rIns="0" tIns="0" bIns="0" anchor="t">
+            <a:spAutoFit/>
+          </a:bodyPr>
+          <a:lstStyle/>
+          <a:p>
+            <a:pPr algn="ctr">
+              <a:spcAft>
+                <a:spcPts val="0"/>
+              </a:spcAft>
+            </a:pPr>
+            <a:r>
+              <a:rPr sz="1300" b="1" i="0">
+                <a:solidFill>
+                  <a:srgbClr val="FFFFFF"/>
+                </a:solidFill>
+                <a:latin typeface="Calibri"/>
+              </a:rPr>
+              <a:t>✓</a:t>
+            </a:r>
+          </a:p>
+        </p:txBody>
+      </p:sp>
+      <p:sp>
+        <p:nvSpPr>
+          <p:cNvPr id="28" name="TextBox 27"/>
+          <p:cNvSpPr txBox="1"/>
+          <p:nvPr/>
+        </p:nvSpPr>
+        <p:spPr>
+          <a:xfrm>
+            <a:off x="6675120" y="5248656"/>
+            <a:ext cx="5120640" cy="365760"/>
+          </a:xfrm>
+          <a:prstGeom prst="rect">
+            <a:avLst/>
+          </a:prstGeom>
+          <a:noFill/>
+        </p:spPr>
+        <p:txBody>
+          <a:bodyPr wrap="square" lIns="0" rIns="0" tIns="0" bIns="0" anchor="t">
+            <a:spAutoFit/>
+          </a:bodyPr>
+          <a:lstStyle/>
+          <a:p>
+            <a:pPr algn="l">
+              <a:spcAft>
+                <a:spcPts val="0"/>
+              </a:spcAft>
+            </a:pPr>
+            <a:r>
+              <a:rPr sz="1500" b="0" i="0">
+                <a:solidFill>
+                  <a:srgbClr val="1F2937"/>
+                </a:solidFill>
+                <a:latin typeface="Calibri"/>
+              </a:rPr>
+              <a:t>A cool-down stops duplicate alerts</a:t>
+            </a:r>
+          </a:p>
+        </p:txBody>
+      </p:sp>
+      <p:sp>
+        <p:nvSpPr>
+          <p:cNvPr id="29" name="TextBox 28"/>
           <p:cNvSpPr txBox="1"/>
           <p:nvPr/>
         </p:nvSpPr>
@@ -12763,7 +12207,7 @@
       </p:sp>
       <p:sp>
         <p:nvSpPr>
-          <p:cNvPr id="26" name="TextBox 25"/>
+          <p:cNvPr id="30" name="TextBox 29"/>
           <p:cNvSpPr txBox="1"/>
           <p:nvPr/>
         </p:nvSpPr>
@@ -12860,21 +12304,89 @@
                 </a:solidFill>
                 <a:latin typeface="Calibri"/>
               </a:rPr>
-              <a:t>Testing</a:t>
-            </a:r>
-          </a:p>
-        </p:txBody>
-      </p:sp>
-      <p:sp>
-        <p:nvSpPr>
-          <p:cNvPr id="3" name="Rounded Rectangle 2"/>
+              <a:t>Results: Live Dashboard</a:t>
+            </a:r>
+          </a:p>
+        </p:txBody>
+      </p:sp>
+      <p:pic>
+        <p:nvPicPr>
+          <p:cNvPr id="3" name="Picture 2" descr="dash_final.png"/>
+          <p:cNvPicPr>
+            <a:picLocks noChangeAspect="1"/>
+          </p:cNvPicPr>
+          <p:nvPr/>
+        </p:nvPicPr>
+        <p:blipFill>
+          <a:blip r:embed="rId2"/>
+          <a:stretch>
+            <a:fillRect/>
+          </a:stretch>
+        </p:blipFill>
+        <p:spPr>
+          <a:xfrm>
+            <a:off x="548640" y="1463040"/>
+            <a:ext cx="7406640" cy="3977411"/>
+          </a:xfrm>
+          <a:prstGeom prst="rect">
+            <a:avLst/>
+          </a:prstGeom>
+          <a:ln w="9525">
+            <a:solidFill>
+              <a:srgbClr val="D5DCE6"/>
+            </a:solidFill>
+          </a:ln>
+        </p:spPr>
+      </p:pic>
+      <p:sp>
+        <p:nvSpPr>
+          <p:cNvPr id="4" name="TextBox 3"/>
+          <p:cNvSpPr txBox="1"/>
+          <p:nvPr/>
+        </p:nvSpPr>
+        <p:spPr>
+          <a:xfrm>
+            <a:off x="548640" y="5513603"/>
+            <a:ext cx="7406640" cy="274320"/>
+          </a:xfrm>
+          <a:prstGeom prst="rect">
+            <a:avLst/>
+          </a:prstGeom>
+          <a:noFill/>
+        </p:spPr>
+        <p:txBody>
+          <a:bodyPr wrap="square" lIns="0" rIns="0" tIns="0" bIns="0" anchor="t">
+            <a:spAutoFit/>
+          </a:bodyPr>
+          <a:lstStyle/>
+          <a:p>
+            <a:pPr algn="ctr">
+              <a:spcAft>
+                <a:spcPts val="0"/>
+              </a:spcAft>
+            </a:pPr>
+            <a:r>
+              <a:rPr sz="1200" b="0" i="0">
+                <a:solidFill>
+                  <a:srgbClr val="5B6472"/>
+                </a:solidFill>
+                <a:latin typeface="Calibri"/>
+              </a:rPr>
+              <a:t>Dashboard after detecting a port scan and a SYN flood</a:t>
+            </a:r>
+          </a:p>
+        </p:txBody>
+      </p:sp>
+      <p:sp>
+        <p:nvSpPr>
+          <p:cNvPr id="5" name="Rounded Rectangle 4"/>
           <p:cNvSpPr/>
           <p:nvPr/>
         </p:nvSpPr>
         <p:spPr>
           <a:xfrm>
-            <a:off x="548640" y="1508760"/>
-            <a:ext cx="5394960" cy="1828800"/>
+            <a:off x="8229600" y="1554480"/>
+            <a:ext cx="3291840" cy="960120"/>
           </a:xfrm>
           <a:prstGeom prst="roundRect">
             <a:avLst>
@@ -12913,14 +12425,14 @@
       </p:sp>
       <p:sp>
         <p:nvSpPr>
-          <p:cNvPr id="4" name="TextBox 3"/>
-          <p:cNvSpPr txBox="1"/>
-          <p:nvPr/>
-        </p:nvSpPr>
-        <p:spPr>
-          <a:xfrm>
-            <a:off x="822960" y="1737360"/>
-            <a:ext cx="4846320" cy="365760"/>
+          <p:cNvPr id="6" name="TextBox 5"/>
+          <p:cNvSpPr txBox="1"/>
+          <p:nvPr/>
+        </p:nvSpPr>
+        <p:spPr>
+          <a:xfrm>
+            <a:off x="8458200" y="1664207"/>
+            <a:ext cx="1371600" cy="640080"/>
           </a:xfrm>
           <a:prstGeom prst="rect">
             <a:avLst/>
@@ -12939,27 +12451,27 @@
               </a:spcAft>
             </a:pPr>
             <a:r>
-              <a:rPr sz="1300" b="1" i="0">
-                <a:solidFill>
-                  <a:srgbClr val="5B6472"/>
-                </a:solidFill>
-                <a:latin typeface="Calibri"/>
-              </a:rPr>
-              <a:t>UNIT TESTS</a:t>
-            </a:r>
-          </a:p>
-        </p:txBody>
-      </p:sp>
-      <p:sp>
-        <p:nvSpPr>
-          <p:cNvPr id="5" name="TextBox 4"/>
-          <p:cNvSpPr txBox="1"/>
-          <p:nvPr/>
-        </p:nvSpPr>
-        <p:spPr>
-          <a:xfrm>
-            <a:off x="822960" y="2103120"/>
-            <a:ext cx="1828800" cy="914400"/>
+              <a:rPr sz="3000" b="1" i="0">
+                <a:solidFill>
+                  <a:srgbClr val="14213D"/>
+                </a:solidFill>
+                <a:latin typeface="Calibri"/>
+              </a:rPr>
+              <a:t>3</a:t>
+            </a:r>
+          </a:p>
+        </p:txBody>
+      </p:sp>
+      <p:sp>
+        <p:nvSpPr>
+          <p:cNvPr id="7" name="TextBox 6"/>
+          <p:cNvSpPr txBox="1"/>
+          <p:nvPr/>
+        </p:nvSpPr>
+        <p:spPr>
+          <a:xfrm>
+            <a:off x="9692640" y="1828800"/>
+            <a:ext cx="1737360" cy="457200"/>
           </a:xfrm>
           <a:prstGeom prst="rect">
             <a:avLst/>
@@ -12978,98 +12490,27 @@
               </a:spcAft>
             </a:pPr>
             <a:r>
-              <a:rPr sz="4400" b="1" i="0">
-                <a:solidFill>
-                  <a:srgbClr val="1B7F73"/>
-                </a:solidFill>
-                <a:latin typeface="Calibri"/>
-              </a:rPr>
-              <a:t>10 / 10</a:t>
-            </a:r>
-          </a:p>
-        </p:txBody>
-      </p:sp>
-      <p:sp>
-        <p:nvSpPr>
-          <p:cNvPr id="6" name="TextBox 5"/>
-          <p:cNvSpPr txBox="1"/>
-          <p:nvPr/>
-        </p:nvSpPr>
-        <p:spPr>
-          <a:xfrm>
-            <a:off x="2926080" y="2240280"/>
-            <a:ext cx="2926080" cy="914400"/>
-          </a:xfrm>
-          <a:prstGeom prst="rect">
-            <a:avLst/>
-          </a:prstGeom>
-          <a:noFill/>
-        </p:spPr>
-        <p:txBody>
-          <a:bodyPr wrap="square" lIns="0" rIns="0" tIns="0" bIns="0" anchor="t">
-            <a:spAutoFit/>
-          </a:bodyPr>
-          <a:lstStyle/>
-          <a:p>
-            <a:pPr algn="l">
-              <a:spcAft>
-                <a:spcPts val="200"/>
-              </a:spcAft>
-            </a:pPr>
-            <a:r>
-              <a:rPr sz="1500" b="0" i="0">
+              <a:rPr sz="1400" b="0" i="0">
                 <a:solidFill>
                   <a:srgbClr val="1F2937"/>
                 </a:solidFill>
                 <a:latin typeface="Calibri"/>
               </a:rPr>
-              <a:t>tests passing</a:t>
-            </a:r>
-          </a:p>
-          <a:p>
-            <a:pPr algn="l">
-              <a:spcAft>
-                <a:spcPts val="200"/>
-              </a:spcAft>
-            </a:pPr>
-            <a:r>
-              <a:rPr sz="1500" b="0" i="0">
-                <a:solidFill>
-                  <a:srgbClr val="1F2937"/>
-                </a:solidFill>
-                <a:latin typeface="Calibri"/>
-              </a:rPr>
-              <a:t>one per rule, with</a:t>
-            </a:r>
-          </a:p>
-          <a:p>
-            <a:pPr algn="l">
-              <a:spcAft>
-                <a:spcPts val="200"/>
-              </a:spcAft>
-            </a:pPr>
-            <a:r>
-              <a:rPr sz="1500" b="0" i="0">
-                <a:solidFill>
-                  <a:srgbClr val="1F2937"/>
-                </a:solidFill>
-                <a:latin typeface="Calibri"/>
-              </a:rPr>
-              <a:t>positive and negative cases</a:t>
-            </a:r>
-          </a:p>
-        </p:txBody>
-      </p:sp>
-      <p:sp>
-        <p:nvSpPr>
-          <p:cNvPr id="7" name="Rounded Rectangle 6"/>
+              <a:t>attacks detected</a:t>
+            </a:r>
+          </a:p>
+        </p:txBody>
+      </p:sp>
+      <p:sp>
+        <p:nvSpPr>
+          <p:cNvPr id="8" name="Rounded Rectangle 7"/>
           <p:cNvSpPr/>
           <p:nvPr/>
         </p:nvSpPr>
         <p:spPr>
           <a:xfrm>
-            <a:off x="6126480" y="1508760"/>
-            <a:ext cx="5394960" cy="1828800"/>
+            <a:off x="8229600" y="2697480"/>
+            <a:ext cx="3291840" cy="960120"/>
           </a:xfrm>
           <a:prstGeom prst="roundRect">
             <a:avLst>
@@ -13108,14 +12549,14 @@
       </p:sp>
       <p:sp>
         <p:nvSpPr>
-          <p:cNvPr id="8" name="TextBox 7"/>
-          <p:cNvSpPr txBox="1"/>
-          <p:nvPr/>
-        </p:nvSpPr>
-        <p:spPr>
-          <a:xfrm>
-            <a:off x="6400800" y="1737360"/>
-            <a:ext cx="4846320" cy="365760"/>
+          <p:cNvPr id="9" name="TextBox 8"/>
+          <p:cNvSpPr txBox="1"/>
+          <p:nvPr/>
+        </p:nvSpPr>
+        <p:spPr>
+          <a:xfrm>
+            <a:off x="8458200" y="2807208"/>
+            <a:ext cx="1371600" cy="640080"/>
           </a:xfrm>
           <a:prstGeom prst="rect">
             <a:avLst/>
@@ -13134,27 +12575,27 @@
               </a:spcAft>
             </a:pPr>
             <a:r>
-              <a:rPr sz="1300" b="1" i="0">
-                <a:solidFill>
-                  <a:srgbClr val="5B6472"/>
-                </a:solidFill>
-                <a:latin typeface="Calibri"/>
-              </a:rPr>
-              <a:t>INTEGRATION TESTS</a:t>
-            </a:r>
-          </a:p>
-        </p:txBody>
-      </p:sp>
-      <p:sp>
-        <p:nvSpPr>
-          <p:cNvPr id="9" name="TextBox 8"/>
-          <p:cNvSpPr txBox="1"/>
-          <p:nvPr/>
-        </p:nvSpPr>
-        <p:spPr>
-          <a:xfrm>
-            <a:off x="6400800" y="2148840"/>
-            <a:ext cx="4846320" cy="1097280"/>
+              <a:rPr sz="3000" b="1" i="0">
+                <a:solidFill>
+                  <a:srgbClr val="14213D"/>
+                </a:solidFill>
+                <a:latin typeface="Calibri"/>
+              </a:rPr>
+              <a:t>~2 ms</a:t>
+            </a:r>
+          </a:p>
+        </p:txBody>
+      </p:sp>
+      <p:sp>
+        <p:nvSpPr>
+          <p:cNvPr id="10" name="TextBox 9"/>
+          <p:cNvSpPr txBox="1"/>
+          <p:nvPr/>
+        </p:nvSpPr>
+        <p:spPr>
+          <a:xfrm>
+            <a:off x="9692640" y="2971800"/>
+            <a:ext cx="1737360" cy="457200"/>
           </a:xfrm>
           <a:prstGeom prst="rect">
             <a:avLst/>
@@ -13169,7 +12610,7 @@
           <a:p>
             <a:pPr algn="l">
               <a:spcAft>
-                <a:spcPts val="400"/>
+                <a:spcPts val="0"/>
               </a:spcAft>
             </a:pPr>
             <a:r>
@@ -13179,98 +12620,29 @@
                 </a:solidFill>
                 <a:latin typeface="Calibri"/>
               </a:rPr>
-              <a:t>Real port scan and SYN flood against the host</a:t>
-            </a:r>
-          </a:p>
-          <a:p>
-            <a:pPr algn="l">
-              <a:spcAft>
-                <a:spcPts val="400"/>
-              </a:spcAft>
-            </a:pPr>
-            <a:r>
-              <a:rPr sz="1400" b="0" i="0">
-                <a:solidFill>
-                  <a:srgbClr val="1F2937"/>
-                </a:solidFill>
-                <a:latin typeface="Calibri"/>
-              </a:rPr>
-              <a:t>Alert reached the dashboard and log in a few ms</a:t>
-            </a:r>
-          </a:p>
-          <a:p>
-            <a:pPr algn="l">
-              <a:spcAft>
-                <a:spcPts val="400"/>
-              </a:spcAft>
-            </a:pPr>
-            <a:r>
-              <a:rPr sz="1400" b="0" i="0">
-                <a:solidFill>
-                  <a:srgbClr val="1F2937"/>
-                </a:solidFill>
-                <a:latin typeface="Calibri"/>
-              </a:rPr>
-              <a:t>No false alarm during normal browsing</a:t>
-            </a:r>
-          </a:p>
-        </p:txBody>
-      </p:sp>
-      <p:sp>
-        <p:nvSpPr>
-          <p:cNvPr id="10" name="TextBox 9"/>
-          <p:cNvSpPr txBox="1"/>
-          <p:nvPr/>
-        </p:nvSpPr>
-        <p:spPr>
-          <a:xfrm>
-            <a:off x="548640" y="3657600"/>
-            <a:ext cx="10972800" cy="365760"/>
-          </a:xfrm>
-          <a:prstGeom prst="rect">
-            <a:avLst/>
-          </a:prstGeom>
-          <a:noFill/>
-        </p:spPr>
-        <p:txBody>
-          <a:bodyPr wrap="square" lIns="0" rIns="0" tIns="0" bIns="0" anchor="t">
-            <a:spAutoFit/>
-          </a:bodyPr>
-          <a:lstStyle/>
-          <a:p>
-            <a:pPr algn="l">
-              <a:spcAft>
-                <a:spcPts val="0"/>
-              </a:spcAft>
-            </a:pPr>
-            <a:r>
-              <a:rPr sz="1600" b="1" i="0">
-                <a:solidFill>
-                  <a:srgbClr val="14213D"/>
-                </a:solidFill>
-                <a:latin typeface="Calibri"/>
-              </a:rPr>
-              <a:t>What the negative tests confirm</a:t>
-            </a:r>
-          </a:p>
-        </p:txBody>
-      </p:sp>
-      <p:sp>
-        <p:nvSpPr>
-          <p:cNvPr id="11" name="Oval 10"/>
+              <a:t>detection latency</a:t>
+            </a:r>
+          </a:p>
+        </p:txBody>
+      </p:sp>
+      <p:sp>
+        <p:nvSpPr>
+          <p:cNvPr id="11" name="Rounded Rectangle 10"/>
           <p:cNvSpPr/>
           <p:nvPr/>
         </p:nvSpPr>
         <p:spPr>
           <a:xfrm>
-            <a:off x="640080" y="4142232"/>
-            <a:ext cx="237744" cy="237744"/>
-          </a:xfrm>
-          <a:prstGeom prst="ellipse">
-            <a:avLst/>
+            <a:off x="8229600" y="3840480"/>
+            <a:ext cx="3291840" cy="960120"/>
+          </a:xfrm>
+          <a:prstGeom prst="roundRect">
+            <a:avLst>
+              <a:gd name="adj" fmla="val 8000"/>
+            </a:avLst>
           </a:prstGeom>
           <a:solidFill>
-            <a:srgbClr val="1B7F73"/>
+            <a:srgbClr val="EEF2F7"/>
           </a:solidFill>
           <a:ln>
             <a:noFill/>
@@ -13307,33 +12679,33 @@
         </p:nvSpPr>
         <p:spPr>
           <a:xfrm>
-            <a:off x="640080" y="4123944"/>
-            <a:ext cx="237744" cy="274320"/>
-          </a:xfrm>
-          <a:prstGeom prst="rect">
-            <a:avLst/>
-          </a:prstGeom>
-          <a:noFill/>
-        </p:spPr>
-        <p:txBody>
-          <a:bodyPr wrap="square" lIns="0" rIns="0" tIns="0" bIns="0" anchor="t">
-            <a:spAutoFit/>
-          </a:bodyPr>
-          <a:lstStyle/>
-          <a:p>
-            <a:pPr algn="ctr">
+            <a:off x="8458200" y="3950208"/>
+            <a:ext cx="1371600" cy="640080"/>
+          </a:xfrm>
+          <a:prstGeom prst="rect">
+            <a:avLst/>
+          </a:prstGeom>
+          <a:noFill/>
+        </p:spPr>
+        <p:txBody>
+          <a:bodyPr wrap="square" lIns="0" rIns="0" tIns="0" bIns="0" anchor="t">
+            <a:spAutoFit/>
+          </a:bodyPr>
+          <a:lstStyle/>
+          <a:p>
+            <a:pPr algn="l">
               <a:spcAft>
                 <a:spcPts val="0"/>
               </a:spcAft>
             </a:pPr>
             <a:r>
-              <a:rPr sz="1300" b="1" i="0">
-                <a:solidFill>
-                  <a:srgbClr val="FFFFFF"/>
-                </a:solidFill>
-                <a:latin typeface="Calibri"/>
-              </a:rPr>
-              <a:t>✓</a:t>
+              <a:rPr sz="3000" b="1" i="0">
+                <a:solidFill>
+                  <a:srgbClr val="14213D"/>
+                </a:solidFill>
+                <a:latin typeface="Calibri"/>
+              </a:rPr>
+              <a:t>10/10</a:t>
             </a:r>
           </a:p>
         </p:txBody>
@@ -13346,8 +12718,8 @@
         </p:nvSpPr>
         <p:spPr>
           <a:xfrm>
-            <a:off x="1005840" y="4114800"/>
-            <a:ext cx="5120640" cy="365760"/>
+            <a:off x="9692640" y="4114800"/>
+            <a:ext cx="1737360" cy="457200"/>
           </a:xfrm>
           <a:prstGeom prst="rect">
             <a:avLst/>
@@ -13366,33 +12738,35 @@
               </a:spcAft>
             </a:pPr>
             <a:r>
-              <a:rPr sz="1500" b="0" i="0">
+              <a:rPr sz="1400" b="0" i="0">
                 <a:solidFill>
                   <a:srgbClr val="1F2937"/>
                 </a:solidFill>
                 <a:latin typeface="Calibri"/>
               </a:rPr>
-              <a:t>Reply (SYN-ACK) packets are not a scan</a:t>
-            </a:r>
-          </a:p>
-        </p:txBody>
-      </p:sp>
-      <p:sp>
-        <p:nvSpPr>
-          <p:cNvPr id="14" name="Oval 13"/>
+              <a:t>unit tests pass</a:t>
+            </a:r>
+          </a:p>
+        </p:txBody>
+      </p:sp>
+      <p:sp>
+        <p:nvSpPr>
+          <p:cNvPr id="14" name="Rounded Rectangle 13"/>
           <p:cNvSpPr/>
           <p:nvPr/>
         </p:nvSpPr>
         <p:spPr>
           <a:xfrm>
-            <a:off x="6309360" y="4142232"/>
-            <a:ext cx="237744" cy="237744"/>
-          </a:xfrm>
-          <a:prstGeom prst="ellipse">
-            <a:avLst/>
+            <a:off x="8229600" y="4983480"/>
+            <a:ext cx="3291840" cy="960120"/>
+          </a:xfrm>
+          <a:prstGeom prst="roundRect">
+            <a:avLst>
+              <a:gd name="adj" fmla="val 8000"/>
+            </a:avLst>
           </a:prstGeom>
           <a:solidFill>
-            <a:srgbClr val="1B7F73"/>
+            <a:srgbClr val="EEF2F7"/>
           </a:solidFill>
           <a:ln>
             <a:noFill/>
@@ -13429,33 +12803,33 @@
         </p:nvSpPr>
         <p:spPr>
           <a:xfrm>
-            <a:off x="6309360" y="4123944"/>
-            <a:ext cx="237744" cy="274320"/>
-          </a:xfrm>
-          <a:prstGeom prst="rect">
-            <a:avLst/>
-          </a:prstGeom>
-          <a:noFill/>
-        </p:spPr>
-        <p:txBody>
-          <a:bodyPr wrap="square" lIns="0" rIns="0" tIns="0" bIns="0" anchor="t">
-            <a:spAutoFit/>
-          </a:bodyPr>
-          <a:lstStyle/>
-          <a:p>
-            <a:pPr algn="ctr">
+            <a:off x="8458200" y="5093208"/>
+            <a:ext cx="1371600" cy="640080"/>
+          </a:xfrm>
+          <a:prstGeom prst="rect">
+            <a:avLst/>
+          </a:prstGeom>
+          <a:noFill/>
+        </p:spPr>
+        <p:txBody>
+          <a:bodyPr wrap="square" lIns="0" rIns="0" tIns="0" bIns="0" anchor="t">
+            <a:spAutoFit/>
+          </a:bodyPr>
+          <a:lstStyle/>
+          <a:p>
+            <a:pPr algn="l">
               <a:spcAft>
                 <a:spcPts val="0"/>
               </a:spcAft>
             </a:pPr>
             <a:r>
-              <a:rPr sz="1300" b="1" i="0">
-                <a:solidFill>
-                  <a:srgbClr val="FFFFFF"/>
-                </a:solidFill>
-                <a:latin typeface="Calibri"/>
-              </a:rPr>
-              <a:t>✓</a:t>
+              <a:rPr sz="3000" b="1" i="0">
+                <a:solidFill>
+                  <a:srgbClr val="14213D"/>
+                </a:solidFill>
+                <a:latin typeface="Calibri"/>
+              </a:rPr>
+              <a:t>~200</a:t>
             </a:r>
           </a:p>
         </p:txBody>
@@ -13468,8 +12842,8 @@
         </p:nvSpPr>
         <p:spPr>
           <a:xfrm>
-            <a:off x="6675120" y="4114800"/>
-            <a:ext cx="5120640" cy="365760"/>
+            <a:off x="9692640" y="5257800"/>
+            <a:ext cx="1737360" cy="457200"/>
           </a:xfrm>
           <a:prstGeom prst="rect">
             <a:avLst/>
@@ -13488,508 +12862,20 @@
               </a:spcAft>
             </a:pPr>
             <a:r>
-              <a:rPr sz="1500" b="0" i="0">
+              <a:rPr sz="1400" b="0" i="0">
                 <a:solidFill>
                   <a:srgbClr val="1F2937"/>
                 </a:solidFill>
                 <a:latin typeface="Calibri"/>
               </a:rPr>
-              <a:t>Slow activity below the threshold stays silent</a:t>
-            </a:r>
-          </a:p>
-        </p:txBody>
-      </p:sp>
-      <p:sp>
-        <p:nvSpPr>
-          <p:cNvPr id="17" name="Oval 16"/>
-          <p:cNvSpPr/>
-          <p:nvPr/>
-        </p:nvSpPr>
-        <p:spPr>
-          <a:xfrm>
-            <a:off x="640080" y="4709160"/>
-            <a:ext cx="237744" cy="237744"/>
-          </a:xfrm>
-          <a:prstGeom prst="ellipse">
-            <a:avLst/>
-          </a:prstGeom>
-          <a:solidFill>
-            <a:srgbClr val="1B7F73"/>
-          </a:solidFill>
-          <a:ln>
-            <a:noFill/>
-          </a:ln>
-          <a:effectLst/>
-        </p:spPr>
-        <p:style>
-          <a:lnRef idx="1">
-            <a:schemeClr val="accent1"/>
-          </a:lnRef>
-          <a:fillRef idx="3">
-            <a:schemeClr val="accent1"/>
-          </a:fillRef>
-          <a:effectRef idx="2">
-            <a:schemeClr val="accent1"/>
-          </a:effectRef>
-          <a:fontRef idx="minor">
-            <a:schemeClr val="lt1"/>
-          </a:fontRef>
-        </p:style>
-        <p:txBody>
-          <a:bodyPr rtlCol="0" anchor="ctr"/>
-          <a:lstStyle/>
-          <a:p>
-            <a:pPr algn="ctr"/>
-          </a:p>
-        </p:txBody>
-      </p:sp>
-      <p:sp>
-        <p:nvSpPr>
-          <p:cNvPr id="18" name="TextBox 17"/>
-          <p:cNvSpPr txBox="1"/>
-          <p:nvPr/>
-        </p:nvSpPr>
-        <p:spPr>
-          <a:xfrm>
-            <a:off x="640080" y="4690872"/>
-            <a:ext cx="237744" cy="274320"/>
-          </a:xfrm>
-          <a:prstGeom prst="rect">
-            <a:avLst/>
-          </a:prstGeom>
-          <a:noFill/>
-        </p:spPr>
-        <p:txBody>
-          <a:bodyPr wrap="square" lIns="0" rIns="0" tIns="0" bIns="0" anchor="t">
-            <a:spAutoFit/>
-          </a:bodyPr>
-          <a:lstStyle/>
-          <a:p>
-            <a:pPr algn="ctr">
-              <a:spcAft>
-                <a:spcPts val="0"/>
-              </a:spcAft>
-            </a:pPr>
-            <a:r>
-              <a:rPr sz="1300" b="1" i="0">
-                <a:solidFill>
-                  <a:srgbClr val="FFFFFF"/>
-                </a:solidFill>
-                <a:latin typeface="Calibri"/>
-              </a:rPr>
-              <a:t>✓</a:t>
-            </a:r>
-          </a:p>
-        </p:txBody>
-      </p:sp>
-      <p:sp>
-        <p:nvSpPr>
-          <p:cNvPr id="19" name="TextBox 18"/>
-          <p:cNvSpPr txBox="1"/>
-          <p:nvPr/>
-        </p:nvSpPr>
-        <p:spPr>
-          <a:xfrm>
-            <a:off x="1005840" y="4681728"/>
-            <a:ext cx="5120640" cy="365760"/>
-          </a:xfrm>
-          <a:prstGeom prst="rect">
-            <a:avLst/>
-          </a:prstGeom>
-          <a:noFill/>
-        </p:spPr>
-        <p:txBody>
-          <a:bodyPr wrap="square" lIns="0" rIns="0" tIns="0" bIns="0" anchor="t">
-            <a:spAutoFit/>
-          </a:bodyPr>
-          <a:lstStyle/>
-          <a:p>
-            <a:pPr algn="l">
-              <a:spcAft>
-                <a:spcPts val="0"/>
-              </a:spcAft>
-            </a:pPr>
-            <a:r>
-              <a:rPr sz="1500" b="0" i="0">
-                <a:solidFill>
-                  <a:srgbClr val="1F2937"/>
-                </a:solidFill>
-                <a:latin typeface="Calibri"/>
-              </a:rPr>
-              <a:t>Completed handshakes are not a flood</a:t>
-            </a:r>
-          </a:p>
-        </p:txBody>
-      </p:sp>
-      <p:sp>
-        <p:nvSpPr>
-          <p:cNvPr id="20" name="Oval 19"/>
-          <p:cNvSpPr/>
-          <p:nvPr/>
-        </p:nvSpPr>
-        <p:spPr>
-          <a:xfrm>
-            <a:off x="6309360" y="4709160"/>
-            <a:ext cx="237744" cy="237744"/>
-          </a:xfrm>
-          <a:prstGeom prst="ellipse">
-            <a:avLst/>
-          </a:prstGeom>
-          <a:solidFill>
-            <a:srgbClr val="1B7F73"/>
-          </a:solidFill>
-          <a:ln>
-            <a:noFill/>
-          </a:ln>
-          <a:effectLst/>
-        </p:spPr>
-        <p:style>
-          <a:lnRef idx="1">
-            <a:schemeClr val="accent1"/>
-          </a:lnRef>
-          <a:fillRef idx="3">
-            <a:schemeClr val="accent1"/>
-          </a:fillRef>
-          <a:effectRef idx="2">
-            <a:schemeClr val="accent1"/>
-          </a:effectRef>
-          <a:fontRef idx="minor">
-            <a:schemeClr val="lt1"/>
-          </a:fontRef>
-        </p:style>
-        <p:txBody>
-          <a:bodyPr rtlCol="0" anchor="ctr"/>
-          <a:lstStyle/>
-          <a:p>
-            <a:pPr algn="ctr"/>
-          </a:p>
-        </p:txBody>
-      </p:sp>
-      <p:sp>
-        <p:nvSpPr>
-          <p:cNvPr id="21" name="TextBox 20"/>
-          <p:cNvSpPr txBox="1"/>
-          <p:nvPr/>
-        </p:nvSpPr>
-        <p:spPr>
-          <a:xfrm>
-            <a:off x="6309360" y="4690872"/>
-            <a:ext cx="237744" cy="274320"/>
-          </a:xfrm>
-          <a:prstGeom prst="rect">
-            <a:avLst/>
-          </a:prstGeom>
-          <a:noFill/>
-        </p:spPr>
-        <p:txBody>
-          <a:bodyPr wrap="square" lIns="0" rIns="0" tIns="0" bIns="0" anchor="t">
-            <a:spAutoFit/>
-          </a:bodyPr>
-          <a:lstStyle/>
-          <a:p>
-            <a:pPr algn="ctr">
-              <a:spcAft>
-                <a:spcPts val="0"/>
-              </a:spcAft>
-            </a:pPr>
-            <a:r>
-              <a:rPr sz="1300" b="1" i="0">
-                <a:solidFill>
-                  <a:srgbClr val="FFFFFF"/>
-                </a:solidFill>
-                <a:latin typeface="Calibri"/>
-              </a:rPr>
-              <a:t>✓</a:t>
-            </a:r>
-          </a:p>
-        </p:txBody>
-      </p:sp>
-      <p:sp>
-        <p:nvSpPr>
-          <p:cNvPr id="22" name="TextBox 21"/>
-          <p:cNvSpPr txBox="1"/>
-          <p:nvPr/>
-        </p:nvSpPr>
-        <p:spPr>
-          <a:xfrm>
-            <a:off x="6675120" y="4681728"/>
-            <a:ext cx="5120640" cy="365760"/>
-          </a:xfrm>
-          <a:prstGeom prst="rect">
-            <a:avLst/>
-          </a:prstGeom>
-          <a:noFill/>
-        </p:spPr>
-        <p:txBody>
-          <a:bodyPr wrap="square" lIns="0" rIns="0" tIns="0" bIns="0" anchor="t">
-            <a:spAutoFit/>
-          </a:bodyPr>
-          <a:lstStyle/>
-          <a:p>
-            <a:pPr algn="l">
-              <a:spcAft>
-                <a:spcPts val="0"/>
-              </a:spcAft>
-            </a:pPr>
-            <a:r>
-              <a:rPr sz="1500" b="0" i="0">
-                <a:solidFill>
-                  <a:srgbClr val="1F2937"/>
-                </a:solidFill>
-                <a:latin typeface="Calibri"/>
-              </a:rPr>
-              <a:t>A port scan is not mistaken for a flood</a:t>
-            </a:r>
-          </a:p>
-        </p:txBody>
-      </p:sp>
-      <p:sp>
-        <p:nvSpPr>
-          <p:cNvPr id="23" name="Oval 22"/>
-          <p:cNvSpPr/>
-          <p:nvPr/>
-        </p:nvSpPr>
-        <p:spPr>
-          <a:xfrm>
-            <a:off x="640080" y="5276088"/>
-            <a:ext cx="237744" cy="237744"/>
-          </a:xfrm>
-          <a:prstGeom prst="ellipse">
-            <a:avLst/>
-          </a:prstGeom>
-          <a:solidFill>
-            <a:srgbClr val="1B7F73"/>
-          </a:solidFill>
-          <a:ln>
-            <a:noFill/>
-          </a:ln>
-          <a:effectLst/>
-        </p:spPr>
-        <p:style>
-          <a:lnRef idx="1">
-            <a:schemeClr val="accent1"/>
-          </a:lnRef>
-          <a:fillRef idx="3">
-            <a:schemeClr val="accent1"/>
-          </a:fillRef>
-          <a:effectRef idx="2">
-            <a:schemeClr val="accent1"/>
-          </a:effectRef>
-          <a:fontRef idx="minor">
-            <a:schemeClr val="lt1"/>
-          </a:fontRef>
-        </p:style>
-        <p:txBody>
-          <a:bodyPr rtlCol="0" anchor="ctr"/>
-          <a:lstStyle/>
-          <a:p>
-            <a:pPr algn="ctr"/>
-          </a:p>
-        </p:txBody>
-      </p:sp>
-      <p:sp>
-        <p:nvSpPr>
-          <p:cNvPr id="24" name="TextBox 23"/>
-          <p:cNvSpPr txBox="1"/>
-          <p:nvPr/>
-        </p:nvSpPr>
-        <p:spPr>
-          <a:xfrm>
-            <a:off x="640080" y="5257800"/>
-            <a:ext cx="237744" cy="274320"/>
-          </a:xfrm>
-          <a:prstGeom prst="rect">
-            <a:avLst/>
-          </a:prstGeom>
-          <a:noFill/>
-        </p:spPr>
-        <p:txBody>
-          <a:bodyPr wrap="square" lIns="0" rIns="0" tIns="0" bIns="0" anchor="t">
-            <a:spAutoFit/>
-          </a:bodyPr>
-          <a:lstStyle/>
-          <a:p>
-            <a:pPr algn="ctr">
-              <a:spcAft>
-                <a:spcPts val="0"/>
-              </a:spcAft>
-            </a:pPr>
-            <a:r>
-              <a:rPr sz="1300" b="1" i="0">
-                <a:solidFill>
-                  <a:srgbClr val="FFFFFF"/>
-                </a:solidFill>
-                <a:latin typeface="Calibri"/>
-              </a:rPr>
-              <a:t>✓</a:t>
-            </a:r>
-          </a:p>
-        </p:txBody>
-      </p:sp>
-      <p:sp>
-        <p:nvSpPr>
-          <p:cNvPr id="25" name="TextBox 24"/>
-          <p:cNvSpPr txBox="1"/>
-          <p:nvPr/>
-        </p:nvSpPr>
-        <p:spPr>
-          <a:xfrm>
-            <a:off x="1005840" y="5248656"/>
-            <a:ext cx="5120640" cy="365760"/>
-          </a:xfrm>
-          <a:prstGeom prst="rect">
-            <a:avLst/>
-          </a:prstGeom>
-          <a:noFill/>
-        </p:spPr>
-        <p:txBody>
-          <a:bodyPr wrap="square" lIns="0" rIns="0" tIns="0" bIns="0" anchor="t">
-            <a:spAutoFit/>
-          </a:bodyPr>
-          <a:lstStyle/>
-          <a:p>
-            <a:pPr algn="l">
-              <a:spcAft>
-                <a:spcPts val="0"/>
-              </a:spcAft>
-            </a:pPr>
-            <a:r>
-              <a:rPr sz="1500" b="0" i="0">
-                <a:solidFill>
-                  <a:srgbClr val="1F2937"/>
-                </a:solidFill>
-                <a:latin typeface="Calibri"/>
-              </a:rPr>
-              <a:t>Genuine ARP replies raise no alarm</a:t>
-            </a:r>
-          </a:p>
-        </p:txBody>
-      </p:sp>
-      <p:sp>
-        <p:nvSpPr>
-          <p:cNvPr id="26" name="Oval 25"/>
-          <p:cNvSpPr/>
-          <p:nvPr/>
-        </p:nvSpPr>
-        <p:spPr>
-          <a:xfrm>
-            <a:off x="6309360" y="5276088"/>
-            <a:ext cx="237744" cy="237744"/>
-          </a:xfrm>
-          <a:prstGeom prst="ellipse">
-            <a:avLst/>
-          </a:prstGeom>
-          <a:solidFill>
-            <a:srgbClr val="1B7F73"/>
-          </a:solidFill>
-          <a:ln>
-            <a:noFill/>
-          </a:ln>
-          <a:effectLst/>
-        </p:spPr>
-        <p:style>
-          <a:lnRef idx="1">
-            <a:schemeClr val="accent1"/>
-          </a:lnRef>
-          <a:fillRef idx="3">
-            <a:schemeClr val="accent1"/>
-          </a:fillRef>
-          <a:effectRef idx="2">
-            <a:schemeClr val="accent1"/>
-          </a:effectRef>
-          <a:fontRef idx="minor">
-            <a:schemeClr val="lt1"/>
-          </a:fontRef>
-        </p:style>
-        <p:txBody>
-          <a:bodyPr rtlCol="0" anchor="ctr"/>
-          <a:lstStyle/>
-          <a:p>
-            <a:pPr algn="ctr"/>
-          </a:p>
-        </p:txBody>
-      </p:sp>
-      <p:sp>
-        <p:nvSpPr>
-          <p:cNvPr id="27" name="TextBox 26"/>
-          <p:cNvSpPr txBox="1"/>
-          <p:nvPr/>
-        </p:nvSpPr>
-        <p:spPr>
-          <a:xfrm>
-            <a:off x="6309360" y="5257800"/>
-            <a:ext cx="237744" cy="274320"/>
-          </a:xfrm>
-          <a:prstGeom prst="rect">
-            <a:avLst/>
-          </a:prstGeom>
-          <a:noFill/>
-        </p:spPr>
-        <p:txBody>
-          <a:bodyPr wrap="square" lIns="0" rIns="0" tIns="0" bIns="0" anchor="t">
-            <a:spAutoFit/>
-          </a:bodyPr>
-          <a:lstStyle/>
-          <a:p>
-            <a:pPr algn="ctr">
-              <a:spcAft>
-                <a:spcPts val="0"/>
-              </a:spcAft>
-            </a:pPr>
-            <a:r>
-              <a:rPr sz="1300" b="1" i="0">
-                <a:solidFill>
-                  <a:srgbClr val="FFFFFF"/>
-                </a:solidFill>
-                <a:latin typeface="Calibri"/>
-              </a:rPr>
-              <a:t>✓</a:t>
-            </a:r>
-          </a:p>
-        </p:txBody>
-      </p:sp>
-      <p:sp>
-        <p:nvSpPr>
-          <p:cNvPr id="28" name="TextBox 27"/>
-          <p:cNvSpPr txBox="1"/>
-          <p:nvPr/>
-        </p:nvSpPr>
-        <p:spPr>
-          <a:xfrm>
-            <a:off x="6675120" y="5248656"/>
-            <a:ext cx="5120640" cy="365760"/>
-          </a:xfrm>
-          <a:prstGeom prst="rect">
-            <a:avLst/>
-          </a:prstGeom>
-          <a:noFill/>
-        </p:spPr>
-        <p:txBody>
-          <a:bodyPr wrap="square" lIns="0" rIns="0" tIns="0" bIns="0" anchor="t">
-            <a:spAutoFit/>
-          </a:bodyPr>
-          <a:lstStyle/>
-          <a:p>
-            <a:pPr algn="l">
-              <a:spcAft>
-                <a:spcPts val="0"/>
-              </a:spcAft>
-            </a:pPr>
-            <a:r>
-              <a:rPr sz="1500" b="0" i="0">
-                <a:solidFill>
-                  <a:srgbClr val="1F2937"/>
-                </a:solidFill>
-                <a:latin typeface="Calibri"/>
-              </a:rPr>
-              <a:t>A cool-down stops duplicate alerts</a:t>
-            </a:r>
-          </a:p>
-        </p:txBody>
-      </p:sp>
-      <p:sp>
-        <p:nvSpPr>
-          <p:cNvPr id="29" name="TextBox 28"/>
+              <a:t>lines of code</a:t>
+            </a:r>
+          </a:p>
+        </p:txBody>
+      </p:sp>
+      <p:sp>
+        <p:nvSpPr>
+          <p:cNvPr id="17" name="TextBox 16"/>
           <p:cNvSpPr txBox="1"/>
           <p:nvPr/>
         </p:nvSpPr>
@@ -14028,7 +12914,7 @@
       </p:sp>
       <p:sp>
         <p:nvSpPr>
-          <p:cNvPr id="30" name="TextBox 29"/>
+          <p:cNvPr id="18" name="TextBox 17"/>
           <p:cNvSpPr txBox="1"/>
           <p:nvPr/>
         </p:nvSpPr>

--- a/NIDS_Final_Presentation_Rohan_Pandey.pptx
+++ b/NIDS_Final_Presentation_Rohan_Pandey.pptx
@@ -581,7 +581,7 @@
           <a:lstStyle/>
           <a:p>
             <a:r>
-              <a:t>In conclusion, the project is a complete and working intrusion detection system that meets every objective and is small enough to explain in full. The modular rule engine means each future extension can be added and tested on its own. Thank you, I am happy to take questions or show any part of the code or the live demo.</a:t>
+              <a:t>Thank you. I am happy to take questions or to show any part of the code or the live demo.</a:t>
             </a:r>
           </a:p>
         </p:txBody>
@@ -791,7 +791,7 @@
           <a:lstStyle/>
           <a:p>
             <a:r>
-              <a:t>The sensor captures packets with Scapy and runs the rules. Alerts go as JSON over HTTP to the Node.js server, which logs them and pushes them to the dashboard through Socket.IO.</a:t>
+              <a:t>The sensor captures packets with Scapy over Npcap and runs the rules. Alerts go as JSON over HTTP to the Node.js server, which logs them and pushes them to the dashboard through Socket.IO. Each tool is used where it is strongest, and the two halves talk over HTTP with small JSON messages, so each can be tested on its own.</a:t>
             </a:r>
           </a:p>
         </p:txBody>
@@ -861,7 +861,7 @@
           <a:lstStyle/>
           <a:p>
             <a:r>
-              <a:t>Each tool is used where it is strongest. The two halves talk over HTTP with small JSON messages, so each can be tested on its own.</a:t>
+              <a:t>The design was captured in standard diagrams: data-flow, use-case, sequence, component and deployment, plus a flowchart of the detection logic. The level-1 data-flow diagram shown here breaks the system into five processes.</a:t>
             </a:r>
           </a:p>
         </p:txBody>
@@ -931,7 +931,7 @@
           <a:lstStyle/>
           <a:p>
             <a:r>
-              <a:t>The design was captured in standard diagrams: data-flow, use-case, sequence, component and deployment, plus a flowchart of the detection logic. The level-1 data-flow diagram shown here breaks the system into five processes.</a:t>
+              <a:t>Each rule is a simple threshold on a counter. The port scan counts distinct ports, the SYN flood counts half-open handshakes, and the ARP rule watches for a changed gateway MAC. Every alert can be explained by its counter and threshold, which is the key advantage over machine learning.</a:t>
             </a:r>
           </a:p>
         </p:txBody>
@@ -1001,7 +1001,7 @@
           <a:lstStyle/>
           <a:p>
             <a:r>
-              <a:t>Each rule is a simple threshold on a counter. The port scan counts distinct ports, the SYN flood counts half-open handshakes, and the ARP rule watches for a changed gateway MAC. Every alert can be explained by its counter and threshold, which is the key advantage over machine learning.</a:t>
+              <a:t>Ten unit tests feed crafted packets straight to the detector and all pass. The negative tests matter as much as the positive ones, because a detector that cries wolf would be ignored. Integration tests confirmed the whole pipeline with real attacks against my own machine.</a:t>
             </a:r>
           </a:p>
         </p:txBody>
@@ -1071,7 +1071,7 @@
           <a:lstStyle/>
           <a:p>
             <a:r>
-              <a:t>Ten unit tests feed crafted packets straight to the detector and all pass. The negative tests matter as much as the positive ones, because a detector that cries wolf would be ignored. Integration tests confirmed the whole pipeline with real attacks against my own machine.</a:t>
+              <a:t>This is the real dashboard during testing. The medium port-scan alert and the high SYN-flood alert are both shown, with the live chart and the per-type totals. Detection latency was about two milliseconds, and no false alarm was raised during normal browsing.</a:t>
             </a:r>
           </a:p>
         </p:txBody>
@@ -1141,7 +1141,7 @@
           <a:lstStyle/>
           <a:p>
             <a:r>
-              <a:t>This is the real dashboard during testing. The medium port-scan alert and the high SYN-flood alert are both shown, with the live chart and the per-type totals. Detection latency was about two milliseconds, and no false alarm was raised during normal browsing.</a:t>
+              <a:t>In conclusion, the project is a complete and working intrusion detection system that meets every objective and is small enough to explain in full. The modular rule engine means each future extension can be added and tested on its own.</a:t>
             </a:r>
           </a:p>
         </p:txBody>
@@ -4483,7 +4483,7 @@
     <p:bg>
       <p:bgPr>
         <a:solidFill>
-          <a:srgbClr val="FFFFFF"/>
+          <a:srgbClr val="14213D"/>
         </a:solidFill>
         <a:effectLst/>
       </p:bgPr>
@@ -4503,33 +4503,33 @@
         </p:nvSpPr>
         <p:spPr>
           <a:xfrm>
-            <a:off x="548640" y="411480"/>
-            <a:ext cx="11064240" cy="685800"/>
-          </a:xfrm>
-          <a:prstGeom prst="rect">
-            <a:avLst/>
-          </a:prstGeom>
-          <a:noFill/>
-        </p:spPr>
-        <p:txBody>
-          <a:bodyPr wrap="square" lIns="0" rIns="0" tIns="0" bIns="0" anchor="t">
-            <a:spAutoFit/>
-          </a:bodyPr>
-          <a:lstStyle/>
-          <a:p>
-            <a:pPr algn="l">
+            <a:off x="548640" y="2103120"/>
+            <a:ext cx="11064240" cy="914400"/>
+          </a:xfrm>
+          <a:prstGeom prst="rect">
+            <a:avLst/>
+          </a:prstGeom>
+          <a:noFill/>
+        </p:spPr>
+        <p:txBody>
+          <a:bodyPr wrap="square" lIns="0" rIns="0" tIns="0" bIns="0" anchor="t">
+            <a:spAutoFit/>
+          </a:bodyPr>
+          <a:lstStyle/>
+          <a:p>
+            <a:pPr algn="ctr">
               <a:spcAft>
                 <a:spcPts val="0"/>
               </a:spcAft>
             </a:pPr>
             <a:r>
-              <a:rPr sz="3200" b="1" i="0">
-                <a:solidFill>
-                  <a:srgbClr val="14213D"/>
-                </a:solidFill>
-                <a:latin typeface="Calibri"/>
-              </a:rPr>
-              <a:t>Conclusion and Future Scope</a:t>
+              <a:rPr sz="5400" b="1" i="0">
+                <a:solidFill>
+                  <a:srgbClr val="FFFFFF"/>
+                </a:solidFill>
+                <a:latin typeface="Calibri"/>
+              </a:rPr>
+              <a:t>Thank You</a:t>
             </a:r>
           </a:p>
         </p:txBody>
@@ -4542,45 +4542,33 @@
         </p:nvSpPr>
         <p:spPr>
           <a:xfrm>
-            <a:off x="548640" y="1417320"/>
-            <a:ext cx="11064240" cy="1371600"/>
-          </a:xfrm>
-          <a:prstGeom prst="rect">
-            <a:avLst/>
-          </a:prstGeom>
-          <a:noFill/>
-        </p:spPr>
-        <p:txBody>
-          <a:bodyPr wrap="square" lIns="0" rIns="0" tIns="0" bIns="0" anchor="t">
-            <a:spAutoFit/>
-          </a:bodyPr>
-          <a:lstStyle/>
-          <a:p>
-            <a:pPr algn="l">
-              <a:lnSpc>
-                <a:spcPct val="115000"/>
-              </a:lnSpc>
+            <a:off x="548640" y="3108960"/>
+            <a:ext cx="11064240" cy="457200"/>
+          </a:xfrm>
+          <a:prstGeom prst="rect">
+            <a:avLst/>
+          </a:prstGeom>
+          <a:noFill/>
+        </p:spPr>
+        <p:txBody>
+          <a:bodyPr wrap="square" lIns="0" rIns="0" tIns="0" bIns="0" anchor="t">
+            <a:spAutoFit/>
+          </a:bodyPr>
+          <a:lstStyle/>
+          <a:p>
+            <a:pPr algn="ctr">
               <a:spcAft>
                 <a:spcPts val="0"/>
               </a:spcAft>
             </a:pPr>
             <a:r>
-              <a:rPr sz="1800" b="1" i="0">
-                <a:solidFill>
-                  <a:srgbClr val="14213D"/>
-                </a:solidFill>
-                <a:latin typeface="Calibri"/>
-              </a:rPr>
-              <a:t>A complete, working NIDS. </a:t>
-            </a:r>
-            <a:r>
-              <a:rPr sz="1800" b="0" i="0">
-                <a:solidFill>
-                  <a:srgbClr val="1F2937"/>
-                </a:solidFill>
-                <a:latin typeface="Calibri"/>
-              </a:rPr>
-              <a:t>All objectives met: live capture, three transparent detection rules, an alert pipeline, and a real-time dashboard, verified by ten unit tests and live attacks, in about 200 lines of code.</a:t>
+              <a:rPr sz="2200" b="0" i="0">
+                <a:solidFill>
+                  <a:srgbClr val="C9D6EA"/>
+                </a:solidFill>
+                <a:latin typeface="Calibri"/>
+              </a:rPr>
+              <a:t>Questions are welcome</a:t>
             </a:r>
           </a:p>
         </p:txBody>
@@ -4593,91 +4581,47 @@
         </p:nvSpPr>
         <p:spPr>
           <a:xfrm>
-            <a:off x="548640" y="3200400"/>
-            <a:ext cx="5394960" cy="365760"/>
-          </a:xfrm>
-          <a:prstGeom prst="rect">
-            <a:avLst/>
-          </a:prstGeom>
-          <a:noFill/>
-        </p:spPr>
-        <p:txBody>
-          <a:bodyPr wrap="square" lIns="0" rIns="0" tIns="0" bIns="0" anchor="t">
-            <a:spAutoFit/>
-          </a:bodyPr>
-          <a:lstStyle/>
-          <a:p>
-            <a:pPr algn="l">
+            <a:off x="548640" y="4206240"/>
+            <a:ext cx="11064240" cy="365760"/>
+          </a:xfrm>
+          <a:prstGeom prst="rect">
+            <a:avLst/>
+          </a:prstGeom>
+          <a:noFill/>
+        </p:spPr>
+        <p:txBody>
+          <a:bodyPr wrap="square" lIns="0" rIns="0" tIns="0" bIns="0" anchor="t">
+            <a:spAutoFit/>
+          </a:bodyPr>
+          <a:lstStyle/>
+          <a:p>
+            <a:pPr algn="ctr">
               <a:spcAft>
                 <a:spcPts val="0"/>
               </a:spcAft>
             </a:pPr>
             <a:r>
-              <a:rPr sz="1300" b="1" i="0">
-                <a:solidFill>
-                  <a:srgbClr val="1B7F73"/>
-                </a:solidFill>
-                <a:latin typeface="Calibri"/>
-              </a:rPr>
-              <a:t>KEY STRENGTHS</a:t>
-            </a:r>
-          </a:p>
-        </p:txBody>
-      </p:sp>
-      <p:sp>
-        <p:nvSpPr>
-          <p:cNvPr id="5" name="Oval 4"/>
-          <p:cNvSpPr/>
-          <p:nvPr/>
-        </p:nvSpPr>
-        <p:spPr>
-          <a:xfrm>
-            <a:off x="640080" y="3639312"/>
-            <a:ext cx="237744" cy="237744"/>
-          </a:xfrm>
-          <a:prstGeom prst="ellipse">
-            <a:avLst/>
-          </a:prstGeom>
-          <a:solidFill>
-            <a:srgbClr val="1B7F73"/>
-          </a:solidFill>
-          <a:ln>
-            <a:noFill/>
-          </a:ln>
-          <a:effectLst/>
-        </p:spPr>
-        <p:style>
-          <a:lnRef idx="1">
-            <a:schemeClr val="accent1"/>
-          </a:lnRef>
-          <a:fillRef idx="3">
-            <a:schemeClr val="accent1"/>
-          </a:fillRef>
-          <a:effectRef idx="2">
-            <a:schemeClr val="accent1"/>
-          </a:effectRef>
-          <a:fontRef idx="minor">
-            <a:schemeClr val="lt1"/>
-          </a:fontRef>
-        </p:style>
-        <p:txBody>
-          <a:bodyPr rtlCol="0" anchor="ctr"/>
-          <a:lstStyle/>
-          <a:p>
-            <a:pPr algn="ctr"/>
-          </a:p>
-        </p:txBody>
-      </p:sp>
-      <p:sp>
-        <p:nvSpPr>
-          <p:cNvPr id="6" name="TextBox 5"/>
-          <p:cNvSpPr txBox="1"/>
-          <p:nvPr/>
-        </p:nvSpPr>
-        <p:spPr>
-          <a:xfrm>
-            <a:off x="640080" y="3621024"/>
-            <a:ext cx="237744" cy="274320"/>
+              <a:rPr sz="1500" b="0" i="0">
+                <a:solidFill>
+                  <a:srgbClr val="9FB3D1"/>
+                </a:solidFill>
+                <a:latin typeface="Calibri"/>
+              </a:rPr>
+              <a:t>github.com/rohanpandey436/realtime-nids</a:t>
+            </a:r>
+          </a:p>
+        </p:txBody>
+      </p:sp>
+      <p:sp>
+        <p:nvSpPr>
+          <p:cNvPr id="5" name="TextBox 4"/>
+          <p:cNvSpPr txBox="1"/>
+          <p:nvPr/>
+        </p:nvSpPr>
+        <p:spPr>
+          <a:xfrm>
+            <a:off x="548640" y="5303520"/>
+            <a:ext cx="11064240" cy="365760"/>
           </a:xfrm>
           <a:prstGeom prst="rect">
             <a:avLst/>
@@ -4696,989 +4640,13 @@
               </a:spcAft>
             </a:pPr>
             <a:r>
-              <a:rPr sz="1300" b="1" i="0">
-                <a:solidFill>
-                  <a:srgbClr val="FFFFFF"/>
-                </a:solidFill>
-                <a:latin typeface="Calibri"/>
-              </a:rPr>
-              <a:t>✓</a:t>
-            </a:r>
-          </a:p>
-        </p:txBody>
-      </p:sp>
-      <p:sp>
-        <p:nvSpPr>
-          <p:cNvPr id="7" name="TextBox 6"/>
-          <p:cNvSpPr txBox="1"/>
-          <p:nvPr/>
-        </p:nvSpPr>
-        <p:spPr>
-          <a:xfrm>
-            <a:off x="1005840" y="3611880"/>
-            <a:ext cx="4754880" cy="365760"/>
-          </a:xfrm>
-          <a:prstGeom prst="rect">
-            <a:avLst/>
-          </a:prstGeom>
-          <a:noFill/>
-        </p:spPr>
-        <p:txBody>
-          <a:bodyPr wrap="square" lIns="0" rIns="0" tIns="0" bIns="0" anchor="t">
-            <a:spAutoFit/>
-          </a:bodyPr>
-          <a:lstStyle/>
-          <a:p>
-            <a:pPr algn="l">
-              <a:spcAft>
-                <a:spcPts val="0"/>
-              </a:spcAft>
-            </a:pPr>
-            <a:r>
-              <a:rPr sz="1500" b="0" i="0">
-                <a:solidFill>
-                  <a:srgbClr val="1F2937"/>
-                </a:solidFill>
-                <a:latin typeface="Calibri"/>
-              </a:rPr>
-              <a:t>Every alert traceable to a threshold</a:t>
-            </a:r>
-          </a:p>
-        </p:txBody>
-      </p:sp>
-      <p:sp>
-        <p:nvSpPr>
-          <p:cNvPr id="8" name="Oval 7"/>
-          <p:cNvSpPr/>
-          <p:nvPr/>
-        </p:nvSpPr>
-        <p:spPr>
-          <a:xfrm>
-            <a:off x="640080" y="4142232"/>
-            <a:ext cx="237744" cy="237744"/>
-          </a:xfrm>
-          <a:prstGeom prst="ellipse">
-            <a:avLst/>
-          </a:prstGeom>
-          <a:solidFill>
-            <a:srgbClr val="1B7F73"/>
-          </a:solidFill>
-          <a:ln>
-            <a:noFill/>
-          </a:ln>
-          <a:effectLst/>
-        </p:spPr>
-        <p:style>
-          <a:lnRef idx="1">
-            <a:schemeClr val="accent1"/>
-          </a:lnRef>
-          <a:fillRef idx="3">
-            <a:schemeClr val="accent1"/>
-          </a:fillRef>
-          <a:effectRef idx="2">
-            <a:schemeClr val="accent1"/>
-          </a:effectRef>
-          <a:fontRef idx="minor">
-            <a:schemeClr val="lt1"/>
-          </a:fontRef>
-        </p:style>
-        <p:txBody>
-          <a:bodyPr rtlCol="0" anchor="ctr"/>
-          <a:lstStyle/>
-          <a:p>
-            <a:pPr algn="ctr"/>
-          </a:p>
-        </p:txBody>
-      </p:sp>
-      <p:sp>
-        <p:nvSpPr>
-          <p:cNvPr id="9" name="TextBox 8"/>
-          <p:cNvSpPr txBox="1"/>
-          <p:nvPr/>
-        </p:nvSpPr>
-        <p:spPr>
-          <a:xfrm>
-            <a:off x="640080" y="4123944"/>
-            <a:ext cx="237744" cy="274320"/>
-          </a:xfrm>
-          <a:prstGeom prst="rect">
-            <a:avLst/>
-          </a:prstGeom>
-          <a:noFill/>
-        </p:spPr>
-        <p:txBody>
-          <a:bodyPr wrap="square" lIns="0" rIns="0" tIns="0" bIns="0" anchor="t">
-            <a:spAutoFit/>
-          </a:bodyPr>
-          <a:lstStyle/>
-          <a:p>
-            <a:pPr algn="ctr">
-              <a:spcAft>
-                <a:spcPts val="0"/>
-              </a:spcAft>
-            </a:pPr>
-            <a:r>
-              <a:rPr sz="1300" b="1" i="0">
-                <a:solidFill>
-                  <a:srgbClr val="FFFFFF"/>
-                </a:solidFill>
-                <a:latin typeface="Calibri"/>
-              </a:rPr>
-              <a:t>✓</a:t>
-            </a:r>
-          </a:p>
-        </p:txBody>
-      </p:sp>
-      <p:sp>
-        <p:nvSpPr>
-          <p:cNvPr id="10" name="TextBox 9"/>
-          <p:cNvSpPr txBox="1"/>
-          <p:nvPr/>
-        </p:nvSpPr>
-        <p:spPr>
-          <a:xfrm>
-            <a:off x="1005840" y="4114800"/>
-            <a:ext cx="4754880" cy="365760"/>
-          </a:xfrm>
-          <a:prstGeom prst="rect">
-            <a:avLst/>
-          </a:prstGeom>
-          <a:noFill/>
-        </p:spPr>
-        <p:txBody>
-          <a:bodyPr wrap="square" lIns="0" rIns="0" tIns="0" bIns="0" anchor="t">
-            <a:spAutoFit/>
-          </a:bodyPr>
-          <a:lstStyle/>
-          <a:p>
-            <a:pPr algn="l">
-              <a:spcAft>
-                <a:spcPts val="0"/>
-              </a:spcAft>
-            </a:pPr>
-            <a:r>
-              <a:rPr sz="1500" b="0" i="0">
-                <a:solidFill>
-                  <a:srgbClr val="1F2937"/>
-                </a:solidFill>
-                <a:latin typeface="Calibri"/>
-              </a:rPr>
-              <a:t>Real-time: under one second</a:t>
-            </a:r>
-          </a:p>
-        </p:txBody>
-      </p:sp>
-      <p:sp>
-        <p:nvSpPr>
-          <p:cNvPr id="11" name="Oval 10"/>
-          <p:cNvSpPr/>
-          <p:nvPr/>
-        </p:nvSpPr>
-        <p:spPr>
-          <a:xfrm>
-            <a:off x="640080" y="4645152"/>
-            <a:ext cx="237744" cy="237744"/>
-          </a:xfrm>
-          <a:prstGeom prst="ellipse">
-            <a:avLst/>
-          </a:prstGeom>
-          <a:solidFill>
-            <a:srgbClr val="1B7F73"/>
-          </a:solidFill>
-          <a:ln>
-            <a:noFill/>
-          </a:ln>
-          <a:effectLst/>
-        </p:spPr>
-        <p:style>
-          <a:lnRef idx="1">
-            <a:schemeClr val="accent1"/>
-          </a:lnRef>
-          <a:fillRef idx="3">
-            <a:schemeClr val="accent1"/>
-          </a:fillRef>
-          <a:effectRef idx="2">
-            <a:schemeClr val="accent1"/>
-          </a:effectRef>
-          <a:fontRef idx="minor">
-            <a:schemeClr val="lt1"/>
-          </a:fontRef>
-        </p:style>
-        <p:txBody>
-          <a:bodyPr rtlCol="0" anchor="ctr"/>
-          <a:lstStyle/>
-          <a:p>
-            <a:pPr algn="ctr"/>
-          </a:p>
-        </p:txBody>
-      </p:sp>
-      <p:sp>
-        <p:nvSpPr>
-          <p:cNvPr id="12" name="TextBox 11"/>
-          <p:cNvSpPr txBox="1"/>
-          <p:nvPr/>
-        </p:nvSpPr>
-        <p:spPr>
-          <a:xfrm>
-            <a:off x="640080" y="4626864"/>
-            <a:ext cx="237744" cy="274320"/>
-          </a:xfrm>
-          <a:prstGeom prst="rect">
-            <a:avLst/>
-          </a:prstGeom>
-          <a:noFill/>
-        </p:spPr>
-        <p:txBody>
-          <a:bodyPr wrap="square" lIns="0" rIns="0" tIns="0" bIns="0" anchor="t">
-            <a:spAutoFit/>
-          </a:bodyPr>
-          <a:lstStyle/>
-          <a:p>
-            <a:pPr algn="ctr">
-              <a:spcAft>
-                <a:spcPts val="0"/>
-              </a:spcAft>
-            </a:pPr>
-            <a:r>
-              <a:rPr sz="1300" b="1" i="0">
-                <a:solidFill>
-                  <a:srgbClr val="FFFFFF"/>
-                </a:solidFill>
-                <a:latin typeface="Calibri"/>
-              </a:rPr>
-              <a:t>✓</a:t>
-            </a:r>
-          </a:p>
-        </p:txBody>
-      </p:sp>
-      <p:sp>
-        <p:nvSpPr>
-          <p:cNvPr id="13" name="TextBox 12"/>
-          <p:cNvSpPr txBox="1"/>
-          <p:nvPr/>
-        </p:nvSpPr>
-        <p:spPr>
-          <a:xfrm>
-            <a:off x="1005840" y="4617720"/>
-            <a:ext cx="4754880" cy="365760"/>
-          </a:xfrm>
-          <a:prstGeom prst="rect">
-            <a:avLst/>
-          </a:prstGeom>
-          <a:noFill/>
-        </p:spPr>
-        <p:txBody>
-          <a:bodyPr wrap="square" lIns="0" rIns="0" tIns="0" bIns="0" anchor="t">
-            <a:spAutoFit/>
-          </a:bodyPr>
-          <a:lstStyle/>
-          <a:p>
-            <a:pPr algn="l">
-              <a:spcAft>
-                <a:spcPts val="0"/>
-              </a:spcAft>
-            </a:pPr>
-            <a:r>
-              <a:rPr sz="1500" b="0" i="0">
-                <a:solidFill>
-                  <a:srgbClr val="1F2937"/>
-                </a:solidFill>
-                <a:latin typeface="Calibri"/>
-              </a:rPr>
-              <a:t>Small, readable, easy to extend</a:t>
-            </a:r>
-          </a:p>
-        </p:txBody>
-      </p:sp>
-      <p:sp>
-        <p:nvSpPr>
-          <p:cNvPr id="14" name="Oval 13"/>
-          <p:cNvSpPr/>
-          <p:nvPr/>
-        </p:nvSpPr>
-        <p:spPr>
-          <a:xfrm>
-            <a:off x="640080" y="5148072"/>
-            <a:ext cx="237744" cy="237744"/>
-          </a:xfrm>
-          <a:prstGeom prst="ellipse">
-            <a:avLst/>
-          </a:prstGeom>
-          <a:solidFill>
-            <a:srgbClr val="1B7F73"/>
-          </a:solidFill>
-          <a:ln>
-            <a:noFill/>
-          </a:ln>
-          <a:effectLst/>
-        </p:spPr>
-        <p:style>
-          <a:lnRef idx="1">
-            <a:schemeClr val="accent1"/>
-          </a:lnRef>
-          <a:fillRef idx="3">
-            <a:schemeClr val="accent1"/>
-          </a:fillRef>
-          <a:effectRef idx="2">
-            <a:schemeClr val="accent1"/>
-          </a:effectRef>
-          <a:fontRef idx="minor">
-            <a:schemeClr val="lt1"/>
-          </a:fontRef>
-        </p:style>
-        <p:txBody>
-          <a:bodyPr rtlCol="0" anchor="ctr"/>
-          <a:lstStyle/>
-          <a:p>
-            <a:pPr algn="ctr"/>
-          </a:p>
-        </p:txBody>
-      </p:sp>
-      <p:sp>
-        <p:nvSpPr>
-          <p:cNvPr id="15" name="TextBox 14"/>
-          <p:cNvSpPr txBox="1"/>
-          <p:nvPr/>
-        </p:nvSpPr>
-        <p:spPr>
-          <a:xfrm>
-            <a:off x="640080" y="5129784"/>
-            <a:ext cx="237744" cy="274320"/>
-          </a:xfrm>
-          <a:prstGeom prst="rect">
-            <a:avLst/>
-          </a:prstGeom>
-          <a:noFill/>
-        </p:spPr>
-        <p:txBody>
-          <a:bodyPr wrap="square" lIns="0" rIns="0" tIns="0" bIns="0" anchor="t">
-            <a:spAutoFit/>
-          </a:bodyPr>
-          <a:lstStyle/>
-          <a:p>
-            <a:pPr algn="ctr">
-              <a:spcAft>
-                <a:spcPts val="0"/>
-              </a:spcAft>
-            </a:pPr>
-            <a:r>
-              <a:rPr sz="1300" b="1" i="0">
-                <a:solidFill>
-                  <a:srgbClr val="FFFFFF"/>
-                </a:solidFill>
-                <a:latin typeface="Calibri"/>
-              </a:rPr>
-              <a:t>✓</a:t>
-            </a:r>
-          </a:p>
-        </p:txBody>
-      </p:sp>
-      <p:sp>
-        <p:nvSpPr>
-          <p:cNvPr id="16" name="TextBox 15"/>
-          <p:cNvSpPr txBox="1"/>
-          <p:nvPr/>
-        </p:nvSpPr>
-        <p:spPr>
-          <a:xfrm>
-            <a:off x="1005840" y="5120640"/>
-            <a:ext cx="4754880" cy="365760"/>
-          </a:xfrm>
-          <a:prstGeom prst="rect">
-            <a:avLst/>
-          </a:prstGeom>
-          <a:noFill/>
-        </p:spPr>
-        <p:txBody>
-          <a:bodyPr wrap="square" lIns="0" rIns="0" tIns="0" bIns="0" anchor="t">
-            <a:spAutoFit/>
-          </a:bodyPr>
-          <a:lstStyle/>
-          <a:p>
-            <a:pPr algn="l">
-              <a:spcAft>
-                <a:spcPts val="0"/>
-              </a:spcAft>
-            </a:pPr>
-            <a:r>
-              <a:rPr sz="1500" b="0" i="0">
-                <a:solidFill>
-                  <a:srgbClr val="1F2937"/>
-                </a:solidFill>
-                <a:latin typeface="Calibri"/>
-              </a:rPr>
-              <a:t>Fails safely if the server is down</a:t>
-            </a:r>
-          </a:p>
-        </p:txBody>
-      </p:sp>
-      <p:sp>
-        <p:nvSpPr>
-          <p:cNvPr id="17" name="TextBox 16"/>
-          <p:cNvSpPr txBox="1"/>
-          <p:nvPr/>
-        </p:nvSpPr>
-        <p:spPr>
-          <a:xfrm>
-            <a:off x="6400800" y="3200400"/>
-            <a:ext cx="5120640" cy="365760"/>
-          </a:xfrm>
-          <a:prstGeom prst="rect">
-            <a:avLst/>
-          </a:prstGeom>
-          <a:noFill/>
-        </p:spPr>
-        <p:txBody>
-          <a:bodyPr wrap="square" lIns="0" rIns="0" tIns="0" bIns="0" anchor="t">
-            <a:spAutoFit/>
-          </a:bodyPr>
-          <a:lstStyle/>
-          <a:p>
-            <a:pPr algn="l">
-              <a:spcAft>
-                <a:spcPts val="0"/>
-              </a:spcAft>
-            </a:pPr>
-            <a:r>
-              <a:rPr sz="1300" b="1" i="0">
-                <a:solidFill>
-                  <a:srgbClr val="5B6472"/>
-                </a:solidFill>
-                <a:latin typeface="Calibri"/>
-              </a:rPr>
-              <a:t>FUTURE SCOPE</a:t>
-            </a:r>
-          </a:p>
-        </p:txBody>
-      </p:sp>
-      <p:sp>
-        <p:nvSpPr>
-          <p:cNvPr id="18" name="Oval 17"/>
-          <p:cNvSpPr/>
-          <p:nvPr/>
-        </p:nvSpPr>
-        <p:spPr>
-          <a:xfrm>
-            <a:off x="6492240" y="3666744"/>
-            <a:ext cx="146304" cy="146304"/>
-          </a:xfrm>
-          <a:prstGeom prst="ellipse">
-            <a:avLst/>
-          </a:prstGeom>
-          <a:solidFill>
-            <a:srgbClr val="5B6472"/>
-          </a:solidFill>
-          <a:ln>
-            <a:noFill/>
-          </a:ln>
-          <a:effectLst/>
-        </p:spPr>
-        <p:style>
-          <a:lnRef idx="1">
-            <a:schemeClr val="accent1"/>
-          </a:lnRef>
-          <a:fillRef idx="3">
-            <a:schemeClr val="accent1"/>
-          </a:fillRef>
-          <a:effectRef idx="2">
-            <a:schemeClr val="accent1"/>
-          </a:effectRef>
-          <a:fontRef idx="minor">
-            <a:schemeClr val="lt1"/>
-          </a:fontRef>
-        </p:style>
-        <p:txBody>
-          <a:bodyPr rtlCol="0" anchor="ctr"/>
-          <a:lstStyle/>
-          <a:p>
-            <a:pPr algn="ctr"/>
-          </a:p>
-        </p:txBody>
-      </p:sp>
-      <p:sp>
-        <p:nvSpPr>
-          <p:cNvPr id="19" name="TextBox 18"/>
-          <p:cNvSpPr txBox="1"/>
-          <p:nvPr/>
-        </p:nvSpPr>
-        <p:spPr>
-          <a:xfrm>
-            <a:off x="6812280" y="3611880"/>
-            <a:ext cx="4663440" cy="365760"/>
-          </a:xfrm>
-          <a:prstGeom prst="rect">
-            <a:avLst/>
-          </a:prstGeom>
-          <a:noFill/>
-        </p:spPr>
-        <p:txBody>
-          <a:bodyPr wrap="square" lIns="0" rIns="0" tIns="0" bIns="0" anchor="t">
-            <a:spAutoFit/>
-          </a:bodyPr>
-          <a:lstStyle/>
-          <a:p>
-            <a:pPr algn="l">
-              <a:spcAft>
-                <a:spcPts val="0"/>
-              </a:spcAft>
-            </a:pPr>
-            <a:r>
-              <a:rPr sz="1500" b="0" i="0">
-                <a:solidFill>
-                  <a:srgbClr val="1F2937"/>
-                </a:solidFill>
-                <a:latin typeface="Calibri"/>
-              </a:rPr>
-              <a:t>More rules: ICMP flood, DNS tunnelling</a:t>
-            </a:r>
-          </a:p>
-        </p:txBody>
-      </p:sp>
-      <p:sp>
-        <p:nvSpPr>
-          <p:cNvPr id="20" name="Oval 19"/>
-          <p:cNvSpPr/>
-          <p:nvPr/>
-        </p:nvSpPr>
-        <p:spPr>
-          <a:xfrm>
-            <a:off x="6492240" y="4169663"/>
-            <a:ext cx="146304" cy="146304"/>
-          </a:xfrm>
-          <a:prstGeom prst="ellipse">
-            <a:avLst/>
-          </a:prstGeom>
-          <a:solidFill>
-            <a:srgbClr val="5B6472"/>
-          </a:solidFill>
-          <a:ln>
-            <a:noFill/>
-          </a:ln>
-          <a:effectLst/>
-        </p:spPr>
-        <p:style>
-          <a:lnRef idx="1">
-            <a:schemeClr val="accent1"/>
-          </a:lnRef>
-          <a:fillRef idx="3">
-            <a:schemeClr val="accent1"/>
-          </a:fillRef>
-          <a:effectRef idx="2">
-            <a:schemeClr val="accent1"/>
-          </a:effectRef>
-          <a:fontRef idx="minor">
-            <a:schemeClr val="lt1"/>
-          </a:fontRef>
-        </p:style>
-        <p:txBody>
-          <a:bodyPr rtlCol="0" anchor="ctr"/>
-          <a:lstStyle/>
-          <a:p>
-            <a:pPr algn="ctr"/>
-          </a:p>
-        </p:txBody>
-      </p:sp>
-      <p:sp>
-        <p:nvSpPr>
-          <p:cNvPr id="21" name="TextBox 20"/>
-          <p:cNvSpPr txBox="1"/>
-          <p:nvPr/>
-        </p:nvSpPr>
-        <p:spPr>
-          <a:xfrm>
-            <a:off x="6812280" y="4114800"/>
-            <a:ext cx="4663440" cy="365760"/>
-          </a:xfrm>
-          <a:prstGeom prst="rect">
-            <a:avLst/>
-          </a:prstGeom>
-          <a:noFill/>
-        </p:spPr>
-        <p:txBody>
-          <a:bodyPr wrap="square" lIns="0" rIns="0" tIns="0" bIns="0" anchor="t">
-            <a:spAutoFit/>
-          </a:bodyPr>
-          <a:lstStyle/>
-          <a:p>
-            <a:pPr algn="l">
-              <a:spcAft>
-                <a:spcPts val="0"/>
-              </a:spcAft>
-            </a:pPr>
-            <a:r>
-              <a:rPr sz="1500" b="0" i="0">
-                <a:solidFill>
-                  <a:srgbClr val="1F2937"/>
-                </a:solidFill>
-                <a:latin typeface="Calibri"/>
-              </a:rPr>
-              <a:t>E-mail or messaging notifications</a:t>
-            </a:r>
-          </a:p>
-        </p:txBody>
-      </p:sp>
-      <p:sp>
-        <p:nvSpPr>
-          <p:cNvPr id="22" name="Oval 21"/>
-          <p:cNvSpPr/>
-          <p:nvPr/>
-        </p:nvSpPr>
-        <p:spPr>
-          <a:xfrm>
-            <a:off x="6492240" y="4672584"/>
-            <a:ext cx="146304" cy="146304"/>
-          </a:xfrm>
-          <a:prstGeom prst="ellipse">
-            <a:avLst/>
-          </a:prstGeom>
-          <a:solidFill>
-            <a:srgbClr val="5B6472"/>
-          </a:solidFill>
-          <a:ln>
-            <a:noFill/>
-          </a:ln>
-          <a:effectLst/>
-        </p:spPr>
-        <p:style>
-          <a:lnRef idx="1">
-            <a:schemeClr val="accent1"/>
-          </a:lnRef>
-          <a:fillRef idx="3">
-            <a:schemeClr val="accent1"/>
-          </a:fillRef>
-          <a:effectRef idx="2">
-            <a:schemeClr val="accent1"/>
-          </a:effectRef>
-          <a:fontRef idx="minor">
-            <a:schemeClr val="lt1"/>
-          </a:fontRef>
-        </p:style>
-        <p:txBody>
-          <a:bodyPr rtlCol="0" anchor="ctr"/>
-          <a:lstStyle/>
-          <a:p>
-            <a:pPr algn="ctr"/>
-          </a:p>
-        </p:txBody>
-      </p:sp>
-      <p:sp>
-        <p:nvSpPr>
-          <p:cNvPr id="23" name="TextBox 22"/>
-          <p:cNvSpPr txBox="1"/>
-          <p:nvPr/>
-        </p:nvSpPr>
-        <p:spPr>
-          <a:xfrm>
-            <a:off x="6812280" y="4617720"/>
-            <a:ext cx="4663440" cy="365760"/>
-          </a:xfrm>
-          <a:prstGeom prst="rect">
-            <a:avLst/>
-          </a:prstGeom>
-          <a:noFill/>
-        </p:spPr>
-        <p:txBody>
-          <a:bodyPr wrap="square" lIns="0" rIns="0" tIns="0" bIns="0" anchor="t">
-            <a:spAutoFit/>
-          </a:bodyPr>
-          <a:lstStyle/>
-          <a:p>
-            <a:pPr algn="l">
-              <a:spcAft>
-                <a:spcPts val="0"/>
-              </a:spcAft>
-            </a:pPr>
-            <a:r>
-              <a:rPr sz="1500" b="0" i="0">
-                <a:solidFill>
-                  <a:srgbClr val="1F2937"/>
-                </a:solidFill>
-                <a:latin typeface="Calibri"/>
-              </a:rPr>
-              <a:t>Store alerts in SQLite, searchable</a:t>
-            </a:r>
-          </a:p>
-        </p:txBody>
-      </p:sp>
-      <p:sp>
-        <p:nvSpPr>
-          <p:cNvPr id="24" name="Oval 23"/>
-          <p:cNvSpPr/>
-          <p:nvPr/>
-        </p:nvSpPr>
-        <p:spPr>
-          <a:xfrm>
-            <a:off x="6492240" y="5175504"/>
-            <a:ext cx="146304" cy="146304"/>
-          </a:xfrm>
-          <a:prstGeom prst="ellipse">
-            <a:avLst/>
-          </a:prstGeom>
-          <a:solidFill>
-            <a:srgbClr val="5B6472"/>
-          </a:solidFill>
-          <a:ln>
-            <a:noFill/>
-          </a:ln>
-          <a:effectLst/>
-        </p:spPr>
-        <p:style>
-          <a:lnRef idx="1">
-            <a:schemeClr val="accent1"/>
-          </a:lnRef>
-          <a:fillRef idx="3">
-            <a:schemeClr val="accent1"/>
-          </a:fillRef>
-          <a:effectRef idx="2">
-            <a:schemeClr val="accent1"/>
-          </a:effectRef>
-          <a:fontRef idx="minor">
-            <a:schemeClr val="lt1"/>
-          </a:fontRef>
-        </p:style>
-        <p:txBody>
-          <a:bodyPr rtlCol="0" anchor="ctr"/>
-          <a:lstStyle/>
-          <a:p>
-            <a:pPr algn="ctr"/>
-          </a:p>
-        </p:txBody>
-      </p:sp>
-      <p:sp>
-        <p:nvSpPr>
-          <p:cNvPr id="25" name="TextBox 24"/>
-          <p:cNvSpPr txBox="1"/>
-          <p:nvPr/>
-        </p:nvSpPr>
-        <p:spPr>
-          <a:xfrm>
-            <a:off x="6812280" y="5120640"/>
-            <a:ext cx="4663440" cy="365760"/>
-          </a:xfrm>
-          <a:prstGeom prst="rect">
-            <a:avLst/>
-          </a:prstGeom>
-          <a:noFill/>
-        </p:spPr>
-        <p:txBody>
-          <a:bodyPr wrap="square" lIns="0" rIns="0" tIns="0" bIns="0" anchor="t">
-            <a:spAutoFit/>
-          </a:bodyPr>
-          <a:lstStyle/>
-          <a:p>
-            <a:pPr algn="l">
-              <a:spcAft>
-                <a:spcPts val="0"/>
-              </a:spcAft>
-            </a:pPr>
-            <a:r>
-              <a:rPr sz="1500" b="0" i="0">
-                <a:solidFill>
-                  <a:srgbClr val="1F2937"/>
-                </a:solidFill>
-                <a:latin typeface="Calibri"/>
-              </a:rPr>
-              <a:t>Authenticate the sensor to the server</a:t>
-            </a:r>
-          </a:p>
-        </p:txBody>
-      </p:sp>
-      <p:sp>
-        <p:nvSpPr>
-          <p:cNvPr id="26" name="Oval 25"/>
-          <p:cNvSpPr/>
-          <p:nvPr/>
-        </p:nvSpPr>
-        <p:spPr>
-          <a:xfrm>
-            <a:off x="6492240" y="5678424"/>
-            <a:ext cx="146304" cy="146304"/>
-          </a:xfrm>
-          <a:prstGeom prst="ellipse">
-            <a:avLst/>
-          </a:prstGeom>
-          <a:solidFill>
-            <a:srgbClr val="5B6472"/>
-          </a:solidFill>
-          <a:ln>
-            <a:noFill/>
-          </a:ln>
-          <a:effectLst/>
-        </p:spPr>
-        <p:style>
-          <a:lnRef idx="1">
-            <a:schemeClr val="accent1"/>
-          </a:lnRef>
-          <a:fillRef idx="3">
-            <a:schemeClr val="accent1"/>
-          </a:fillRef>
-          <a:effectRef idx="2">
-            <a:schemeClr val="accent1"/>
-          </a:effectRef>
-          <a:fontRef idx="minor">
-            <a:schemeClr val="lt1"/>
-          </a:fontRef>
-        </p:style>
-        <p:txBody>
-          <a:bodyPr rtlCol="0" anchor="ctr"/>
-          <a:lstStyle/>
-          <a:p>
-            <a:pPr algn="ctr"/>
-          </a:p>
-        </p:txBody>
-      </p:sp>
-      <p:sp>
-        <p:nvSpPr>
-          <p:cNvPr id="27" name="TextBox 26"/>
-          <p:cNvSpPr txBox="1"/>
-          <p:nvPr/>
-        </p:nvSpPr>
-        <p:spPr>
-          <a:xfrm>
-            <a:off x="6812280" y="5623560"/>
-            <a:ext cx="4663440" cy="365760"/>
-          </a:xfrm>
-          <a:prstGeom prst="rect">
-            <a:avLst/>
-          </a:prstGeom>
-          <a:noFill/>
-        </p:spPr>
-        <p:txBody>
-          <a:bodyPr wrap="square" lIns="0" rIns="0" tIns="0" bIns="0" anchor="t">
-            <a:spAutoFit/>
-          </a:bodyPr>
-          <a:lstStyle/>
-          <a:p>
-            <a:pPr algn="l">
-              <a:spcAft>
-                <a:spcPts val="0"/>
-              </a:spcAft>
-            </a:pPr>
-            <a:r>
-              <a:rPr sz="1500" b="0" i="0">
-                <a:solidFill>
-                  <a:srgbClr val="1F2937"/>
-                </a:solidFill>
-                <a:latin typeface="Calibri"/>
-              </a:rPr>
-              <a:t>Active response: firewall the attacker</a:t>
-            </a:r>
-          </a:p>
-        </p:txBody>
-      </p:sp>
-      <p:sp>
-        <p:nvSpPr>
-          <p:cNvPr id="28" name="TextBox 27"/>
-          <p:cNvSpPr txBox="1"/>
-          <p:nvPr/>
-        </p:nvSpPr>
-        <p:spPr>
-          <a:xfrm>
-            <a:off x="548640" y="5989320"/>
-            <a:ext cx="11064240" cy="365760"/>
-          </a:xfrm>
-          <a:prstGeom prst="rect">
-            <a:avLst/>
-          </a:prstGeom>
-          <a:noFill/>
-        </p:spPr>
-        <p:txBody>
-          <a:bodyPr wrap="square" lIns="0" rIns="0" tIns="0" bIns="0" anchor="t">
-            <a:spAutoFit/>
-          </a:bodyPr>
-          <a:lstStyle/>
-          <a:p>
-            <a:pPr algn="l">
-              <a:spcAft>
-                <a:spcPts val="0"/>
-              </a:spcAft>
-            </a:pPr>
-            <a:r>
-              <a:rPr sz="1400" b="1" i="0">
-                <a:solidFill>
-                  <a:srgbClr val="1B7F73"/>
-                </a:solidFill>
-                <a:latin typeface="Calibri"/>
-              </a:rPr>
-              <a:t>Thank you. Questions are welcome.   github.com/rohanpandey436/realtime-nids</a:t>
-            </a:r>
-          </a:p>
-        </p:txBody>
-      </p:sp>
-      <p:sp>
-        <p:nvSpPr>
-          <p:cNvPr id="29" name="TextBox 28"/>
-          <p:cNvSpPr txBox="1"/>
-          <p:nvPr/>
-        </p:nvSpPr>
-        <p:spPr>
-          <a:xfrm>
-            <a:off x="548640" y="6419088"/>
-            <a:ext cx="8229600" cy="274320"/>
-          </a:xfrm>
-          <a:prstGeom prst="rect">
-            <a:avLst/>
-          </a:prstGeom>
-          <a:noFill/>
-        </p:spPr>
-        <p:txBody>
-          <a:bodyPr wrap="square" lIns="0" rIns="0" tIns="0" bIns="0" anchor="t">
-            <a:spAutoFit/>
-          </a:bodyPr>
-          <a:lstStyle/>
-          <a:p>
-            <a:pPr algn="l">
-              <a:spcAft>
-                <a:spcPts val="0"/>
-              </a:spcAft>
-            </a:pPr>
-            <a:r>
-              <a:rPr sz="1000" b="0" i="0">
-                <a:solidFill>
-                  <a:srgbClr val="5B6472"/>
-                </a:solidFill>
-                <a:latin typeface="Calibri"/>
-              </a:rPr>
-              <a:t>Real-Time NIDS  |  Rohan Pandey  |  Final Evaluation</a:t>
-            </a:r>
-          </a:p>
-        </p:txBody>
-      </p:sp>
-      <p:sp>
-        <p:nvSpPr>
-          <p:cNvPr id="30" name="TextBox 29"/>
-          <p:cNvSpPr txBox="1"/>
-          <p:nvPr/>
-        </p:nvSpPr>
-        <p:spPr>
-          <a:xfrm>
-            <a:off x="10881360" y="6419088"/>
-            <a:ext cx="731520" cy="274320"/>
-          </a:xfrm>
-          <a:prstGeom prst="rect">
-            <a:avLst/>
-          </a:prstGeom>
-          <a:noFill/>
-        </p:spPr>
-        <p:txBody>
-          <a:bodyPr wrap="square" lIns="0" rIns="0" tIns="0" bIns="0" anchor="t">
-            <a:spAutoFit/>
-          </a:bodyPr>
-          <a:lstStyle/>
-          <a:p>
-            <a:pPr algn="r">
-              <a:spcAft>
-                <a:spcPts val="0"/>
-              </a:spcAft>
-            </a:pPr>
-            <a:r>
-              <a:rPr sz="1000" b="0" i="0">
-                <a:solidFill>
-                  <a:srgbClr val="5B6472"/>
-                </a:solidFill>
-                <a:latin typeface="Calibri"/>
-              </a:rPr>
-              <a:t>10</a:t>
+              <a:rPr sz="1400" b="0" i="0">
+                <a:solidFill>
+                  <a:srgbClr val="B8C4D9"/>
+                </a:solidFill>
+                <a:latin typeface="Calibri"/>
+              </a:rPr>
+              <a:t>Rohan Pandey  |  Roll No. 2501720100117  |  Guide: Mr. Vikas</a:t>
             </a:r>
           </a:p>
         </p:txBody>
@@ -7688,7 +6656,7 @@
                 </a:solidFill>
                 <a:latin typeface="Calibri"/>
               </a:rPr>
-              <a:t>System Architecture</a:t>
+              <a:t>Architecture and Technology</a:t>
             </a:r>
           </a:p>
         </p:txBody>
@@ -7709,8 +6677,8 @@
         </p:blipFill>
         <p:spPr>
           <a:xfrm>
-            <a:off x="1097280" y="1554480"/>
-            <a:ext cx="9966960" cy="5801538"/>
+            <a:off x="548640" y="1463040"/>
+            <a:ext cx="7040880" cy="4098334"/>
           </a:xfrm>
           <a:prstGeom prst="rect">
             <a:avLst/>
@@ -7730,27 +6698,27 @@
         </p:nvSpPr>
         <p:spPr>
           <a:xfrm>
-            <a:off x="548640" y="9093378"/>
-            <a:ext cx="11064240" cy="548640"/>
-          </a:xfrm>
-          <a:prstGeom prst="rect">
-            <a:avLst/>
-          </a:prstGeom>
-          <a:noFill/>
-        </p:spPr>
-        <p:txBody>
-          <a:bodyPr wrap="square" lIns="0" rIns="0" tIns="0" bIns="0" anchor="t">
-            <a:spAutoFit/>
-          </a:bodyPr>
-          <a:lstStyle/>
-          <a:p>
-            <a:pPr algn="ctr">
+            <a:off x="548640" y="5698534"/>
+            <a:ext cx="7040880" cy="822960"/>
+          </a:xfrm>
+          <a:prstGeom prst="rect">
+            <a:avLst/>
+          </a:prstGeom>
+          <a:noFill/>
+        </p:spPr>
+        <p:txBody>
+          <a:bodyPr wrap="square" lIns="0" rIns="0" tIns="0" bIns="0" anchor="t">
+            <a:spAutoFit/>
+          </a:bodyPr>
+          <a:lstStyle/>
+          <a:p>
+            <a:pPr algn="l">
               <a:spcAft>
                 <a:spcPts val="0"/>
               </a:spcAft>
             </a:pPr>
             <a:r>
-              <a:rPr sz="1600" b="0" i="0">
+              <a:rPr sz="1400" b="0" i="0">
                 <a:solidFill>
                   <a:srgbClr val="1F2937"/>
                 </a:solidFill>
@@ -7759,7 +6727,7 @@
               <a:t>Packets flow left to right; alerts flow from the detector to the browser. </a:t>
             </a:r>
             <a:r>
-              <a:rPr sz="1600" b="1" i="0">
+              <a:rPr sz="1400" b="1" i="0">
                 <a:solidFill>
                   <a:srgbClr val="14213D"/>
                 </a:solidFill>
@@ -7773,6 +6741,913 @@
       <p:sp>
         <p:nvSpPr>
           <p:cNvPr id="5" name="TextBox 4"/>
+          <p:cNvSpPr txBox="1"/>
+          <p:nvPr/>
+        </p:nvSpPr>
+        <p:spPr>
+          <a:xfrm>
+            <a:off x="7955279" y="1325880"/>
+            <a:ext cx="3657600" cy="320040"/>
+          </a:xfrm>
+          <a:prstGeom prst="rect">
+            <a:avLst/>
+          </a:prstGeom>
+          <a:noFill/>
+        </p:spPr>
+        <p:txBody>
+          <a:bodyPr wrap="square" lIns="0" rIns="0" tIns="0" bIns="0" anchor="t">
+            <a:spAutoFit/>
+          </a:bodyPr>
+          <a:lstStyle/>
+          <a:p>
+            <a:pPr algn="l">
+              <a:spcAft>
+                <a:spcPts val="0"/>
+              </a:spcAft>
+            </a:pPr>
+            <a:r>
+              <a:rPr sz="1200" b="1" i="0">
+                <a:solidFill>
+                  <a:srgbClr val="5B6472"/>
+                </a:solidFill>
+                <a:latin typeface="Calibri"/>
+              </a:rPr>
+              <a:t>TECHNOLOGY STACK</a:t>
+            </a:r>
+          </a:p>
+        </p:txBody>
+      </p:sp>
+      <p:sp>
+        <p:nvSpPr>
+          <p:cNvPr id="6" name="Rounded Rectangle 5"/>
+          <p:cNvSpPr/>
+          <p:nvPr/>
+        </p:nvSpPr>
+        <p:spPr>
+          <a:xfrm>
+            <a:off x="7955279" y="1691640"/>
+            <a:ext cx="3657600" cy="566928"/>
+          </a:xfrm>
+          <a:prstGeom prst="roundRect">
+            <a:avLst>
+              <a:gd name="adj" fmla="val 8000"/>
+            </a:avLst>
+          </a:prstGeom>
+          <a:solidFill>
+            <a:srgbClr val="EEF2F7"/>
+          </a:solidFill>
+          <a:ln>
+            <a:noFill/>
+          </a:ln>
+          <a:effectLst/>
+        </p:spPr>
+        <p:style>
+          <a:lnRef idx="1">
+            <a:schemeClr val="accent1"/>
+          </a:lnRef>
+          <a:fillRef idx="3">
+            <a:schemeClr val="accent1"/>
+          </a:fillRef>
+          <a:effectRef idx="2">
+            <a:schemeClr val="accent1"/>
+          </a:effectRef>
+          <a:fontRef idx="minor">
+            <a:schemeClr val="lt1"/>
+          </a:fontRef>
+        </p:style>
+        <p:txBody>
+          <a:bodyPr rtlCol="0" anchor="ctr"/>
+          <a:lstStyle/>
+          <a:p>
+            <a:pPr algn="ctr"/>
+          </a:p>
+        </p:txBody>
+      </p:sp>
+      <p:sp>
+        <p:nvSpPr>
+          <p:cNvPr id="7" name="TextBox 6"/>
+          <p:cNvSpPr txBox="1"/>
+          <p:nvPr/>
+        </p:nvSpPr>
+        <p:spPr>
+          <a:xfrm>
+            <a:off x="8138160" y="1755648"/>
+            <a:ext cx="3383280" cy="274320"/>
+          </a:xfrm>
+          <a:prstGeom prst="rect">
+            <a:avLst/>
+          </a:prstGeom>
+          <a:noFill/>
+        </p:spPr>
+        <p:txBody>
+          <a:bodyPr wrap="square" lIns="0" rIns="0" tIns="0" bIns="0" anchor="t">
+            <a:spAutoFit/>
+          </a:bodyPr>
+          <a:lstStyle/>
+          <a:p>
+            <a:pPr algn="l">
+              <a:spcAft>
+                <a:spcPts val="0"/>
+              </a:spcAft>
+            </a:pPr>
+            <a:r>
+              <a:rPr sz="1400" b="1" i="0">
+                <a:solidFill>
+                  <a:srgbClr val="14213D"/>
+                </a:solidFill>
+                <a:latin typeface="Calibri"/>
+              </a:rPr>
+              <a:t>Npcap 1.89</a:t>
+            </a:r>
+          </a:p>
+        </p:txBody>
+      </p:sp>
+      <p:sp>
+        <p:nvSpPr>
+          <p:cNvPr id="8" name="TextBox 7"/>
+          <p:cNvSpPr txBox="1"/>
+          <p:nvPr/>
+        </p:nvSpPr>
+        <p:spPr>
+          <a:xfrm>
+            <a:off x="8138160" y="2002536"/>
+            <a:ext cx="3383280" cy="256032"/>
+          </a:xfrm>
+          <a:prstGeom prst="rect">
+            <a:avLst/>
+          </a:prstGeom>
+          <a:noFill/>
+        </p:spPr>
+        <p:txBody>
+          <a:bodyPr wrap="square" lIns="0" rIns="0" tIns="0" bIns="0" anchor="t">
+            <a:spAutoFit/>
+          </a:bodyPr>
+          <a:lstStyle/>
+          <a:p>
+            <a:pPr algn="l">
+              <a:spcAft>
+                <a:spcPts val="0"/>
+              </a:spcAft>
+            </a:pPr>
+            <a:r>
+              <a:rPr sz="1100" b="0" i="0">
+                <a:solidFill>
+                  <a:srgbClr val="5B6472"/>
+                </a:solidFill>
+                <a:latin typeface="Calibri"/>
+              </a:rPr>
+              <a:t>raw packets on Windows</a:t>
+            </a:r>
+          </a:p>
+        </p:txBody>
+      </p:sp>
+      <p:sp>
+        <p:nvSpPr>
+          <p:cNvPr id="9" name="Rounded Rectangle 8"/>
+          <p:cNvSpPr/>
+          <p:nvPr/>
+        </p:nvSpPr>
+        <p:spPr>
+          <a:xfrm>
+            <a:off x="7955279" y="2350008"/>
+            <a:ext cx="3657600" cy="566928"/>
+          </a:xfrm>
+          <a:prstGeom prst="roundRect">
+            <a:avLst>
+              <a:gd name="adj" fmla="val 8000"/>
+            </a:avLst>
+          </a:prstGeom>
+          <a:solidFill>
+            <a:srgbClr val="EEF2F7"/>
+          </a:solidFill>
+          <a:ln>
+            <a:noFill/>
+          </a:ln>
+          <a:effectLst/>
+        </p:spPr>
+        <p:style>
+          <a:lnRef idx="1">
+            <a:schemeClr val="accent1"/>
+          </a:lnRef>
+          <a:fillRef idx="3">
+            <a:schemeClr val="accent1"/>
+          </a:fillRef>
+          <a:effectRef idx="2">
+            <a:schemeClr val="accent1"/>
+          </a:effectRef>
+          <a:fontRef idx="minor">
+            <a:schemeClr val="lt1"/>
+          </a:fontRef>
+        </p:style>
+        <p:txBody>
+          <a:bodyPr rtlCol="0" anchor="ctr"/>
+          <a:lstStyle/>
+          <a:p>
+            <a:pPr algn="ctr"/>
+          </a:p>
+        </p:txBody>
+      </p:sp>
+      <p:sp>
+        <p:nvSpPr>
+          <p:cNvPr id="10" name="TextBox 9"/>
+          <p:cNvSpPr txBox="1"/>
+          <p:nvPr/>
+        </p:nvSpPr>
+        <p:spPr>
+          <a:xfrm>
+            <a:off x="8138160" y="2414016"/>
+            <a:ext cx="3383280" cy="274320"/>
+          </a:xfrm>
+          <a:prstGeom prst="rect">
+            <a:avLst/>
+          </a:prstGeom>
+          <a:noFill/>
+        </p:spPr>
+        <p:txBody>
+          <a:bodyPr wrap="square" lIns="0" rIns="0" tIns="0" bIns="0" anchor="t">
+            <a:spAutoFit/>
+          </a:bodyPr>
+          <a:lstStyle/>
+          <a:p>
+            <a:pPr algn="l">
+              <a:spcAft>
+                <a:spcPts val="0"/>
+              </a:spcAft>
+            </a:pPr>
+            <a:r>
+              <a:rPr sz="1400" b="1" i="0">
+                <a:solidFill>
+                  <a:srgbClr val="14213D"/>
+                </a:solidFill>
+                <a:latin typeface="Calibri"/>
+              </a:rPr>
+              <a:t>Python 3.13 + Scapy 2.8</a:t>
+            </a:r>
+          </a:p>
+        </p:txBody>
+      </p:sp>
+      <p:sp>
+        <p:nvSpPr>
+          <p:cNvPr id="11" name="TextBox 10"/>
+          <p:cNvSpPr txBox="1"/>
+          <p:nvPr/>
+        </p:nvSpPr>
+        <p:spPr>
+          <a:xfrm>
+            <a:off x="8138160" y="2660904"/>
+            <a:ext cx="3383280" cy="256032"/>
+          </a:xfrm>
+          <a:prstGeom prst="rect">
+            <a:avLst/>
+          </a:prstGeom>
+          <a:noFill/>
+        </p:spPr>
+        <p:txBody>
+          <a:bodyPr wrap="square" lIns="0" rIns="0" tIns="0" bIns="0" anchor="t">
+            <a:spAutoFit/>
+          </a:bodyPr>
+          <a:lstStyle/>
+          <a:p>
+            <a:pPr algn="l">
+              <a:spcAft>
+                <a:spcPts val="0"/>
+              </a:spcAft>
+            </a:pPr>
+            <a:r>
+              <a:rPr sz="1100" b="0" i="0">
+                <a:solidFill>
+                  <a:srgbClr val="5B6472"/>
+                </a:solidFill>
+                <a:latin typeface="Calibri"/>
+              </a:rPr>
+              <a:t>decodes IP, TCP, UDP, ARP</a:t>
+            </a:r>
+          </a:p>
+        </p:txBody>
+      </p:sp>
+      <p:sp>
+        <p:nvSpPr>
+          <p:cNvPr id="12" name="Rounded Rectangle 11"/>
+          <p:cNvSpPr/>
+          <p:nvPr/>
+        </p:nvSpPr>
+        <p:spPr>
+          <a:xfrm>
+            <a:off x="7955279" y="3008376"/>
+            <a:ext cx="3657600" cy="566928"/>
+          </a:xfrm>
+          <a:prstGeom prst="roundRect">
+            <a:avLst>
+              <a:gd name="adj" fmla="val 8000"/>
+            </a:avLst>
+          </a:prstGeom>
+          <a:solidFill>
+            <a:srgbClr val="EEF2F7"/>
+          </a:solidFill>
+          <a:ln>
+            <a:noFill/>
+          </a:ln>
+          <a:effectLst/>
+        </p:spPr>
+        <p:style>
+          <a:lnRef idx="1">
+            <a:schemeClr val="accent1"/>
+          </a:lnRef>
+          <a:fillRef idx="3">
+            <a:schemeClr val="accent1"/>
+          </a:fillRef>
+          <a:effectRef idx="2">
+            <a:schemeClr val="accent1"/>
+          </a:effectRef>
+          <a:fontRef idx="minor">
+            <a:schemeClr val="lt1"/>
+          </a:fontRef>
+        </p:style>
+        <p:txBody>
+          <a:bodyPr rtlCol="0" anchor="ctr"/>
+          <a:lstStyle/>
+          <a:p>
+            <a:pPr algn="ctr"/>
+          </a:p>
+        </p:txBody>
+      </p:sp>
+      <p:sp>
+        <p:nvSpPr>
+          <p:cNvPr id="13" name="TextBox 12"/>
+          <p:cNvSpPr txBox="1"/>
+          <p:nvPr/>
+        </p:nvSpPr>
+        <p:spPr>
+          <a:xfrm>
+            <a:off x="8138160" y="3072384"/>
+            <a:ext cx="3383280" cy="274320"/>
+          </a:xfrm>
+          <a:prstGeom prst="rect">
+            <a:avLst/>
+          </a:prstGeom>
+          <a:noFill/>
+        </p:spPr>
+        <p:txBody>
+          <a:bodyPr wrap="square" lIns="0" rIns="0" tIns="0" bIns="0" anchor="t">
+            <a:spAutoFit/>
+          </a:bodyPr>
+          <a:lstStyle/>
+          <a:p>
+            <a:pPr algn="l">
+              <a:spcAft>
+                <a:spcPts val="0"/>
+              </a:spcAft>
+            </a:pPr>
+            <a:r>
+              <a:rPr sz="1400" b="1" i="0">
+                <a:solidFill>
+                  <a:srgbClr val="14213D"/>
+                </a:solidFill>
+                <a:latin typeface="Calibri"/>
+              </a:rPr>
+              <a:t>Python standard library</a:t>
+            </a:r>
+          </a:p>
+        </p:txBody>
+      </p:sp>
+      <p:sp>
+        <p:nvSpPr>
+          <p:cNvPr id="14" name="TextBox 13"/>
+          <p:cNvSpPr txBox="1"/>
+          <p:nvPr/>
+        </p:nvSpPr>
+        <p:spPr>
+          <a:xfrm>
+            <a:off x="8138160" y="3319272"/>
+            <a:ext cx="3383280" cy="256032"/>
+          </a:xfrm>
+          <a:prstGeom prst="rect">
+            <a:avLst/>
+          </a:prstGeom>
+          <a:noFill/>
+        </p:spPr>
+        <p:txBody>
+          <a:bodyPr wrap="square" lIns="0" rIns="0" tIns="0" bIns="0" anchor="t">
+            <a:spAutoFit/>
+          </a:bodyPr>
+          <a:lstStyle/>
+          <a:p>
+            <a:pPr algn="l">
+              <a:spcAft>
+                <a:spcPts val="0"/>
+              </a:spcAft>
+            </a:pPr>
+            <a:r>
+              <a:rPr sz="1100" b="0" i="0">
+                <a:solidFill>
+                  <a:srgbClr val="5B6472"/>
+                </a:solidFill>
+                <a:latin typeface="Calibri"/>
+              </a:rPr>
+              <a:t>rules: deque window, set of ports</a:t>
+            </a:r>
+          </a:p>
+        </p:txBody>
+      </p:sp>
+      <p:sp>
+        <p:nvSpPr>
+          <p:cNvPr id="15" name="Rounded Rectangle 14"/>
+          <p:cNvSpPr/>
+          <p:nvPr/>
+        </p:nvSpPr>
+        <p:spPr>
+          <a:xfrm>
+            <a:off x="7955279" y="3666744"/>
+            <a:ext cx="3657600" cy="566928"/>
+          </a:xfrm>
+          <a:prstGeom prst="roundRect">
+            <a:avLst>
+              <a:gd name="adj" fmla="val 8000"/>
+            </a:avLst>
+          </a:prstGeom>
+          <a:solidFill>
+            <a:srgbClr val="EEF2F7"/>
+          </a:solidFill>
+          <a:ln>
+            <a:noFill/>
+          </a:ln>
+          <a:effectLst/>
+        </p:spPr>
+        <p:style>
+          <a:lnRef idx="1">
+            <a:schemeClr val="accent1"/>
+          </a:lnRef>
+          <a:fillRef idx="3">
+            <a:schemeClr val="accent1"/>
+          </a:fillRef>
+          <a:effectRef idx="2">
+            <a:schemeClr val="accent1"/>
+          </a:effectRef>
+          <a:fontRef idx="minor">
+            <a:schemeClr val="lt1"/>
+          </a:fontRef>
+        </p:style>
+        <p:txBody>
+          <a:bodyPr rtlCol="0" anchor="ctr"/>
+          <a:lstStyle/>
+          <a:p>
+            <a:pPr algn="ctr"/>
+          </a:p>
+        </p:txBody>
+      </p:sp>
+      <p:sp>
+        <p:nvSpPr>
+          <p:cNvPr id="16" name="TextBox 15"/>
+          <p:cNvSpPr txBox="1"/>
+          <p:nvPr/>
+        </p:nvSpPr>
+        <p:spPr>
+          <a:xfrm>
+            <a:off x="8138160" y="3730752"/>
+            <a:ext cx="3383280" cy="274320"/>
+          </a:xfrm>
+          <a:prstGeom prst="rect">
+            <a:avLst/>
+          </a:prstGeom>
+          <a:noFill/>
+        </p:spPr>
+        <p:txBody>
+          <a:bodyPr wrap="square" lIns="0" rIns="0" tIns="0" bIns="0" anchor="t">
+            <a:spAutoFit/>
+          </a:bodyPr>
+          <a:lstStyle/>
+          <a:p>
+            <a:pPr algn="l">
+              <a:spcAft>
+                <a:spcPts val="0"/>
+              </a:spcAft>
+            </a:pPr>
+            <a:r>
+              <a:rPr sz="1400" b="1" i="0">
+                <a:solidFill>
+                  <a:srgbClr val="14213D"/>
+                </a:solidFill>
+                <a:latin typeface="Calibri"/>
+              </a:rPr>
+              <a:t>Node.js 24 + Express 5</a:t>
+            </a:r>
+          </a:p>
+        </p:txBody>
+      </p:sp>
+      <p:sp>
+        <p:nvSpPr>
+          <p:cNvPr id="17" name="TextBox 16"/>
+          <p:cNvSpPr txBox="1"/>
+          <p:nvPr/>
+        </p:nvSpPr>
+        <p:spPr>
+          <a:xfrm>
+            <a:off x="8138160" y="3977639"/>
+            <a:ext cx="3383280" cy="256032"/>
+          </a:xfrm>
+          <a:prstGeom prst="rect">
+            <a:avLst/>
+          </a:prstGeom>
+          <a:noFill/>
+        </p:spPr>
+        <p:txBody>
+          <a:bodyPr wrap="square" lIns="0" rIns="0" tIns="0" bIns="0" anchor="t">
+            <a:spAutoFit/>
+          </a:bodyPr>
+          <a:lstStyle/>
+          <a:p>
+            <a:pPr algn="l">
+              <a:spcAft>
+                <a:spcPts val="0"/>
+              </a:spcAft>
+            </a:pPr>
+            <a:r>
+              <a:rPr sz="1100" b="0" i="0">
+                <a:solidFill>
+                  <a:srgbClr val="5B6472"/>
+                </a:solidFill>
+                <a:latin typeface="Calibri"/>
+              </a:rPr>
+              <a:t>receives alerts by HTTP POST</a:t>
+            </a:r>
+          </a:p>
+        </p:txBody>
+      </p:sp>
+      <p:sp>
+        <p:nvSpPr>
+          <p:cNvPr id="18" name="Rounded Rectangle 17"/>
+          <p:cNvSpPr/>
+          <p:nvPr/>
+        </p:nvSpPr>
+        <p:spPr>
+          <a:xfrm>
+            <a:off x="7955279" y="4325112"/>
+            <a:ext cx="3657600" cy="566928"/>
+          </a:xfrm>
+          <a:prstGeom prst="roundRect">
+            <a:avLst>
+              <a:gd name="adj" fmla="val 8000"/>
+            </a:avLst>
+          </a:prstGeom>
+          <a:solidFill>
+            <a:srgbClr val="EEF2F7"/>
+          </a:solidFill>
+          <a:ln>
+            <a:noFill/>
+          </a:ln>
+          <a:effectLst/>
+        </p:spPr>
+        <p:style>
+          <a:lnRef idx="1">
+            <a:schemeClr val="accent1"/>
+          </a:lnRef>
+          <a:fillRef idx="3">
+            <a:schemeClr val="accent1"/>
+          </a:fillRef>
+          <a:effectRef idx="2">
+            <a:schemeClr val="accent1"/>
+          </a:effectRef>
+          <a:fontRef idx="minor">
+            <a:schemeClr val="lt1"/>
+          </a:fontRef>
+        </p:style>
+        <p:txBody>
+          <a:bodyPr rtlCol="0" anchor="ctr"/>
+          <a:lstStyle/>
+          <a:p>
+            <a:pPr algn="ctr"/>
+          </a:p>
+        </p:txBody>
+      </p:sp>
+      <p:sp>
+        <p:nvSpPr>
+          <p:cNvPr id="19" name="TextBox 18"/>
+          <p:cNvSpPr txBox="1"/>
+          <p:nvPr/>
+        </p:nvSpPr>
+        <p:spPr>
+          <a:xfrm>
+            <a:off x="8138160" y="4389120"/>
+            <a:ext cx="3383280" cy="274320"/>
+          </a:xfrm>
+          <a:prstGeom prst="rect">
+            <a:avLst/>
+          </a:prstGeom>
+          <a:noFill/>
+        </p:spPr>
+        <p:txBody>
+          <a:bodyPr wrap="square" lIns="0" rIns="0" tIns="0" bIns="0" anchor="t">
+            <a:spAutoFit/>
+          </a:bodyPr>
+          <a:lstStyle/>
+          <a:p>
+            <a:pPr algn="l">
+              <a:spcAft>
+                <a:spcPts val="0"/>
+              </a:spcAft>
+            </a:pPr>
+            <a:r>
+              <a:rPr sz="1400" b="1" i="0">
+                <a:solidFill>
+                  <a:srgbClr val="14213D"/>
+                </a:solidFill>
+                <a:latin typeface="Calibri"/>
+              </a:rPr>
+              <a:t>Socket.IO 4</a:t>
+            </a:r>
+          </a:p>
+        </p:txBody>
+      </p:sp>
+      <p:sp>
+        <p:nvSpPr>
+          <p:cNvPr id="20" name="TextBox 19"/>
+          <p:cNvSpPr txBox="1"/>
+          <p:nvPr/>
+        </p:nvSpPr>
+        <p:spPr>
+          <a:xfrm>
+            <a:off x="8138160" y="4636008"/>
+            <a:ext cx="3383280" cy="256032"/>
+          </a:xfrm>
+          <a:prstGeom prst="rect">
+            <a:avLst/>
+          </a:prstGeom>
+          <a:noFill/>
+        </p:spPr>
+        <p:txBody>
+          <a:bodyPr wrap="square" lIns="0" rIns="0" tIns="0" bIns="0" anchor="t">
+            <a:spAutoFit/>
+          </a:bodyPr>
+          <a:lstStyle/>
+          <a:p>
+            <a:pPr algn="l">
+              <a:spcAft>
+                <a:spcPts val="0"/>
+              </a:spcAft>
+            </a:pPr>
+            <a:r>
+              <a:rPr sz="1100" b="0" i="0">
+                <a:solidFill>
+                  <a:srgbClr val="5B6472"/>
+                </a:solidFill>
+                <a:latin typeface="Calibri"/>
+              </a:rPr>
+              <a:t>pushes alerts to the browser</a:t>
+            </a:r>
+          </a:p>
+        </p:txBody>
+      </p:sp>
+      <p:sp>
+        <p:nvSpPr>
+          <p:cNvPr id="21" name="Rounded Rectangle 20"/>
+          <p:cNvSpPr/>
+          <p:nvPr/>
+        </p:nvSpPr>
+        <p:spPr>
+          <a:xfrm>
+            <a:off x="7955279" y="4983479"/>
+            <a:ext cx="3657600" cy="566928"/>
+          </a:xfrm>
+          <a:prstGeom prst="roundRect">
+            <a:avLst>
+              <a:gd name="adj" fmla="val 8000"/>
+            </a:avLst>
+          </a:prstGeom>
+          <a:solidFill>
+            <a:srgbClr val="EEF2F7"/>
+          </a:solidFill>
+          <a:ln>
+            <a:noFill/>
+          </a:ln>
+          <a:effectLst/>
+        </p:spPr>
+        <p:style>
+          <a:lnRef idx="1">
+            <a:schemeClr val="accent1"/>
+          </a:lnRef>
+          <a:fillRef idx="3">
+            <a:schemeClr val="accent1"/>
+          </a:fillRef>
+          <a:effectRef idx="2">
+            <a:schemeClr val="accent1"/>
+          </a:effectRef>
+          <a:fontRef idx="minor">
+            <a:schemeClr val="lt1"/>
+          </a:fontRef>
+        </p:style>
+        <p:txBody>
+          <a:bodyPr rtlCol="0" anchor="ctr"/>
+          <a:lstStyle/>
+          <a:p>
+            <a:pPr algn="ctr"/>
+          </a:p>
+        </p:txBody>
+      </p:sp>
+      <p:sp>
+        <p:nvSpPr>
+          <p:cNvPr id="22" name="TextBox 21"/>
+          <p:cNvSpPr txBox="1"/>
+          <p:nvPr/>
+        </p:nvSpPr>
+        <p:spPr>
+          <a:xfrm>
+            <a:off x="8138160" y="5047488"/>
+            <a:ext cx="3383280" cy="274320"/>
+          </a:xfrm>
+          <a:prstGeom prst="rect">
+            <a:avLst/>
+          </a:prstGeom>
+          <a:noFill/>
+        </p:spPr>
+        <p:txBody>
+          <a:bodyPr wrap="square" lIns="0" rIns="0" tIns="0" bIns="0" anchor="t">
+            <a:spAutoFit/>
+          </a:bodyPr>
+          <a:lstStyle/>
+          <a:p>
+            <a:pPr algn="l">
+              <a:spcAft>
+                <a:spcPts val="0"/>
+              </a:spcAft>
+            </a:pPr>
+            <a:r>
+              <a:rPr sz="1400" b="1" i="0">
+                <a:solidFill>
+                  <a:srgbClr val="14213D"/>
+                </a:solidFill>
+                <a:latin typeface="Calibri"/>
+              </a:rPr>
+              <a:t>HTML, CSS, JS + Chart.js</a:t>
+            </a:r>
+          </a:p>
+        </p:txBody>
+      </p:sp>
+      <p:sp>
+        <p:nvSpPr>
+          <p:cNvPr id="23" name="TextBox 22"/>
+          <p:cNvSpPr txBox="1"/>
+          <p:nvPr/>
+        </p:nvSpPr>
+        <p:spPr>
+          <a:xfrm>
+            <a:off x="8138160" y="5294375"/>
+            <a:ext cx="3383280" cy="256032"/>
+          </a:xfrm>
+          <a:prstGeom prst="rect">
+            <a:avLst/>
+          </a:prstGeom>
+          <a:noFill/>
+        </p:spPr>
+        <p:txBody>
+          <a:bodyPr wrap="square" lIns="0" rIns="0" tIns="0" bIns="0" anchor="t">
+            <a:spAutoFit/>
+          </a:bodyPr>
+          <a:lstStyle/>
+          <a:p>
+            <a:pPr algn="l">
+              <a:spcAft>
+                <a:spcPts val="0"/>
+              </a:spcAft>
+            </a:pPr>
+            <a:r>
+              <a:rPr sz="1100" b="0" i="0">
+                <a:solidFill>
+                  <a:srgbClr val="5B6472"/>
+                </a:solidFill>
+                <a:latin typeface="Calibri"/>
+              </a:rPr>
+              <a:t>live chart, table and banner</a:t>
+            </a:r>
+          </a:p>
+        </p:txBody>
+      </p:sp>
+      <p:sp>
+        <p:nvSpPr>
+          <p:cNvPr id="24" name="Rounded Rectangle 23"/>
+          <p:cNvSpPr/>
+          <p:nvPr/>
+        </p:nvSpPr>
+        <p:spPr>
+          <a:xfrm>
+            <a:off x="7955279" y="5641848"/>
+            <a:ext cx="3657600" cy="566928"/>
+          </a:xfrm>
+          <a:prstGeom prst="roundRect">
+            <a:avLst>
+              <a:gd name="adj" fmla="val 8000"/>
+            </a:avLst>
+          </a:prstGeom>
+          <a:solidFill>
+            <a:srgbClr val="EEF2F7"/>
+          </a:solidFill>
+          <a:ln>
+            <a:noFill/>
+          </a:ln>
+          <a:effectLst/>
+        </p:spPr>
+        <p:style>
+          <a:lnRef idx="1">
+            <a:schemeClr val="accent1"/>
+          </a:lnRef>
+          <a:fillRef idx="3">
+            <a:schemeClr val="accent1"/>
+          </a:fillRef>
+          <a:effectRef idx="2">
+            <a:schemeClr val="accent1"/>
+          </a:effectRef>
+          <a:fontRef idx="minor">
+            <a:schemeClr val="lt1"/>
+          </a:fontRef>
+        </p:style>
+        <p:txBody>
+          <a:bodyPr rtlCol="0" anchor="ctr"/>
+          <a:lstStyle/>
+          <a:p>
+            <a:pPr algn="ctr"/>
+          </a:p>
+        </p:txBody>
+      </p:sp>
+      <p:sp>
+        <p:nvSpPr>
+          <p:cNvPr id="25" name="TextBox 24"/>
+          <p:cNvSpPr txBox="1"/>
+          <p:nvPr/>
+        </p:nvSpPr>
+        <p:spPr>
+          <a:xfrm>
+            <a:off x="8138160" y="5705856"/>
+            <a:ext cx="3383280" cy="274320"/>
+          </a:xfrm>
+          <a:prstGeom prst="rect">
+            <a:avLst/>
+          </a:prstGeom>
+          <a:noFill/>
+        </p:spPr>
+        <p:txBody>
+          <a:bodyPr wrap="square" lIns="0" rIns="0" tIns="0" bIns="0" anchor="t">
+            <a:spAutoFit/>
+          </a:bodyPr>
+          <a:lstStyle/>
+          <a:p>
+            <a:pPr algn="l">
+              <a:spcAft>
+                <a:spcPts val="0"/>
+              </a:spcAft>
+            </a:pPr>
+            <a:r>
+              <a:rPr sz="1400" b="1" i="0">
+                <a:solidFill>
+                  <a:srgbClr val="14213D"/>
+                </a:solidFill>
+                <a:latin typeface="Calibri"/>
+              </a:rPr>
+              <a:t>unittest, Nmap, Wireshark</a:t>
+            </a:r>
+          </a:p>
+        </p:txBody>
+      </p:sp>
+      <p:sp>
+        <p:nvSpPr>
+          <p:cNvPr id="26" name="TextBox 25"/>
+          <p:cNvSpPr txBox="1"/>
+          <p:nvPr/>
+        </p:nvSpPr>
+        <p:spPr>
+          <a:xfrm>
+            <a:off x="8138160" y="5952744"/>
+            <a:ext cx="3383280" cy="256032"/>
+          </a:xfrm>
+          <a:prstGeom prst="rect">
+            <a:avLst/>
+          </a:prstGeom>
+          <a:noFill/>
+        </p:spPr>
+        <p:txBody>
+          <a:bodyPr wrap="square" lIns="0" rIns="0" tIns="0" bIns="0" anchor="t">
+            <a:spAutoFit/>
+          </a:bodyPr>
+          <a:lstStyle/>
+          <a:p>
+            <a:pPr algn="l">
+              <a:spcAft>
+                <a:spcPts val="0"/>
+              </a:spcAft>
+            </a:pPr>
+            <a:r>
+              <a:rPr sz="1100" b="0" i="0">
+                <a:solidFill>
+                  <a:srgbClr val="5B6472"/>
+                </a:solidFill>
+                <a:latin typeface="Calibri"/>
+              </a:rPr>
+              <a:t>testing and verification</a:t>
+            </a:r>
+          </a:p>
+        </p:txBody>
+      </p:sp>
+      <p:sp>
+        <p:nvSpPr>
+          <p:cNvPr id="27" name="TextBox 26"/>
           <p:cNvSpPr txBox="1"/>
           <p:nvPr/>
         </p:nvSpPr>
@@ -7811,7 +7686,7 @@
       </p:sp>
       <p:sp>
         <p:nvSpPr>
-          <p:cNvPr id="6" name="TextBox 5"/>
+          <p:cNvPr id="28" name="TextBox 27"/>
           <p:cNvSpPr txBox="1"/>
           <p:nvPr/>
         </p:nvSpPr>
@@ -7908,29 +7783,134 @@
                 </a:solidFill>
                 <a:latin typeface="Calibri"/>
               </a:rPr>
-              <a:t>Technology Stack</a:t>
-            </a:r>
-          </a:p>
-        </p:txBody>
-      </p:sp>
-      <p:sp>
-        <p:nvSpPr>
-          <p:cNvPr id="3" name="Rounded Rectangle 2"/>
+              <a:t>System Design</a:t>
+            </a:r>
+          </a:p>
+        </p:txBody>
+      </p:sp>
+      <p:pic>
+        <p:nvPicPr>
+          <p:cNvPr id="3" name="Picture 2" descr="dfd_level1.png"/>
+          <p:cNvPicPr>
+            <a:picLocks noChangeAspect="1"/>
+          </p:cNvPicPr>
+          <p:nvPr/>
+        </p:nvPicPr>
+        <p:blipFill>
+          <a:blip r:embed="rId2"/>
+          <a:stretch>
+            <a:fillRect/>
+          </a:stretch>
+        </p:blipFill>
+        <p:spPr>
+          <a:xfrm>
+            <a:off x="548640" y="1554480"/>
+            <a:ext cx="6583680" cy="3800019"/>
+          </a:xfrm>
+          <a:prstGeom prst="rect">
+            <a:avLst/>
+          </a:prstGeom>
+          <a:ln w="9525">
+            <a:solidFill>
+              <a:srgbClr val="D5DCE6"/>
+            </a:solidFill>
+          </a:ln>
+        </p:spPr>
+      </p:pic>
+      <p:sp>
+        <p:nvSpPr>
+          <p:cNvPr id="4" name="TextBox 3"/>
+          <p:cNvSpPr txBox="1"/>
+          <p:nvPr/>
+        </p:nvSpPr>
+        <p:spPr>
+          <a:xfrm>
+            <a:off x="548640" y="5445939"/>
+            <a:ext cx="6583680" cy="274320"/>
+          </a:xfrm>
+          <a:prstGeom prst="rect">
+            <a:avLst/>
+          </a:prstGeom>
+          <a:noFill/>
+        </p:spPr>
+        <p:txBody>
+          <a:bodyPr wrap="square" lIns="0" rIns="0" tIns="0" bIns="0" anchor="t">
+            <a:spAutoFit/>
+          </a:bodyPr>
+          <a:lstStyle/>
+          <a:p>
+            <a:pPr algn="ctr">
+              <a:spcAft>
+                <a:spcPts val="0"/>
+              </a:spcAft>
+            </a:pPr>
+            <a:r>
+              <a:rPr sz="1200" b="0" i="0">
+                <a:solidFill>
+                  <a:srgbClr val="5B6472"/>
+                </a:solidFill>
+                <a:latin typeface="Calibri"/>
+              </a:rPr>
+              <a:t>Level-1 Data Flow Diagram</a:t>
+            </a:r>
+          </a:p>
+        </p:txBody>
+      </p:sp>
+      <p:sp>
+        <p:nvSpPr>
+          <p:cNvPr id="5" name="TextBox 4"/>
+          <p:cNvSpPr txBox="1"/>
+          <p:nvPr/>
+        </p:nvSpPr>
+        <p:spPr>
+          <a:xfrm>
+            <a:off x="7406640" y="1554480"/>
+            <a:ext cx="4206240" cy="365760"/>
+          </a:xfrm>
+          <a:prstGeom prst="rect">
+            <a:avLst/>
+          </a:prstGeom>
+          <a:noFill/>
+        </p:spPr>
+        <p:txBody>
+          <a:bodyPr wrap="square" lIns="0" rIns="0" tIns="0" bIns="0" anchor="t">
+            <a:spAutoFit/>
+          </a:bodyPr>
+          <a:lstStyle/>
+          <a:p>
+            <a:pPr algn="l">
+              <a:spcAft>
+                <a:spcPts val="0"/>
+              </a:spcAft>
+            </a:pPr>
+            <a:r>
+              <a:rPr sz="1200" b="1" i="0">
+                <a:solidFill>
+                  <a:srgbClr val="5B6472"/>
+                </a:solidFill>
+                <a:latin typeface="Calibri"/>
+              </a:rPr>
+              <a:t>DESIGN ARTEFACTS</a:t>
+            </a:r>
+          </a:p>
+        </p:txBody>
+      </p:sp>
+      <p:sp>
+        <p:nvSpPr>
+          <p:cNvPr id="6" name="Oval 5"/>
           <p:cNvSpPr/>
           <p:nvPr/>
         </p:nvSpPr>
         <p:spPr>
           <a:xfrm>
-            <a:off x="548640" y="1508760"/>
-            <a:ext cx="3474720" cy="1828800"/>
-          </a:xfrm>
-          <a:prstGeom prst="roundRect">
-            <a:avLst>
-              <a:gd name="adj" fmla="val 8000"/>
-            </a:avLst>
+            <a:off x="7406640" y="2066544"/>
+            <a:ext cx="164592" cy="164592"/>
+          </a:xfrm>
+          <a:prstGeom prst="ellipse">
+            <a:avLst/>
           </a:prstGeom>
           <a:solidFill>
-            <a:srgbClr val="EEF2F7"/>
+            <a:srgbClr val="14213D"/>
           </a:solidFill>
           <a:ln>
             <a:noFill/>
@@ -7961,14 +7941,14 @@
       </p:sp>
       <p:sp>
         <p:nvSpPr>
-          <p:cNvPr id="4" name="TextBox 3"/>
-          <p:cNvSpPr txBox="1"/>
-          <p:nvPr/>
-        </p:nvSpPr>
-        <p:spPr>
-          <a:xfrm>
-            <a:off x="822959" y="1764792"/>
-            <a:ext cx="2926080" cy="274320"/>
+          <p:cNvPr id="7" name="TextBox 6"/>
+          <p:cNvSpPr txBox="1"/>
+          <p:nvPr/>
+        </p:nvSpPr>
+        <p:spPr>
+          <a:xfrm>
+            <a:off x="7726679" y="2011680"/>
+            <a:ext cx="3931920" cy="365760"/>
           </a:xfrm>
           <a:prstGeom prst="rect">
             <a:avLst/>
@@ -7987,116 +7967,33 @@
               </a:spcAft>
             </a:pPr>
             <a:r>
-              <a:rPr sz="1200" b="1" i="0">
-                <a:solidFill>
-                  <a:srgbClr val="5B6472"/>
-                </a:solidFill>
-                <a:latin typeface="Calibri"/>
-              </a:rPr>
-              <a:t>CAPTURE</a:t>
-            </a:r>
-          </a:p>
-        </p:txBody>
-      </p:sp>
-      <p:sp>
-        <p:nvSpPr>
-          <p:cNvPr id="5" name="TextBox 4"/>
-          <p:cNvSpPr txBox="1"/>
-          <p:nvPr/>
-        </p:nvSpPr>
-        <p:spPr>
-          <a:xfrm>
-            <a:off x="822959" y="2075688"/>
-            <a:ext cx="2926080" cy="685800"/>
-          </a:xfrm>
-          <a:prstGeom prst="rect">
-            <a:avLst/>
-          </a:prstGeom>
-          <a:noFill/>
-        </p:spPr>
-        <p:txBody>
-          <a:bodyPr wrap="square" lIns="0" rIns="0" tIns="0" bIns="0" anchor="t">
-            <a:spAutoFit/>
-          </a:bodyPr>
-          <a:lstStyle/>
-          <a:p>
-            <a:pPr algn="l">
-              <a:lnSpc>
-                <a:spcPct val="95000"/>
-              </a:lnSpc>
-              <a:spcAft>
-                <a:spcPts val="0"/>
-              </a:spcAft>
-            </a:pPr>
-            <a:r>
-              <a:rPr sz="1900" b="1" i="0">
-                <a:solidFill>
-                  <a:srgbClr val="14213D"/>
-                </a:solidFill>
-                <a:latin typeface="Calibri"/>
-              </a:rPr>
-              <a:t>Npcap 1.89</a:t>
-            </a:r>
-          </a:p>
-        </p:txBody>
-      </p:sp>
-      <p:sp>
-        <p:nvSpPr>
-          <p:cNvPr id="6" name="TextBox 5"/>
-          <p:cNvSpPr txBox="1"/>
-          <p:nvPr/>
-        </p:nvSpPr>
-        <p:spPr>
-          <a:xfrm>
-            <a:off x="822959" y="2807208"/>
-            <a:ext cx="2926080" cy="411480"/>
-          </a:xfrm>
-          <a:prstGeom prst="rect">
-            <a:avLst/>
-          </a:prstGeom>
-          <a:noFill/>
-        </p:spPr>
-        <p:txBody>
-          <a:bodyPr wrap="square" lIns="0" rIns="0" tIns="0" bIns="0" anchor="t">
-            <a:spAutoFit/>
-          </a:bodyPr>
-          <a:lstStyle/>
-          <a:p>
-            <a:pPr algn="l">
-              <a:spcAft>
-                <a:spcPts val="0"/>
-              </a:spcAft>
-            </a:pPr>
-            <a:r>
-              <a:rPr sz="1400" b="0" i="0">
+              <a:rPr sz="1500" b="0" i="0">
                 <a:solidFill>
                   <a:srgbClr val="1F2937"/>
                 </a:solidFill>
                 <a:latin typeface="Calibri"/>
               </a:rPr>
-              <a:t>raw packets on Windows</a:t>
-            </a:r>
-          </a:p>
-        </p:txBody>
-      </p:sp>
-      <p:sp>
-        <p:nvSpPr>
-          <p:cNvPr id="7" name="Rounded Rectangle 6"/>
+              <a:t>Context and level-1 DFDs</a:t>
+            </a:r>
+          </a:p>
+        </p:txBody>
+      </p:sp>
+      <p:sp>
+        <p:nvSpPr>
+          <p:cNvPr id="8" name="Oval 7"/>
           <p:cNvSpPr/>
           <p:nvPr/>
         </p:nvSpPr>
         <p:spPr>
           <a:xfrm>
-            <a:off x="4343400" y="1508760"/>
-            <a:ext cx="3474720" cy="1828800"/>
-          </a:xfrm>
-          <a:prstGeom prst="roundRect">
-            <a:avLst>
-              <a:gd name="adj" fmla="val 8000"/>
-            </a:avLst>
+            <a:off x="7406640" y="2615184"/>
+            <a:ext cx="164592" cy="164592"/>
+          </a:xfrm>
+          <a:prstGeom prst="ellipse">
+            <a:avLst/>
           </a:prstGeom>
           <a:solidFill>
-            <a:srgbClr val="EEF2F7"/>
+            <a:srgbClr val="14213D"/>
           </a:solidFill>
           <a:ln>
             <a:noFill/>
@@ -8127,14 +8024,14 @@
       </p:sp>
       <p:sp>
         <p:nvSpPr>
-          <p:cNvPr id="8" name="TextBox 7"/>
-          <p:cNvSpPr txBox="1"/>
-          <p:nvPr/>
-        </p:nvSpPr>
-        <p:spPr>
-          <a:xfrm>
-            <a:off x="4617720" y="1764792"/>
-            <a:ext cx="2926080" cy="274320"/>
+          <p:cNvPr id="9" name="TextBox 8"/>
+          <p:cNvSpPr txBox="1"/>
+          <p:nvPr/>
+        </p:nvSpPr>
+        <p:spPr>
+          <a:xfrm>
+            <a:off x="7726679" y="2560320"/>
+            <a:ext cx="3931920" cy="365760"/>
           </a:xfrm>
           <a:prstGeom prst="rect">
             <a:avLst/>
@@ -8153,116 +8050,33 @@
               </a:spcAft>
             </a:pPr>
             <a:r>
-              <a:rPr sz="1200" b="1" i="0">
-                <a:solidFill>
-                  <a:srgbClr val="5B6472"/>
-                </a:solidFill>
-                <a:latin typeface="Calibri"/>
-              </a:rPr>
-              <a:t>SENSOR</a:t>
-            </a:r>
-          </a:p>
-        </p:txBody>
-      </p:sp>
-      <p:sp>
-        <p:nvSpPr>
-          <p:cNvPr id="9" name="TextBox 8"/>
-          <p:cNvSpPr txBox="1"/>
-          <p:nvPr/>
-        </p:nvSpPr>
-        <p:spPr>
-          <a:xfrm>
-            <a:off x="4617720" y="2075688"/>
-            <a:ext cx="2926080" cy="685800"/>
-          </a:xfrm>
-          <a:prstGeom prst="rect">
-            <a:avLst/>
-          </a:prstGeom>
-          <a:noFill/>
-        </p:spPr>
-        <p:txBody>
-          <a:bodyPr wrap="square" lIns="0" rIns="0" tIns="0" bIns="0" anchor="t">
-            <a:spAutoFit/>
-          </a:bodyPr>
-          <a:lstStyle/>
-          <a:p>
-            <a:pPr algn="l">
-              <a:lnSpc>
-                <a:spcPct val="95000"/>
-              </a:lnSpc>
-              <a:spcAft>
-                <a:spcPts val="0"/>
-              </a:spcAft>
-            </a:pPr>
-            <a:r>
-              <a:rPr sz="1900" b="1" i="0">
-                <a:solidFill>
-                  <a:srgbClr val="14213D"/>
-                </a:solidFill>
-                <a:latin typeface="Calibri"/>
-              </a:rPr>
-              <a:t>Python 3.13 + Scapy 2.8</a:t>
-            </a:r>
-          </a:p>
-        </p:txBody>
-      </p:sp>
-      <p:sp>
-        <p:nvSpPr>
-          <p:cNvPr id="10" name="TextBox 9"/>
-          <p:cNvSpPr txBox="1"/>
-          <p:nvPr/>
-        </p:nvSpPr>
-        <p:spPr>
-          <a:xfrm>
-            <a:off x="4617720" y="2807208"/>
-            <a:ext cx="2926080" cy="411480"/>
-          </a:xfrm>
-          <a:prstGeom prst="rect">
-            <a:avLst/>
-          </a:prstGeom>
-          <a:noFill/>
-        </p:spPr>
-        <p:txBody>
-          <a:bodyPr wrap="square" lIns="0" rIns="0" tIns="0" bIns="0" anchor="t">
-            <a:spAutoFit/>
-          </a:bodyPr>
-          <a:lstStyle/>
-          <a:p>
-            <a:pPr algn="l">
-              <a:spcAft>
-                <a:spcPts val="0"/>
-              </a:spcAft>
-            </a:pPr>
-            <a:r>
-              <a:rPr sz="1400" b="0" i="0">
+              <a:rPr sz="1500" b="0" i="0">
                 <a:solidFill>
                   <a:srgbClr val="1F2937"/>
                 </a:solidFill>
                 <a:latin typeface="Calibri"/>
               </a:rPr>
-              <a:t>decodes IP, TCP, UDP, ARP</a:t>
-            </a:r>
-          </a:p>
-        </p:txBody>
-      </p:sp>
-      <p:sp>
-        <p:nvSpPr>
-          <p:cNvPr id="11" name="Rounded Rectangle 10"/>
+              <a:t>Use-case diagram</a:t>
+            </a:r>
+          </a:p>
+        </p:txBody>
+      </p:sp>
+      <p:sp>
+        <p:nvSpPr>
+          <p:cNvPr id="10" name="Oval 9"/>
           <p:cNvSpPr/>
           <p:nvPr/>
         </p:nvSpPr>
         <p:spPr>
           <a:xfrm>
-            <a:off x="8138160" y="1508760"/>
-            <a:ext cx="3474720" cy="1828800"/>
-          </a:xfrm>
-          <a:prstGeom prst="roundRect">
-            <a:avLst>
-              <a:gd name="adj" fmla="val 8000"/>
-            </a:avLst>
+            <a:off x="7406640" y="3163824"/>
+            <a:ext cx="164592" cy="164592"/>
+          </a:xfrm>
+          <a:prstGeom prst="ellipse">
+            <a:avLst/>
           </a:prstGeom>
           <a:solidFill>
-            <a:srgbClr val="EEF2F7"/>
+            <a:srgbClr val="14213D"/>
           </a:solidFill>
           <a:ln>
             <a:noFill/>
@@ -8293,14 +8107,14 @@
       </p:sp>
       <p:sp>
         <p:nvSpPr>
-          <p:cNvPr id="12" name="TextBox 11"/>
-          <p:cNvSpPr txBox="1"/>
-          <p:nvPr/>
-        </p:nvSpPr>
-        <p:spPr>
-          <a:xfrm>
-            <a:off x="8412480" y="1764792"/>
-            <a:ext cx="2926080" cy="274320"/>
+          <p:cNvPr id="11" name="TextBox 10"/>
+          <p:cNvSpPr txBox="1"/>
+          <p:nvPr/>
+        </p:nvSpPr>
+        <p:spPr>
+          <a:xfrm>
+            <a:off x="7726679" y="3108960"/>
+            <a:ext cx="3931920" cy="365760"/>
           </a:xfrm>
           <a:prstGeom prst="rect">
             <a:avLst/>
@@ -8319,116 +8133,33 @@
               </a:spcAft>
             </a:pPr>
             <a:r>
-              <a:rPr sz="1200" b="1" i="0">
-                <a:solidFill>
-                  <a:srgbClr val="5B6472"/>
-                </a:solidFill>
-                <a:latin typeface="Calibri"/>
-              </a:rPr>
-              <a:t>RULES</a:t>
-            </a:r>
-          </a:p>
-        </p:txBody>
-      </p:sp>
-      <p:sp>
-        <p:nvSpPr>
-          <p:cNvPr id="13" name="TextBox 12"/>
-          <p:cNvSpPr txBox="1"/>
-          <p:nvPr/>
-        </p:nvSpPr>
-        <p:spPr>
-          <a:xfrm>
-            <a:off x="8412480" y="2075688"/>
-            <a:ext cx="2926080" cy="685800"/>
-          </a:xfrm>
-          <a:prstGeom prst="rect">
-            <a:avLst/>
-          </a:prstGeom>
-          <a:noFill/>
-        </p:spPr>
-        <p:txBody>
-          <a:bodyPr wrap="square" lIns="0" rIns="0" tIns="0" bIns="0" anchor="t">
-            <a:spAutoFit/>
-          </a:bodyPr>
-          <a:lstStyle/>
-          <a:p>
-            <a:pPr algn="l">
-              <a:lnSpc>
-                <a:spcPct val="95000"/>
-              </a:lnSpc>
-              <a:spcAft>
-                <a:spcPts val="0"/>
-              </a:spcAft>
-            </a:pPr>
-            <a:r>
-              <a:rPr sz="1900" b="1" i="0">
-                <a:solidFill>
-                  <a:srgbClr val="14213D"/>
-                </a:solidFill>
-                <a:latin typeface="Calibri"/>
-              </a:rPr>
-              <a:t>Python standard library</a:t>
-            </a:r>
-          </a:p>
-        </p:txBody>
-      </p:sp>
-      <p:sp>
-        <p:nvSpPr>
-          <p:cNvPr id="14" name="TextBox 13"/>
-          <p:cNvSpPr txBox="1"/>
-          <p:nvPr/>
-        </p:nvSpPr>
-        <p:spPr>
-          <a:xfrm>
-            <a:off x="8412480" y="2807208"/>
-            <a:ext cx="2926080" cy="411480"/>
-          </a:xfrm>
-          <a:prstGeom prst="rect">
-            <a:avLst/>
-          </a:prstGeom>
-          <a:noFill/>
-        </p:spPr>
-        <p:txBody>
-          <a:bodyPr wrap="square" lIns="0" rIns="0" tIns="0" bIns="0" anchor="t">
-            <a:spAutoFit/>
-          </a:bodyPr>
-          <a:lstStyle/>
-          <a:p>
-            <a:pPr algn="l">
-              <a:spcAft>
-                <a:spcPts val="0"/>
-              </a:spcAft>
-            </a:pPr>
-            <a:r>
-              <a:rPr sz="1400" b="0" i="0">
+              <a:rPr sz="1500" b="0" i="0">
                 <a:solidFill>
                   <a:srgbClr val="1F2937"/>
                 </a:solidFill>
                 <a:latin typeface="Calibri"/>
               </a:rPr>
-              <a:t>deque window, set of ports</a:t>
-            </a:r>
-          </a:p>
-        </p:txBody>
-      </p:sp>
-      <p:sp>
-        <p:nvSpPr>
-          <p:cNvPr id="15" name="Rounded Rectangle 14"/>
+              <a:t>Sequence diagram</a:t>
+            </a:r>
+          </a:p>
+        </p:txBody>
+      </p:sp>
+      <p:sp>
+        <p:nvSpPr>
+          <p:cNvPr id="12" name="Oval 11"/>
           <p:cNvSpPr/>
           <p:nvPr/>
         </p:nvSpPr>
         <p:spPr>
           <a:xfrm>
-            <a:off x="548640" y="3611879"/>
-            <a:ext cx="3474720" cy="1828800"/>
-          </a:xfrm>
-          <a:prstGeom prst="roundRect">
-            <a:avLst>
-              <a:gd name="adj" fmla="val 8000"/>
-            </a:avLst>
+            <a:off x="7406640" y="3712463"/>
+            <a:ext cx="164592" cy="164592"/>
+          </a:xfrm>
+          <a:prstGeom prst="ellipse">
+            <a:avLst/>
           </a:prstGeom>
           <a:solidFill>
-            <a:srgbClr val="EEF2F7"/>
+            <a:srgbClr val="14213D"/>
           </a:solidFill>
           <a:ln>
             <a:noFill/>
@@ -8459,14 +8190,14 @@
       </p:sp>
       <p:sp>
         <p:nvSpPr>
-          <p:cNvPr id="16" name="TextBox 15"/>
-          <p:cNvSpPr txBox="1"/>
-          <p:nvPr/>
-        </p:nvSpPr>
-        <p:spPr>
-          <a:xfrm>
-            <a:off x="822959" y="3867911"/>
-            <a:ext cx="2926080" cy="274320"/>
+          <p:cNvPr id="13" name="TextBox 12"/>
+          <p:cNvSpPr txBox="1"/>
+          <p:nvPr/>
+        </p:nvSpPr>
+        <p:spPr>
+          <a:xfrm>
+            <a:off x="7726679" y="3657600"/>
+            <a:ext cx="3931920" cy="365760"/>
           </a:xfrm>
           <a:prstGeom prst="rect">
             <a:avLst/>
@@ -8485,116 +8216,33 @@
               </a:spcAft>
             </a:pPr>
             <a:r>
-              <a:rPr sz="1200" b="1" i="0">
-                <a:solidFill>
-                  <a:srgbClr val="5B6472"/>
-                </a:solidFill>
-                <a:latin typeface="Calibri"/>
-              </a:rPr>
-              <a:t>SERVER</a:t>
-            </a:r>
-          </a:p>
-        </p:txBody>
-      </p:sp>
-      <p:sp>
-        <p:nvSpPr>
-          <p:cNvPr id="17" name="TextBox 16"/>
-          <p:cNvSpPr txBox="1"/>
-          <p:nvPr/>
-        </p:nvSpPr>
-        <p:spPr>
-          <a:xfrm>
-            <a:off x="822959" y="4178807"/>
-            <a:ext cx="2926080" cy="685800"/>
-          </a:xfrm>
-          <a:prstGeom prst="rect">
-            <a:avLst/>
-          </a:prstGeom>
-          <a:noFill/>
-        </p:spPr>
-        <p:txBody>
-          <a:bodyPr wrap="square" lIns="0" rIns="0" tIns="0" bIns="0" anchor="t">
-            <a:spAutoFit/>
-          </a:bodyPr>
-          <a:lstStyle/>
-          <a:p>
-            <a:pPr algn="l">
-              <a:lnSpc>
-                <a:spcPct val="95000"/>
-              </a:lnSpc>
-              <a:spcAft>
-                <a:spcPts val="0"/>
-              </a:spcAft>
-            </a:pPr>
-            <a:r>
-              <a:rPr sz="1900" b="1" i="0">
-                <a:solidFill>
-                  <a:srgbClr val="14213D"/>
-                </a:solidFill>
-                <a:latin typeface="Calibri"/>
-              </a:rPr>
-              <a:t>Node.js 24 + Express 5</a:t>
-            </a:r>
-          </a:p>
-        </p:txBody>
-      </p:sp>
-      <p:sp>
-        <p:nvSpPr>
-          <p:cNvPr id="18" name="TextBox 17"/>
-          <p:cNvSpPr txBox="1"/>
-          <p:nvPr/>
-        </p:nvSpPr>
-        <p:spPr>
-          <a:xfrm>
-            <a:off x="822959" y="4910327"/>
-            <a:ext cx="2926080" cy="411480"/>
-          </a:xfrm>
-          <a:prstGeom prst="rect">
-            <a:avLst/>
-          </a:prstGeom>
-          <a:noFill/>
-        </p:spPr>
-        <p:txBody>
-          <a:bodyPr wrap="square" lIns="0" rIns="0" tIns="0" bIns="0" anchor="t">
-            <a:spAutoFit/>
-          </a:bodyPr>
-          <a:lstStyle/>
-          <a:p>
-            <a:pPr algn="l">
-              <a:spcAft>
-                <a:spcPts val="0"/>
-              </a:spcAft>
-            </a:pPr>
-            <a:r>
-              <a:rPr sz="1400" b="0" i="0">
+              <a:rPr sz="1500" b="0" i="0">
                 <a:solidFill>
                   <a:srgbClr val="1F2937"/>
                 </a:solidFill>
                 <a:latin typeface="Calibri"/>
               </a:rPr>
-              <a:t>receives alerts by HTTP POST</a:t>
-            </a:r>
-          </a:p>
-        </p:txBody>
-      </p:sp>
-      <p:sp>
-        <p:nvSpPr>
-          <p:cNvPr id="19" name="Rounded Rectangle 18"/>
+              <a:t>Component diagram</a:t>
+            </a:r>
+          </a:p>
+        </p:txBody>
+      </p:sp>
+      <p:sp>
+        <p:nvSpPr>
+          <p:cNvPr id="14" name="Oval 13"/>
           <p:cNvSpPr/>
           <p:nvPr/>
         </p:nvSpPr>
         <p:spPr>
           <a:xfrm>
-            <a:off x="4343400" y="3611879"/>
-            <a:ext cx="3474720" cy="1828800"/>
-          </a:xfrm>
-          <a:prstGeom prst="roundRect">
-            <a:avLst>
-              <a:gd name="adj" fmla="val 8000"/>
-            </a:avLst>
+            <a:off x="7406640" y="4261103"/>
+            <a:ext cx="164592" cy="164592"/>
+          </a:xfrm>
+          <a:prstGeom prst="ellipse">
+            <a:avLst/>
           </a:prstGeom>
           <a:solidFill>
-            <a:srgbClr val="EEF2F7"/>
+            <a:srgbClr val="14213D"/>
           </a:solidFill>
           <a:ln>
             <a:noFill/>
@@ -8625,14 +8273,14 @@
       </p:sp>
       <p:sp>
         <p:nvSpPr>
-          <p:cNvPr id="20" name="TextBox 19"/>
-          <p:cNvSpPr txBox="1"/>
-          <p:nvPr/>
-        </p:nvSpPr>
-        <p:spPr>
-          <a:xfrm>
-            <a:off x="4617720" y="3867911"/>
-            <a:ext cx="2926080" cy="274320"/>
+          <p:cNvPr id="15" name="TextBox 14"/>
+          <p:cNvSpPr txBox="1"/>
+          <p:nvPr/>
+        </p:nvSpPr>
+        <p:spPr>
+          <a:xfrm>
+            <a:off x="7726679" y="4206240"/>
+            <a:ext cx="3931920" cy="365760"/>
           </a:xfrm>
           <a:prstGeom prst="rect">
             <a:avLst/>
@@ -8651,116 +8299,33 @@
               </a:spcAft>
             </a:pPr>
             <a:r>
-              <a:rPr sz="1200" b="1" i="0">
-                <a:solidFill>
-                  <a:srgbClr val="5B6472"/>
-                </a:solidFill>
-                <a:latin typeface="Calibri"/>
-              </a:rPr>
-              <a:t>LIVE PUSH</a:t>
-            </a:r>
-          </a:p>
-        </p:txBody>
-      </p:sp>
-      <p:sp>
-        <p:nvSpPr>
-          <p:cNvPr id="21" name="TextBox 20"/>
-          <p:cNvSpPr txBox="1"/>
-          <p:nvPr/>
-        </p:nvSpPr>
-        <p:spPr>
-          <a:xfrm>
-            <a:off x="4617720" y="4178807"/>
-            <a:ext cx="2926080" cy="685800"/>
-          </a:xfrm>
-          <a:prstGeom prst="rect">
-            <a:avLst/>
-          </a:prstGeom>
-          <a:noFill/>
-        </p:spPr>
-        <p:txBody>
-          <a:bodyPr wrap="square" lIns="0" rIns="0" tIns="0" bIns="0" anchor="t">
-            <a:spAutoFit/>
-          </a:bodyPr>
-          <a:lstStyle/>
-          <a:p>
-            <a:pPr algn="l">
-              <a:lnSpc>
-                <a:spcPct val="95000"/>
-              </a:lnSpc>
-              <a:spcAft>
-                <a:spcPts val="0"/>
-              </a:spcAft>
-            </a:pPr>
-            <a:r>
-              <a:rPr sz="1900" b="1" i="0">
-                <a:solidFill>
-                  <a:srgbClr val="14213D"/>
-                </a:solidFill>
-                <a:latin typeface="Calibri"/>
-              </a:rPr>
-              <a:t>Socket.IO 4</a:t>
-            </a:r>
-          </a:p>
-        </p:txBody>
-      </p:sp>
-      <p:sp>
-        <p:nvSpPr>
-          <p:cNvPr id="22" name="TextBox 21"/>
-          <p:cNvSpPr txBox="1"/>
-          <p:nvPr/>
-        </p:nvSpPr>
-        <p:spPr>
-          <a:xfrm>
-            <a:off x="4617720" y="4910327"/>
-            <a:ext cx="2926080" cy="411480"/>
-          </a:xfrm>
-          <a:prstGeom prst="rect">
-            <a:avLst/>
-          </a:prstGeom>
-          <a:noFill/>
-        </p:spPr>
-        <p:txBody>
-          <a:bodyPr wrap="square" lIns="0" rIns="0" tIns="0" bIns="0" anchor="t">
-            <a:spAutoFit/>
-          </a:bodyPr>
-          <a:lstStyle/>
-          <a:p>
-            <a:pPr algn="l">
-              <a:spcAft>
-                <a:spcPts val="0"/>
-              </a:spcAft>
-            </a:pPr>
-            <a:r>
-              <a:rPr sz="1400" b="0" i="0">
+              <a:rPr sz="1500" b="0" i="0">
                 <a:solidFill>
                   <a:srgbClr val="1F2937"/>
                 </a:solidFill>
                 <a:latin typeface="Calibri"/>
               </a:rPr>
-              <a:t>alerts reach the browser instantly</a:t>
-            </a:r>
-          </a:p>
-        </p:txBody>
-      </p:sp>
-      <p:sp>
-        <p:nvSpPr>
-          <p:cNvPr id="23" name="Rounded Rectangle 22"/>
+              <a:t>Deployment diagram</a:t>
+            </a:r>
+          </a:p>
+        </p:txBody>
+      </p:sp>
+      <p:sp>
+        <p:nvSpPr>
+          <p:cNvPr id="16" name="Oval 15"/>
           <p:cNvSpPr/>
           <p:nvPr/>
         </p:nvSpPr>
         <p:spPr>
           <a:xfrm>
-            <a:off x="8138160" y="3611879"/>
-            <a:ext cx="3474720" cy="1828800"/>
-          </a:xfrm>
-          <a:prstGeom prst="roundRect">
-            <a:avLst>
-              <a:gd name="adj" fmla="val 8000"/>
-            </a:avLst>
+            <a:off x="7406640" y="4809744"/>
+            <a:ext cx="164592" cy="164592"/>
+          </a:xfrm>
+          <a:prstGeom prst="ellipse">
+            <a:avLst/>
           </a:prstGeom>
           <a:solidFill>
-            <a:srgbClr val="EEF2F7"/>
+            <a:srgbClr val="14213D"/>
           </a:solidFill>
           <a:ln>
             <a:noFill/>
@@ -8791,14 +8356,14 @@
       </p:sp>
       <p:sp>
         <p:nvSpPr>
-          <p:cNvPr id="24" name="TextBox 23"/>
-          <p:cNvSpPr txBox="1"/>
-          <p:nvPr/>
-        </p:nvSpPr>
-        <p:spPr>
-          <a:xfrm>
-            <a:off x="8412480" y="3867911"/>
-            <a:ext cx="2926080" cy="274320"/>
+          <p:cNvPr id="17" name="TextBox 16"/>
+          <p:cNvSpPr txBox="1"/>
+          <p:nvPr/>
+        </p:nvSpPr>
+        <p:spPr>
+          <a:xfrm>
+            <a:off x="7726679" y="4754880"/>
+            <a:ext cx="3931920" cy="365760"/>
           </a:xfrm>
           <a:prstGeom prst="rect">
             <a:avLst/>
@@ -8817,27 +8382,27 @@
               </a:spcAft>
             </a:pPr>
             <a:r>
-              <a:rPr sz="1200" b="1" i="0">
-                <a:solidFill>
-                  <a:srgbClr val="5B6472"/>
-                </a:solidFill>
-                <a:latin typeface="Calibri"/>
-              </a:rPr>
-              <a:t>DASHBOARD</a:t>
-            </a:r>
-          </a:p>
-        </p:txBody>
-      </p:sp>
-      <p:sp>
-        <p:nvSpPr>
-          <p:cNvPr id="25" name="TextBox 24"/>
-          <p:cNvSpPr txBox="1"/>
-          <p:nvPr/>
-        </p:nvSpPr>
-        <p:spPr>
-          <a:xfrm>
-            <a:off x="8412480" y="4178807"/>
-            <a:ext cx="2926080" cy="685800"/>
+              <a:rPr sz="1500" b="0" i="0">
+                <a:solidFill>
+                  <a:srgbClr val="1F2937"/>
+                </a:solidFill>
+                <a:latin typeface="Calibri"/>
+              </a:rPr>
+              <a:t>Flowchart of the port-scan rule</a:t>
+            </a:r>
+          </a:p>
+        </p:txBody>
+      </p:sp>
+      <p:sp>
+        <p:nvSpPr>
+          <p:cNvPr id="18" name="TextBox 17"/>
+          <p:cNvSpPr txBox="1"/>
+          <p:nvPr/>
+        </p:nvSpPr>
+        <p:spPr>
+          <a:xfrm>
+            <a:off x="7406640" y="5394960"/>
+            <a:ext cx="4206240" cy="822960"/>
           </a:xfrm>
           <a:prstGeom prst="rect">
             <a:avLst/>
@@ -8851,52 +8416,28 @@
           <a:lstStyle/>
           <a:p>
             <a:pPr algn="l">
-              <a:lnSpc>
-                <a:spcPct val="95000"/>
-              </a:lnSpc>
               <a:spcAft>
                 <a:spcPts val="0"/>
               </a:spcAft>
             </a:pPr>
             <a:r>
-              <a:rPr sz="1900" b="1" i="0">
+              <a:rPr sz="1400" b="0" i="0">
+                <a:solidFill>
+                  <a:srgbClr val="1F2937"/>
+                </a:solidFill>
+                <a:latin typeface="Calibri"/>
+              </a:rPr>
+              <a:t>All diagrams are in the report, </a:t>
+            </a:r>
+            <a:r>
+              <a:rPr sz="1400" b="1" i="0">
                 <a:solidFill>
                   <a:srgbClr val="14213D"/>
                 </a:solidFill>
                 <a:latin typeface="Calibri"/>
               </a:rPr>
-              <a:t>HTML, CSS, JS + Chart.js</a:t>
-            </a:r>
-          </a:p>
-        </p:txBody>
-      </p:sp>
-      <p:sp>
-        <p:nvSpPr>
-          <p:cNvPr id="26" name="TextBox 25"/>
-          <p:cNvSpPr txBox="1"/>
-          <p:nvPr/>
-        </p:nvSpPr>
-        <p:spPr>
-          <a:xfrm>
-            <a:off x="8412480" y="4910327"/>
-            <a:ext cx="2926080" cy="411480"/>
-          </a:xfrm>
-          <a:prstGeom prst="rect">
-            <a:avLst/>
-          </a:prstGeom>
-          <a:noFill/>
-        </p:spPr>
-        <p:txBody>
-          <a:bodyPr wrap="square" lIns="0" rIns="0" tIns="0" bIns="0" anchor="t">
-            <a:spAutoFit/>
-          </a:bodyPr>
-          <a:lstStyle/>
-          <a:p>
-            <a:pPr algn="l">
-              <a:spcAft>
-                <a:spcPts val="0"/>
-              </a:spcAft>
-            </a:pPr>
+              <a:t>numbered chapter-wise</a:t>
+            </a:r>
             <a:r>
               <a:rPr sz="1400" b="0" i="0">
                 <a:solidFill>
@@ -8904,98 +8445,14 @@
                 </a:solidFill>
                 <a:latin typeface="Calibri"/>
               </a:rPr>
-              <a:t>live chart, table and banner</a:t>
-            </a:r>
-          </a:p>
-        </p:txBody>
-      </p:sp>
-      <p:sp>
-        <p:nvSpPr>
-          <p:cNvPr id="27" name="TextBox 26"/>
-          <p:cNvSpPr txBox="1"/>
-          <p:nvPr/>
-        </p:nvSpPr>
-        <p:spPr>
-          <a:xfrm>
-            <a:off x="548640" y="5806440"/>
-            <a:ext cx="10972800" cy="365760"/>
-          </a:xfrm>
-          <a:prstGeom prst="rect">
-            <a:avLst/>
-          </a:prstGeom>
-          <a:noFill/>
-        </p:spPr>
-        <p:txBody>
-          <a:bodyPr wrap="square" lIns="0" rIns="0" tIns="0" bIns="0" anchor="t">
-            <a:spAutoFit/>
-          </a:bodyPr>
-          <a:lstStyle/>
-          <a:p>
-            <a:pPr algn="l">
-              <a:spcAft>
-                <a:spcPts val="0"/>
-              </a:spcAft>
-            </a:pPr>
-            <a:r>
-              <a:rPr sz="1400" b="1" i="0">
-                <a:solidFill>
-                  <a:srgbClr val="14213D"/>
-                </a:solidFill>
-                <a:latin typeface="Calibri"/>
-              </a:rPr>
-              <a:t>Storage: </a:t>
-            </a:r>
-            <a:r>
-              <a:rPr sz="1400" b="0" i="0">
-                <a:solidFill>
-                  <a:srgbClr val="1F2937"/>
-                </a:solidFill>
-                <a:latin typeface="Calibri"/>
-              </a:rPr>
-              <a:t>JSON alert log  </a:t>
-            </a:r>
-            <a:r>
-              <a:rPr sz="1400" b="1" i="0">
-                <a:solidFill>
-                  <a:srgbClr val="14213D"/>
-                </a:solidFill>
-                <a:latin typeface="Calibri"/>
-              </a:rPr>
-              <a:t>Testing: </a:t>
-            </a:r>
-            <a:r>
-              <a:rPr sz="1400" b="0" i="0">
-                <a:solidFill>
-                  <a:srgbClr val="1F2937"/>
-                </a:solidFill>
-                <a:latin typeface="Calibri"/>
-              </a:rPr>
-              <a:t>unittest, Nmap, Wireshark  </a:t>
-            </a:r>
-            <a:r>
-              <a:rPr sz="1400" b="1" i="0">
-                <a:solidFill>
-                  <a:srgbClr val="14213D"/>
-                </a:solidFill>
-                <a:latin typeface="Calibri"/>
-              </a:rPr>
-              <a:t>Tools: </a:t>
-            </a:r>
-            <a:r>
-              <a:rPr sz="1400" b="0" i="0">
-                <a:solidFill>
-                  <a:srgbClr val="1F2937"/>
-                </a:solidFill>
-                <a:latin typeface="Calibri"/>
-              </a:rPr>
-              <a:t>VS Code, Git, GitHub</a:t>
-            </a:r>
-          </a:p>
-        </p:txBody>
-      </p:sp>
-      <p:sp>
-        <p:nvSpPr>
-          <p:cNvPr id="28" name="TextBox 27"/>
+              <a:t> as Fig. 3.1 to 4.2.</a:t>
+            </a:r>
+          </a:p>
+        </p:txBody>
+      </p:sp>
+      <p:sp>
+        <p:nvSpPr>
+          <p:cNvPr id="19" name="TextBox 18"/>
           <p:cNvSpPr txBox="1"/>
           <p:nvPr/>
         </p:nvSpPr>
@@ -9034,7 +8491,7 @@
       </p:sp>
       <p:sp>
         <p:nvSpPr>
-          <p:cNvPr id="29" name="TextBox 28"/>
+          <p:cNvPr id="20" name="TextBox 19"/>
           <p:cNvSpPr txBox="1"/>
           <p:nvPr/>
         </p:nvSpPr>
@@ -9131,134 +8588,29 @@
                 </a:solidFill>
                 <a:latin typeface="Calibri"/>
               </a:rPr>
-              <a:t>System Design</a:t>
-            </a:r>
-          </a:p>
-        </p:txBody>
-      </p:sp>
-      <p:pic>
-        <p:nvPicPr>
-          <p:cNvPr id="3" name="Picture 2" descr="dfd_level1.png"/>
-          <p:cNvPicPr>
-            <a:picLocks noChangeAspect="1"/>
-          </p:cNvPicPr>
-          <p:nvPr/>
-        </p:nvPicPr>
-        <p:blipFill>
-          <a:blip r:embed="rId2"/>
-          <a:stretch>
-            <a:fillRect/>
-          </a:stretch>
-        </p:blipFill>
-        <p:spPr>
-          <a:xfrm>
-            <a:off x="548640" y="1554480"/>
-            <a:ext cx="6583680" cy="3800019"/>
-          </a:xfrm>
-          <a:prstGeom prst="rect">
-            <a:avLst/>
-          </a:prstGeom>
-          <a:ln w="9525">
-            <a:solidFill>
-              <a:srgbClr val="D5DCE6"/>
-            </a:solidFill>
-          </a:ln>
-        </p:spPr>
-      </p:pic>
-      <p:sp>
-        <p:nvSpPr>
-          <p:cNvPr id="4" name="TextBox 3"/>
-          <p:cNvSpPr txBox="1"/>
-          <p:nvPr/>
-        </p:nvSpPr>
-        <p:spPr>
-          <a:xfrm>
-            <a:off x="548640" y="5445939"/>
-            <a:ext cx="6583680" cy="274320"/>
-          </a:xfrm>
-          <a:prstGeom prst="rect">
-            <a:avLst/>
-          </a:prstGeom>
-          <a:noFill/>
-        </p:spPr>
-        <p:txBody>
-          <a:bodyPr wrap="square" lIns="0" rIns="0" tIns="0" bIns="0" anchor="t">
-            <a:spAutoFit/>
-          </a:bodyPr>
-          <a:lstStyle/>
-          <a:p>
-            <a:pPr algn="ctr">
-              <a:spcAft>
-                <a:spcPts val="0"/>
-              </a:spcAft>
-            </a:pPr>
-            <a:r>
-              <a:rPr sz="1200" b="0" i="0">
-                <a:solidFill>
-                  <a:srgbClr val="5B6472"/>
-                </a:solidFill>
-                <a:latin typeface="Calibri"/>
-              </a:rPr>
-              <a:t>Level-1 Data Flow Diagram</a:t>
-            </a:r>
-          </a:p>
-        </p:txBody>
-      </p:sp>
-      <p:sp>
-        <p:nvSpPr>
-          <p:cNvPr id="5" name="TextBox 4"/>
-          <p:cNvSpPr txBox="1"/>
-          <p:nvPr/>
-        </p:nvSpPr>
-        <p:spPr>
-          <a:xfrm>
-            <a:off x="7406640" y="1554480"/>
-            <a:ext cx="4206240" cy="365760"/>
-          </a:xfrm>
-          <a:prstGeom prst="rect">
-            <a:avLst/>
-          </a:prstGeom>
-          <a:noFill/>
-        </p:spPr>
-        <p:txBody>
-          <a:bodyPr wrap="square" lIns="0" rIns="0" tIns="0" bIns="0" anchor="t">
-            <a:spAutoFit/>
-          </a:bodyPr>
-          <a:lstStyle/>
-          <a:p>
-            <a:pPr algn="l">
-              <a:spcAft>
-                <a:spcPts val="0"/>
-              </a:spcAft>
-            </a:pPr>
-            <a:r>
-              <a:rPr sz="1200" b="1" i="0">
-                <a:solidFill>
-                  <a:srgbClr val="5B6472"/>
-                </a:solidFill>
-                <a:latin typeface="Calibri"/>
-              </a:rPr>
-              <a:t>DESIGN ARTEFACTS</a:t>
-            </a:r>
-          </a:p>
-        </p:txBody>
-      </p:sp>
-      <p:sp>
-        <p:nvSpPr>
-          <p:cNvPr id="6" name="Oval 5"/>
+              <a:t>Detection Rules</a:t>
+            </a:r>
+          </a:p>
+        </p:txBody>
+      </p:sp>
+      <p:sp>
+        <p:nvSpPr>
+          <p:cNvPr id="3" name="Rounded Rectangle 2"/>
           <p:cNvSpPr/>
           <p:nvPr/>
         </p:nvSpPr>
         <p:spPr>
           <a:xfrm>
-            <a:off x="7406640" y="2066544"/>
-            <a:ext cx="164592" cy="164592"/>
-          </a:xfrm>
-          <a:prstGeom prst="ellipse">
-            <a:avLst/>
+            <a:off x="548640" y="1508760"/>
+            <a:ext cx="3474720" cy="3200400"/>
+          </a:xfrm>
+          <a:prstGeom prst="roundRect">
+            <a:avLst>
+              <a:gd name="adj" fmla="val 8000"/>
+            </a:avLst>
           </a:prstGeom>
           <a:solidFill>
-            <a:srgbClr val="14213D"/>
+            <a:srgbClr val="EEF2F7"/>
           </a:solidFill>
           <a:ln>
             <a:noFill/>
@@ -9289,59 +8641,22 @@
       </p:sp>
       <p:sp>
         <p:nvSpPr>
-          <p:cNvPr id="7" name="TextBox 6"/>
-          <p:cNvSpPr txBox="1"/>
-          <p:nvPr/>
-        </p:nvSpPr>
-        <p:spPr>
-          <a:xfrm>
-            <a:off x="7726679" y="2011680"/>
-            <a:ext cx="3931920" cy="365760"/>
-          </a:xfrm>
-          <a:prstGeom prst="rect">
-            <a:avLst/>
-          </a:prstGeom>
-          <a:noFill/>
-        </p:spPr>
-        <p:txBody>
-          <a:bodyPr wrap="square" lIns="0" rIns="0" tIns="0" bIns="0" anchor="t">
-            <a:spAutoFit/>
-          </a:bodyPr>
-          <a:lstStyle/>
-          <a:p>
-            <a:pPr algn="l">
-              <a:spcAft>
-                <a:spcPts val="0"/>
-              </a:spcAft>
-            </a:pPr>
-            <a:r>
-              <a:rPr sz="1500" b="0" i="0">
-                <a:solidFill>
-                  <a:srgbClr val="1F2937"/>
-                </a:solidFill>
-                <a:latin typeface="Calibri"/>
-              </a:rPr>
-              <a:t>Context and level-1 DFDs</a:t>
-            </a:r>
-          </a:p>
-        </p:txBody>
-      </p:sp>
-      <p:sp>
-        <p:nvSpPr>
-          <p:cNvPr id="8" name="Oval 7"/>
+          <p:cNvPr id="4" name="Rounded Rectangle 3"/>
           <p:cNvSpPr/>
           <p:nvPr/>
         </p:nvSpPr>
         <p:spPr>
           <a:xfrm>
-            <a:off x="7406640" y="2615184"/>
-            <a:ext cx="164592" cy="164592"/>
-          </a:xfrm>
-          <a:prstGeom prst="ellipse">
-            <a:avLst/>
+            <a:off x="548640" y="1508760"/>
+            <a:ext cx="3474720" cy="822960"/>
+          </a:xfrm>
+          <a:prstGeom prst="roundRect">
+            <a:avLst>
+              <a:gd name="adj" fmla="val 8000"/>
+            </a:avLst>
           </a:prstGeom>
           <a:solidFill>
-            <a:srgbClr val="14213D"/>
+            <a:srgbClr val="E08A00"/>
           </a:solidFill>
           <a:ln>
             <a:noFill/>
@@ -9372,59 +8687,178 @@
       </p:sp>
       <p:sp>
         <p:nvSpPr>
-          <p:cNvPr id="9" name="TextBox 8"/>
-          <p:cNvSpPr txBox="1"/>
-          <p:nvPr/>
-        </p:nvSpPr>
-        <p:spPr>
-          <a:xfrm>
-            <a:off x="7726679" y="2560320"/>
-            <a:ext cx="3931920" cy="365760"/>
-          </a:xfrm>
-          <a:prstGeom prst="rect">
-            <a:avLst/>
-          </a:prstGeom>
-          <a:noFill/>
-        </p:spPr>
-        <p:txBody>
-          <a:bodyPr wrap="square" lIns="0" rIns="0" tIns="0" bIns="0" anchor="t">
-            <a:spAutoFit/>
-          </a:bodyPr>
-          <a:lstStyle/>
-          <a:p>
-            <a:pPr algn="l">
+          <p:cNvPr id="5" name="TextBox 4"/>
+          <p:cNvSpPr txBox="1"/>
+          <p:nvPr/>
+        </p:nvSpPr>
+        <p:spPr>
+          <a:xfrm>
+            <a:off x="548640" y="1664208"/>
+            <a:ext cx="3474720" cy="548640"/>
+          </a:xfrm>
+          <a:prstGeom prst="rect">
+            <a:avLst/>
+          </a:prstGeom>
+          <a:noFill/>
+        </p:spPr>
+        <p:txBody>
+          <a:bodyPr wrap="square" lIns="0" rIns="0" tIns="0" bIns="0" anchor="t">
+            <a:spAutoFit/>
+          </a:bodyPr>
+          <a:lstStyle/>
+          <a:p>
+            <a:pPr algn="ctr">
               <a:spcAft>
                 <a:spcPts val="0"/>
               </a:spcAft>
             </a:pPr>
             <a:r>
-              <a:rPr sz="1500" b="0" i="0">
+              <a:rPr sz="2200" b="1" i="0">
+                <a:solidFill>
+                  <a:srgbClr val="FFFFFF"/>
+                </a:solidFill>
+                <a:latin typeface="Calibri"/>
+              </a:rPr>
+              <a:t>Port Scan</a:t>
+            </a:r>
+          </a:p>
+        </p:txBody>
+      </p:sp>
+      <p:sp>
+        <p:nvSpPr>
+          <p:cNvPr id="6" name="TextBox 5"/>
+          <p:cNvSpPr txBox="1"/>
+          <p:nvPr/>
+        </p:nvSpPr>
+        <p:spPr>
+          <a:xfrm>
+            <a:off x="822959" y="2697480"/>
+            <a:ext cx="2926080" cy="457200"/>
+          </a:xfrm>
+          <a:prstGeom prst="rect">
+            <a:avLst/>
+          </a:prstGeom>
+          <a:noFill/>
+        </p:spPr>
+        <p:txBody>
+          <a:bodyPr wrap="square" lIns="0" rIns="0" tIns="0" bIns="0" anchor="t">
+            <a:spAutoFit/>
+          </a:bodyPr>
+          <a:lstStyle/>
+          <a:p>
+            <a:pPr algn="ctr">
+              <a:spcAft>
+                <a:spcPts val="0"/>
+              </a:spcAft>
+            </a:pPr>
+            <a:r>
+              <a:rPr sz="1600" b="0" i="0">
                 <a:solidFill>
                   <a:srgbClr val="1F2937"/>
                 </a:solidFill>
                 <a:latin typeface="Calibri"/>
               </a:rPr>
-              <a:t>Use-case diagram</a:t>
-            </a:r>
-          </a:p>
-        </p:txBody>
-      </p:sp>
-      <p:sp>
-        <p:nvSpPr>
-          <p:cNvPr id="10" name="Oval 9"/>
+              <a:t>&gt; 15 distinct ports</a:t>
+            </a:r>
+          </a:p>
+        </p:txBody>
+      </p:sp>
+      <p:sp>
+        <p:nvSpPr>
+          <p:cNvPr id="7" name="TextBox 6"/>
+          <p:cNvSpPr txBox="1"/>
+          <p:nvPr/>
+        </p:nvSpPr>
+        <p:spPr>
+          <a:xfrm>
+            <a:off x="822959" y="3200400"/>
+            <a:ext cx="2926080" cy="457200"/>
+          </a:xfrm>
+          <a:prstGeom prst="rect">
+            <a:avLst/>
+          </a:prstGeom>
+          <a:noFill/>
+        </p:spPr>
+        <p:txBody>
+          <a:bodyPr wrap="square" lIns="0" rIns="0" tIns="0" bIns="0" anchor="t">
+            <a:spAutoFit/>
+          </a:bodyPr>
+          <a:lstStyle/>
+          <a:p>
+            <a:pPr algn="ctr">
+              <a:spcAft>
+                <a:spcPts val="0"/>
+              </a:spcAft>
+            </a:pPr>
+            <a:r>
+              <a:rPr sz="1600" b="0" i="0">
+                <a:solidFill>
+                  <a:srgbClr val="1F2937"/>
+                </a:solidFill>
+                <a:latin typeface="Calibri"/>
+              </a:rPr>
+              <a:t>from one source</a:t>
+            </a:r>
+          </a:p>
+        </p:txBody>
+      </p:sp>
+      <p:sp>
+        <p:nvSpPr>
+          <p:cNvPr id="8" name="TextBox 7"/>
+          <p:cNvSpPr txBox="1"/>
+          <p:nvPr/>
+        </p:nvSpPr>
+        <p:spPr>
+          <a:xfrm>
+            <a:off x="822959" y="3703320"/>
+            <a:ext cx="2926080" cy="457200"/>
+          </a:xfrm>
+          <a:prstGeom prst="rect">
+            <a:avLst/>
+          </a:prstGeom>
+          <a:noFill/>
+        </p:spPr>
+        <p:txBody>
+          <a:bodyPr wrap="square" lIns="0" rIns="0" tIns="0" bIns="0" anchor="t">
+            <a:spAutoFit/>
+          </a:bodyPr>
+          <a:lstStyle/>
+          <a:p>
+            <a:pPr algn="ctr">
+              <a:spcAft>
+                <a:spcPts val="0"/>
+              </a:spcAft>
+            </a:pPr>
+            <a:r>
+              <a:rPr sz="1600" b="0" i="0">
+                <a:solidFill>
+                  <a:srgbClr val="1F2937"/>
+                </a:solidFill>
+                <a:latin typeface="Calibri"/>
+              </a:rPr>
+              <a:t>within 5 seconds</a:t>
+            </a:r>
+          </a:p>
+        </p:txBody>
+      </p:sp>
+      <p:sp>
+        <p:nvSpPr>
+          <p:cNvPr id="9" name="Rounded Rectangle 8"/>
           <p:cNvSpPr/>
           <p:nvPr/>
         </p:nvSpPr>
         <p:spPr>
           <a:xfrm>
-            <a:off x="7406640" y="3163824"/>
-            <a:ext cx="164592" cy="164592"/>
-          </a:xfrm>
-          <a:prstGeom prst="ellipse">
-            <a:avLst/>
+            <a:off x="1737360" y="4251960"/>
+            <a:ext cx="1097280" cy="329184"/>
+          </a:xfrm>
+          <a:prstGeom prst="roundRect">
+            <a:avLst>
+              <a:gd name="adj" fmla="val 50000"/>
+            </a:avLst>
           </a:prstGeom>
           <a:solidFill>
-            <a:srgbClr val="14213D"/>
+            <a:srgbClr val="E08A00"/>
           </a:solidFill>
           <a:ln>
             <a:noFill/>
@@ -9446,68 +8880,40 @@
           </a:fontRef>
         </p:style>
         <p:txBody>
-          <a:bodyPr rtlCol="0" anchor="ctr"/>
+          <a:bodyPr rtlCol="0" anchor="ctr" lIns="0" rIns="0" tIns="0" bIns="0" wrap="square"/>
           <a:lstStyle/>
           <a:p>
             <a:pPr algn="ctr"/>
-          </a:p>
-        </p:txBody>
-      </p:sp>
-      <p:sp>
-        <p:nvSpPr>
-          <p:cNvPr id="11" name="TextBox 10"/>
-          <p:cNvSpPr txBox="1"/>
-          <p:nvPr/>
-        </p:nvSpPr>
-        <p:spPr>
-          <a:xfrm>
-            <a:off x="7726679" y="3108960"/>
-            <a:ext cx="3931920" cy="365760"/>
-          </a:xfrm>
-          <a:prstGeom prst="rect">
-            <a:avLst/>
-          </a:prstGeom>
-          <a:noFill/>
-        </p:spPr>
-        <p:txBody>
-          <a:bodyPr wrap="square" lIns="0" rIns="0" tIns="0" bIns="0" anchor="t">
-            <a:spAutoFit/>
-          </a:bodyPr>
-          <a:lstStyle/>
-          <a:p>
-            <a:pPr algn="l">
-              <a:spcAft>
-                <a:spcPts val="0"/>
-              </a:spcAft>
-            </a:pPr>
-            <a:r>
-              <a:rPr sz="1500" b="0" i="0">
-                <a:solidFill>
-                  <a:srgbClr val="1F2937"/>
-                </a:solidFill>
-                <a:latin typeface="Calibri"/>
-              </a:rPr>
-              <a:t>Sequence diagram</a:t>
-            </a:r>
-          </a:p>
-        </p:txBody>
-      </p:sp>
-      <p:sp>
-        <p:nvSpPr>
-          <p:cNvPr id="12" name="Oval 11"/>
+            <a:r>
+              <a:rPr sz="1200" b="1" i="0">
+                <a:solidFill>
+                  <a:srgbClr val="FFFFFF"/>
+                </a:solidFill>
+                <a:latin typeface="Calibri"/>
+              </a:rPr>
+              <a:t>medium</a:t>
+            </a:r>
+          </a:p>
+        </p:txBody>
+      </p:sp>
+      <p:sp>
+        <p:nvSpPr>
+          <p:cNvPr id="10" name="Rounded Rectangle 9"/>
           <p:cNvSpPr/>
           <p:nvPr/>
         </p:nvSpPr>
         <p:spPr>
           <a:xfrm>
-            <a:off x="7406640" y="3712463"/>
-            <a:ext cx="164592" cy="164592"/>
-          </a:xfrm>
-          <a:prstGeom prst="ellipse">
-            <a:avLst/>
+            <a:off x="4343400" y="1508760"/>
+            <a:ext cx="3474720" cy="3200400"/>
+          </a:xfrm>
+          <a:prstGeom prst="roundRect">
+            <a:avLst>
+              <a:gd name="adj" fmla="val 8000"/>
+            </a:avLst>
           </a:prstGeom>
           <a:solidFill>
-            <a:srgbClr val="14213D"/>
+            <a:srgbClr val="EEF2F7"/>
           </a:solidFill>
           <a:ln>
             <a:noFill/>
@@ -9538,59 +8944,22 @@
       </p:sp>
       <p:sp>
         <p:nvSpPr>
-          <p:cNvPr id="13" name="TextBox 12"/>
-          <p:cNvSpPr txBox="1"/>
-          <p:nvPr/>
-        </p:nvSpPr>
-        <p:spPr>
-          <a:xfrm>
-            <a:off x="7726679" y="3657600"/>
-            <a:ext cx="3931920" cy="365760"/>
-          </a:xfrm>
-          <a:prstGeom prst="rect">
-            <a:avLst/>
-          </a:prstGeom>
-          <a:noFill/>
-        </p:spPr>
-        <p:txBody>
-          <a:bodyPr wrap="square" lIns="0" rIns="0" tIns="0" bIns="0" anchor="t">
-            <a:spAutoFit/>
-          </a:bodyPr>
-          <a:lstStyle/>
-          <a:p>
-            <a:pPr algn="l">
-              <a:spcAft>
-                <a:spcPts val="0"/>
-              </a:spcAft>
-            </a:pPr>
-            <a:r>
-              <a:rPr sz="1500" b="0" i="0">
-                <a:solidFill>
-                  <a:srgbClr val="1F2937"/>
-                </a:solidFill>
-                <a:latin typeface="Calibri"/>
-              </a:rPr>
-              <a:t>Component diagram</a:t>
-            </a:r>
-          </a:p>
-        </p:txBody>
-      </p:sp>
-      <p:sp>
-        <p:nvSpPr>
-          <p:cNvPr id="14" name="Oval 13"/>
+          <p:cNvPr id="11" name="Rounded Rectangle 10"/>
           <p:cNvSpPr/>
           <p:nvPr/>
         </p:nvSpPr>
         <p:spPr>
           <a:xfrm>
-            <a:off x="7406640" y="4261103"/>
-            <a:ext cx="164592" cy="164592"/>
-          </a:xfrm>
-          <a:prstGeom prst="ellipse">
-            <a:avLst/>
+            <a:off x="4343400" y="1508760"/>
+            <a:ext cx="3474720" cy="822960"/>
+          </a:xfrm>
+          <a:prstGeom prst="roundRect">
+            <a:avLst>
+              <a:gd name="adj" fmla="val 8000"/>
+            </a:avLst>
           </a:prstGeom>
           <a:solidFill>
-            <a:srgbClr val="14213D"/>
+            <a:srgbClr val="C62828"/>
           </a:solidFill>
           <a:ln>
             <a:noFill/>
@@ -9621,59 +8990,178 @@
       </p:sp>
       <p:sp>
         <p:nvSpPr>
+          <p:cNvPr id="12" name="TextBox 11"/>
+          <p:cNvSpPr txBox="1"/>
+          <p:nvPr/>
+        </p:nvSpPr>
+        <p:spPr>
+          <a:xfrm>
+            <a:off x="4343400" y="1664208"/>
+            <a:ext cx="3474720" cy="548640"/>
+          </a:xfrm>
+          <a:prstGeom prst="rect">
+            <a:avLst/>
+          </a:prstGeom>
+          <a:noFill/>
+        </p:spPr>
+        <p:txBody>
+          <a:bodyPr wrap="square" lIns="0" rIns="0" tIns="0" bIns="0" anchor="t">
+            <a:spAutoFit/>
+          </a:bodyPr>
+          <a:lstStyle/>
+          <a:p>
+            <a:pPr algn="ctr">
+              <a:spcAft>
+                <a:spcPts val="0"/>
+              </a:spcAft>
+            </a:pPr>
+            <a:r>
+              <a:rPr sz="2200" b="1" i="0">
+                <a:solidFill>
+                  <a:srgbClr val="FFFFFF"/>
+                </a:solidFill>
+                <a:latin typeface="Calibri"/>
+              </a:rPr>
+              <a:t>SYN Flood</a:t>
+            </a:r>
+          </a:p>
+        </p:txBody>
+      </p:sp>
+      <p:sp>
+        <p:nvSpPr>
+          <p:cNvPr id="13" name="TextBox 12"/>
+          <p:cNvSpPr txBox="1"/>
+          <p:nvPr/>
+        </p:nvSpPr>
+        <p:spPr>
+          <a:xfrm>
+            <a:off x="4617720" y="2697480"/>
+            <a:ext cx="2926080" cy="457200"/>
+          </a:xfrm>
+          <a:prstGeom prst="rect">
+            <a:avLst/>
+          </a:prstGeom>
+          <a:noFill/>
+        </p:spPr>
+        <p:txBody>
+          <a:bodyPr wrap="square" lIns="0" rIns="0" tIns="0" bIns="0" anchor="t">
+            <a:spAutoFit/>
+          </a:bodyPr>
+          <a:lstStyle/>
+          <a:p>
+            <a:pPr algn="ctr">
+              <a:spcAft>
+                <a:spcPts val="0"/>
+              </a:spcAft>
+            </a:pPr>
+            <a:r>
+              <a:rPr sz="1600" b="0" i="0">
+                <a:solidFill>
+                  <a:srgbClr val="1F2937"/>
+                </a:solidFill>
+                <a:latin typeface="Calibri"/>
+              </a:rPr>
+              <a:t>100+ half-open SYNs</a:t>
+            </a:r>
+          </a:p>
+        </p:txBody>
+      </p:sp>
+      <p:sp>
+        <p:nvSpPr>
+          <p:cNvPr id="14" name="TextBox 13"/>
+          <p:cNvSpPr txBox="1"/>
+          <p:nvPr/>
+        </p:nvSpPr>
+        <p:spPr>
+          <a:xfrm>
+            <a:off x="4617720" y="3200400"/>
+            <a:ext cx="2926080" cy="457200"/>
+          </a:xfrm>
+          <a:prstGeom prst="rect">
+            <a:avLst/>
+          </a:prstGeom>
+          <a:noFill/>
+        </p:spPr>
+        <p:txBody>
+          <a:bodyPr wrap="square" lIns="0" rIns="0" tIns="0" bIns="0" anchor="t">
+            <a:spAutoFit/>
+          </a:bodyPr>
+          <a:lstStyle/>
+          <a:p>
+            <a:pPr algn="ctr">
+              <a:spcAft>
+                <a:spcPts val="0"/>
+              </a:spcAft>
+            </a:pPr>
+            <a:r>
+              <a:rPr sz="1600" b="0" i="0">
+                <a:solidFill>
+                  <a:srgbClr val="1F2937"/>
+                </a:solidFill>
+                <a:latin typeface="Calibri"/>
+              </a:rPr>
+              <a:t>to one host</a:t>
+            </a:r>
+          </a:p>
+        </p:txBody>
+      </p:sp>
+      <p:sp>
+        <p:nvSpPr>
           <p:cNvPr id="15" name="TextBox 14"/>
           <p:cNvSpPr txBox="1"/>
           <p:nvPr/>
         </p:nvSpPr>
         <p:spPr>
           <a:xfrm>
-            <a:off x="7726679" y="4206240"/>
-            <a:ext cx="3931920" cy="365760"/>
-          </a:xfrm>
-          <a:prstGeom prst="rect">
-            <a:avLst/>
-          </a:prstGeom>
-          <a:noFill/>
-        </p:spPr>
-        <p:txBody>
-          <a:bodyPr wrap="square" lIns="0" rIns="0" tIns="0" bIns="0" anchor="t">
-            <a:spAutoFit/>
-          </a:bodyPr>
-          <a:lstStyle/>
-          <a:p>
-            <a:pPr algn="l">
+            <a:off x="4617720" y="3703320"/>
+            <a:ext cx="2926080" cy="457200"/>
+          </a:xfrm>
+          <a:prstGeom prst="rect">
+            <a:avLst/>
+          </a:prstGeom>
+          <a:noFill/>
+        </p:spPr>
+        <p:txBody>
+          <a:bodyPr wrap="square" lIns="0" rIns="0" tIns="0" bIns="0" anchor="t">
+            <a:spAutoFit/>
+          </a:bodyPr>
+          <a:lstStyle/>
+          <a:p>
+            <a:pPr algn="ctr">
               <a:spcAft>
                 <a:spcPts val="0"/>
               </a:spcAft>
             </a:pPr>
             <a:r>
-              <a:rPr sz="1500" b="0" i="0">
+              <a:rPr sz="1600" b="0" i="0">
                 <a:solidFill>
                   <a:srgbClr val="1F2937"/>
                 </a:solidFill>
                 <a:latin typeface="Calibri"/>
               </a:rPr>
-              <a:t>Deployment diagram</a:t>
-            </a:r>
-          </a:p>
-        </p:txBody>
-      </p:sp>
-      <p:sp>
-        <p:nvSpPr>
-          <p:cNvPr id="16" name="Oval 15"/>
+              <a:t>few completed</a:t>
+            </a:r>
+          </a:p>
+        </p:txBody>
+      </p:sp>
+      <p:sp>
+        <p:nvSpPr>
+          <p:cNvPr id="16" name="Rounded Rectangle 15"/>
           <p:cNvSpPr/>
           <p:nvPr/>
         </p:nvSpPr>
         <p:spPr>
           <a:xfrm>
-            <a:off x="7406640" y="4809744"/>
-            <a:ext cx="164592" cy="164592"/>
-          </a:xfrm>
-          <a:prstGeom prst="ellipse">
-            <a:avLst/>
+            <a:off x="5532120" y="4251960"/>
+            <a:ext cx="1097280" cy="329184"/>
+          </a:xfrm>
+          <a:prstGeom prst="roundRect">
+            <a:avLst>
+              <a:gd name="adj" fmla="val 50000"/>
+            </a:avLst>
           </a:prstGeom>
           <a:solidFill>
-            <a:srgbClr val="14213D"/>
+            <a:srgbClr val="C62828"/>
           </a:solidFill>
           <a:ln>
             <a:noFill/>
@@ -9695,6 +9183,61 @@
           </a:fontRef>
         </p:style>
         <p:txBody>
+          <a:bodyPr rtlCol="0" anchor="ctr" lIns="0" rIns="0" tIns="0" bIns="0" wrap="square"/>
+          <a:lstStyle/>
+          <a:p>
+            <a:pPr algn="ctr"/>
+            <a:r>
+              <a:rPr sz="1200" b="1" i="0">
+                <a:solidFill>
+                  <a:srgbClr val="FFFFFF"/>
+                </a:solidFill>
+                <a:latin typeface="Calibri"/>
+              </a:rPr>
+              <a:t>high</a:t>
+            </a:r>
+          </a:p>
+        </p:txBody>
+      </p:sp>
+      <p:sp>
+        <p:nvSpPr>
+          <p:cNvPr id="17" name="Rounded Rectangle 16"/>
+          <p:cNvSpPr/>
+          <p:nvPr/>
+        </p:nvSpPr>
+        <p:spPr>
+          <a:xfrm>
+            <a:off x="8138160" y="1508760"/>
+            <a:ext cx="3474720" cy="3200400"/>
+          </a:xfrm>
+          <a:prstGeom prst="roundRect">
+            <a:avLst>
+              <a:gd name="adj" fmla="val 8000"/>
+            </a:avLst>
+          </a:prstGeom>
+          <a:solidFill>
+            <a:srgbClr val="EEF2F7"/>
+          </a:solidFill>
+          <a:ln>
+            <a:noFill/>
+          </a:ln>
+          <a:effectLst/>
+        </p:spPr>
+        <p:style>
+          <a:lnRef idx="1">
+            <a:schemeClr val="accent1"/>
+          </a:lnRef>
+          <a:fillRef idx="3">
+            <a:schemeClr val="accent1"/>
+          </a:fillRef>
+          <a:effectRef idx="2">
+            <a:schemeClr val="accent1"/>
+          </a:effectRef>
+          <a:fontRef idx="minor">
+            <a:schemeClr val="lt1"/>
+          </a:fontRef>
+        </p:style>
+        <p:txBody>
           <a:bodyPr rtlCol="0" anchor="ctr"/>
           <a:lstStyle/>
           <a:p>
@@ -9704,14 +9247,271 @@
       </p:sp>
       <p:sp>
         <p:nvSpPr>
-          <p:cNvPr id="17" name="TextBox 16"/>
-          <p:cNvSpPr txBox="1"/>
-          <p:nvPr/>
-        </p:nvSpPr>
-        <p:spPr>
-          <a:xfrm>
-            <a:off x="7726679" y="4754880"/>
-            <a:ext cx="3931920" cy="365760"/>
+          <p:cNvPr id="18" name="Rounded Rectangle 17"/>
+          <p:cNvSpPr/>
+          <p:nvPr/>
+        </p:nvSpPr>
+        <p:spPr>
+          <a:xfrm>
+            <a:off x="8138160" y="1508760"/>
+            <a:ext cx="3474720" cy="822960"/>
+          </a:xfrm>
+          <a:prstGeom prst="roundRect">
+            <a:avLst>
+              <a:gd name="adj" fmla="val 8000"/>
+            </a:avLst>
+          </a:prstGeom>
+          <a:solidFill>
+            <a:srgbClr val="7B1FA2"/>
+          </a:solidFill>
+          <a:ln>
+            <a:noFill/>
+          </a:ln>
+          <a:effectLst/>
+        </p:spPr>
+        <p:style>
+          <a:lnRef idx="1">
+            <a:schemeClr val="accent1"/>
+          </a:lnRef>
+          <a:fillRef idx="3">
+            <a:schemeClr val="accent1"/>
+          </a:fillRef>
+          <a:effectRef idx="2">
+            <a:schemeClr val="accent1"/>
+          </a:effectRef>
+          <a:fontRef idx="minor">
+            <a:schemeClr val="lt1"/>
+          </a:fontRef>
+        </p:style>
+        <p:txBody>
+          <a:bodyPr rtlCol="0" anchor="ctr"/>
+          <a:lstStyle/>
+          <a:p>
+            <a:pPr algn="ctr"/>
+          </a:p>
+        </p:txBody>
+      </p:sp>
+      <p:sp>
+        <p:nvSpPr>
+          <p:cNvPr id="19" name="TextBox 18"/>
+          <p:cNvSpPr txBox="1"/>
+          <p:nvPr/>
+        </p:nvSpPr>
+        <p:spPr>
+          <a:xfrm>
+            <a:off x="8138160" y="1664208"/>
+            <a:ext cx="3474720" cy="548640"/>
+          </a:xfrm>
+          <a:prstGeom prst="rect">
+            <a:avLst/>
+          </a:prstGeom>
+          <a:noFill/>
+        </p:spPr>
+        <p:txBody>
+          <a:bodyPr wrap="square" lIns="0" rIns="0" tIns="0" bIns="0" anchor="t">
+            <a:spAutoFit/>
+          </a:bodyPr>
+          <a:lstStyle/>
+          <a:p>
+            <a:pPr algn="ctr">
+              <a:spcAft>
+                <a:spcPts val="0"/>
+              </a:spcAft>
+            </a:pPr>
+            <a:r>
+              <a:rPr sz="2200" b="1" i="0">
+                <a:solidFill>
+                  <a:srgbClr val="FFFFFF"/>
+                </a:solidFill>
+                <a:latin typeface="Calibri"/>
+              </a:rPr>
+              <a:t>ARP Spoofing</a:t>
+            </a:r>
+          </a:p>
+        </p:txBody>
+      </p:sp>
+      <p:sp>
+        <p:nvSpPr>
+          <p:cNvPr id="20" name="TextBox 19"/>
+          <p:cNvSpPr txBox="1"/>
+          <p:nvPr/>
+        </p:nvSpPr>
+        <p:spPr>
+          <a:xfrm>
+            <a:off x="8412480" y="2697480"/>
+            <a:ext cx="2926080" cy="457200"/>
+          </a:xfrm>
+          <a:prstGeom prst="rect">
+            <a:avLst/>
+          </a:prstGeom>
+          <a:noFill/>
+        </p:spPr>
+        <p:txBody>
+          <a:bodyPr wrap="square" lIns="0" rIns="0" tIns="0" bIns="0" anchor="t">
+            <a:spAutoFit/>
+          </a:bodyPr>
+          <a:lstStyle/>
+          <a:p>
+            <a:pPr algn="ctr">
+              <a:spcAft>
+                <a:spcPts val="0"/>
+              </a:spcAft>
+            </a:pPr>
+            <a:r>
+              <a:rPr sz="1600" b="0" i="0">
+                <a:solidFill>
+                  <a:srgbClr val="1F2937"/>
+                </a:solidFill>
+                <a:latin typeface="Calibri"/>
+              </a:rPr>
+              <a:t>gateway IP seen</a:t>
+            </a:r>
+          </a:p>
+        </p:txBody>
+      </p:sp>
+      <p:sp>
+        <p:nvSpPr>
+          <p:cNvPr id="21" name="TextBox 20"/>
+          <p:cNvSpPr txBox="1"/>
+          <p:nvPr/>
+        </p:nvSpPr>
+        <p:spPr>
+          <a:xfrm>
+            <a:off x="8412480" y="3200400"/>
+            <a:ext cx="2926080" cy="457200"/>
+          </a:xfrm>
+          <a:prstGeom prst="rect">
+            <a:avLst/>
+          </a:prstGeom>
+          <a:noFill/>
+        </p:spPr>
+        <p:txBody>
+          <a:bodyPr wrap="square" lIns="0" rIns="0" tIns="0" bIns="0" anchor="t">
+            <a:spAutoFit/>
+          </a:bodyPr>
+          <a:lstStyle/>
+          <a:p>
+            <a:pPr algn="ctr">
+              <a:spcAft>
+                <a:spcPts val="0"/>
+              </a:spcAft>
+            </a:pPr>
+            <a:r>
+              <a:rPr sz="1600" b="0" i="0">
+                <a:solidFill>
+                  <a:srgbClr val="1F2937"/>
+                </a:solidFill>
+                <a:latin typeface="Calibri"/>
+              </a:rPr>
+              <a:t>with a different</a:t>
+            </a:r>
+          </a:p>
+        </p:txBody>
+      </p:sp>
+      <p:sp>
+        <p:nvSpPr>
+          <p:cNvPr id="22" name="TextBox 21"/>
+          <p:cNvSpPr txBox="1"/>
+          <p:nvPr/>
+        </p:nvSpPr>
+        <p:spPr>
+          <a:xfrm>
+            <a:off x="8412480" y="3703320"/>
+            <a:ext cx="2926080" cy="457200"/>
+          </a:xfrm>
+          <a:prstGeom prst="rect">
+            <a:avLst/>
+          </a:prstGeom>
+          <a:noFill/>
+        </p:spPr>
+        <p:txBody>
+          <a:bodyPr wrap="square" lIns="0" rIns="0" tIns="0" bIns="0" anchor="t">
+            <a:spAutoFit/>
+          </a:bodyPr>
+          <a:lstStyle/>
+          <a:p>
+            <a:pPr algn="ctr">
+              <a:spcAft>
+                <a:spcPts val="0"/>
+              </a:spcAft>
+            </a:pPr>
+            <a:r>
+              <a:rPr sz="1600" b="0" i="0">
+                <a:solidFill>
+                  <a:srgbClr val="1F2937"/>
+                </a:solidFill>
+                <a:latin typeface="Calibri"/>
+              </a:rPr>
+              <a:t>MAC address</a:t>
+            </a:r>
+          </a:p>
+        </p:txBody>
+      </p:sp>
+      <p:sp>
+        <p:nvSpPr>
+          <p:cNvPr id="23" name="Rounded Rectangle 22"/>
+          <p:cNvSpPr/>
+          <p:nvPr/>
+        </p:nvSpPr>
+        <p:spPr>
+          <a:xfrm>
+            <a:off x="9326880" y="4251960"/>
+            <a:ext cx="1097280" cy="329184"/>
+          </a:xfrm>
+          <a:prstGeom prst="roundRect">
+            <a:avLst>
+              <a:gd name="adj" fmla="val 50000"/>
+            </a:avLst>
+          </a:prstGeom>
+          <a:solidFill>
+            <a:srgbClr val="7B1FA2"/>
+          </a:solidFill>
+          <a:ln>
+            <a:noFill/>
+          </a:ln>
+          <a:effectLst/>
+        </p:spPr>
+        <p:style>
+          <a:lnRef idx="1">
+            <a:schemeClr val="accent1"/>
+          </a:lnRef>
+          <a:fillRef idx="3">
+            <a:schemeClr val="accent1"/>
+          </a:fillRef>
+          <a:effectRef idx="2">
+            <a:schemeClr val="accent1"/>
+          </a:effectRef>
+          <a:fontRef idx="minor">
+            <a:schemeClr val="lt1"/>
+          </a:fontRef>
+        </p:style>
+        <p:txBody>
+          <a:bodyPr rtlCol="0" anchor="ctr" lIns="0" rIns="0" tIns="0" bIns="0" wrap="square"/>
+          <a:lstStyle/>
+          <a:p>
+            <a:pPr algn="ctr"/>
+            <a:r>
+              <a:rPr sz="1200" b="1" i="0">
+                <a:solidFill>
+                  <a:srgbClr val="FFFFFF"/>
+                </a:solidFill>
+                <a:latin typeface="Calibri"/>
+              </a:rPr>
+              <a:t>critical</a:t>
+            </a:r>
+          </a:p>
+        </p:txBody>
+      </p:sp>
+      <p:sp>
+        <p:nvSpPr>
+          <p:cNvPr id="24" name="TextBox 23"/>
+          <p:cNvSpPr txBox="1"/>
+          <p:nvPr/>
+        </p:nvSpPr>
+        <p:spPr>
+          <a:xfrm>
+            <a:off x="548640" y="5029200"/>
+            <a:ext cx="11064240" cy="1097280"/>
           </a:xfrm>
           <a:prstGeom prst="rect">
             <a:avLst/>
@@ -9725,82 +9525,37 @@
           <a:lstStyle/>
           <a:p>
             <a:pPr algn="l">
+              <a:lnSpc>
+                <a:spcPct val="110000"/>
+              </a:lnSpc>
               <a:spcAft>
                 <a:spcPts val="0"/>
               </a:spcAft>
             </a:pPr>
             <a:r>
-              <a:rPr sz="1500" b="0" i="0">
+              <a:rPr sz="1600" b="1" i="0">
+                <a:solidFill>
+                  <a:srgbClr val="14213D"/>
+                </a:solidFill>
+                <a:latin typeface="Calibri"/>
+              </a:rPr>
+              <a:t>All rules are deterministic. </a:t>
+            </a:r>
+            <a:r>
+              <a:rPr sz="1600" b="0" i="0">
                 <a:solidFill>
                   <a:srgbClr val="1F2937"/>
                 </a:solidFill>
                 <a:latin typeface="Calibri"/>
               </a:rPr>
-              <a:t>Flowchart of the port-scan rule</a:t>
-            </a:r>
-          </a:p>
-        </p:txBody>
-      </p:sp>
-      <p:sp>
-        <p:nvSpPr>
-          <p:cNvPr id="18" name="TextBox 17"/>
-          <p:cNvSpPr txBox="1"/>
-          <p:nvPr/>
-        </p:nvSpPr>
-        <p:spPr>
-          <a:xfrm>
-            <a:off x="7406640" y="5394960"/>
-            <a:ext cx="4206240" cy="822960"/>
-          </a:xfrm>
-          <a:prstGeom prst="rect">
-            <a:avLst/>
-          </a:prstGeom>
-          <a:noFill/>
-        </p:spPr>
-        <p:txBody>
-          <a:bodyPr wrap="square" lIns="0" rIns="0" tIns="0" bIns="0" anchor="t">
-            <a:spAutoFit/>
-          </a:bodyPr>
-          <a:lstStyle/>
-          <a:p>
-            <a:pPr algn="l">
-              <a:spcAft>
-                <a:spcPts val="0"/>
-              </a:spcAft>
-            </a:pPr>
-            <a:r>
-              <a:rPr sz="1400" b="0" i="0">
-                <a:solidFill>
-                  <a:srgbClr val="1F2937"/>
-                </a:solidFill>
-                <a:latin typeface="Calibri"/>
-              </a:rPr>
-              <a:t>All diagrams are in the report, </a:t>
-            </a:r>
-            <a:r>
-              <a:rPr sz="1400" b="1" i="0">
-                <a:solidFill>
-                  <a:srgbClr val="14213D"/>
-                </a:solidFill>
-                <a:latin typeface="Calibri"/>
-              </a:rPr>
-              <a:t>numbered chapter-wise</a:t>
-            </a:r>
-            <a:r>
-              <a:rPr sz="1400" b="0" i="0">
-                <a:solidFill>
-                  <a:srgbClr val="1F2937"/>
-                </a:solidFill>
-                <a:latin typeface="Calibri"/>
-              </a:rPr>
-              <a:t> as Fig. 3.1 to 4.2.</a:t>
-            </a:r>
-          </a:p>
-        </p:txBody>
-      </p:sp>
-      <p:sp>
-        <p:nvSpPr>
-          <p:cNvPr id="19" name="TextBox 18"/>
+              <a:t>Each keeps a few seconds of history in a sliding window, compares a count against a threshold, and raises an alert with a cool-down so one attack gives one alert.</a:t>
+            </a:r>
+          </a:p>
+        </p:txBody>
+      </p:sp>
+      <p:sp>
+        <p:nvSpPr>
+          <p:cNvPr id="25" name="TextBox 24"/>
           <p:cNvSpPr txBox="1"/>
           <p:nvPr/>
         </p:nvSpPr>
@@ -9839,7 +9594,7 @@
       </p:sp>
       <p:sp>
         <p:nvSpPr>
-          <p:cNvPr id="20" name="TextBox 19"/>
+          <p:cNvPr id="26" name="TextBox 25"/>
           <p:cNvSpPr txBox="1"/>
           <p:nvPr/>
         </p:nvSpPr>
@@ -9936,7 +9691,7 @@
                 </a:solidFill>
                 <a:latin typeface="Calibri"/>
               </a:rPr>
-              <a:t>Detection Rules</a:t>
+              <a:t>Testing</a:t>
             </a:r>
           </a:p>
         </p:txBody>
@@ -9950,7 +9705,7 @@
         <p:spPr>
           <a:xfrm>
             <a:off x="548640" y="1508760"/>
-            <a:ext cx="3474720" cy="3200400"/>
+            <a:ext cx="5394960" cy="1828800"/>
           </a:xfrm>
           <a:prstGeom prst="roundRect">
             <a:avLst>
@@ -9989,271 +9744,163 @@
       </p:sp>
       <p:sp>
         <p:nvSpPr>
-          <p:cNvPr id="4" name="Rounded Rectangle 3"/>
+          <p:cNvPr id="4" name="TextBox 3"/>
+          <p:cNvSpPr txBox="1"/>
+          <p:nvPr/>
+        </p:nvSpPr>
+        <p:spPr>
+          <a:xfrm>
+            <a:off x="822960" y="1737360"/>
+            <a:ext cx="4846320" cy="365760"/>
+          </a:xfrm>
+          <a:prstGeom prst="rect">
+            <a:avLst/>
+          </a:prstGeom>
+          <a:noFill/>
+        </p:spPr>
+        <p:txBody>
+          <a:bodyPr wrap="square" lIns="0" rIns="0" tIns="0" bIns="0" anchor="t">
+            <a:spAutoFit/>
+          </a:bodyPr>
+          <a:lstStyle/>
+          <a:p>
+            <a:pPr algn="l">
+              <a:spcAft>
+                <a:spcPts val="0"/>
+              </a:spcAft>
+            </a:pPr>
+            <a:r>
+              <a:rPr sz="1300" b="1" i="0">
+                <a:solidFill>
+                  <a:srgbClr val="5B6472"/>
+                </a:solidFill>
+                <a:latin typeface="Calibri"/>
+              </a:rPr>
+              <a:t>UNIT TESTS</a:t>
+            </a:r>
+          </a:p>
+        </p:txBody>
+      </p:sp>
+      <p:sp>
+        <p:nvSpPr>
+          <p:cNvPr id="5" name="TextBox 4"/>
+          <p:cNvSpPr txBox="1"/>
+          <p:nvPr/>
+        </p:nvSpPr>
+        <p:spPr>
+          <a:xfrm>
+            <a:off x="822960" y="2103120"/>
+            <a:ext cx="1828800" cy="914400"/>
+          </a:xfrm>
+          <a:prstGeom prst="rect">
+            <a:avLst/>
+          </a:prstGeom>
+          <a:noFill/>
+        </p:spPr>
+        <p:txBody>
+          <a:bodyPr wrap="square" lIns="0" rIns="0" tIns="0" bIns="0" anchor="t">
+            <a:spAutoFit/>
+          </a:bodyPr>
+          <a:lstStyle/>
+          <a:p>
+            <a:pPr algn="l">
+              <a:spcAft>
+                <a:spcPts val="0"/>
+              </a:spcAft>
+            </a:pPr>
+            <a:r>
+              <a:rPr sz="4400" b="1" i="0">
+                <a:solidFill>
+                  <a:srgbClr val="1B7F73"/>
+                </a:solidFill>
+                <a:latin typeface="Calibri"/>
+              </a:rPr>
+              <a:t>10 / 10</a:t>
+            </a:r>
+          </a:p>
+        </p:txBody>
+      </p:sp>
+      <p:sp>
+        <p:nvSpPr>
+          <p:cNvPr id="6" name="TextBox 5"/>
+          <p:cNvSpPr txBox="1"/>
+          <p:nvPr/>
+        </p:nvSpPr>
+        <p:spPr>
+          <a:xfrm>
+            <a:off x="2926080" y="2240280"/>
+            <a:ext cx="2926080" cy="914400"/>
+          </a:xfrm>
+          <a:prstGeom prst="rect">
+            <a:avLst/>
+          </a:prstGeom>
+          <a:noFill/>
+        </p:spPr>
+        <p:txBody>
+          <a:bodyPr wrap="square" lIns="0" rIns="0" tIns="0" bIns="0" anchor="t">
+            <a:spAutoFit/>
+          </a:bodyPr>
+          <a:lstStyle/>
+          <a:p>
+            <a:pPr algn="l">
+              <a:spcAft>
+                <a:spcPts val="200"/>
+              </a:spcAft>
+            </a:pPr>
+            <a:r>
+              <a:rPr sz="1500" b="0" i="0">
+                <a:solidFill>
+                  <a:srgbClr val="1F2937"/>
+                </a:solidFill>
+                <a:latin typeface="Calibri"/>
+              </a:rPr>
+              <a:t>tests passing</a:t>
+            </a:r>
+          </a:p>
+          <a:p>
+            <a:pPr algn="l">
+              <a:spcAft>
+                <a:spcPts val="200"/>
+              </a:spcAft>
+            </a:pPr>
+            <a:r>
+              <a:rPr sz="1500" b="0" i="0">
+                <a:solidFill>
+                  <a:srgbClr val="1F2937"/>
+                </a:solidFill>
+                <a:latin typeface="Calibri"/>
+              </a:rPr>
+              <a:t>one per rule, with</a:t>
+            </a:r>
+          </a:p>
+          <a:p>
+            <a:pPr algn="l">
+              <a:spcAft>
+                <a:spcPts val="200"/>
+              </a:spcAft>
+            </a:pPr>
+            <a:r>
+              <a:rPr sz="1500" b="0" i="0">
+                <a:solidFill>
+                  <a:srgbClr val="1F2937"/>
+                </a:solidFill>
+                <a:latin typeface="Calibri"/>
+              </a:rPr>
+              <a:t>positive and negative cases</a:t>
+            </a:r>
+          </a:p>
+        </p:txBody>
+      </p:sp>
+      <p:sp>
+        <p:nvSpPr>
+          <p:cNvPr id="7" name="Rounded Rectangle 6"/>
           <p:cNvSpPr/>
           <p:nvPr/>
         </p:nvSpPr>
         <p:spPr>
           <a:xfrm>
-            <a:off x="548640" y="1508760"/>
-            <a:ext cx="3474720" cy="822960"/>
-          </a:xfrm>
-          <a:prstGeom prst="roundRect">
-            <a:avLst>
-              <a:gd name="adj" fmla="val 8000"/>
-            </a:avLst>
-          </a:prstGeom>
-          <a:solidFill>
-            <a:srgbClr val="E08A00"/>
-          </a:solidFill>
-          <a:ln>
-            <a:noFill/>
-          </a:ln>
-          <a:effectLst/>
-        </p:spPr>
-        <p:style>
-          <a:lnRef idx="1">
-            <a:schemeClr val="accent1"/>
-          </a:lnRef>
-          <a:fillRef idx="3">
-            <a:schemeClr val="accent1"/>
-          </a:fillRef>
-          <a:effectRef idx="2">
-            <a:schemeClr val="accent1"/>
-          </a:effectRef>
-          <a:fontRef idx="minor">
-            <a:schemeClr val="lt1"/>
-          </a:fontRef>
-        </p:style>
-        <p:txBody>
-          <a:bodyPr rtlCol="0" anchor="ctr"/>
-          <a:lstStyle/>
-          <a:p>
-            <a:pPr algn="ctr"/>
-          </a:p>
-        </p:txBody>
-      </p:sp>
-      <p:sp>
-        <p:nvSpPr>
-          <p:cNvPr id="5" name="TextBox 4"/>
-          <p:cNvSpPr txBox="1"/>
-          <p:nvPr/>
-        </p:nvSpPr>
-        <p:spPr>
-          <a:xfrm>
-            <a:off x="548640" y="1664208"/>
-            <a:ext cx="3474720" cy="548640"/>
-          </a:xfrm>
-          <a:prstGeom prst="rect">
-            <a:avLst/>
-          </a:prstGeom>
-          <a:noFill/>
-        </p:spPr>
-        <p:txBody>
-          <a:bodyPr wrap="square" lIns="0" rIns="0" tIns="0" bIns="0" anchor="t">
-            <a:spAutoFit/>
-          </a:bodyPr>
-          <a:lstStyle/>
-          <a:p>
-            <a:pPr algn="ctr">
-              <a:spcAft>
-                <a:spcPts val="0"/>
-              </a:spcAft>
-            </a:pPr>
-            <a:r>
-              <a:rPr sz="2200" b="1" i="0">
-                <a:solidFill>
-                  <a:srgbClr val="FFFFFF"/>
-                </a:solidFill>
-                <a:latin typeface="Calibri"/>
-              </a:rPr>
-              <a:t>Port Scan</a:t>
-            </a:r>
-          </a:p>
-        </p:txBody>
-      </p:sp>
-      <p:sp>
-        <p:nvSpPr>
-          <p:cNvPr id="6" name="TextBox 5"/>
-          <p:cNvSpPr txBox="1"/>
-          <p:nvPr/>
-        </p:nvSpPr>
-        <p:spPr>
-          <a:xfrm>
-            <a:off x="822959" y="2697480"/>
-            <a:ext cx="2926080" cy="457200"/>
-          </a:xfrm>
-          <a:prstGeom prst="rect">
-            <a:avLst/>
-          </a:prstGeom>
-          <a:noFill/>
-        </p:spPr>
-        <p:txBody>
-          <a:bodyPr wrap="square" lIns="0" rIns="0" tIns="0" bIns="0" anchor="t">
-            <a:spAutoFit/>
-          </a:bodyPr>
-          <a:lstStyle/>
-          <a:p>
-            <a:pPr algn="ctr">
-              <a:spcAft>
-                <a:spcPts val="0"/>
-              </a:spcAft>
-            </a:pPr>
-            <a:r>
-              <a:rPr sz="1600" b="0" i="0">
-                <a:solidFill>
-                  <a:srgbClr val="1F2937"/>
-                </a:solidFill>
-                <a:latin typeface="Calibri"/>
-              </a:rPr>
-              <a:t>&gt; 15 distinct ports</a:t>
-            </a:r>
-          </a:p>
-        </p:txBody>
-      </p:sp>
-      <p:sp>
-        <p:nvSpPr>
-          <p:cNvPr id="7" name="TextBox 6"/>
-          <p:cNvSpPr txBox="1"/>
-          <p:nvPr/>
-        </p:nvSpPr>
-        <p:spPr>
-          <a:xfrm>
-            <a:off x="822959" y="3200400"/>
-            <a:ext cx="2926080" cy="457200"/>
-          </a:xfrm>
-          <a:prstGeom prst="rect">
-            <a:avLst/>
-          </a:prstGeom>
-          <a:noFill/>
-        </p:spPr>
-        <p:txBody>
-          <a:bodyPr wrap="square" lIns="0" rIns="0" tIns="0" bIns="0" anchor="t">
-            <a:spAutoFit/>
-          </a:bodyPr>
-          <a:lstStyle/>
-          <a:p>
-            <a:pPr algn="ctr">
-              <a:spcAft>
-                <a:spcPts val="0"/>
-              </a:spcAft>
-            </a:pPr>
-            <a:r>
-              <a:rPr sz="1600" b="0" i="0">
-                <a:solidFill>
-                  <a:srgbClr val="1F2937"/>
-                </a:solidFill>
-                <a:latin typeface="Calibri"/>
-              </a:rPr>
-              <a:t>from one source</a:t>
-            </a:r>
-          </a:p>
-        </p:txBody>
-      </p:sp>
-      <p:sp>
-        <p:nvSpPr>
-          <p:cNvPr id="8" name="TextBox 7"/>
-          <p:cNvSpPr txBox="1"/>
-          <p:nvPr/>
-        </p:nvSpPr>
-        <p:spPr>
-          <a:xfrm>
-            <a:off x="822959" y="3703320"/>
-            <a:ext cx="2926080" cy="457200"/>
-          </a:xfrm>
-          <a:prstGeom prst="rect">
-            <a:avLst/>
-          </a:prstGeom>
-          <a:noFill/>
-        </p:spPr>
-        <p:txBody>
-          <a:bodyPr wrap="square" lIns="0" rIns="0" tIns="0" bIns="0" anchor="t">
-            <a:spAutoFit/>
-          </a:bodyPr>
-          <a:lstStyle/>
-          <a:p>
-            <a:pPr algn="ctr">
-              <a:spcAft>
-                <a:spcPts val="0"/>
-              </a:spcAft>
-            </a:pPr>
-            <a:r>
-              <a:rPr sz="1600" b="0" i="0">
-                <a:solidFill>
-                  <a:srgbClr val="1F2937"/>
-                </a:solidFill>
-                <a:latin typeface="Calibri"/>
-              </a:rPr>
-              <a:t>within 5 seconds</a:t>
-            </a:r>
-          </a:p>
-        </p:txBody>
-      </p:sp>
-      <p:sp>
-        <p:nvSpPr>
-          <p:cNvPr id="9" name="Rounded Rectangle 8"/>
-          <p:cNvSpPr/>
-          <p:nvPr/>
-        </p:nvSpPr>
-        <p:spPr>
-          <a:xfrm>
-            <a:off x="1737360" y="4251960"/>
-            <a:ext cx="1097280" cy="329184"/>
-          </a:xfrm>
-          <a:prstGeom prst="roundRect">
-            <a:avLst>
-              <a:gd name="adj" fmla="val 50000"/>
-            </a:avLst>
-          </a:prstGeom>
-          <a:solidFill>
-            <a:srgbClr val="E08A00"/>
-          </a:solidFill>
-          <a:ln>
-            <a:noFill/>
-          </a:ln>
-          <a:effectLst/>
-        </p:spPr>
-        <p:style>
-          <a:lnRef idx="1">
-            <a:schemeClr val="accent1"/>
-          </a:lnRef>
-          <a:fillRef idx="3">
-            <a:schemeClr val="accent1"/>
-          </a:fillRef>
-          <a:effectRef idx="2">
-            <a:schemeClr val="accent1"/>
-          </a:effectRef>
-          <a:fontRef idx="minor">
-            <a:schemeClr val="lt1"/>
-          </a:fontRef>
-        </p:style>
-        <p:txBody>
-          <a:bodyPr rtlCol="0" anchor="ctr" lIns="0" rIns="0" tIns="0" bIns="0" wrap="square"/>
-          <a:lstStyle/>
-          <a:p>
-            <a:pPr algn="ctr"/>
-            <a:r>
-              <a:rPr sz="1200" b="1" i="0">
-                <a:solidFill>
-                  <a:srgbClr val="FFFFFF"/>
-                </a:solidFill>
-                <a:latin typeface="Calibri"/>
-              </a:rPr>
-              <a:t>medium</a:t>
-            </a:r>
-          </a:p>
-        </p:txBody>
-      </p:sp>
-      <p:sp>
-        <p:nvSpPr>
-          <p:cNvPr id="10" name="Rounded Rectangle 9"/>
-          <p:cNvSpPr/>
-          <p:nvPr/>
-        </p:nvSpPr>
-        <p:spPr>
-          <a:xfrm>
-            <a:off x="4343400" y="1508760"/>
-            <a:ext cx="3474720" cy="3200400"/>
+            <a:off x="6126480" y="1508760"/>
+            <a:ext cx="5394960" cy="1828800"/>
           </a:xfrm>
           <a:prstGeom prst="roundRect">
             <a:avLst>
@@ -10292,22 +9939,169 @@
       </p:sp>
       <p:sp>
         <p:nvSpPr>
-          <p:cNvPr id="11" name="Rounded Rectangle 10"/>
+          <p:cNvPr id="8" name="TextBox 7"/>
+          <p:cNvSpPr txBox="1"/>
+          <p:nvPr/>
+        </p:nvSpPr>
+        <p:spPr>
+          <a:xfrm>
+            <a:off x="6400800" y="1737360"/>
+            <a:ext cx="4846320" cy="365760"/>
+          </a:xfrm>
+          <a:prstGeom prst="rect">
+            <a:avLst/>
+          </a:prstGeom>
+          <a:noFill/>
+        </p:spPr>
+        <p:txBody>
+          <a:bodyPr wrap="square" lIns="0" rIns="0" tIns="0" bIns="0" anchor="t">
+            <a:spAutoFit/>
+          </a:bodyPr>
+          <a:lstStyle/>
+          <a:p>
+            <a:pPr algn="l">
+              <a:spcAft>
+                <a:spcPts val="0"/>
+              </a:spcAft>
+            </a:pPr>
+            <a:r>
+              <a:rPr sz="1300" b="1" i="0">
+                <a:solidFill>
+                  <a:srgbClr val="5B6472"/>
+                </a:solidFill>
+                <a:latin typeface="Calibri"/>
+              </a:rPr>
+              <a:t>INTEGRATION TESTS</a:t>
+            </a:r>
+          </a:p>
+        </p:txBody>
+      </p:sp>
+      <p:sp>
+        <p:nvSpPr>
+          <p:cNvPr id="9" name="TextBox 8"/>
+          <p:cNvSpPr txBox="1"/>
+          <p:nvPr/>
+        </p:nvSpPr>
+        <p:spPr>
+          <a:xfrm>
+            <a:off x="6400800" y="2148840"/>
+            <a:ext cx="4846320" cy="1097280"/>
+          </a:xfrm>
+          <a:prstGeom prst="rect">
+            <a:avLst/>
+          </a:prstGeom>
+          <a:noFill/>
+        </p:spPr>
+        <p:txBody>
+          <a:bodyPr wrap="square" lIns="0" rIns="0" tIns="0" bIns="0" anchor="t">
+            <a:spAutoFit/>
+          </a:bodyPr>
+          <a:lstStyle/>
+          <a:p>
+            <a:pPr algn="l">
+              <a:spcAft>
+                <a:spcPts val="400"/>
+              </a:spcAft>
+            </a:pPr>
+            <a:r>
+              <a:rPr sz="1400" b="0" i="0">
+                <a:solidFill>
+                  <a:srgbClr val="1F2937"/>
+                </a:solidFill>
+                <a:latin typeface="Calibri"/>
+              </a:rPr>
+              <a:t>Real port scan and SYN flood against the host</a:t>
+            </a:r>
+          </a:p>
+          <a:p>
+            <a:pPr algn="l">
+              <a:spcAft>
+                <a:spcPts val="400"/>
+              </a:spcAft>
+            </a:pPr>
+            <a:r>
+              <a:rPr sz="1400" b="0" i="0">
+                <a:solidFill>
+                  <a:srgbClr val="1F2937"/>
+                </a:solidFill>
+                <a:latin typeface="Calibri"/>
+              </a:rPr>
+              <a:t>Alert reached the dashboard and log in a few ms</a:t>
+            </a:r>
+          </a:p>
+          <a:p>
+            <a:pPr algn="l">
+              <a:spcAft>
+                <a:spcPts val="400"/>
+              </a:spcAft>
+            </a:pPr>
+            <a:r>
+              <a:rPr sz="1400" b="0" i="0">
+                <a:solidFill>
+                  <a:srgbClr val="1F2937"/>
+                </a:solidFill>
+                <a:latin typeface="Calibri"/>
+              </a:rPr>
+              <a:t>No false alarm during normal browsing</a:t>
+            </a:r>
+          </a:p>
+        </p:txBody>
+      </p:sp>
+      <p:sp>
+        <p:nvSpPr>
+          <p:cNvPr id="10" name="TextBox 9"/>
+          <p:cNvSpPr txBox="1"/>
+          <p:nvPr/>
+        </p:nvSpPr>
+        <p:spPr>
+          <a:xfrm>
+            <a:off x="548640" y="3657600"/>
+            <a:ext cx="10972800" cy="365760"/>
+          </a:xfrm>
+          <a:prstGeom prst="rect">
+            <a:avLst/>
+          </a:prstGeom>
+          <a:noFill/>
+        </p:spPr>
+        <p:txBody>
+          <a:bodyPr wrap="square" lIns="0" rIns="0" tIns="0" bIns="0" anchor="t">
+            <a:spAutoFit/>
+          </a:bodyPr>
+          <a:lstStyle/>
+          <a:p>
+            <a:pPr algn="l">
+              <a:spcAft>
+                <a:spcPts val="0"/>
+              </a:spcAft>
+            </a:pPr>
+            <a:r>
+              <a:rPr sz="1600" b="1" i="0">
+                <a:solidFill>
+                  <a:srgbClr val="14213D"/>
+                </a:solidFill>
+                <a:latin typeface="Calibri"/>
+              </a:rPr>
+              <a:t>What the negative tests confirm</a:t>
+            </a:r>
+          </a:p>
+        </p:txBody>
+      </p:sp>
+      <p:sp>
+        <p:nvSpPr>
+          <p:cNvPr id="11" name="Oval 10"/>
           <p:cNvSpPr/>
           <p:nvPr/>
         </p:nvSpPr>
         <p:spPr>
           <a:xfrm>
-            <a:off x="4343400" y="1508760"/>
-            <a:ext cx="3474720" cy="822960"/>
-          </a:xfrm>
-          <a:prstGeom prst="roundRect">
-            <a:avLst>
-              <a:gd name="adj" fmla="val 8000"/>
-            </a:avLst>
+            <a:off x="640080" y="4142232"/>
+            <a:ext cx="237744" cy="237744"/>
+          </a:xfrm>
+          <a:prstGeom prst="ellipse">
+            <a:avLst/>
           </a:prstGeom>
           <a:solidFill>
-            <a:srgbClr val="C62828"/>
+            <a:srgbClr val="1B7F73"/>
           </a:solidFill>
           <a:ln>
             <a:noFill/>
@@ -10344,8 +10138,8 @@
         </p:nvSpPr>
         <p:spPr>
           <a:xfrm>
-            <a:off x="4343400" y="1664208"/>
-            <a:ext cx="3474720" cy="548640"/>
+            <a:off x="640080" y="4123944"/>
+            <a:ext cx="237744" cy="274320"/>
           </a:xfrm>
           <a:prstGeom prst="rect">
             <a:avLst/>
@@ -10364,13 +10158,13 @@
               </a:spcAft>
             </a:pPr>
             <a:r>
-              <a:rPr sz="2200" b="1" i="0">
+              <a:rPr sz="1300" b="1" i="0">
                 <a:solidFill>
                   <a:srgbClr val="FFFFFF"/>
                 </a:solidFill>
                 <a:latin typeface="Calibri"/>
               </a:rPr>
-              <a:t>SYN Flood</a:t>
+              <a:t>✓</a:t>
             </a:r>
           </a:p>
         </p:txBody>
@@ -10383,133 +10177,53 @@
         </p:nvSpPr>
         <p:spPr>
           <a:xfrm>
-            <a:off x="4617720" y="2697480"/>
-            <a:ext cx="2926080" cy="457200"/>
-          </a:xfrm>
-          <a:prstGeom prst="rect">
-            <a:avLst/>
-          </a:prstGeom>
-          <a:noFill/>
-        </p:spPr>
-        <p:txBody>
-          <a:bodyPr wrap="square" lIns="0" rIns="0" tIns="0" bIns="0" anchor="t">
-            <a:spAutoFit/>
-          </a:bodyPr>
-          <a:lstStyle/>
-          <a:p>
-            <a:pPr algn="ctr">
+            <a:off x="1005840" y="4114800"/>
+            <a:ext cx="5120640" cy="365760"/>
+          </a:xfrm>
+          <a:prstGeom prst="rect">
+            <a:avLst/>
+          </a:prstGeom>
+          <a:noFill/>
+        </p:spPr>
+        <p:txBody>
+          <a:bodyPr wrap="square" lIns="0" rIns="0" tIns="0" bIns="0" anchor="t">
+            <a:spAutoFit/>
+          </a:bodyPr>
+          <a:lstStyle/>
+          <a:p>
+            <a:pPr algn="l">
               <a:spcAft>
                 <a:spcPts val="0"/>
               </a:spcAft>
             </a:pPr>
             <a:r>
-              <a:rPr sz="1600" b="0" i="0">
+              <a:rPr sz="1500" b="0" i="0">
                 <a:solidFill>
                   <a:srgbClr val="1F2937"/>
                 </a:solidFill>
                 <a:latin typeface="Calibri"/>
               </a:rPr>
-              <a:t>100+ half-open SYNs</a:t>
-            </a:r>
-          </a:p>
-        </p:txBody>
-      </p:sp>
-      <p:sp>
-        <p:nvSpPr>
-          <p:cNvPr id="14" name="TextBox 13"/>
-          <p:cNvSpPr txBox="1"/>
-          <p:nvPr/>
-        </p:nvSpPr>
-        <p:spPr>
-          <a:xfrm>
-            <a:off x="4617720" y="3200400"/>
-            <a:ext cx="2926080" cy="457200"/>
-          </a:xfrm>
-          <a:prstGeom prst="rect">
-            <a:avLst/>
-          </a:prstGeom>
-          <a:noFill/>
-        </p:spPr>
-        <p:txBody>
-          <a:bodyPr wrap="square" lIns="0" rIns="0" tIns="0" bIns="0" anchor="t">
-            <a:spAutoFit/>
-          </a:bodyPr>
-          <a:lstStyle/>
-          <a:p>
-            <a:pPr algn="ctr">
-              <a:spcAft>
-                <a:spcPts val="0"/>
-              </a:spcAft>
-            </a:pPr>
-            <a:r>
-              <a:rPr sz="1600" b="0" i="0">
-                <a:solidFill>
-                  <a:srgbClr val="1F2937"/>
-                </a:solidFill>
-                <a:latin typeface="Calibri"/>
-              </a:rPr>
-              <a:t>to one host</a:t>
-            </a:r>
-          </a:p>
-        </p:txBody>
-      </p:sp>
-      <p:sp>
-        <p:nvSpPr>
-          <p:cNvPr id="15" name="TextBox 14"/>
-          <p:cNvSpPr txBox="1"/>
-          <p:nvPr/>
-        </p:nvSpPr>
-        <p:spPr>
-          <a:xfrm>
-            <a:off x="4617720" y="3703320"/>
-            <a:ext cx="2926080" cy="457200"/>
-          </a:xfrm>
-          <a:prstGeom prst="rect">
-            <a:avLst/>
-          </a:prstGeom>
-          <a:noFill/>
-        </p:spPr>
-        <p:txBody>
-          <a:bodyPr wrap="square" lIns="0" rIns="0" tIns="0" bIns="0" anchor="t">
-            <a:spAutoFit/>
-          </a:bodyPr>
-          <a:lstStyle/>
-          <a:p>
-            <a:pPr algn="ctr">
-              <a:spcAft>
-                <a:spcPts val="0"/>
-              </a:spcAft>
-            </a:pPr>
-            <a:r>
-              <a:rPr sz="1600" b="0" i="0">
-                <a:solidFill>
-                  <a:srgbClr val="1F2937"/>
-                </a:solidFill>
-                <a:latin typeface="Calibri"/>
-              </a:rPr>
-              <a:t>few completed</a:t>
-            </a:r>
-          </a:p>
-        </p:txBody>
-      </p:sp>
-      <p:sp>
-        <p:nvSpPr>
-          <p:cNvPr id="16" name="Rounded Rectangle 15"/>
+              <a:t>Reply (SYN-ACK) packets are not a scan</a:t>
+            </a:r>
+          </a:p>
+        </p:txBody>
+      </p:sp>
+      <p:sp>
+        <p:nvSpPr>
+          <p:cNvPr id="14" name="Oval 13"/>
           <p:cNvSpPr/>
           <p:nvPr/>
         </p:nvSpPr>
         <p:spPr>
           <a:xfrm>
-            <a:off x="5532120" y="4251960"/>
-            <a:ext cx="1097280" cy="329184"/>
-          </a:xfrm>
-          <a:prstGeom prst="roundRect">
-            <a:avLst>
-              <a:gd name="adj" fmla="val 50000"/>
-            </a:avLst>
+            <a:off x="6309360" y="4142232"/>
+            <a:ext cx="237744" cy="237744"/>
+          </a:xfrm>
+          <a:prstGeom prst="ellipse">
+            <a:avLst/>
           </a:prstGeom>
           <a:solidFill>
-            <a:srgbClr val="C62828"/>
+            <a:srgbClr val="1B7F73"/>
           </a:solidFill>
           <a:ln>
             <a:noFill/>
@@ -10531,40 +10245,107 @@
           </a:fontRef>
         </p:style>
         <p:txBody>
-          <a:bodyPr rtlCol="0" anchor="ctr" lIns="0" rIns="0" tIns="0" bIns="0" wrap="square"/>
+          <a:bodyPr rtlCol="0" anchor="ctr"/>
           <a:lstStyle/>
           <a:p>
             <a:pPr algn="ctr"/>
-            <a:r>
-              <a:rPr sz="1200" b="1" i="0">
+          </a:p>
+        </p:txBody>
+      </p:sp>
+      <p:sp>
+        <p:nvSpPr>
+          <p:cNvPr id="15" name="TextBox 14"/>
+          <p:cNvSpPr txBox="1"/>
+          <p:nvPr/>
+        </p:nvSpPr>
+        <p:spPr>
+          <a:xfrm>
+            <a:off x="6309360" y="4123944"/>
+            <a:ext cx="237744" cy="274320"/>
+          </a:xfrm>
+          <a:prstGeom prst="rect">
+            <a:avLst/>
+          </a:prstGeom>
+          <a:noFill/>
+        </p:spPr>
+        <p:txBody>
+          <a:bodyPr wrap="square" lIns="0" rIns="0" tIns="0" bIns="0" anchor="t">
+            <a:spAutoFit/>
+          </a:bodyPr>
+          <a:lstStyle/>
+          <a:p>
+            <a:pPr algn="ctr">
+              <a:spcAft>
+                <a:spcPts val="0"/>
+              </a:spcAft>
+            </a:pPr>
+            <a:r>
+              <a:rPr sz="1300" b="1" i="0">
                 <a:solidFill>
                   <a:srgbClr val="FFFFFF"/>
                 </a:solidFill>
                 <a:latin typeface="Calibri"/>
               </a:rPr>
-              <a:t>high</a:t>
-            </a:r>
-          </a:p>
-        </p:txBody>
-      </p:sp>
-      <p:sp>
-        <p:nvSpPr>
-          <p:cNvPr id="17" name="Rounded Rectangle 16"/>
+              <a:t>✓</a:t>
+            </a:r>
+          </a:p>
+        </p:txBody>
+      </p:sp>
+      <p:sp>
+        <p:nvSpPr>
+          <p:cNvPr id="16" name="TextBox 15"/>
+          <p:cNvSpPr txBox="1"/>
+          <p:nvPr/>
+        </p:nvSpPr>
+        <p:spPr>
+          <a:xfrm>
+            <a:off x="6675120" y="4114800"/>
+            <a:ext cx="5120640" cy="365760"/>
+          </a:xfrm>
+          <a:prstGeom prst="rect">
+            <a:avLst/>
+          </a:prstGeom>
+          <a:noFill/>
+        </p:spPr>
+        <p:txBody>
+          <a:bodyPr wrap="square" lIns="0" rIns="0" tIns="0" bIns="0" anchor="t">
+            <a:spAutoFit/>
+          </a:bodyPr>
+          <a:lstStyle/>
+          <a:p>
+            <a:pPr algn="l">
+              <a:spcAft>
+                <a:spcPts val="0"/>
+              </a:spcAft>
+            </a:pPr>
+            <a:r>
+              <a:rPr sz="1500" b="0" i="0">
+                <a:solidFill>
+                  <a:srgbClr val="1F2937"/>
+                </a:solidFill>
+                <a:latin typeface="Calibri"/>
+              </a:rPr>
+              <a:t>Slow activity below the threshold stays silent</a:t>
+            </a:r>
+          </a:p>
+        </p:txBody>
+      </p:sp>
+      <p:sp>
+        <p:nvSpPr>
+          <p:cNvPr id="17" name="Oval 16"/>
           <p:cNvSpPr/>
           <p:nvPr/>
         </p:nvSpPr>
         <p:spPr>
           <a:xfrm>
-            <a:off x="8138160" y="1508760"/>
-            <a:ext cx="3474720" cy="3200400"/>
-          </a:xfrm>
-          <a:prstGeom prst="roundRect">
-            <a:avLst>
-              <a:gd name="adj" fmla="val 8000"/>
-            </a:avLst>
+            <a:off x="640080" y="4709160"/>
+            <a:ext cx="237744" cy="237744"/>
+          </a:xfrm>
+          <a:prstGeom prst="ellipse">
+            <a:avLst/>
           </a:prstGeom>
           <a:solidFill>
-            <a:srgbClr val="EEF2F7"/>
+            <a:srgbClr val="1B7F73"/>
           </a:solidFill>
           <a:ln>
             <a:noFill/>
@@ -10595,22 +10376,98 @@
       </p:sp>
       <p:sp>
         <p:nvSpPr>
-          <p:cNvPr id="18" name="Rounded Rectangle 17"/>
+          <p:cNvPr id="18" name="TextBox 17"/>
+          <p:cNvSpPr txBox="1"/>
+          <p:nvPr/>
+        </p:nvSpPr>
+        <p:spPr>
+          <a:xfrm>
+            <a:off x="640080" y="4690872"/>
+            <a:ext cx="237744" cy="274320"/>
+          </a:xfrm>
+          <a:prstGeom prst="rect">
+            <a:avLst/>
+          </a:prstGeom>
+          <a:noFill/>
+        </p:spPr>
+        <p:txBody>
+          <a:bodyPr wrap="square" lIns="0" rIns="0" tIns="0" bIns="0" anchor="t">
+            <a:spAutoFit/>
+          </a:bodyPr>
+          <a:lstStyle/>
+          <a:p>
+            <a:pPr algn="ctr">
+              <a:spcAft>
+                <a:spcPts val="0"/>
+              </a:spcAft>
+            </a:pPr>
+            <a:r>
+              <a:rPr sz="1300" b="1" i="0">
+                <a:solidFill>
+                  <a:srgbClr val="FFFFFF"/>
+                </a:solidFill>
+                <a:latin typeface="Calibri"/>
+              </a:rPr>
+              <a:t>✓</a:t>
+            </a:r>
+          </a:p>
+        </p:txBody>
+      </p:sp>
+      <p:sp>
+        <p:nvSpPr>
+          <p:cNvPr id="19" name="TextBox 18"/>
+          <p:cNvSpPr txBox="1"/>
+          <p:nvPr/>
+        </p:nvSpPr>
+        <p:spPr>
+          <a:xfrm>
+            <a:off x="1005840" y="4681728"/>
+            <a:ext cx="5120640" cy="365760"/>
+          </a:xfrm>
+          <a:prstGeom prst="rect">
+            <a:avLst/>
+          </a:prstGeom>
+          <a:noFill/>
+        </p:spPr>
+        <p:txBody>
+          <a:bodyPr wrap="square" lIns="0" rIns="0" tIns="0" bIns="0" anchor="t">
+            <a:spAutoFit/>
+          </a:bodyPr>
+          <a:lstStyle/>
+          <a:p>
+            <a:pPr algn="l">
+              <a:spcAft>
+                <a:spcPts val="0"/>
+              </a:spcAft>
+            </a:pPr>
+            <a:r>
+              <a:rPr sz="1500" b="0" i="0">
+                <a:solidFill>
+                  <a:srgbClr val="1F2937"/>
+                </a:solidFill>
+                <a:latin typeface="Calibri"/>
+              </a:rPr>
+              <a:t>Completed handshakes are not a flood</a:t>
+            </a:r>
+          </a:p>
+        </p:txBody>
+      </p:sp>
+      <p:sp>
+        <p:nvSpPr>
+          <p:cNvPr id="20" name="Oval 19"/>
           <p:cNvSpPr/>
           <p:nvPr/>
         </p:nvSpPr>
         <p:spPr>
           <a:xfrm>
-            <a:off x="8138160" y="1508760"/>
-            <a:ext cx="3474720" cy="822960"/>
-          </a:xfrm>
-          <a:prstGeom prst="roundRect">
-            <a:avLst>
-              <a:gd name="adj" fmla="val 8000"/>
-            </a:avLst>
+            <a:off x="6309360" y="4709160"/>
+            <a:ext cx="237744" cy="237744"/>
+          </a:xfrm>
+          <a:prstGeom prst="ellipse">
+            <a:avLst/>
           </a:prstGeom>
           <a:solidFill>
-            <a:srgbClr val="7B1FA2"/>
+            <a:srgbClr val="1B7F73"/>
           </a:solidFill>
           <a:ln>
             <a:noFill/>
@@ -10641,14 +10498,14 @@
       </p:sp>
       <p:sp>
         <p:nvSpPr>
-          <p:cNvPr id="19" name="TextBox 18"/>
-          <p:cNvSpPr txBox="1"/>
-          <p:nvPr/>
-        </p:nvSpPr>
-        <p:spPr>
-          <a:xfrm>
-            <a:off x="8138160" y="1664208"/>
-            <a:ext cx="3474720" cy="548640"/>
+          <p:cNvPr id="21" name="TextBox 20"/>
+          <p:cNvSpPr txBox="1"/>
+          <p:nvPr/>
+        </p:nvSpPr>
+        <p:spPr>
+          <a:xfrm>
+            <a:off x="6309360" y="4690872"/>
+            <a:ext cx="237744" cy="274320"/>
           </a:xfrm>
           <a:prstGeom prst="rect">
             <a:avLst/>
@@ -10667,152 +10524,72 @@
               </a:spcAft>
             </a:pPr>
             <a:r>
-              <a:rPr sz="2200" b="1" i="0">
+              <a:rPr sz="1300" b="1" i="0">
                 <a:solidFill>
                   <a:srgbClr val="FFFFFF"/>
                 </a:solidFill>
                 <a:latin typeface="Calibri"/>
               </a:rPr>
-              <a:t>ARP Spoofing</a:t>
-            </a:r>
-          </a:p>
-        </p:txBody>
-      </p:sp>
-      <p:sp>
-        <p:nvSpPr>
-          <p:cNvPr id="20" name="TextBox 19"/>
-          <p:cNvSpPr txBox="1"/>
-          <p:nvPr/>
-        </p:nvSpPr>
-        <p:spPr>
-          <a:xfrm>
-            <a:off x="8412480" y="2697480"/>
-            <a:ext cx="2926080" cy="457200"/>
-          </a:xfrm>
-          <a:prstGeom prst="rect">
-            <a:avLst/>
-          </a:prstGeom>
-          <a:noFill/>
-        </p:spPr>
-        <p:txBody>
-          <a:bodyPr wrap="square" lIns="0" rIns="0" tIns="0" bIns="0" anchor="t">
-            <a:spAutoFit/>
-          </a:bodyPr>
-          <a:lstStyle/>
-          <a:p>
-            <a:pPr algn="ctr">
+              <a:t>✓</a:t>
+            </a:r>
+          </a:p>
+        </p:txBody>
+      </p:sp>
+      <p:sp>
+        <p:nvSpPr>
+          <p:cNvPr id="22" name="TextBox 21"/>
+          <p:cNvSpPr txBox="1"/>
+          <p:nvPr/>
+        </p:nvSpPr>
+        <p:spPr>
+          <a:xfrm>
+            <a:off x="6675120" y="4681728"/>
+            <a:ext cx="5120640" cy="365760"/>
+          </a:xfrm>
+          <a:prstGeom prst="rect">
+            <a:avLst/>
+          </a:prstGeom>
+          <a:noFill/>
+        </p:spPr>
+        <p:txBody>
+          <a:bodyPr wrap="square" lIns="0" rIns="0" tIns="0" bIns="0" anchor="t">
+            <a:spAutoFit/>
+          </a:bodyPr>
+          <a:lstStyle/>
+          <a:p>
+            <a:pPr algn="l">
               <a:spcAft>
                 <a:spcPts val="0"/>
               </a:spcAft>
             </a:pPr>
             <a:r>
-              <a:rPr sz="1600" b="0" i="0">
+              <a:rPr sz="1500" b="0" i="0">
                 <a:solidFill>
                   <a:srgbClr val="1F2937"/>
                 </a:solidFill>
                 <a:latin typeface="Calibri"/>
               </a:rPr>
-              <a:t>gateway IP seen</a:t>
-            </a:r>
-          </a:p>
-        </p:txBody>
-      </p:sp>
-      <p:sp>
-        <p:nvSpPr>
-          <p:cNvPr id="21" name="TextBox 20"/>
-          <p:cNvSpPr txBox="1"/>
-          <p:nvPr/>
-        </p:nvSpPr>
-        <p:spPr>
-          <a:xfrm>
-            <a:off x="8412480" y="3200400"/>
-            <a:ext cx="2926080" cy="457200"/>
-          </a:xfrm>
-          <a:prstGeom prst="rect">
-            <a:avLst/>
-          </a:prstGeom>
-          <a:noFill/>
-        </p:spPr>
-        <p:txBody>
-          <a:bodyPr wrap="square" lIns="0" rIns="0" tIns="0" bIns="0" anchor="t">
-            <a:spAutoFit/>
-          </a:bodyPr>
-          <a:lstStyle/>
-          <a:p>
-            <a:pPr algn="ctr">
-              <a:spcAft>
-                <a:spcPts val="0"/>
-              </a:spcAft>
-            </a:pPr>
-            <a:r>
-              <a:rPr sz="1600" b="0" i="0">
-                <a:solidFill>
-                  <a:srgbClr val="1F2937"/>
-                </a:solidFill>
-                <a:latin typeface="Calibri"/>
-              </a:rPr>
-              <a:t>with a different</a:t>
-            </a:r>
-          </a:p>
-        </p:txBody>
-      </p:sp>
-      <p:sp>
-        <p:nvSpPr>
-          <p:cNvPr id="22" name="TextBox 21"/>
-          <p:cNvSpPr txBox="1"/>
-          <p:nvPr/>
-        </p:nvSpPr>
-        <p:spPr>
-          <a:xfrm>
-            <a:off x="8412480" y="3703320"/>
-            <a:ext cx="2926080" cy="457200"/>
-          </a:xfrm>
-          <a:prstGeom prst="rect">
-            <a:avLst/>
-          </a:prstGeom>
-          <a:noFill/>
-        </p:spPr>
-        <p:txBody>
-          <a:bodyPr wrap="square" lIns="0" rIns="0" tIns="0" bIns="0" anchor="t">
-            <a:spAutoFit/>
-          </a:bodyPr>
-          <a:lstStyle/>
-          <a:p>
-            <a:pPr algn="ctr">
-              <a:spcAft>
-                <a:spcPts val="0"/>
-              </a:spcAft>
-            </a:pPr>
-            <a:r>
-              <a:rPr sz="1600" b="0" i="0">
-                <a:solidFill>
-                  <a:srgbClr val="1F2937"/>
-                </a:solidFill>
-                <a:latin typeface="Calibri"/>
-              </a:rPr>
-              <a:t>MAC address</a:t>
-            </a:r>
-          </a:p>
-        </p:txBody>
-      </p:sp>
-      <p:sp>
-        <p:nvSpPr>
-          <p:cNvPr id="23" name="Rounded Rectangle 22"/>
+              <a:t>A port scan is not mistaken for a flood</a:t>
+            </a:r>
+          </a:p>
+        </p:txBody>
+      </p:sp>
+      <p:sp>
+        <p:nvSpPr>
+          <p:cNvPr id="23" name="Oval 22"/>
           <p:cNvSpPr/>
           <p:nvPr/>
         </p:nvSpPr>
         <p:spPr>
           <a:xfrm>
-            <a:off x="9326880" y="4251960"/>
-            <a:ext cx="1097280" cy="329184"/>
-          </a:xfrm>
-          <a:prstGeom prst="roundRect">
-            <a:avLst>
-              <a:gd name="adj" fmla="val 50000"/>
-            </a:avLst>
+            <a:off x="640080" y="5276088"/>
+            <a:ext cx="237744" cy="237744"/>
+          </a:xfrm>
+          <a:prstGeom prst="ellipse">
+            <a:avLst/>
           </a:prstGeom>
           <a:solidFill>
-            <a:srgbClr val="7B1FA2"/>
+            <a:srgbClr val="1B7F73"/>
           </a:solidFill>
           <a:ln>
             <a:noFill/>
@@ -10834,32 +10611,62 @@
           </a:fontRef>
         </p:style>
         <p:txBody>
-          <a:bodyPr rtlCol="0" anchor="ctr" lIns="0" rIns="0" tIns="0" bIns="0" wrap="square"/>
+          <a:bodyPr rtlCol="0" anchor="ctr"/>
           <a:lstStyle/>
           <a:p>
             <a:pPr algn="ctr"/>
-            <a:r>
-              <a:rPr sz="1200" b="1" i="0">
+          </a:p>
+        </p:txBody>
+      </p:sp>
+      <p:sp>
+        <p:nvSpPr>
+          <p:cNvPr id="24" name="TextBox 23"/>
+          <p:cNvSpPr txBox="1"/>
+          <p:nvPr/>
+        </p:nvSpPr>
+        <p:spPr>
+          <a:xfrm>
+            <a:off x="640080" y="5257800"/>
+            <a:ext cx="237744" cy="274320"/>
+          </a:xfrm>
+          <a:prstGeom prst="rect">
+            <a:avLst/>
+          </a:prstGeom>
+          <a:noFill/>
+        </p:spPr>
+        <p:txBody>
+          <a:bodyPr wrap="square" lIns="0" rIns="0" tIns="0" bIns="0" anchor="t">
+            <a:spAutoFit/>
+          </a:bodyPr>
+          <a:lstStyle/>
+          <a:p>
+            <a:pPr algn="ctr">
+              <a:spcAft>
+                <a:spcPts val="0"/>
+              </a:spcAft>
+            </a:pPr>
+            <a:r>
+              <a:rPr sz="1300" b="1" i="0">
                 <a:solidFill>
                   <a:srgbClr val="FFFFFF"/>
                 </a:solidFill>
                 <a:latin typeface="Calibri"/>
               </a:rPr>
-              <a:t>critical</a:t>
-            </a:r>
-          </a:p>
-        </p:txBody>
-      </p:sp>
-      <p:sp>
-        <p:nvSpPr>
-          <p:cNvPr id="24" name="TextBox 23"/>
-          <p:cNvSpPr txBox="1"/>
-          <p:nvPr/>
-        </p:nvSpPr>
-        <p:spPr>
-          <a:xfrm>
-            <a:off x="548640" y="5029200"/>
-            <a:ext cx="11064240" cy="1097280"/>
+              <a:t>✓</a:t>
+            </a:r>
+          </a:p>
+        </p:txBody>
+      </p:sp>
+      <p:sp>
+        <p:nvSpPr>
+          <p:cNvPr id="25" name="TextBox 24"/>
+          <p:cNvSpPr txBox="1"/>
+          <p:nvPr/>
+        </p:nvSpPr>
+        <p:spPr>
+          <a:xfrm>
+            <a:off x="1005840" y="5248656"/>
+            <a:ext cx="5120640" cy="365760"/>
           </a:xfrm>
           <a:prstGeom prst="rect">
             <a:avLst/>
@@ -10873,37 +10680,147 @@
           <a:lstStyle/>
           <a:p>
             <a:pPr algn="l">
-              <a:lnSpc>
-                <a:spcPct val="110000"/>
-              </a:lnSpc>
               <a:spcAft>
                 <a:spcPts val="0"/>
               </a:spcAft>
             </a:pPr>
             <a:r>
-              <a:rPr sz="1600" b="1" i="0">
-                <a:solidFill>
-                  <a:srgbClr val="14213D"/>
-                </a:solidFill>
-                <a:latin typeface="Calibri"/>
-              </a:rPr>
-              <a:t>All rules are deterministic. </a:t>
-            </a:r>
-            <a:r>
-              <a:rPr sz="1600" b="0" i="0">
+              <a:rPr sz="1500" b="0" i="0">
                 <a:solidFill>
                   <a:srgbClr val="1F2937"/>
                 </a:solidFill>
                 <a:latin typeface="Calibri"/>
               </a:rPr>
-              <a:t>Each keeps a few seconds of history in a sliding window, compares a count against a threshold, and raises an alert with a cool-down so one attack gives one alert.</a:t>
-            </a:r>
-          </a:p>
-        </p:txBody>
-      </p:sp>
-      <p:sp>
-        <p:nvSpPr>
-          <p:cNvPr id="25" name="TextBox 24"/>
+              <a:t>Genuine ARP replies raise no alarm</a:t>
+            </a:r>
+          </a:p>
+        </p:txBody>
+      </p:sp>
+      <p:sp>
+        <p:nvSpPr>
+          <p:cNvPr id="26" name="Oval 25"/>
+          <p:cNvSpPr/>
+          <p:nvPr/>
+        </p:nvSpPr>
+        <p:spPr>
+          <a:xfrm>
+            <a:off x="6309360" y="5276088"/>
+            <a:ext cx="237744" cy="237744"/>
+          </a:xfrm>
+          <a:prstGeom prst="ellipse">
+            <a:avLst/>
+          </a:prstGeom>
+          <a:solidFill>
+            <a:srgbClr val="1B7F73"/>
+          </a:solidFill>
+          <a:ln>
+            <a:noFill/>
+          </a:ln>
+          <a:effectLst/>
+        </p:spPr>
+        <p:style>
+          <a:lnRef idx="1">
+            <a:schemeClr val="accent1"/>
+          </a:lnRef>
+          <a:fillRef idx="3">
+            <a:schemeClr val="accent1"/>
+          </a:fillRef>
+          <a:effectRef idx="2">
+            <a:schemeClr val="accent1"/>
+          </a:effectRef>
+          <a:fontRef idx="minor">
+            <a:schemeClr val="lt1"/>
+          </a:fontRef>
+        </p:style>
+        <p:txBody>
+          <a:bodyPr rtlCol="0" anchor="ctr"/>
+          <a:lstStyle/>
+          <a:p>
+            <a:pPr algn="ctr"/>
+          </a:p>
+        </p:txBody>
+      </p:sp>
+      <p:sp>
+        <p:nvSpPr>
+          <p:cNvPr id="27" name="TextBox 26"/>
+          <p:cNvSpPr txBox="1"/>
+          <p:nvPr/>
+        </p:nvSpPr>
+        <p:spPr>
+          <a:xfrm>
+            <a:off x="6309360" y="5257800"/>
+            <a:ext cx="237744" cy="274320"/>
+          </a:xfrm>
+          <a:prstGeom prst="rect">
+            <a:avLst/>
+          </a:prstGeom>
+          <a:noFill/>
+        </p:spPr>
+        <p:txBody>
+          <a:bodyPr wrap="square" lIns="0" rIns="0" tIns="0" bIns="0" anchor="t">
+            <a:spAutoFit/>
+          </a:bodyPr>
+          <a:lstStyle/>
+          <a:p>
+            <a:pPr algn="ctr">
+              <a:spcAft>
+                <a:spcPts val="0"/>
+              </a:spcAft>
+            </a:pPr>
+            <a:r>
+              <a:rPr sz="1300" b="1" i="0">
+                <a:solidFill>
+                  <a:srgbClr val="FFFFFF"/>
+                </a:solidFill>
+                <a:latin typeface="Calibri"/>
+              </a:rPr>
+              <a:t>✓</a:t>
+            </a:r>
+          </a:p>
+        </p:txBody>
+      </p:sp>
+      <p:sp>
+        <p:nvSpPr>
+          <p:cNvPr id="28" name="TextBox 27"/>
+          <p:cNvSpPr txBox="1"/>
+          <p:nvPr/>
+        </p:nvSpPr>
+        <p:spPr>
+          <a:xfrm>
+            <a:off x="6675120" y="5248656"/>
+            <a:ext cx="5120640" cy="365760"/>
+          </a:xfrm>
+          <a:prstGeom prst="rect">
+            <a:avLst/>
+          </a:prstGeom>
+          <a:noFill/>
+        </p:spPr>
+        <p:txBody>
+          <a:bodyPr wrap="square" lIns="0" rIns="0" tIns="0" bIns="0" anchor="t">
+            <a:spAutoFit/>
+          </a:bodyPr>
+          <a:lstStyle/>
+          <a:p>
+            <a:pPr algn="l">
+              <a:spcAft>
+                <a:spcPts val="0"/>
+              </a:spcAft>
+            </a:pPr>
+            <a:r>
+              <a:rPr sz="1500" b="0" i="0">
+                <a:solidFill>
+                  <a:srgbClr val="1F2937"/>
+                </a:solidFill>
+                <a:latin typeface="Calibri"/>
+              </a:rPr>
+              <a:t>A cool-down stops duplicate alerts</a:t>
+            </a:r>
+          </a:p>
+        </p:txBody>
+      </p:sp>
+      <p:sp>
+        <p:nvSpPr>
+          <p:cNvPr id="29" name="TextBox 28"/>
           <p:cNvSpPr txBox="1"/>
           <p:nvPr/>
         </p:nvSpPr>
@@ -10942,7 +10859,7 @@
       </p:sp>
       <p:sp>
         <p:nvSpPr>
-          <p:cNvPr id="26" name="TextBox 25"/>
+          <p:cNvPr id="30" name="TextBox 29"/>
           <p:cNvSpPr txBox="1"/>
           <p:nvPr/>
         </p:nvSpPr>
@@ -11039,21 +10956,89 @@
                 </a:solidFill>
                 <a:latin typeface="Calibri"/>
               </a:rPr>
-              <a:t>Testing</a:t>
-            </a:r>
-          </a:p>
-        </p:txBody>
-      </p:sp>
-      <p:sp>
-        <p:nvSpPr>
-          <p:cNvPr id="3" name="Rounded Rectangle 2"/>
+              <a:t>Results: Live Dashboard</a:t>
+            </a:r>
+          </a:p>
+        </p:txBody>
+      </p:sp>
+      <p:pic>
+        <p:nvPicPr>
+          <p:cNvPr id="3" name="Picture 2" descr="dash_final.png"/>
+          <p:cNvPicPr>
+            <a:picLocks noChangeAspect="1"/>
+          </p:cNvPicPr>
+          <p:nvPr/>
+        </p:nvPicPr>
+        <p:blipFill>
+          <a:blip r:embed="rId2"/>
+          <a:stretch>
+            <a:fillRect/>
+          </a:stretch>
+        </p:blipFill>
+        <p:spPr>
+          <a:xfrm>
+            <a:off x="548640" y="1463040"/>
+            <a:ext cx="7406640" cy="3977411"/>
+          </a:xfrm>
+          <a:prstGeom prst="rect">
+            <a:avLst/>
+          </a:prstGeom>
+          <a:ln w="9525">
+            <a:solidFill>
+              <a:srgbClr val="D5DCE6"/>
+            </a:solidFill>
+          </a:ln>
+        </p:spPr>
+      </p:pic>
+      <p:sp>
+        <p:nvSpPr>
+          <p:cNvPr id="4" name="TextBox 3"/>
+          <p:cNvSpPr txBox="1"/>
+          <p:nvPr/>
+        </p:nvSpPr>
+        <p:spPr>
+          <a:xfrm>
+            <a:off x="548640" y="5513603"/>
+            <a:ext cx="7406640" cy="274320"/>
+          </a:xfrm>
+          <a:prstGeom prst="rect">
+            <a:avLst/>
+          </a:prstGeom>
+          <a:noFill/>
+        </p:spPr>
+        <p:txBody>
+          <a:bodyPr wrap="square" lIns="0" rIns="0" tIns="0" bIns="0" anchor="t">
+            <a:spAutoFit/>
+          </a:bodyPr>
+          <a:lstStyle/>
+          <a:p>
+            <a:pPr algn="ctr">
+              <a:spcAft>
+                <a:spcPts val="0"/>
+              </a:spcAft>
+            </a:pPr>
+            <a:r>
+              <a:rPr sz="1200" b="0" i="0">
+                <a:solidFill>
+                  <a:srgbClr val="5B6472"/>
+                </a:solidFill>
+                <a:latin typeface="Calibri"/>
+              </a:rPr>
+              <a:t>Dashboard after detecting a port scan and a SYN flood</a:t>
+            </a:r>
+          </a:p>
+        </p:txBody>
+      </p:sp>
+      <p:sp>
+        <p:nvSpPr>
+          <p:cNvPr id="5" name="Rounded Rectangle 4"/>
           <p:cNvSpPr/>
           <p:nvPr/>
         </p:nvSpPr>
         <p:spPr>
           <a:xfrm>
-            <a:off x="548640" y="1508760"/>
-            <a:ext cx="5394960" cy="1828800"/>
+            <a:off x="8229600" y="1554480"/>
+            <a:ext cx="3291840" cy="960120"/>
           </a:xfrm>
           <a:prstGeom prst="roundRect">
             <a:avLst>
@@ -11092,14 +11077,14 @@
       </p:sp>
       <p:sp>
         <p:nvSpPr>
-          <p:cNvPr id="4" name="TextBox 3"/>
-          <p:cNvSpPr txBox="1"/>
-          <p:nvPr/>
-        </p:nvSpPr>
-        <p:spPr>
-          <a:xfrm>
-            <a:off x="822960" y="1737360"/>
-            <a:ext cx="4846320" cy="365760"/>
+          <p:cNvPr id="6" name="TextBox 5"/>
+          <p:cNvSpPr txBox="1"/>
+          <p:nvPr/>
+        </p:nvSpPr>
+        <p:spPr>
+          <a:xfrm>
+            <a:off x="8458200" y="1664207"/>
+            <a:ext cx="1371600" cy="640080"/>
           </a:xfrm>
           <a:prstGeom prst="rect">
             <a:avLst/>
@@ -11118,27 +11103,27 @@
               </a:spcAft>
             </a:pPr>
             <a:r>
-              <a:rPr sz="1300" b="1" i="0">
-                <a:solidFill>
-                  <a:srgbClr val="5B6472"/>
-                </a:solidFill>
-                <a:latin typeface="Calibri"/>
-              </a:rPr>
-              <a:t>UNIT TESTS</a:t>
-            </a:r>
-          </a:p>
-        </p:txBody>
-      </p:sp>
-      <p:sp>
-        <p:nvSpPr>
-          <p:cNvPr id="5" name="TextBox 4"/>
-          <p:cNvSpPr txBox="1"/>
-          <p:nvPr/>
-        </p:nvSpPr>
-        <p:spPr>
-          <a:xfrm>
-            <a:off x="822960" y="2103120"/>
-            <a:ext cx="1828800" cy="914400"/>
+              <a:rPr sz="3000" b="1" i="0">
+                <a:solidFill>
+                  <a:srgbClr val="14213D"/>
+                </a:solidFill>
+                <a:latin typeface="Calibri"/>
+              </a:rPr>
+              <a:t>3</a:t>
+            </a:r>
+          </a:p>
+        </p:txBody>
+      </p:sp>
+      <p:sp>
+        <p:nvSpPr>
+          <p:cNvPr id="7" name="TextBox 6"/>
+          <p:cNvSpPr txBox="1"/>
+          <p:nvPr/>
+        </p:nvSpPr>
+        <p:spPr>
+          <a:xfrm>
+            <a:off x="9692640" y="1828800"/>
+            <a:ext cx="1737360" cy="457200"/>
           </a:xfrm>
           <a:prstGeom prst="rect">
             <a:avLst/>
@@ -11157,98 +11142,27 @@
               </a:spcAft>
             </a:pPr>
             <a:r>
-              <a:rPr sz="4400" b="1" i="0">
-                <a:solidFill>
-                  <a:srgbClr val="1B7F73"/>
-                </a:solidFill>
-                <a:latin typeface="Calibri"/>
-              </a:rPr>
-              <a:t>10 / 10</a:t>
-            </a:r>
-          </a:p>
-        </p:txBody>
-      </p:sp>
-      <p:sp>
-        <p:nvSpPr>
-          <p:cNvPr id="6" name="TextBox 5"/>
-          <p:cNvSpPr txBox="1"/>
-          <p:nvPr/>
-        </p:nvSpPr>
-        <p:spPr>
-          <a:xfrm>
-            <a:off x="2926080" y="2240280"/>
-            <a:ext cx="2926080" cy="914400"/>
-          </a:xfrm>
-          <a:prstGeom prst="rect">
-            <a:avLst/>
-          </a:prstGeom>
-          <a:noFill/>
-        </p:spPr>
-        <p:txBody>
-          <a:bodyPr wrap="square" lIns="0" rIns="0" tIns="0" bIns="0" anchor="t">
-            <a:spAutoFit/>
-          </a:bodyPr>
-          <a:lstStyle/>
-          <a:p>
-            <a:pPr algn="l">
-              <a:spcAft>
-                <a:spcPts val="200"/>
-              </a:spcAft>
-            </a:pPr>
-            <a:r>
-              <a:rPr sz="1500" b="0" i="0">
+              <a:rPr sz="1400" b="0" i="0">
                 <a:solidFill>
                   <a:srgbClr val="1F2937"/>
                 </a:solidFill>
                 <a:latin typeface="Calibri"/>
               </a:rPr>
-              <a:t>tests passing</a:t>
-            </a:r>
-          </a:p>
-          <a:p>
-            <a:pPr algn="l">
-              <a:spcAft>
-                <a:spcPts val="200"/>
-              </a:spcAft>
-            </a:pPr>
-            <a:r>
-              <a:rPr sz="1500" b="0" i="0">
-                <a:solidFill>
-                  <a:srgbClr val="1F2937"/>
-                </a:solidFill>
-                <a:latin typeface="Calibri"/>
-              </a:rPr>
-              <a:t>one per rule, with</a:t>
-            </a:r>
-          </a:p>
-          <a:p>
-            <a:pPr algn="l">
-              <a:spcAft>
-                <a:spcPts val="200"/>
-              </a:spcAft>
-            </a:pPr>
-            <a:r>
-              <a:rPr sz="1500" b="0" i="0">
-                <a:solidFill>
-                  <a:srgbClr val="1F2937"/>
-                </a:solidFill>
-                <a:latin typeface="Calibri"/>
-              </a:rPr>
-              <a:t>positive and negative cases</a:t>
-            </a:r>
-          </a:p>
-        </p:txBody>
-      </p:sp>
-      <p:sp>
-        <p:nvSpPr>
-          <p:cNvPr id="7" name="Rounded Rectangle 6"/>
+              <a:t>attacks detected</a:t>
+            </a:r>
+          </a:p>
+        </p:txBody>
+      </p:sp>
+      <p:sp>
+        <p:nvSpPr>
+          <p:cNvPr id="8" name="Rounded Rectangle 7"/>
           <p:cNvSpPr/>
           <p:nvPr/>
         </p:nvSpPr>
         <p:spPr>
           <a:xfrm>
-            <a:off x="6126480" y="1508760"/>
-            <a:ext cx="5394960" cy="1828800"/>
+            <a:off x="8229600" y="2697480"/>
+            <a:ext cx="3291840" cy="960120"/>
           </a:xfrm>
           <a:prstGeom prst="roundRect">
             <a:avLst>
@@ -11287,14 +11201,14 @@
       </p:sp>
       <p:sp>
         <p:nvSpPr>
-          <p:cNvPr id="8" name="TextBox 7"/>
-          <p:cNvSpPr txBox="1"/>
-          <p:nvPr/>
-        </p:nvSpPr>
-        <p:spPr>
-          <a:xfrm>
-            <a:off x="6400800" y="1737360"/>
-            <a:ext cx="4846320" cy="365760"/>
+          <p:cNvPr id="9" name="TextBox 8"/>
+          <p:cNvSpPr txBox="1"/>
+          <p:nvPr/>
+        </p:nvSpPr>
+        <p:spPr>
+          <a:xfrm>
+            <a:off x="8458200" y="2807208"/>
+            <a:ext cx="1371600" cy="640080"/>
           </a:xfrm>
           <a:prstGeom prst="rect">
             <a:avLst/>
@@ -11313,27 +11227,27 @@
               </a:spcAft>
             </a:pPr>
             <a:r>
-              <a:rPr sz="1300" b="1" i="0">
-                <a:solidFill>
-                  <a:srgbClr val="5B6472"/>
-                </a:solidFill>
-                <a:latin typeface="Calibri"/>
-              </a:rPr>
-              <a:t>INTEGRATION TESTS</a:t>
-            </a:r>
-          </a:p>
-        </p:txBody>
-      </p:sp>
-      <p:sp>
-        <p:nvSpPr>
-          <p:cNvPr id="9" name="TextBox 8"/>
-          <p:cNvSpPr txBox="1"/>
-          <p:nvPr/>
-        </p:nvSpPr>
-        <p:spPr>
-          <a:xfrm>
-            <a:off x="6400800" y="2148840"/>
-            <a:ext cx="4846320" cy="1097280"/>
+              <a:rPr sz="3000" b="1" i="0">
+                <a:solidFill>
+                  <a:srgbClr val="14213D"/>
+                </a:solidFill>
+                <a:latin typeface="Calibri"/>
+              </a:rPr>
+              <a:t>~2 ms</a:t>
+            </a:r>
+          </a:p>
+        </p:txBody>
+      </p:sp>
+      <p:sp>
+        <p:nvSpPr>
+          <p:cNvPr id="10" name="TextBox 9"/>
+          <p:cNvSpPr txBox="1"/>
+          <p:nvPr/>
+        </p:nvSpPr>
+        <p:spPr>
+          <a:xfrm>
+            <a:off x="9692640" y="2971800"/>
+            <a:ext cx="1737360" cy="457200"/>
           </a:xfrm>
           <a:prstGeom prst="rect">
             <a:avLst/>
@@ -11348,7 +11262,7 @@
           <a:p>
             <a:pPr algn="l">
               <a:spcAft>
-                <a:spcPts val="400"/>
+                <a:spcPts val="0"/>
               </a:spcAft>
             </a:pPr>
             <a:r>
@@ -11358,98 +11272,29 @@
                 </a:solidFill>
                 <a:latin typeface="Calibri"/>
               </a:rPr>
-              <a:t>Real port scan and SYN flood against the host</a:t>
-            </a:r>
-          </a:p>
-          <a:p>
-            <a:pPr algn="l">
-              <a:spcAft>
-                <a:spcPts val="400"/>
-              </a:spcAft>
-            </a:pPr>
-            <a:r>
-              <a:rPr sz="1400" b="0" i="0">
-                <a:solidFill>
-                  <a:srgbClr val="1F2937"/>
-                </a:solidFill>
-                <a:latin typeface="Calibri"/>
-              </a:rPr>
-              <a:t>Alert reached the dashboard and log in a few ms</a:t>
-            </a:r>
-          </a:p>
-          <a:p>
-            <a:pPr algn="l">
-              <a:spcAft>
-                <a:spcPts val="400"/>
-              </a:spcAft>
-            </a:pPr>
-            <a:r>
-              <a:rPr sz="1400" b="0" i="0">
-                <a:solidFill>
-                  <a:srgbClr val="1F2937"/>
-                </a:solidFill>
-                <a:latin typeface="Calibri"/>
-              </a:rPr>
-              <a:t>No false alarm during normal browsing</a:t>
-            </a:r>
-          </a:p>
-        </p:txBody>
-      </p:sp>
-      <p:sp>
-        <p:nvSpPr>
-          <p:cNvPr id="10" name="TextBox 9"/>
-          <p:cNvSpPr txBox="1"/>
-          <p:nvPr/>
-        </p:nvSpPr>
-        <p:spPr>
-          <a:xfrm>
-            <a:off x="548640" y="3657600"/>
-            <a:ext cx="10972800" cy="365760"/>
-          </a:xfrm>
-          <a:prstGeom prst="rect">
-            <a:avLst/>
-          </a:prstGeom>
-          <a:noFill/>
-        </p:spPr>
-        <p:txBody>
-          <a:bodyPr wrap="square" lIns="0" rIns="0" tIns="0" bIns="0" anchor="t">
-            <a:spAutoFit/>
-          </a:bodyPr>
-          <a:lstStyle/>
-          <a:p>
-            <a:pPr algn="l">
-              <a:spcAft>
-                <a:spcPts val="0"/>
-              </a:spcAft>
-            </a:pPr>
-            <a:r>
-              <a:rPr sz="1600" b="1" i="0">
-                <a:solidFill>
-                  <a:srgbClr val="14213D"/>
-                </a:solidFill>
-                <a:latin typeface="Calibri"/>
-              </a:rPr>
-              <a:t>What the negative tests confirm</a:t>
-            </a:r>
-          </a:p>
-        </p:txBody>
-      </p:sp>
-      <p:sp>
-        <p:nvSpPr>
-          <p:cNvPr id="11" name="Oval 10"/>
+              <a:t>detection latency</a:t>
+            </a:r>
+          </a:p>
+        </p:txBody>
+      </p:sp>
+      <p:sp>
+        <p:nvSpPr>
+          <p:cNvPr id="11" name="Rounded Rectangle 10"/>
           <p:cNvSpPr/>
           <p:nvPr/>
         </p:nvSpPr>
         <p:spPr>
           <a:xfrm>
-            <a:off x="640080" y="4142232"/>
-            <a:ext cx="237744" cy="237744"/>
-          </a:xfrm>
-          <a:prstGeom prst="ellipse">
-            <a:avLst/>
+            <a:off x="8229600" y="3840480"/>
+            <a:ext cx="3291840" cy="960120"/>
+          </a:xfrm>
+          <a:prstGeom prst="roundRect">
+            <a:avLst>
+              <a:gd name="adj" fmla="val 8000"/>
+            </a:avLst>
           </a:prstGeom>
           <a:solidFill>
-            <a:srgbClr val="1B7F73"/>
+            <a:srgbClr val="EEF2F7"/>
           </a:solidFill>
           <a:ln>
             <a:noFill/>
@@ -11486,33 +11331,33 @@
         </p:nvSpPr>
         <p:spPr>
           <a:xfrm>
-            <a:off x="640080" y="4123944"/>
-            <a:ext cx="237744" cy="274320"/>
-          </a:xfrm>
-          <a:prstGeom prst="rect">
-            <a:avLst/>
-          </a:prstGeom>
-          <a:noFill/>
-        </p:spPr>
-        <p:txBody>
-          <a:bodyPr wrap="square" lIns="0" rIns="0" tIns="0" bIns="0" anchor="t">
-            <a:spAutoFit/>
-          </a:bodyPr>
-          <a:lstStyle/>
-          <a:p>
-            <a:pPr algn="ctr">
+            <a:off x="8458200" y="3950208"/>
+            <a:ext cx="1371600" cy="640080"/>
+          </a:xfrm>
+          <a:prstGeom prst="rect">
+            <a:avLst/>
+          </a:prstGeom>
+          <a:noFill/>
+        </p:spPr>
+        <p:txBody>
+          <a:bodyPr wrap="square" lIns="0" rIns="0" tIns="0" bIns="0" anchor="t">
+            <a:spAutoFit/>
+          </a:bodyPr>
+          <a:lstStyle/>
+          <a:p>
+            <a:pPr algn="l">
               <a:spcAft>
                 <a:spcPts val="0"/>
               </a:spcAft>
             </a:pPr>
             <a:r>
-              <a:rPr sz="1300" b="1" i="0">
-                <a:solidFill>
-                  <a:srgbClr val="FFFFFF"/>
-                </a:solidFill>
-                <a:latin typeface="Calibri"/>
-              </a:rPr>
-              <a:t>✓</a:t>
+              <a:rPr sz="3000" b="1" i="0">
+                <a:solidFill>
+                  <a:srgbClr val="14213D"/>
+                </a:solidFill>
+                <a:latin typeface="Calibri"/>
+              </a:rPr>
+              <a:t>10/10</a:t>
             </a:r>
           </a:p>
         </p:txBody>
@@ -11525,8 +11370,8 @@
         </p:nvSpPr>
         <p:spPr>
           <a:xfrm>
-            <a:off x="1005840" y="4114800"/>
-            <a:ext cx="5120640" cy="365760"/>
+            <a:off x="9692640" y="4114800"/>
+            <a:ext cx="1737360" cy="457200"/>
           </a:xfrm>
           <a:prstGeom prst="rect">
             <a:avLst/>
@@ -11545,33 +11390,35 @@
               </a:spcAft>
             </a:pPr>
             <a:r>
-              <a:rPr sz="1500" b="0" i="0">
+              <a:rPr sz="1400" b="0" i="0">
                 <a:solidFill>
                   <a:srgbClr val="1F2937"/>
                 </a:solidFill>
                 <a:latin typeface="Calibri"/>
               </a:rPr>
-              <a:t>Reply (SYN-ACK) packets are not a scan</a:t>
-            </a:r>
-          </a:p>
-        </p:txBody>
-      </p:sp>
-      <p:sp>
-        <p:nvSpPr>
-          <p:cNvPr id="14" name="Oval 13"/>
+              <a:t>unit tests pass</a:t>
+            </a:r>
+          </a:p>
+        </p:txBody>
+      </p:sp>
+      <p:sp>
+        <p:nvSpPr>
+          <p:cNvPr id="14" name="Rounded Rectangle 13"/>
           <p:cNvSpPr/>
           <p:nvPr/>
         </p:nvSpPr>
         <p:spPr>
           <a:xfrm>
-            <a:off x="6309360" y="4142232"/>
-            <a:ext cx="237744" cy="237744"/>
-          </a:xfrm>
-          <a:prstGeom prst="ellipse">
-            <a:avLst/>
+            <a:off x="8229600" y="4983480"/>
+            <a:ext cx="3291840" cy="960120"/>
+          </a:xfrm>
+          <a:prstGeom prst="roundRect">
+            <a:avLst>
+              <a:gd name="adj" fmla="val 8000"/>
+            </a:avLst>
           </a:prstGeom>
           <a:solidFill>
-            <a:srgbClr val="1B7F73"/>
+            <a:srgbClr val="EEF2F7"/>
           </a:solidFill>
           <a:ln>
             <a:noFill/>
@@ -11608,33 +11455,33 @@
         </p:nvSpPr>
         <p:spPr>
           <a:xfrm>
-            <a:off x="6309360" y="4123944"/>
-            <a:ext cx="237744" cy="274320"/>
-          </a:xfrm>
-          <a:prstGeom prst="rect">
-            <a:avLst/>
-          </a:prstGeom>
-          <a:noFill/>
-        </p:spPr>
-        <p:txBody>
-          <a:bodyPr wrap="square" lIns="0" rIns="0" tIns="0" bIns="0" anchor="t">
-            <a:spAutoFit/>
-          </a:bodyPr>
-          <a:lstStyle/>
-          <a:p>
-            <a:pPr algn="ctr">
+            <a:off x="8458200" y="5093208"/>
+            <a:ext cx="1371600" cy="640080"/>
+          </a:xfrm>
+          <a:prstGeom prst="rect">
+            <a:avLst/>
+          </a:prstGeom>
+          <a:noFill/>
+        </p:spPr>
+        <p:txBody>
+          <a:bodyPr wrap="square" lIns="0" rIns="0" tIns="0" bIns="0" anchor="t">
+            <a:spAutoFit/>
+          </a:bodyPr>
+          <a:lstStyle/>
+          <a:p>
+            <a:pPr algn="l">
               <a:spcAft>
                 <a:spcPts val="0"/>
               </a:spcAft>
             </a:pPr>
             <a:r>
-              <a:rPr sz="1300" b="1" i="0">
-                <a:solidFill>
-                  <a:srgbClr val="FFFFFF"/>
-                </a:solidFill>
-                <a:latin typeface="Calibri"/>
-              </a:rPr>
-              <a:t>✓</a:t>
+              <a:rPr sz="3000" b="1" i="0">
+                <a:solidFill>
+                  <a:srgbClr val="14213D"/>
+                </a:solidFill>
+                <a:latin typeface="Calibri"/>
+              </a:rPr>
+              <a:t>~200</a:t>
             </a:r>
           </a:p>
         </p:txBody>
@@ -11647,8 +11494,8 @@
         </p:nvSpPr>
         <p:spPr>
           <a:xfrm>
-            <a:off x="6675120" y="4114800"/>
-            <a:ext cx="5120640" cy="365760"/>
+            <a:off x="9692640" y="5257800"/>
+            <a:ext cx="1737360" cy="457200"/>
           </a:xfrm>
           <a:prstGeom prst="rect">
             <a:avLst/>
@@ -11667,508 +11514,20 @@
               </a:spcAft>
             </a:pPr>
             <a:r>
-              <a:rPr sz="1500" b="0" i="0">
+              <a:rPr sz="1400" b="0" i="0">
                 <a:solidFill>
                   <a:srgbClr val="1F2937"/>
                 </a:solidFill>
                 <a:latin typeface="Calibri"/>
               </a:rPr>
-              <a:t>Slow activity below the threshold stays silent</a:t>
-            </a:r>
-          </a:p>
-        </p:txBody>
-      </p:sp>
-      <p:sp>
-        <p:nvSpPr>
-          <p:cNvPr id="17" name="Oval 16"/>
-          <p:cNvSpPr/>
-          <p:nvPr/>
-        </p:nvSpPr>
-        <p:spPr>
-          <a:xfrm>
-            <a:off x="640080" y="4709160"/>
-            <a:ext cx="237744" cy="237744"/>
-          </a:xfrm>
-          <a:prstGeom prst="ellipse">
-            <a:avLst/>
-          </a:prstGeom>
-          <a:solidFill>
-            <a:srgbClr val="1B7F73"/>
-          </a:solidFill>
-          <a:ln>
-            <a:noFill/>
-          </a:ln>
-          <a:effectLst/>
-        </p:spPr>
-        <p:style>
-          <a:lnRef idx="1">
-            <a:schemeClr val="accent1"/>
-          </a:lnRef>
-          <a:fillRef idx="3">
-            <a:schemeClr val="accent1"/>
-          </a:fillRef>
-          <a:effectRef idx="2">
-            <a:schemeClr val="accent1"/>
-          </a:effectRef>
-          <a:fontRef idx="minor">
-            <a:schemeClr val="lt1"/>
-          </a:fontRef>
-        </p:style>
-        <p:txBody>
-          <a:bodyPr rtlCol="0" anchor="ctr"/>
-          <a:lstStyle/>
-          <a:p>
-            <a:pPr algn="ctr"/>
-          </a:p>
-        </p:txBody>
-      </p:sp>
-      <p:sp>
-        <p:nvSpPr>
-          <p:cNvPr id="18" name="TextBox 17"/>
-          <p:cNvSpPr txBox="1"/>
-          <p:nvPr/>
-        </p:nvSpPr>
-        <p:spPr>
-          <a:xfrm>
-            <a:off x="640080" y="4690872"/>
-            <a:ext cx="237744" cy="274320"/>
-          </a:xfrm>
-          <a:prstGeom prst="rect">
-            <a:avLst/>
-          </a:prstGeom>
-          <a:noFill/>
-        </p:spPr>
-        <p:txBody>
-          <a:bodyPr wrap="square" lIns="0" rIns="0" tIns="0" bIns="0" anchor="t">
-            <a:spAutoFit/>
-          </a:bodyPr>
-          <a:lstStyle/>
-          <a:p>
-            <a:pPr algn="ctr">
-              <a:spcAft>
-                <a:spcPts val="0"/>
-              </a:spcAft>
-            </a:pPr>
-            <a:r>
-              <a:rPr sz="1300" b="1" i="0">
-                <a:solidFill>
-                  <a:srgbClr val="FFFFFF"/>
-                </a:solidFill>
-                <a:latin typeface="Calibri"/>
-              </a:rPr>
-              <a:t>✓</a:t>
-            </a:r>
-          </a:p>
-        </p:txBody>
-      </p:sp>
-      <p:sp>
-        <p:nvSpPr>
-          <p:cNvPr id="19" name="TextBox 18"/>
-          <p:cNvSpPr txBox="1"/>
-          <p:nvPr/>
-        </p:nvSpPr>
-        <p:spPr>
-          <a:xfrm>
-            <a:off x="1005840" y="4681728"/>
-            <a:ext cx="5120640" cy="365760"/>
-          </a:xfrm>
-          <a:prstGeom prst="rect">
-            <a:avLst/>
-          </a:prstGeom>
-          <a:noFill/>
-        </p:spPr>
-        <p:txBody>
-          <a:bodyPr wrap="square" lIns="0" rIns="0" tIns="0" bIns="0" anchor="t">
-            <a:spAutoFit/>
-          </a:bodyPr>
-          <a:lstStyle/>
-          <a:p>
-            <a:pPr algn="l">
-              <a:spcAft>
-                <a:spcPts val="0"/>
-              </a:spcAft>
-            </a:pPr>
-            <a:r>
-              <a:rPr sz="1500" b="0" i="0">
-                <a:solidFill>
-                  <a:srgbClr val="1F2937"/>
-                </a:solidFill>
-                <a:latin typeface="Calibri"/>
-              </a:rPr>
-              <a:t>Completed handshakes are not a flood</a:t>
-            </a:r>
-          </a:p>
-        </p:txBody>
-      </p:sp>
-      <p:sp>
-        <p:nvSpPr>
-          <p:cNvPr id="20" name="Oval 19"/>
-          <p:cNvSpPr/>
-          <p:nvPr/>
-        </p:nvSpPr>
-        <p:spPr>
-          <a:xfrm>
-            <a:off x="6309360" y="4709160"/>
-            <a:ext cx="237744" cy="237744"/>
-          </a:xfrm>
-          <a:prstGeom prst="ellipse">
-            <a:avLst/>
-          </a:prstGeom>
-          <a:solidFill>
-            <a:srgbClr val="1B7F73"/>
-          </a:solidFill>
-          <a:ln>
-            <a:noFill/>
-          </a:ln>
-          <a:effectLst/>
-        </p:spPr>
-        <p:style>
-          <a:lnRef idx="1">
-            <a:schemeClr val="accent1"/>
-          </a:lnRef>
-          <a:fillRef idx="3">
-            <a:schemeClr val="accent1"/>
-          </a:fillRef>
-          <a:effectRef idx="2">
-            <a:schemeClr val="accent1"/>
-          </a:effectRef>
-          <a:fontRef idx="minor">
-            <a:schemeClr val="lt1"/>
-          </a:fontRef>
-        </p:style>
-        <p:txBody>
-          <a:bodyPr rtlCol="0" anchor="ctr"/>
-          <a:lstStyle/>
-          <a:p>
-            <a:pPr algn="ctr"/>
-          </a:p>
-        </p:txBody>
-      </p:sp>
-      <p:sp>
-        <p:nvSpPr>
-          <p:cNvPr id="21" name="TextBox 20"/>
-          <p:cNvSpPr txBox="1"/>
-          <p:nvPr/>
-        </p:nvSpPr>
-        <p:spPr>
-          <a:xfrm>
-            <a:off x="6309360" y="4690872"/>
-            <a:ext cx="237744" cy="274320"/>
-          </a:xfrm>
-          <a:prstGeom prst="rect">
-            <a:avLst/>
-          </a:prstGeom>
-          <a:noFill/>
-        </p:spPr>
-        <p:txBody>
-          <a:bodyPr wrap="square" lIns="0" rIns="0" tIns="0" bIns="0" anchor="t">
-            <a:spAutoFit/>
-          </a:bodyPr>
-          <a:lstStyle/>
-          <a:p>
-            <a:pPr algn="ctr">
-              <a:spcAft>
-                <a:spcPts val="0"/>
-              </a:spcAft>
-            </a:pPr>
-            <a:r>
-              <a:rPr sz="1300" b="1" i="0">
-                <a:solidFill>
-                  <a:srgbClr val="FFFFFF"/>
-                </a:solidFill>
-                <a:latin typeface="Calibri"/>
-              </a:rPr>
-              <a:t>✓</a:t>
-            </a:r>
-          </a:p>
-        </p:txBody>
-      </p:sp>
-      <p:sp>
-        <p:nvSpPr>
-          <p:cNvPr id="22" name="TextBox 21"/>
-          <p:cNvSpPr txBox="1"/>
-          <p:nvPr/>
-        </p:nvSpPr>
-        <p:spPr>
-          <a:xfrm>
-            <a:off x="6675120" y="4681728"/>
-            <a:ext cx="5120640" cy="365760"/>
-          </a:xfrm>
-          <a:prstGeom prst="rect">
-            <a:avLst/>
-          </a:prstGeom>
-          <a:noFill/>
-        </p:spPr>
-        <p:txBody>
-          <a:bodyPr wrap="square" lIns="0" rIns="0" tIns="0" bIns="0" anchor="t">
-            <a:spAutoFit/>
-          </a:bodyPr>
-          <a:lstStyle/>
-          <a:p>
-            <a:pPr algn="l">
-              <a:spcAft>
-                <a:spcPts val="0"/>
-              </a:spcAft>
-            </a:pPr>
-            <a:r>
-              <a:rPr sz="1500" b="0" i="0">
-                <a:solidFill>
-                  <a:srgbClr val="1F2937"/>
-                </a:solidFill>
-                <a:latin typeface="Calibri"/>
-              </a:rPr>
-              <a:t>A port scan is not mistaken for a flood</a:t>
-            </a:r>
-          </a:p>
-        </p:txBody>
-      </p:sp>
-      <p:sp>
-        <p:nvSpPr>
-          <p:cNvPr id="23" name="Oval 22"/>
-          <p:cNvSpPr/>
-          <p:nvPr/>
-        </p:nvSpPr>
-        <p:spPr>
-          <a:xfrm>
-            <a:off x="640080" y="5276088"/>
-            <a:ext cx="237744" cy="237744"/>
-          </a:xfrm>
-          <a:prstGeom prst="ellipse">
-            <a:avLst/>
-          </a:prstGeom>
-          <a:solidFill>
-            <a:srgbClr val="1B7F73"/>
-          </a:solidFill>
-          <a:ln>
-            <a:noFill/>
-          </a:ln>
-          <a:effectLst/>
-        </p:spPr>
-        <p:style>
-          <a:lnRef idx="1">
-            <a:schemeClr val="accent1"/>
-          </a:lnRef>
-          <a:fillRef idx="3">
-            <a:schemeClr val="accent1"/>
-          </a:fillRef>
-          <a:effectRef idx="2">
-            <a:schemeClr val="accent1"/>
-          </a:effectRef>
-          <a:fontRef idx="minor">
-            <a:schemeClr val="lt1"/>
-          </a:fontRef>
-        </p:style>
-        <p:txBody>
-          <a:bodyPr rtlCol="0" anchor="ctr"/>
-          <a:lstStyle/>
-          <a:p>
-            <a:pPr algn="ctr"/>
-          </a:p>
-        </p:txBody>
-      </p:sp>
-      <p:sp>
-        <p:nvSpPr>
-          <p:cNvPr id="24" name="TextBox 23"/>
-          <p:cNvSpPr txBox="1"/>
-          <p:nvPr/>
-        </p:nvSpPr>
-        <p:spPr>
-          <a:xfrm>
-            <a:off x="640080" y="5257800"/>
-            <a:ext cx="237744" cy="274320"/>
-          </a:xfrm>
-          <a:prstGeom prst="rect">
-            <a:avLst/>
-          </a:prstGeom>
-          <a:noFill/>
-        </p:spPr>
-        <p:txBody>
-          <a:bodyPr wrap="square" lIns="0" rIns="0" tIns="0" bIns="0" anchor="t">
-            <a:spAutoFit/>
-          </a:bodyPr>
-          <a:lstStyle/>
-          <a:p>
-            <a:pPr algn="ctr">
-              <a:spcAft>
-                <a:spcPts val="0"/>
-              </a:spcAft>
-            </a:pPr>
-            <a:r>
-              <a:rPr sz="1300" b="1" i="0">
-                <a:solidFill>
-                  <a:srgbClr val="FFFFFF"/>
-                </a:solidFill>
-                <a:latin typeface="Calibri"/>
-              </a:rPr>
-              <a:t>✓</a:t>
-            </a:r>
-          </a:p>
-        </p:txBody>
-      </p:sp>
-      <p:sp>
-        <p:nvSpPr>
-          <p:cNvPr id="25" name="TextBox 24"/>
-          <p:cNvSpPr txBox="1"/>
-          <p:nvPr/>
-        </p:nvSpPr>
-        <p:spPr>
-          <a:xfrm>
-            <a:off x="1005840" y="5248656"/>
-            <a:ext cx="5120640" cy="365760"/>
-          </a:xfrm>
-          <a:prstGeom prst="rect">
-            <a:avLst/>
-          </a:prstGeom>
-          <a:noFill/>
-        </p:spPr>
-        <p:txBody>
-          <a:bodyPr wrap="square" lIns="0" rIns="0" tIns="0" bIns="0" anchor="t">
-            <a:spAutoFit/>
-          </a:bodyPr>
-          <a:lstStyle/>
-          <a:p>
-            <a:pPr algn="l">
-              <a:spcAft>
-                <a:spcPts val="0"/>
-              </a:spcAft>
-            </a:pPr>
-            <a:r>
-              <a:rPr sz="1500" b="0" i="0">
-                <a:solidFill>
-                  <a:srgbClr val="1F2937"/>
-                </a:solidFill>
-                <a:latin typeface="Calibri"/>
-              </a:rPr>
-              <a:t>Genuine ARP replies raise no alarm</a:t>
-            </a:r>
-          </a:p>
-        </p:txBody>
-      </p:sp>
-      <p:sp>
-        <p:nvSpPr>
-          <p:cNvPr id="26" name="Oval 25"/>
-          <p:cNvSpPr/>
-          <p:nvPr/>
-        </p:nvSpPr>
-        <p:spPr>
-          <a:xfrm>
-            <a:off x="6309360" y="5276088"/>
-            <a:ext cx="237744" cy="237744"/>
-          </a:xfrm>
-          <a:prstGeom prst="ellipse">
-            <a:avLst/>
-          </a:prstGeom>
-          <a:solidFill>
-            <a:srgbClr val="1B7F73"/>
-          </a:solidFill>
-          <a:ln>
-            <a:noFill/>
-          </a:ln>
-          <a:effectLst/>
-        </p:spPr>
-        <p:style>
-          <a:lnRef idx="1">
-            <a:schemeClr val="accent1"/>
-          </a:lnRef>
-          <a:fillRef idx="3">
-            <a:schemeClr val="accent1"/>
-          </a:fillRef>
-          <a:effectRef idx="2">
-            <a:schemeClr val="accent1"/>
-          </a:effectRef>
-          <a:fontRef idx="minor">
-            <a:schemeClr val="lt1"/>
-          </a:fontRef>
-        </p:style>
-        <p:txBody>
-          <a:bodyPr rtlCol="0" anchor="ctr"/>
-          <a:lstStyle/>
-          <a:p>
-            <a:pPr algn="ctr"/>
-          </a:p>
-        </p:txBody>
-      </p:sp>
-      <p:sp>
-        <p:nvSpPr>
-          <p:cNvPr id="27" name="TextBox 26"/>
-          <p:cNvSpPr txBox="1"/>
-          <p:nvPr/>
-        </p:nvSpPr>
-        <p:spPr>
-          <a:xfrm>
-            <a:off x="6309360" y="5257800"/>
-            <a:ext cx="237744" cy="274320"/>
-          </a:xfrm>
-          <a:prstGeom prst="rect">
-            <a:avLst/>
-          </a:prstGeom>
-          <a:noFill/>
-        </p:spPr>
-        <p:txBody>
-          <a:bodyPr wrap="square" lIns="0" rIns="0" tIns="0" bIns="0" anchor="t">
-            <a:spAutoFit/>
-          </a:bodyPr>
-          <a:lstStyle/>
-          <a:p>
-            <a:pPr algn="ctr">
-              <a:spcAft>
-                <a:spcPts val="0"/>
-              </a:spcAft>
-            </a:pPr>
-            <a:r>
-              <a:rPr sz="1300" b="1" i="0">
-                <a:solidFill>
-                  <a:srgbClr val="FFFFFF"/>
-                </a:solidFill>
-                <a:latin typeface="Calibri"/>
-              </a:rPr>
-              <a:t>✓</a:t>
-            </a:r>
-          </a:p>
-        </p:txBody>
-      </p:sp>
-      <p:sp>
-        <p:nvSpPr>
-          <p:cNvPr id="28" name="TextBox 27"/>
-          <p:cNvSpPr txBox="1"/>
-          <p:nvPr/>
-        </p:nvSpPr>
-        <p:spPr>
-          <a:xfrm>
-            <a:off x="6675120" y="5248656"/>
-            <a:ext cx="5120640" cy="365760"/>
-          </a:xfrm>
-          <a:prstGeom prst="rect">
-            <a:avLst/>
-          </a:prstGeom>
-          <a:noFill/>
-        </p:spPr>
-        <p:txBody>
-          <a:bodyPr wrap="square" lIns="0" rIns="0" tIns="0" bIns="0" anchor="t">
-            <a:spAutoFit/>
-          </a:bodyPr>
-          <a:lstStyle/>
-          <a:p>
-            <a:pPr algn="l">
-              <a:spcAft>
-                <a:spcPts val="0"/>
-              </a:spcAft>
-            </a:pPr>
-            <a:r>
-              <a:rPr sz="1500" b="0" i="0">
-                <a:solidFill>
-                  <a:srgbClr val="1F2937"/>
-                </a:solidFill>
-                <a:latin typeface="Calibri"/>
-              </a:rPr>
-              <a:t>A cool-down stops duplicate alerts</a:t>
-            </a:r>
-          </a:p>
-        </p:txBody>
-      </p:sp>
-      <p:sp>
-        <p:nvSpPr>
-          <p:cNvPr id="29" name="TextBox 28"/>
+              <a:t>lines of code</a:t>
+            </a:r>
+          </a:p>
+        </p:txBody>
+      </p:sp>
+      <p:sp>
+        <p:nvSpPr>
+          <p:cNvPr id="17" name="TextBox 16"/>
           <p:cNvSpPr txBox="1"/>
           <p:nvPr/>
         </p:nvSpPr>
@@ -12207,7 +11566,7 @@
       </p:sp>
       <p:sp>
         <p:nvSpPr>
-          <p:cNvPr id="30" name="TextBox 29"/>
+          <p:cNvPr id="18" name="TextBox 17"/>
           <p:cNvSpPr txBox="1"/>
           <p:nvPr/>
         </p:nvSpPr>
@@ -12304,40 +11663,62 @@
                 </a:solidFill>
                 <a:latin typeface="Calibri"/>
               </a:rPr>
-              <a:t>Results: Live Dashboard</a:t>
-            </a:r>
-          </a:p>
-        </p:txBody>
-      </p:sp>
-      <p:pic>
-        <p:nvPicPr>
-          <p:cNvPr id="3" name="Picture 2" descr="dash_final.png"/>
-          <p:cNvPicPr>
-            <a:picLocks noChangeAspect="1"/>
-          </p:cNvPicPr>
-          <p:nvPr/>
-        </p:nvPicPr>
-        <p:blipFill>
-          <a:blip r:embed="rId2"/>
-          <a:stretch>
-            <a:fillRect/>
-          </a:stretch>
-        </p:blipFill>
-        <p:spPr>
-          <a:xfrm>
-            <a:off x="548640" y="1463040"/>
-            <a:ext cx="7406640" cy="3977411"/>
-          </a:xfrm>
-          <a:prstGeom prst="rect">
-            <a:avLst/>
-          </a:prstGeom>
-          <a:ln w="9525">
-            <a:solidFill>
-              <a:srgbClr val="D5DCE6"/>
-            </a:solidFill>
-          </a:ln>
-        </p:spPr>
-      </p:pic>
+              <a:t>Conclusion and Future Scope</a:t>
+            </a:r>
+          </a:p>
+        </p:txBody>
+      </p:sp>
+      <p:sp>
+        <p:nvSpPr>
+          <p:cNvPr id="3" name="TextBox 2"/>
+          <p:cNvSpPr txBox="1"/>
+          <p:nvPr/>
+        </p:nvSpPr>
+        <p:spPr>
+          <a:xfrm>
+            <a:off x="548640" y="1417320"/>
+            <a:ext cx="11064240" cy="1371600"/>
+          </a:xfrm>
+          <a:prstGeom prst="rect">
+            <a:avLst/>
+          </a:prstGeom>
+          <a:noFill/>
+        </p:spPr>
+        <p:txBody>
+          <a:bodyPr wrap="square" lIns="0" rIns="0" tIns="0" bIns="0" anchor="t">
+            <a:spAutoFit/>
+          </a:bodyPr>
+          <a:lstStyle/>
+          <a:p>
+            <a:pPr algn="l">
+              <a:lnSpc>
+                <a:spcPct val="115000"/>
+              </a:lnSpc>
+              <a:spcAft>
+                <a:spcPts val="0"/>
+              </a:spcAft>
+            </a:pPr>
+            <a:r>
+              <a:rPr sz="1800" b="1" i="0">
+                <a:solidFill>
+                  <a:srgbClr val="14213D"/>
+                </a:solidFill>
+                <a:latin typeface="Calibri"/>
+              </a:rPr>
+              <a:t>A complete, working NIDS. </a:t>
+            </a:r>
+            <a:r>
+              <a:rPr sz="1800" b="0" i="0">
+                <a:solidFill>
+                  <a:srgbClr val="1F2937"/>
+                </a:solidFill>
+                <a:latin typeface="Calibri"/>
+              </a:rPr>
+              <a:t>All objectives met: live capture, three transparent detection rules, an alert pipeline, and a real-time dashboard, verified by ten unit tests and live attacks, in about 200 lines of code.</a:t>
+            </a:r>
+          </a:p>
+        </p:txBody>
+      </p:sp>
       <p:sp>
         <p:nvSpPr>
           <p:cNvPr id="4" name="TextBox 3"/>
@@ -12346,55 +11727,53 @@
         </p:nvSpPr>
         <p:spPr>
           <a:xfrm>
-            <a:off x="548640" y="5513603"/>
-            <a:ext cx="7406640" cy="274320"/>
-          </a:xfrm>
-          <a:prstGeom prst="rect">
-            <a:avLst/>
-          </a:prstGeom>
-          <a:noFill/>
-        </p:spPr>
-        <p:txBody>
-          <a:bodyPr wrap="square" lIns="0" rIns="0" tIns="0" bIns="0" anchor="t">
-            <a:spAutoFit/>
-          </a:bodyPr>
-          <a:lstStyle/>
-          <a:p>
-            <a:pPr algn="ctr">
+            <a:off x="548640" y="3200400"/>
+            <a:ext cx="5394960" cy="365760"/>
+          </a:xfrm>
+          <a:prstGeom prst="rect">
+            <a:avLst/>
+          </a:prstGeom>
+          <a:noFill/>
+        </p:spPr>
+        <p:txBody>
+          <a:bodyPr wrap="square" lIns="0" rIns="0" tIns="0" bIns="0" anchor="t">
+            <a:spAutoFit/>
+          </a:bodyPr>
+          <a:lstStyle/>
+          <a:p>
+            <a:pPr algn="l">
               <a:spcAft>
                 <a:spcPts val="0"/>
               </a:spcAft>
             </a:pPr>
             <a:r>
-              <a:rPr sz="1200" b="0" i="0">
-                <a:solidFill>
-                  <a:srgbClr val="5B6472"/>
-                </a:solidFill>
-                <a:latin typeface="Calibri"/>
-              </a:rPr>
-              <a:t>Dashboard after detecting a port scan and a SYN flood</a:t>
-            </a:r>
-          </a:p>
-        </p:txBody>
-      </p:sp>
-      <p:sp>
-        <p:nvSpPr>
-          <p:cNvPr id="5" name="Rounded Rectangle 4"/>
+              <a:rPr sz="1300" b="1" i="0">
+                <a:solidFill>
+                  <a:srgbClr val="1B7F73"/>
+                </a:solidFill>
+                <a:latin typeface="Calibri"/>
+              </a:rPr>
+              <a:t>KEY STRENGTHS</a:t>
+            </a:r>
+          </a:p>
+        </p:txBody>
+      </p:sp>
+      <p:sp>
+        <p:nvSpPr>
+          <p:cNvPr id="5" name="Oval 4"/>
           <p:cNvSpPr/>
           <p:nvPr/>
         </p:nvSpPr>
         <p:spPr>
           <a:xfrm>
-            <a:off x="8229600" y="1554480"/>
-            <a:ext cx="3291840" cy="960120"/>
-          </a:xfrm>
-          <a:prstGeom prst="roundRect">
-            <a:avLst>
-              <a:gd name="adj" fmla="val 8000"/>
-            </a:avLst>
+            <a:off x="640080" y="3639312"/>
+            <a:ext cx="237744" cy="237744"/>
+          </a:xfrm>
+          <a:prstGeom prst="ellipse">
+            <a:avLst/>
           </a:prstGeom>
           <a:solidFill>
-            <a:srgbClr val="EEF2F7"/>
+            <a:srgbClr val="1B7F73"/>
           </a:solidFill>
           <a:ln>
             <a:noFill/>
@@ -12431,8 +11810,47 @@
         </p:nvSpPr>
         <p:spPr>
           <a:xfrm>
-            <a:off x="8458200" y="1664207"/>
-            <a:ext cx="1371600" cy="640080"/>
+            <a:off x="640080" y="3621024"/>
+            <a:ext cx="237744" cy="274320"/>
+          </a:xfrm>
+          <a:prstGeom prst="rect">
+            <a:avLst/>
+          </a:prstGeom>
+          <a:noFill/>
+        </p:spPr>
+        <p:txBody>
+          <a:bodyPr wrap="square" lIns="0" rIns="0" tIns="0" bIns="0" anchor="t">
+            <a:spAutoFit/>
+          </a:bodyPr>
+          <a:lstStyle/>
+          <a:p>
+            <a:pPr algn="ctr">
+              <a:spcAft>
+                <a:spcPts val="0"/>
+              </a:spcAft>
+            </a:pPr>
+            <a:r>
+              <a:rPr sz="1300" b="1" i="0">
+                <a:solidFill>
+                  <a:srgbClr val="FFFFFF"/>
+                </a:solidFill>
+                <a:latin typeface="Calibri"/>
+              </a:rPr>
+              <a:t>✓</a:t>
+            </a:r>
+          </a:p>
+        </p:txBody>
+      </p:sp>
+      <p:sp>
+        <p:nvSpPr>
+          <p:cNvPr id="7" name="TextBox 6"/>
+          <p:cNvSpPr txBox="1"/>
+          <p:nvPr/>
+        </p:nvSpPr>
+        <p:spPr>
+          <a:xfrm>
+            <a:off x="1005840" y="3611880"/>
+            <a:ext cx="4754880" cy="365760"/>
           </a:xfrm>
           <a:prstGeom prst="rect">
             <a:avLst/>
@@ -12451,74 +11869,33 @@
               </a:spcAft>
             </a:pPr>
             <a:r>
-              <a:rPr sz="3000" b="1" i="0">
-                <a:solidFill>
-                  <a:srgbClr val="14213D"/>
-                </a:solidFill>
-                <a:latin typeface="Calibri"/>
-              </a:rPr>
-              <a:t>3</a:t>
-            </a:r>
-          </a:p>
-        </p:txBody>
-      </p:sp>
-      <p:sp>
-        <p:nvSpPr>
-          <p:cNvPr id="7" name="TextBox 6"/>
-          <p:cNvSpPr txBox="1"/>
-          <p:nvPr/>
-        </p:nvSpPr>
-        <p:spPr>
-          <a:xfrm>
-            <a:off x="9692640" y="1828800"/>
-            <a:ext cx="1737360" cy="457200"/>
-          </a:xfrm>
-          <a:prstGeom prst="rect">
-            <a:avLst/>
-          </a:prstGeom>
-          <a:noFill/>
-        </p:spPr>
-        <p:txBody>
-          <a:bodyPr wrap="square" lIns="0" rIns="0" tIns="0" bIns="0" anchor="t">
-            <a:spAutoFit/>
-          </a:bodyPr>
-          <a:lstStyle/>
-          <a:p>
-            <a:pPr algn="l">
-              <a:spcAft>
-                <a:spcPts val="0"/>
-              </a:spcAft>
-            </a:pPr>
-            <a:r>
-              <a:rPr sz="1400" b="0" i="0">
+              <a:rPr sz="1500" b="0" i="0">
                 <a:solidFill>
                   <a:srgbClr val="1F2937"/>
                 </a:solidFill>
                 <a:latin typeface="Calibri"/>
               </a:rPr>
-              <a:t>attacks detected</a:t>
-            </a:r>
-          </a:p>
-        </p:txBody>
-      </p:sp>
-      <p:sp>
-        <p:nvSpPr>
-          <p:cNvPr id="8" name="Rounded Rectangle 7"/>
+              <a:t>Every alert traceable to a threshold</a:t>
+            </a:r>
+          </a:p>
+        </p:txBody>
+      </p:sp>
+      <p:sp>
+        <p:nvSpPr>
+          <p:cNvPr id="8" name="Oval 7"/>
           <p:cNvSpPr/>
           <p:nvPr/>
         </p:nvSpPr>
         <p:spPr>
           <a:xfrm>
-            <a:off x="8229600" y="2697480"/>
-            <a:ext cx="3291840" cy="960120"/>
-          </a:xfrm>
-          <a:prstGeom prst="roundRect">
-            <a:avLst>
-              <a:gd name="adj" fmla="val 8000"/>
-            </a:avLst>
+            <a:off x="640080" y="4142232"/>
+            <a:ext cx="237744" cy="237744"/>
+          </a:xfrm>
+          <a:prstGeom prst="ellipse">
+            <a:avLst/>
           </a:prstGeom>
           <a:solidFill>
-            <a:srgbClr val="EEF2F7"/>
+            <a:srgbClr val="1B7F73"/>
           </a:solidFill>
           <a:ln>
             <a:noFill/>
@@ -12555,8 +11932,47 @@
         </p:nvSpPr>
         <p:spPr>
           <a:xfrm>
-            <a:off x="8458200" y="2807208"/>
-            <a:ext cx="1371600" cy="640080"/>
+            <a:off x="640080" y="4123944"/>
+            <a:ext cx="237744" cy="274320"/>
+          </a:xfrm>
+          <a:prstGeom prst="rect">
+            <a:avLst/>
+          </a:prstGeom>
+          <a:noFill/>
+        </p:spPr>
+        <p:txBody>
+          <a:bodyPr wrap="square" lIns="0" rIns="0" tIns="0" bIns="0" anchor="t">
+            <a:spAutoFit/>
+          </a:bodyPr>
+          <a:lstStyle/>
+          <a:p>
+            <a:pPr algn="ctr">
+              <a:spcAft>
+                <a:spcPts val="0"/>
+              </a:spcAft>
+            </a:pPr>
+            <a:r>
+              <a:rPr sz="1300" b="1" i="0">
+                <a:solidFill>
+                  <a:srgbClr val="FFFFFF"/>
+                </a:solidFill>
+                <a:latin typeface="Calibri"/>
+              </a:rPr>
+              <a:t>✓</a:t>
+            </a:r>
+          </a:p>
+        </p:txBody>
+      </p:sp>
+      <p:sp>
+        <p:nvSpPr>
+          <p:cNvPr id="10" name="TextBox 9"/>
+          <p:cNvSpPr txBox="1"/>
+          <p:nvPr/>
+        </p:nvSpPr>
+        <p:spPr>
+          <a:xfrm>
+            <a:off x="1005840" y="4114800"/>
+            <a:ext cx="4754880" cy="365760"/>
           </a:xfrm>
           <a:prstGeom prst="rect">
             <a:avLst/>
@@ -12575,74 +11991,33 @@
               </a:spcAft>
             </a:pPr>
             <a:r>
-              <a:rPr sz="3000" b="1" i="0">
-                <a:solidFill>
-                  <a:srgbClr val="14213D"/>
-                </a:solidFill>
-                <a:latin typeface="Calibri"/>
-              </a:rPr>
-              <a:t>~2 ms</a:t>
-            </a:r>
-          </a:p>
-        </p:txBody>
-      </p:sp>
-      <p:sp>
-        <p:nvSpPr>
-          <p:cNvPr id="10" name="TextBox 9"/>
-          <p:cNvSpPr txBox="1"/>
-          <p:nvPr/>
-        </p:nvSpPr>
-        <p:spPr>
-          <a:xfrm>
-            <a:off x="9692640" y="2971800"/>
-            <a:ext cx="1737360" cy="457200"/>
-          </a:xfrm>
-          <a:prstGeom prst="rect">
-            <a:avLst/>
-          </a:prstGeom>
-          <a:noFill/>
-        </p:spPr>
-        <p:txBody>
-          <a:bodyPr wrap="square" lIns="0" rIns="0" tIns="0" bIns="0" anchor="t">
-            <a:spAutoFit/>
-          </a:bodyPr>
-          <a:lstStyle/>
-          <a:p>
-            <a:pPr algn="l">
-              <a:spcAft>
-                <a:spcPts val="0"/>
-              </a:spcAft>
-            </a:pPr>
-            <a:r>
-              <a:rPr sz="1400" b="0" i="0">
+              <a:rPr sz="1500" b="0" i="0">
                 <a:solidFill>
                   <a:srgbClr val="1F2937"/>
                 </a:solidFill>
                 <a:latin typeface="Calibri"/>
               </a:rPr>
-              <a:t>detection latency</a:t>
-            </a:r>
-          </a:p>
-        </p:txBody>
-      </p:sp>
-      <p:sp>
-        <p:nvSpPr>
-          <p:cNvPr id="11" name="Rounded Rectangle 10"/>
+              <a:t>Real-time: under one second</a:t>
+            </a:r>
+          </a:p>
+        </p:txBody>
+      </p:sp>
+      <p:sp>
+        <p:nvSpPr>
+          <p:cNvPr id="11" name="Oval 10"/>
           <p:cNvSpPr/>
           <p:nvPr/>
         </p:nvSpPr>
         <p:spPr>
           <a:xfrm>
-            <a:off x="8229600" y="3840480"/>
-            <a:ext cx="3291840" cy="960120"/>
-          </a:xfrm>
-          <a:prstGeom prst="roundRect">
-            <a:avLst>
-              <a:gd name="adj" fmla="val 8000"/>
-            </a:avLst>
+            <a:off x="640080" y="4645152"/>
+            <a:ext cx="237744" cy="237744"/>
+          </a:xfrm>
+          <a:prstGeom prst="ellipse">
+            <a:avLst/>
           </a:prstGeom>
           <a:solidFill>
-            <a:srgbClr val="EEF2F7"/>
+            <a:srgbClr val="1B7F73"/>
           </a:solidFill>
           <a:ln>
             <a:noFill/>
@@ -12679,8 +12054,47 @@
         </p:nvSpPr>
         <p:spPr>
           <a:xfrm>
-            <a:off x="8458200" y="3950208"/>
-            <a:ext cx="1371600" cy="640080"/>
+            <a:off x="640080" y="4626864"/>
+            <a:ext cx="237744" cy="274320"/>
+          </a:xfrm>
+          <a:prstGeom prst="rect">
+            <a:avLst/>
+          </a:prstGeom>
+          <a:noFill/>
+        </p:spPr>
+        <p:txBody>
+          <a:bodyPr wrap="square" lIns="0" rIns="0" tIns="0" bIns="0" anchor="t">
+            <a:spAutoFit/>
+          </a:bodyPr>
+          <a:lstStyle/>
+          <a:p>
+            <a:pPr algn="ctr">
+              <a:spcAft>
+                <a:spcPts val="0"/>
+              </a:spcAft>
+            </a:pPr>
+            <a:r>
+              <a:rPr sz="1300" b="1" i="0">
+                <a:solidFill>
+                  <a:srgbClr val="FFFFFF"/>
+                </a:solidFill>
+                <a:latin typeface="Calibri"/>
+              </a:rPr>
+              <a:t>✓</a:t>
+            </a:r>
+          </a:p>
+        </p:txBody>
+      </p:sp>
+      <p:sp>
+        <p:nvSpPr>
+          <p:cNvPr id="13" name="TextBox 12"/>
+          <p:cNvSpPr txBox="1"/>
+          <p:nvPr/>
+        </p:nvSpPr>
+        <p:spPr>
+          <a:xfrm>
+            <a:off x="1005840" y="4617720"/>
+            <a:ext cx="4754880" cy="365760"/>
           </a:xfrm>
           <a:prstGeom prst="rect">
             <a:avLst/>
@@ -12699,74 +12113,33 @@
               </a:spcAft>
             </a:pPr>
             <a:r>
-              <a:rPr sz="3000" b="1" i="0">
-                <a:solidFill>
-                  <a:srgbClr val="14213D"/>
-                </a:solidFill>
-                <a:latin typeface="Calibri"/>
-              </a:rPr>
-              <a:t>10/10</a:t>
-            </a:r>
-          </a:p>
-        </p:txBody>
-      </p:sp>
-      <p:sp>
-        <p:nvSpPr>
-          <p:cNvPr id="13" name="TextBox 12"/>
-          <p:cNvSpPr txBox="1"/>
-          <p:nvPr/>
-        </p:nvSpPr>
-        <p:spPr>
-          <a:xfrm>
-            <a:off x="9692640" y="4114800"/>
-            <a:ext cx="1737360" cy="457200"/>
-          </a:xfrm>
-          <a:prstGeom prst="rect">
-            <a:avLst/>
-          </a:prstGeom>
-          <a:noFill/>
-        </p:spPr>
-        <p:txBody>
-          <a:bodyPr wrap="square" lIns="0" rIns="0" tIns="0" bIns="0" anchor="t">
-            <a:spAutoFit/>
-          </a:bodyPr>
-          <a:lstStyle/>
-          <a:p>
-            <a:pPr algn="l">
-              <a:spcAft>
-                <a:spcPts val="0"/>
-              </a:spcAft>
-            </a:pPr>
-            <a:r>
-              <a:rPr sz="1400" b="0" i="0">
+              <a:rPr sz="1500" b="0" i="0">
                 <a:solidFill>
                   <a:srgbClr val="1F2937"/>
                 </a:solidFill>
                 <a:latin typeface="Calibri"/>
               </a:rPr>
-              <a:t>unit tests pass</a:t>
-            </a:r>
-          </a:p>
-        </p:txBody>
-      </p:sp>
-      <p:sp>
-        <p:nvSpPr>
-          <p:cNvPr id="14" name="Rounded Rectangle 13"/>
+              <a:t>Small, readable, easy to extend</a:t>
+            </a:r>
+          </a:p>
+        </p:txBody>
+      </p:sp>
+      <p:sp>
+        <p:nvSpPr>
+          <p:cNvPr id="14" name="Oval 13"/>
           <p:cNvSpPr/>
           <p:nvPr/>
         </p:nvSpPr>
         <p:spPr>
           <a:xfrm>
-            <a:off x="8229600" y="4983480"/>
-            <a:ext cx="3291840" cy="960120"/>
-          </a:xfrm>
-          <a:prstGeom prst="roundRect">
-            <a:avLst>
-              <a:gd name="adj" fmla="val 8000"/>
-            </a:avLst>
+            <a:off x="640080" y="5148072"/>
+            <a:ext cx="237744" cy="237744"/>
+          </a:xfrm>
+          <a:prstGeom prst="ellipse">
+            <a:avLst/>
           </a:prstGeom>
           <a:solidFill>
-            <a:srgbClr val="EEF2F7"/>
+            <a:srgbClr val="1B7F73"/>
           </a:solidFill>
           <a:ln>
             <a:noFill/>
@@ -12803,8 +12176,47 @@
         </p:nvSpPr>
         <p:spPr>
           <a:xfrm>
-            <a:off x="8458200" y="5093208"/>
-            <a:ext cx="1371600" cy="640080"/>
+            <a:off x="640080" y="5129784"/>
+            <a:ext cx="237744" cy="274320"/>
+          </a:xfrm>
+          <a:prstGeom prst="rect">
+            <a:avLst/>
+          </a:prstGeom>
+          <a:noFill/>
+        </p:spPr>
+        <p:txBody>
+          <a:bodyPr wrap="square" lIns="0" rIns="0" tIns="0" bIns="0" anchor="t">
+            <a:spAutoFit/>
+          </a:bodyPr>
+          <a:lstStyle/>
+          <a:p>
+            <a:pPr algn="ctr">
+              <a:spcAft>
+                <a:spcPts val="0"/>
+              </a:spcAft>
+            </a:pPr>
+            <a:r>
+              <a:rPr sz="1300" b="1" i="0">
+                <a:solidFill>
+                  <a:srgbClr val="FFFFFF"/>
+                </a:solidFill>
+                <a:latin typeface="Calibri"/>
+              </a:rPr>
+              <a:t>✓</a:t>
+            </a:r>
+          </a:p>
+        </p:txBody>
+      </p:sp>
+      <p:sp>
+        <p:nvSpPr>
+          <p:cNvPr id="16" name="TextBox 15"/>
+          <p:cNvSpPr txBox="1"/>
+          <p:nvPr/>
+        </p:nvSpPr>
+        <p:spPr>
+          <a:xfrm>
+            <a:off x="1005840" y="5120640"/>
+            <a:ext cx="4754880" cy="365760"/>
           </a:xfrm>
           <a:prstGeom prst="rect">
             <a:avLst/>
@@ -12823,27 +12235,27 @@
               </a:spcAft>
             </a:pPr>
             <a:r>
-              <a:rPr sz="3000" b="1" i="0">
-                <a:solidFill>
-                  <a:srgbClr val="14213D"/>
-                </a:solidFill>
-                <a:latin typeface="Calibri"/>
-              </a:rPr>
-              <a:t>~200</a:t>
-            </a:r>
-          </a:p>
-        </p:txBody>
-      </p:sp>
-      <p:sp>
-        <p:nvSpPr>
-          <p:cNvPr id="16" name="TextBox 15"/>
-          <p:cNvSpPr txBox="1"/>
-          <p:nvPr/>
-        </p:nvSpPr>
-        <p:spPr>
-          <a:xfrm>
-            <a:off x="9692640" y="5257800"/>
-            <a:ext cx="1737360" cy="457200"/>
+              <a:rPr sz="1500" b="0" i="0">
+                <a:solidFill>
+                  <a:srgbClr val="1F2937"/>
+                </a:solidFill>
+                <a:latin typeface="Calibri"/>
+              </a:rPr>
+              <a:t>Fails safely if the server is down</a:t>
+            </a:r>
+          </a:p>
+        </p:txBody>
+      </p:sp>
+      <p:sp>
+        <p:nvSpPr>
+          <p:cNvPr id="17" name="TextBox 16"/>
+          <p:cNvSpPr txBox="1"/>
+          <p:nvPr/>
+        </p:nvSpPr>
+        <p:spPr>
+          <a:xfrm>
+            <a:off x="6400800" y="3200400"/>
+            <a:ext cx="5120640" cy="365760"/>
           </a:xfrm>
           <a:prstGeom prst="rect">
             <a:avLst/>
@@ -12862,20 +12274,435 @@
               </a:spcAft>
             </a:pPr>
             <a:r>
-              <a:rPr sz="1400" b="0" i="0">
+              <a:rPr sz="1300" b="1" i="0">
+                <a:solidFill>
+                  <a:srgbClr val="5B6472"/>
+                </a:solidFill>
+                <a:latin typeface="Calibri"/>
+              </a:rPr>
+              <a:t>FUTURE SCOPE</a:t>
+            </a:r>
+          </a:p>
+        </p:txBody>
+      </p:sp>
+      <p:sp>
+        <p:nvSpPr>
+          <p:cNvPr id="18" name="Oval 17"/>
+          <p:cNvSpPr/>
+          <p:nvPr/>
+        </p:nvSpPr>
+        <p:spPr>
+          <a:xfrm>
+            <a:off x="6492240" y="3666744"/>
+            <a:ext cx="146304" cy="146304"/>
+          </a:xfrm>
+          <a:prstGeom prst="ellipse">
+            <a:avLst/>
+          </a:prstGeom>
+          <a:solidFill>
+            <a:srgbClr val="5B6472"/>
+          </a:solidFill>
+          <a:ln>
+            <a:noFill/>
+          </a:ln>
+          <a:effectLst/>
+        </p:spPr>
+        <p:style>
+          <a:lnRef idx="1">
+            <a:schemeClr val="accent1"/>
+          </a:lnRef>
+          <a:fillRef idx="3">
+            <a:schemeClr val="accent1"/>
+          </a:fillRef>
+          <a:effectRef idx="2">
+            <a:schemeClr val="accent1"/>
+          </a:effectRef>
+          <a:fontRef idx="minor">
+            <a:schemeClr val="lt1"/>
+          </a:fontRef>
+        </p:style>
+        <p:txBody>
+          <a:bodyPr rtlCol="0" anchor="ctr"/>
+          <a:lstStyle/>
+          <a:p>
+            <a:pPr algn="ctr"/>
+          </a:p>
+        </p:txBody>
+      </p:sp>
+      <p:sp>
+        <p:nvSpPr>
+          <p:cNvPr id="19" name="TextBox 18"/>
+          <p:cNvSpPr txBox="1"/>
+          <p:nvPr/>
+        </p:nvSpPr>
+        <p:spPr>
+          <a:xfrm>
+            <a:off x="6812280" y="3611880"/>
+            <a:ext cx="4663440" cy="365760"/>
+          </a:xfrm>
+          <a:prstGeom prst="rect">
+            <a:avLst/>
+          </a:prstGeom>
+          <a:noFill/>
+        </p:spPr>
+        <p:txBody>
+          <a:bodyPr wrap="square" lIns="0" rIns="0" tIns="0" bIns="0" anchor="t">
+            <a:spAutoFit/>
+          </a:bodyPr>
+          <a:lstStyle/>
+          <a:p>
+            <a:pPr algn="l">
+              <a:spcAft>
+                <a:spcPts val="0"/>
+              </a:spcAft>
+            </a:pPr>
+            <a:r>
+              <a:rPr sz="1500" b="0" i="0">
                 <a:solidFill>
                   <a:srgbClr val="1F2937"/>
                 </a:solidFill>
                 <a:latin typeface="Calibri"/>
               </a:rPr>
-              <a:t>lines of code</a:t>
-            </a:r>
-          </a:p>
-        </p:txBody>
-      </p:sp>
-      <p:sp>
-        <p:nvSpPr>
-          <p:cNvPr id="17" name="TextBox 16"/>
+              <a:t>More rules: ICMP flood, DNS tunnelling</a:t>
+            </a:r>
+          </a:p>
+        </p:txBody>
+      </p:sp>
+      <p:sp>
+        <p:nvSpPr>
+          <p:cNvPr id="20" name="Oval 19"/>
+          <p:cNvSpPr/>
+          <p:nvPr/>
+        </p:nvSpPr>
+        <p:spPr>
+          <a:xfrm>
+            <a:off x="6492240" y="4169663"/>
+            <a:ext cx="146304" cy="146304"/>
+          </a:xfrm>
+          <a:prstGeom prst="ellipse">
+            <a:avLst/>
+          </a:prstGeom>
+          <a:solidFill>
+            <a:srgbClr val="5B6472"/>
+          </a:solidFill>
+          <a:ln>
+            <a:noFill/>
+          </a:ln>
+          <a:effectLst/>
+        </p:spPr>
+        <p:style>
+          <a:lnRef idx="1">
+            <a:schemeClr val="accent1"/>
+          </a:lnRef>
+          <a:fillRef idx="3">
+            <a:schemeClr val="accent1"/>
+          </a:fillRef>
+          <a:effectRef idx="2">
+            <a:schemeClr val="accent1"/>
+          </a:effectRef>
+          <a:fontRef idx="minor">
+            <a:schemeClr val="lt1"/>
+          </a:fontRef>
+        </p:style>
+        <p:txBody>
+          <a:bodyPr rtlCol="0" anchor="ctr"/>
+          <a:lstStyle/>
+          <a:p>
+            <a:pPr algn="ctr"/>
+          </a:p>
+        </p:txBody>
+      </p:sp>
+      <p:sp>
+        <p:nvSpPr>
+          <p:cNvPr id="21" name="TextBox 20"/>
+          <p:cNvSpPr txBox="1"/>
+          <p:nvPr/>
+        </p:nvSpPr>
+        <p:spPr>
+          <a:xfrm>
+            <a:off x="6812280" y="4114800"/>
+            <a:ext cx="4663440" cy="365760"/>
+          </a:xfrm>
+          <a:prstGeom prst="rect">
+            <a:avLst/>
+          </a:prstGeom>
+          <a:noFill/>
+        </p:spPr>
+        <p:txBody>
+          <a:bodyPr wrap="square" lIns="0" rIns="0" tIns="0" bIns="0" anchor="t">
+            <a:spAutoFit/>
+          </a:bodyPr>
+          <a:lstStyle/>
+          <a:p>
+            <a:pPr algn="l">
+              <a:spcAft>
+                <a:spcPts val="0"/>
+              </a:spcAft>
+            </a:pPr>
+            <a:r>
+              <a:rPr sz="1500" b="0" i="0">
+                <a:solidFill>
+                  <a:srgbClr val="1F2937"/>
+                </a:solidFill>
+                <a:latin typeface="Calibri"/>
+              </a:rPr>
+              <a:t>E-mail or messaging notifications</a:t>
+            </a:r>
+          </a:p>
+        </p:txBody>
+      </p:sp>
+      <p:sp>
+        <p:nvSpPr>
+          <p:cNvPr id="22" name="Oval 21"/>
+          <p:cNvSpPr/>
+          <p:nvPr/>
+        </p:nvSpPr>
+        <p:spPr>
+          <a:xfrm>
+            <a:off x="6492240" y="4672584"/>
+            <a:ext cx="146304" cy="146304"/>
+          </a:xfrm>
+          <a:prstGeom prst="ellipse">
+            <a:avLst/>
+          </a:prstGeom>
+          <a:solidFill>
+            <a:srgbClr val="5B6472"/>
+          </a:solidFill>
+          <a:ln>
+            <a:noFill/>
+          </a:ln>
+          <a:effectLst/>
+        </p:spPr>
+        <p:style>
+          <a:lnRef idx="1">
+            <a:schemeClr val="accent1"/>
+          </a:lnRef>
+          <a:fillRef idx="3">
+            <a:schemeClr val="accent1"/>
+          </a:fillRef>
+          <a:effectRef idx="2">
+            <a:schemeClr val="accent1"/>
+          </a:effectRef>
+          <a:fontRef idx="minor">
+            <a:schemeClr val="lt1"/>
+          </a:fontRef>
+        </p:style>
+        <p:txBody>
+          <a:bodyPr rtlCol="0" anchor="ctr"/>
+          <a:lstStyle/>
+          <a:p>
+            <a:pPr algn="ctr"/>
+          </a:p>
+        </p:txBody>
+      </p:sp>
+      <p:sp>
+        <p:nvSpPr>
+          <p:cNvPr id="23" name="TextBox 22"/>
+          <p:cNvSpPr txBox="1"/>
+          <p:nvPr/>
+        </p:nvSpPr>
+        <p:spPr>
+          <a:xfrm>
+            <a:off x="6812280" y="4617720"/>
+            <a:ext cx="4663440" cy="365760"/>
+          </a:xfrm>
+          <a:prstGeom prst="rect">
+            <a:avLst/>
+          </a:prstGeom>
+          <a:noFill/>
+        </p:spPr>
+        <p:txBody>
+          <a:bodyPr wrap="square" lIns="0" rIns="0" tIns="0" bIns="0" anchor="t">
+            <a:spAutoFit/>
+          </a:bodyPr>
+          <a:lstStyle/>
+          <a:p>
+            <a:pPr algn="l">
+              <a:spcAft>
+                <a:spcPts val="0"/>
+              </a:spcAft>
+            </a:pPr>
+            <a:r>
+              <a:rPr sz="1500" b="0" i="0">
+                <a:solidFill>
+                  <a:srgbClr val="1F2937"/>
+                </a:solidFill>
+                <a:latin typeface="Calibri"/>
+              </a:rPr>
+              <a:t>Store alerts in SQLite, searchable</a:t>
+            </a:r>
+          </a:p>
+        </p:txBody>
+      </p:sp>
+      <p:sp>
+        <p:nvSpPr>
+          <p:cNvPr id="24" name="Oval 23"/>
+          <p:cNvSpPr/>
+          <p:nvPr/>
+        </p:nvSpPr>
+        <p:spPr>
+          <a:xfrm>
+            <a:off x="6492240" y="5175504"/>
+            <a:ext cx="146304" cy="146304"/>
+          </a:xfrm>
+          <a:prstGeom prst="ellipse">
+            <a:avLst/>
+          </a:prstGeom>
+          <a:solidFill>
+            <a:srgbClr val="5B6472"/>
+          </a:solidFill>
+          <a:ln>
+            <a:noFill/>
+          </a:ln>
+          <a:effectLst/>
+        </p:spPr>
+        <p:style>
+          <a:lnRef idx="1">
+            <a:schemeClr val="accent1"/>
+          </a:lnRef>
+          <a:fillRef idx="3">
+            <a:schemeClr val="accent1"/>
+          </a:fillRef>
+          <a:effectRef idx="2">
+            <a:schemeClr val="accent1"/>
+          </a:effectRef>
+          <a:fontRef idx="minor">
+            <a:schemeClr val="lt1"/>
+          </a:fontRef>
+        </p:style>
+        <p:txBody>
+          <a:bodyPr rtlCol="0" anchor="ctr"/>
+          <a:lstStyle/>
+          <a:p>
+            <a:pPr algn="ctr"/>
+          </a:p>
+        </p:txBody>
+      </p:sp>
+      <p:sp>
+        <p:nvSpPr>
+          <p:cNvPr id="25" name="TextBox 24"/>
+          <p:cNvSpPr txBox="1"/>
+          <p:nvPr/>
+        </p:nvSpPr>
+        <p:spPr>
+          <a:xfrm>
+            <a:off x="6812280" y="5120640"/>
+            <a:ext cx="4663440" cy="365760"/>
+          </a:xfrm>
+          <a:prstGeom prst="rect">
+            <a:avLst/>
+          </a:prstGeom>
+          <a:noFill/>
+        </p:spPr>
+        <p:txBody>
+          <a:bodyPr wrap="square" lIns="0" rIns="0" tIns="0" bIns="0" anchor="t">
+            <a:spAutoFit/>
+          </a:bodyPr>
+          <a:lstStyle/>
+          <a:p>
+            <a:pPr algn="l">
+              <a:spcAft>
+                <a:spcPts val="0"/>
+              </a:spcAft>
+            </a:pPr>
+            <a:r>
+              <a:rPr sz="1500" b="0" i="0">
+                <a:solidFill>
+                  <a:srgbClr val="1F2937"/>
+                </a:solidFill>
+                <a:latin typeface="Calibri"/>
+              </a:rPr>
+              <a:t>Authenticate the sensor to the server</a:t>
+            </a:r>
+          </a:p>
+        </p:txBody>
+      </p:sp>
+      <p:sp>
+        <p:nvSpPr>
+          <p:cNvPr id="26" name="Oval 25"/>
+          <p:cNvSpPr/>
+          <p:nvPr/>
+        </p:nvSpPr>
+        <p:spPr>
+          <a:xfrm>
+            <a:off x="6492240" y="5678424"/>
+            <a:ext cx="146304" cy="146304"/>
+          </a:xfrm>
+          <a:prstGeom prst="ellipse">
+            <a:avLst/>
+          </a:prstGeom>
+          <a:solidFill>
+            <a:srgbClr val="5B6472"/>
+          </a:solidFill>
+          <a:ln>
+            <a:noFill/>
+          </a:ln>
+          <a:effectLst/>
+        </p:spPr>
+        <p:style>
+          <a:lnRef idx="1">
+            <a:schemeClr val="accent1"/>
+          </a:lnRef>
+          <a:fillRef idx="3">
+            <a:schemeClr val="accent1"/>
+          </a:fillRef>
+          <a:effectRef idx="2">
+            <a:schemeClr val="accent1"/>
+          </a:effectRef>
+          <a:fontRef idx="minor">
+            <a:schemeClr val="lt1"/>
+          </a:fontRef>
+        </p:style>
+        <p:txBody>
+          <a:bodyPr rtlCol="0" anchor="ctr"/>
+          <a:lstStyle/>
+          <a:p>
+            <a:pPr algn="ctr"/>
+          </a:p>
+        </p:txBody>
+      </p:sp>
+      <p:sp>
+        <p:nvSpPr>
+          <p:cNvPr id="27" name="TextBox 26"/>
+          <p:cNvSpPr txBox="1"/>
+          <p:nvPr/>
+        </p:nvSpPr>
+        <p:spPr>
+          <a:xfrm>
+            <a:off x="6812280" y="5623560"/>
+            <a:ext cx="4663440" cy="365760"/>
+          </a:xfrm>
+          <a:prstGeom prst="rect">
+            <a:avLst/>
+          </a:prstGeom>
+          <a:noFill/>
+        </p:spPr>
+        <p:txBody>
+          <a:bodyPr wrap="square" lIns="0" rIns="0" tIns="0" bIns="0" anchor="t">
+            <a:spAutoFit/>
+          </a:bodyPr>
+          <a:lstStyle/>
+          <a:p>
+            <a:pPr algn="l">
+              <a:spcAft>
+                <a:spcPts val="0"/>
+              </a:spcAft>
+            </a:pPr>
+            <a:r>
+              <a:rPr sz="1500" b="0" i="0">
+                <a:solidFill>
+                  <a:srgbClr val="1F2937"/>
+                </a:solidFill>
+                <a:latin typeface="Calibri"/>
+              </a:rPr>
+              <a:t>Active response: firewall the attacker</a:t>
+            </a:r>
+          </a:p>
+        </p:txBody>
+      </p:sp>
+      <p:sp>
+        <p:nvSpPr>
+          <p:cNvPr id="28" name="TextBox 27"/>
           <p:cNvSpPr txBox="1"/>
           <p:nvPr/>
         </p:nvSpPr>
@@ -12914,7 +12741,7 @@
       </p:sp>
       <p:sp>
         <p:nvSpPr>
-          <p:cNvPr id="18" name="TextBox 17"/>
+          <p:cNvPr id="29" name="TextBox 28"/>
           <p:cNvSpPr txBox="1"/>
           <p:nvPr/>
         </p:nvSpPr>
